--- a/doc/presentations/defensa-placa-permanent-dsi-ports-sortida-hexagonal/output/defensa-dsi-ports-sortida-hexagonal.pptx
+++ b/doc/presentations/defensa-placa-permanent-dsi-ports-sortida-hexagonal/output/defensa-dsi-ports-sortida-hexagonal.pptx
@@ -15,6 +15,7 @@
     <p:sldId id="263" r:id="rId9"/>
     <p:sldId id="264" r:id="rId10"/>
     <p:sldId id="265" r:id="rId11"/>
+    <p:sldId id="266" r:id="rId12"/>
   </p:sldIdLst>
   <p:sldSz cx="12192000" cy="6858000"/>
   <p:notesSz cx="6858000" cy="9144000"/>
@@ -311,7 +312,7 @@
           <a:p>
             <a:fld id="{5BCAD085-E8A6-8845-BD4E-CB4CCA059FC4}" type="datetimeFigureOut">
               <a:rPr lang="en-US" smtClean="0"/>
-              <a:t>6/28/26</a:t>
+              <a:t>6/29/26</a:t>
             </a:fld>
             <a:endParaRPr lang="en-US"/>
           </a:p>
@@ -479,7 +480,7 @@
           <a:p>
             <a:fld id="{5BCAD085-E8A6-8845-BD4E-CB4CCA059FC4}" type="datetimeFigureOut">
               <a:rPr lang="en-US" smtClean="0"/>
-              <a:t>6/28/26</a:t>
+              <a:t>6/29/26</a:t>
             </a:fld>
             <a:endParaRPr lang="en-US"/>
           </a:p>
@@ -657,7 +658,7 @@
           <a:p>
             <a:fld id="{5BCAD085-E8A6-8845-BD4E-CB4CCA059FC4}" type="datetimeFigureOut">
               <a:rPr lang="en-US" smtClean="0"/>
-              <a:t>6/28/26</a:t>
+              <a:t>6/29/26</a:t>
             </a:fld>
             <a:endParaRPr lang="en-US"/>
           </a:p>
@@ -825,7 +826,7 @@
           <a:p>
             <a:fld id="{5BCAD085-E8A6-8845-BD4E-CB4CCA059FC4}" type="datetimeFigureOut">
               <a:rPr lang="en-US" smtClean="0"/>
-              <a:t>6/28/26</a:t>
+              <a:t>6/29/26</a:t>
             </a:fld>
             <a:endParaRPr lang="en-US"/>
           </a:p>
@@ -1070,7 +1071,7 @@
           <a:p>
             <a:fld id="{5BCAD085-E8A6-8845-BD4E-CB4CCA059FC4}" type="datetimeFigureOut">
               <a:rPr lang="en-US" smtClean="0"/>
-              <a:t>6/28/26</a:t>
+              <a:t>6/29/26</a:t>
             </a:fld>
             <a:endParaRPr lang="en-US"/>
           </a:p>
@@ -1355,7 +1356,7 @@
           <a:p>
             <a:fld id="{5BCAD085-E8A6-8845-BD4E-CB4CCA059FC4}" type="datetimeFigureOut">
               <a:rPr lang="en-US" smtClean="0"/>
-              <a:t>6/28/26</a:t>
+              <a:t>6/29/26</a:t>
             </a:fld>
             <a:endParaRPr lang="en-US"/>
           </a:p>
@@ -1774,7 +1775,7 @@
           <a:p>
             <a:fld id="{5BCAD085-E8A6-8845-BD4E-CB4CCA059FC4}" type="datetimeFigureOut">
               <a:rPr lang="en-US" smtClean="0"/>
-              <a:t>6/28/26</a:t>
+              <a:t>6/29/26</a:t>
             </a:fld>
             <a:endParaRPr lang="en-US"/>
           </a:p>
@@ -1891,7 +1892,7 @@
           <a:p>
             <a:fld id="{5BCAD085-E8A6-8845-BD4E-CB4CCA059FC4}" type="datetimeFigureOut">
               <a:rPr lang="en-US" smtClean="0"/>
-              <a:t>6/28/26</a:t>
+              <a:t>6/29/26</a:t>
             </a:fld>
             <a:endParaRPr lang="en-US"/>
           </a:p>
@@ -1986,7 +1987,7 @@
           <a:p>
             <a:fld id="{5BCAD085-E8A6-8845-BD4E-CB4CCA059FC4}" type="datetimeFigureOut">
               <a:rPr lang="en-US" smtClean="0"/>
-              <a:t>6/28/26</a:t>
+              <a:t>6/29/26</a:t>
             </a:fld>
             <a:endParaRPr lang="en-US"/>
           </a:p>
@@ -2261,7 +2262,7 @@
           <a:p>
             <a:fld id="{5BCAD085-E8A6-8845-BD4E-CB4CCA059FC4}" type="datetimeFigureOut">
               <a:rPr lang="en-US" smtClean="0"/>
-              <a:t>6/28/26</a:t>
+              <a:t>6/29/26</a:t>
             </a:fld>
             <a:endParaRPr lang="en-US"/>
           </a:p>
@@ -2513,7 +2514,7 @@
           <a:p>
             <a:fld id="{5BCAD085-E8A6-8845-BD4E-CB4CCA059FC4}" type="datetimeFigureOut">
               <a:rPr lang="en-US" smtClean="0"/>
-              <a:t>6/28/26</a:t>
+              <a:t>6/29/26</a:t>
             </a:fld>
             <a:endParaRPr lang="en-US"/>
           </a:p>
@@ -2724,7 +2725,7 @@
           <a:p>
             <a:fld id="{5BCAD085-E8A6-8845-BD4E-CB4CCA059FC4}" type="datetimeFigureOut">
               <a:rPr lang="en-US" smtClean="0"/>
-              <a:t>6/28/26</a:t>
+              <a:t>6/29/26</a:t>
             </a:fld>
             <a:endParaRPr lang="en-US"/>
           </a:p>
@@ -3147,76 +3148,13 @@
           <a:p>
             <a:pPr algn="l"/>
             <a:r>
-              <a:rPr sz="3200" b="1" dirty="0" err="1">
+              <a:rPr sz="3200" b="1">
                 <a:solidFill>
                   <a:srgbClr val="192D3E"/>
                 </a:solidFill>
                 <a:latin typeface="Arial"/>
               </a:rPr>
-              <a:t>Disseny</a:t>
-            </a:r>
-            <a:r>
-              <a:rPr sz="3200" b="1" dirty="0">
-                <a:solidFill>
-                  <a:srgbClr val="192D3E"/>
-                </a:solidFill>
-                <a:latin typeface="Arial"/>
-              </a:rPr>
-              <a:t> de ports de </a:t>
-            </a:r>
-            <a:r>
-              <a:rPr sz="3200" b="1" dirty="0" err="1">
-                <a:solidFill>
-                  <a:srgbClr val="192D3E"/>
-                </a:solidFill>
-                <a:latin typeface="Arial"/>
-              </a:rPr>
-              <a:t>sortida</a:t>
-            </a:r>
-            <a:r>
-              <a:rPr sz="3200" b="1" dirty="0">
-                <a:solidFill>
-                  <a:srgbClr val="192D3E"/>
-                </a:solidFill>
-                <a:latin typeface="Arial"/>
-              </a:rPr>
-              <a:t> </a:t>
-            </a:r>
-            <a:r>
-              <a:rPr sz="3200" b="1" dirty="0" err="1">
-                <a:solidFill>
-                  <a:srgbClr val="192D3E"/>
-                </a:solidFill>
-                <a:latin typeface="Arial"/>
-              </a:rPr>
-              <a:t>en</a:t>
-            </a:r>
-            <a:r>
-              <a:rPr sz="3200" b="1" dirty="0">
-                <a:solidFill>
-                  <a:srgbClr val="192D3E"/>
-                </a:solidFill>
-                <a:latin typeface="Arial"/>
-              </a:rPr>
-              <a:t> </a:t>
-            </a:r>
-            <a:r>
-              <a:rPr sz="3200" b="1" dirty="0" err="1">
-                <a:solidFill>
-                  <a:srgbClr val="192D3E"/>
-                </a:solidFill>
-                <a:latin typeface="Arial"/>
-              </a:rPr>
-              <a:t>arquitectura</a:t>
-            </a:r>
-            <a:r>
-              <a:rPr sz="3200" b="1" dirty="0">
-                <a:solidFill>
-                  <a:srgbClr val="192D3E"/>
-                </a:solidFill>
-                <a:latin typeface="Arial"/>
-              </a:rPr>
-              <a:t> hexagonal</a:t>
+              <a:t>Disseny de ports de sortida en arquitectura hexagonal</a:t>
             </a:r>
           </a:p>
         </p:txBody>
@@ -3229,7 +3167,7 @@
         </p:nvSpPr>
         <p:spPr>
           <a:xfrm>
-            <a:off x="685800" y="2329500"/>
+            <a:off x="685800" y="2216685"/>
             <a:ext cx="9326880" cy="411480"/>
           </a:xfrm>
           <a:prstGeom prst="rect">
@@ -3245,7 +3183,7 @@
           <a:p>
             <a:pPr algn="l"/>
             <a:r>
-              <a:rPr lang="es-ES" sz="2100" b="0" dirty="0">
+              <a:rPr lang="es-ES" sz="2100" dirty="0">
                 <a:solidFill>
                   <a:srgbClr val="236092"/>
                 </a:solidFill>
@@ -3525,7 +3463,7 @@
                 </a:solidFill>
                 <a:latin typeface="Arial"/>
               </a:rPr>
-              <a:t>Conclusió</a:t>
+              <a:t>Flux i codi essencial</a:t>
             </a:r>
           </a:p>
         </p:txBody>
@@ -3560,7 +3498,7 @@
                 </a:solidFill>
                 <a:latin typeface="Arial"/>
               </a:rPr>
-              <a:t>L'arquitectura no elimina el canvi. El localitza.</a:t>
+              <a:t>El servei coordina. El domini decideix. La infraestructura adapta.</a:t>
             </a:r>
           </a:p>
         </p:txBody>
@@ -3635,7 +3573,7 @@
       </p:sp>
       <p:pic>
         <p:nvPicPr>
-          <p:cNvPr id="6" name="Picture 5" descr="before-after-comparison.png"/>
+          <p:cNvPr id="6" name="Picture 5" descr="sell-stock-sequence.png"/>
           <p:cNvPicPr>
             <a:picLocks noChangeAspect="1"/>
           </p:cNvPicPr>
@@ -3649,8 +3587,8 @@
         </p:blipFill>
         <p:spPr>
           <a:xfrm>
-            <a:off x="685800" y="1391858"/>
-            <a:ext cx="7086600" cy="4485763"/>
+            <a:off x="502920" y="1962677"/>
+            <a:ext cx="7315200" cy="3069806"/>
           </a:xfrm>
           <a:prstGeom prst="rect">
             <a:avLst/>
@@ -3659,14 +3597,98 @@
       </p:pic>
       <p:sp>
         <p:nvSpPr>
-          <p:cNvPr id="7" name="TextBox 6"/>
+          <p:cNvPr id="7" name="Rounded Rectangle 6"/>
+          <p:cNvSpPr/>
+          <p:nvPr/>
+        </p:nvSpPr>
+        <p:spPr>
+          <a:xfrm>
+            <a:off x="8092440" y="1645920"/>
+            <a:ext cx="3520440" cy="2423160"/>
+          </a:xfrm>
+          <a:prstGeom prst="roundRect">
+            <a:avLst/>
+          </a:prstGeom>
+          <a:solidFill>
+            <a:srgbClr val="1F2429"/>
+          </a:solidFill>
+          <a:ln>
+            <a:solidFill>
+              <a:srgbClr val="1F2429"/>
+            </a:solidFill>
+          </a:ln>
+        </p:spPr>
+        <p:style>
+          <a:lnRef idx="1">
+            <a:schemeClr val="accent1"/>
+          </a:lnRef>
+          <a:fillRef idx="3">
+            <a:schemeClr val="accent1"/>
+          </a:fillRef>
+          <a:effectRef idx="2">
+            <a:schemeClr val="accent1"/>
+          </a:effectRef>
+          <a:fontRef idx="minor">
+            <a:schemeClr val="lt1"/>
+          </a:fontRef>
+        </p:style>
+        <p:txBody>
+          <a:bodyPr rtlCol="0" anchor="ctr"/>
+          <a:lstStyle/>
+          <a:p>
+            <a:pPr algn="ctr"/>
+            <a:endParaRPr/>
+          </a:p>
+        </p:txBody>
+      </p:sp>
+      <p:sp>
+        <p:nvSpPr>
+          <p:cNvPr id="8" name="TextBox 7"/>
           <p:cNvSpPr txBox="1"/>
           <p:nvPr/>
         </p:nvSpPr>
         <p:spPr>
           <a:xfrm>
-            <a:off x="8183879" y="1874519"/>
-            <a:ext cx="2971800" cy="1737360"/>
+            <a:off x="8293608" y="1810512"/>
+            <a:ext cx="3118104" cy="2093976"/>
+          </a:xfrm>
+          <a:prstGeom prst="rect">
+            <a:avLst/>
+          </a:prstGeom>
+          <a:noFill/>
+        </p:spPr>
+        <p:txBody>
+          <a:bodyPr wrap="square">
+            <a:spAutoFit/>
+          </a:bodyPr>
+          <a:lstStyle/>
+          <a:p>
+            <a:r>
+              <a:rPr sz="1500">
+                <a:solidFill>
+                  <a:srgbClr val="F5F6F7"/>
+                </a:solidFill>
+                <a:latin typeface="Consolas"/>
+              </a:rPr>
+              <a:t>StockPrice stockPrice =
+    stockPriceProviderPort.fetchStockPrice(ticker);
+Price price = stockPrice.price();
+SellResult sellResult =
+    portfolio.sell(ticker, quantity, price);</a:t>
+            </a:r>
+          </a:p>
+        </p:txBody>
+      </p:sp>
+      <p:sp>
+        <p:nvSpPr>
+          <p:cNvPr id="9" name="TextBox 8"/>
+          <p:cNvSpPr txBox="1"/>
+          <p:nvPr/>
+        </p:nvSpPr>
+        <p:spPr>
+          <a:xfrm>
+            <a:off x="8138160" y="4434840"/>
+            <a:ext cx="3429000" cy="822960"/>
           </a:xfrm>
           <a:prstGeom prst="rect">
             <a:avLst/>
@@ -3679,29 +3701,29 @@
           </a:bodyPr>
           <a:lstStyle/>
           <a:p>
-            <a:pPr algn="ctr"/>
-            <a:r>
-              <a:rPr sz="2400" b="1">
+            <a:pPr algn="l"/>
+            <a:r>
+              <a:rPr sz="1700" b="0">
                 <a:solidFill>
                   <a:srgbClr val="192D3E"/>
                 </a:solidFill>
                 <a:latin typeface="Arial"/>
               </a:rPr>
-              <a:t>Quan el proveïdor canvia, volem canviar l'adaptador, no el cas d'ús ni el model de domini.</a:t>
-            </a:r>
-          </a:p>
-        </p:txBody>
-      </p:sp>
-      <p:sp>
-        <p:nvSpPr>
-          <p:cNvPr id="8" name="TextBox 7"/>
+              <a:t>El servei obté informació externa a través d'un port i delega la decisió al domini ric.</a:t>
+            </a:r>
+          </a:p>
+        </p:txBody>
+      </p:sp>
+      <p:sp>
+        <p:nvSpPr>
+          <p:cNvPr id="10" name="TextBox 9"/>
           <p:cNvSpPr txBox="1"/>
           <p:nvPr/>
         </p:nvSpPr>
         <p:spPr>
           <a:xfrm>
-            <a:off x="8183879" y="4160520"/>
-            <a:ext cx="2971800" cy="868680"/>
+            <a:off x="594360" y="6473952"/>
+            <a:ext cx="8595360" cy="201168"/>
           </a:xfrm>
           <a:prstGeom prst="rect">
             <a:avLst/>
@@ -3714,29 +3736,29 @@
           </a:bodyPr>
           <a:lstStyle/>
           <a:p>
-            <a:pPr algn="ctr"/>
-            <a:r>
-              <a:rPr sz="1700" b="0">
-                <a:solidFill>
-                  <a:srgbClr val="236092"/>
-                </a:solidFill>
-                <a:latin typeface="Arial"/>
-              </a:rPr>
-              <a:t>L'arquitectura fa explícita, substituïble i localitzada la dependència del món exterior.</a:t>
-            </a:r>
-          </a:p>
-        </p:txBody>
-      </p:sp>
-      <p:sp>
-        <p:nvSpPr>
-          <p:cNvPr id="9" name="TextBox 8"/>
+            <a:pPr algn="l"/>
+            <a:r>
+              <a:rPr sz="800" b="0">
+                <a:solidFill>
+                  <a:srgbClr val="66707A"/>
+                </a:solidFill>
+                <a:latin typeface="Arial"/>
+              </a:rPr>
+              <a:t>Disseny de Sistemes d'Informació · Ports de sortida en arquitectura hexagonal</a:t>
+            </a:r>
+          </a:p>
+        </p:txBody>
+      </p:sp>
+      <p:sp>
+        <p:nvSpPr>
+          <p:cNvPr id="11" name="TextBox 10"/>
           <p:cNvSpPr txBox="1"/>
           <p:nvPr/>
         </p:nvSpPr>
         <p:spPr>
           <a:xfrm>
-            <a:off x="594360" y="6473952"/>
-            <a:ext cx="8595360" cy="201168"/>
+            <a:off x="11155680" y="6473952"/>
+            <a:ext cx="411480" cy="201168"/>
           </a:xfrm>
           <a:prstGeom prst="rect">
             <a:avLst/>
@@ -3749,7 +3771,7 @@
           </a:bodyPr>
           <a:lstStyle/>
           <a:p>
-            <a:pPr algn="l"/>
+            <a:pPr algn="r"/>
             <a:r>
               <a:rPr sz="800" b="0">
                 <a:solidFill>
@@ -3757,21 +3779,46 @@
                 </a:solidFill>
                 <a:latin typeface="Arial"/>
               </a:rPr>
-              <a:t>Disseny de Sistemes d'Informació · Ports de sortida en arquitectura hexagonal</a:t>
-            </a:r>
-          </a:p>
-        </p:txBody>
-      </p:sp>
-      <p:sp>
-        <p:nvSpPr>
-          <p:cNvPr id="10" name="TextBox 9"/>
+              <a:t>10</a:t>
+            </a:r>
+          </a:p>
+        </p:txBody>
+      </p:sp>
+    </p:spTree>
+  </p:cSld>
+  <p:clrMapOvr>
+    <a:masterClrMapping/>
+  </p:clrMapOvr>
+</p:sld>
+</file>
+
+<file path=ppt/slides/slide11.xml><?xml version="1.0" encoding="utf-8"?>
+<p:sld xmlns:a="http://schemas.openxmlformats.org/drawingml/2006/main" xmlns:r="http://schemas.openxmlformats.org/officeDocument/2006/relationships" xmlns:p="http://schemas.openxmlformats.org/presentationml/2006/main">
+  <p:cSld>
+    <p:spTree>
+      <p:nvGrpSpPr>
+        <p:cNvPr id="1" name=""/>
+        <p:cNvGrpSpPr/>
+        <p:nvPr/>
+      </p:nvGrpSpPr>
+      <p:grpSpPr>
+        <a:xfrm>
+          <a:off x="0" y="0"/>
+          <a:ext cx="0" cy="0"/>
+          <a:chOff x="0" y="0"/>
+          <a:chExt cx="0" cy="0"/>
+        </a:xfrm>
+      </p:grpSpPr>
+      <p:sp>
+        <p:nvSpPr>
+          <p:cNvPr id="2" name="TextBox 1"/>
           <p:cNvSpPr txBox="1"/>
           <p:nvPr/>
         </p:nvSpPr>
         <p:spPr>
           <a:xfrm>
-            <a:off x="11155680" y="6473952"/>
-            <a:ext cx="411480" cy="201168"/>
+            <a:off x="594360" y="320040"/>
+            <a:ext cx="8961120" cy="502920"/>
           </a:xfrm>
           <a:prstGeom prst="rect">
             <a:avLst/>
@@ -3784,6 +3831,273 @@
           </a:bodyPr>
           <a:lstStyle/>
           <a:p>
+            <a:pPr algn="l"/>
+            <a:r>
+              <a:rPr sz="2800" b="1">
+                <a:solidFill>
+                  <a:srgbClr val="192D3E"/>
+                </a:solidFill>
+                <a:latin typeface="Arial"/>
+              </a:rPr>
+              <a:t>Conclusió</a:t>
+            </a:r>
+          </a:p>
+        </p:txBody>
+      </p:sp>
+      <p:sp>
+        <p:nvSpPr>
+          <p:cNvPr id="3" name="TextBox 2"/>
+          <p:cNvSpPr txBox="1"/>
+          <p:nvPr/>
+        </p:nvSpPr>
+        <p:spPr>
+          <a:xfrm>
+            <a:off x="612648" y="822960"/>
+            <a:ext cx="8869680" cy="320040"/>
+          </a:xfrm>
+          <a:prstGeom prst="rect">
+            <a:avLst/>
+          </a:prstGeom>
+          <a:noFill/>
+        </p:spPr>
+        <p:txBody>
+          <a:bodyPr wrap="square">
+            <a:normAutofit/>
+          </a:bodyPr>
+          <a:lstStyle/>
+          <a:p>
+            <a:pPr algn="l"/>
+            <a:r>
+              <a:rPr sz="1300" b="0">
+                <a:solidFill>
+                  <a:srgbClr val="66707A"/>
+                </a:solidFill>
+                <a:latin typeface="Arial"/>
+              </a:rPr>
+              <a:t>L'arquitectura no elimina el canvi. El localitza.</a:t>
+            </a:r>
+          </a:p>
+        </p:txBody>
+      </p:sp>
+      <p:pic>
+        <p:nvPicPr>
+          <p:cNvPr id="4" name="Picture 3" descr="logotip-oficial-tecnocampus-upf-horitzontal-color.png"/>
+          <p:cNvPicPr>
+            <a:picLocks noChangeAspect="1"/>
+          </p:cNvPicPr>
+          <p:nvPr/>
+        </p:nvPicPr>
+        <p:blipFill>
+          <a:blip r:embed="rId2"/>
+          <a:stretch>
+            <a:fillRect/>
+          </a:stretch>
+        </p:blipFill>
+        <p:spPr>
+          <a:xfrm>
+            <a:off x="9738360" y="293025"/>
+            <a:ext cx="1783079" cy="337493"/>
+          </a:xfrm>
+          <a:prstGeom prst="rect">
+            <a:avLst/>
+          </a:prstGeom>
+        </p:spPr>
+      </p:pic>
+      <p:sp>
+        <p:nvSpPr>
+          <p:cNvPr id="5" name="Rectangle 4"/>
+          <p:cNvSpPr/>
+          <p:nvPr/>
+        </p:nvSpPr>
+        <p:spPr>
+          <a:xfrm>
+            <a:off x="594360" y="1115568"/>
+            <a:ext cx="10972800" cy="13716"/>
+          </a:xfrm>
+          <a:prstGeom prst="rect">
+            <a:avLst/>
+          </a:prstGeom>
+          <a:solidFill>
+            <a:srgbClr val="D6DBE0"/>
+          </a:solidFill>
+          <a:ln>
+            <a:noFill/>
+          </a:ln>
+        </p:spPr>
+        <p:style>
+          <a:lnRef idx="1">
+            <a:schemeClr val="accent1"/>
+          </a:lnRef>
+          <a:fillRef idx="3">
+            <a:schemeClr val="accent1"/>
+          </a:fillRef>
+          <a:effectRef idx="2">
+            <a:schemeClr val="accent1"/>
+          </a:effectRef>
+          <a:fontRef idx="minor">
+            <a:schemeClr val="lt1"/>
+          </a:fontRef>
+        </p:style>
+        <p:txBody>
+          <a:bodyPr rtlCol="0" anchor="ctr"/>
+          <a:lstStyle/>
+          <a:p>
+            <a:pPr algn="ctr"/>
+            <a:endParaRPr/>
+          </a:p>
+        </p:txBody>
+      </p:sp>
+      <p:pic>
+        <p:nvPicPr>
+          <p:cNvPr id="6" name="Picture 5" descr="before-after-comparison.png"/>
+          <p:cNvPicPr>
+            <a:picLocks noChangeAspect="1"/>
+          </p:cNvPicPr>
+          <p:nvPr/>
+        </p:nvPicPr>
+        <p:blipFill>
+          <a:blip r:embed="rId3"/>
+          <a:stretch>
+            <a:fillRect/>
+          </a:stretch>
+        </p:blipFill>
+        <p:spPr>
+          <a:xfrm>
+            <a:off x="685800" y="1391858"/>
+            <a:ext cx="7086600" cy="4485763"/>
+          </a:xfrm>
+          <a:prstGeom prst="rect">
+            <a:avLst/>
+          </a:prstGeom>
+        </p:spPr>
+      </p:pic>
+      <p:sp>
+        <p:nvSpPr>
+          <p:cNvPr id="7" name="TextBox 6"/>
+          <p:cNvSpPr txBox="1"/>
+          <p:nvPr/>
+        </p:nvSpPr>
+        <p:spPr>
+          <a:xfrm>
+            <a:off x="8183879" y="1874519"/>
+            <a:ext cx="2971800" cy="1737360"/>
+          </a:xfrm>
+          <a:prstGeom prst="rect">
+            <a:avLst/>
+          </a:prstGeom>
+          <a:noFill/>
+        </p:spPr>
+        <p:txBody>
+          <a:bodyPr wrap="square">
+            <a:normAutofit/>
+          </a:bodyPr>
+          <a:lstStyle/>
+          <a:p>
+            <a:pPr algn="ctr"/>
+            <a:r>
+              <a:rPr sz="2400" b="1">
+                <a:solidFill>
+                  <a:srgbClr val="192D3E"/>
+                </a:solidFill>
+                <a:latin typeface="Arial"/>
+              </a:rPr>
+              <a:t>Quan el proveïdor canvia, volem canviar l'adaptador, no el cas d'ús ni el model de domini.</a:t>
+            </a:r>
+          </a:p>
+        </p:txBody>
+      </p:sp>
+      <p:sp>
+        <p:nvSpPr>
+          <p:cNvPr id="8" name="TextBox 7"/>
+          <p:cNvSpPr txBox="1"/>
+          <p:nvPr/>
+        </p:nvSpPr>
+        <p:spPr>
+          <a:xfrm>
+            <a:off x="8183879" y="4160520"/>
+            <a:ext cx="2971800" cy="868680"/>
+          </a:xfrm>
+          <a:prstGeom prst="rect">
+            <a:avLst/>
+          </a:prstGeom>
+          <a:noFill/>
+        </p:spPr>
+        <p:txBody>
+          <a:bodyPr wrap="square">
+            <a:normAutofit/>
+          </a:bodyPr>
+          <a:lstStyle/>
+          <a:p>
+            <a:pPr algn="ctr"/>
+            <a:r>
+              <a:rPr sz="1700" b="0">
+                <a:solidFill>
+                  <a:srgbClr val="236092"/>
+                </a:solidFill>
+                <a:latin typeface="Arial"/>
+              </a:rPr>
+              <a:t>L'arquitectura fa explícita, substituïble i localitzada la dependència del món exterior.</a:t>
+            </a:r>
+          </a:p>
+        </p:txBody>
+      </p:sp>
+      <p:sp>
+        <p:nvSpPr>
+          <p:cNvPr id="9" name="TextBox 8"/>
+          <p:cNvSpPr txBox="1"/>
+          <p:nvPr/>
+        </p:nvSpPr>
+        <p:spPr>
+          <a:xfrm>
+            <a:off x="594360" y="6473952"/>
+            <a:ext cx="8595360" cy="201168"/>
+          </a:xfrm>
+          <a:prstGeom prst="rect">
+            <a:avLst/>
+          </a:prstGeom>
+          <a:noFill/>
+        </p:spPr>
+        <p:txBody>
+          <a:bodyPr wrap="square">
+            <a:normAutofit/>
+          </a:bodyPr>
+          <a:lstStyle/>
+          <a:p>
+            <a:pPr algn="l"/>
+            <a:r>
+              <a:rPr sz="800" b="0">
+                <a:solidFill>
+                  <a:srgbClr val="66707A"/>
+                </a:solidFill>
+                <a:latin typeface="Arial"/>
+              </a:rPr>
+              <a:t>Disseny de Sistemes d'Informació · Ports de sortida en arquitectura hexagonal</a:t>
+            </a:r>
+          </a:p>
+        </p:txBody>
+      </p:sp>
+      <p:sp>
+        <p:nvSpPr>
+          <p:cNvPr id="10" name="TextBox 9"/>
+          <p:cNvSpPr txBox="1"/>
+          <p:nvPr/>
+        </p:nvSpPr>
+        <p:spPr>
+          <a:xfrm>
+            <a:off x="11155680" y="6473952"/>
+            <a:ext cx="411480" cy="201168"/>
+          </a:xfrm>
+          <a:prstGeom prst="rect">
+            <a:avLst/>
+          </a:prstGeom>
+          <a:noFill/>
+        </p:spPr>
+        <p:txBody>
+          <a:bodyPr wrap="square">
+            <a:normAutofit/>
+          </a:bodyPr>
+          <a:lstStyle/>
+          <a:p>
             <a:pPr algn="r"/>
             <a:r>
               <a:rPr sz="800" b="0">
@@ -3792,7 +4106,7 @@
                 </a:solidFill>
                 <a:latin typeface="Arial"/>
               </a:rPr>
-              <a:t>10</a:t>
+              <a:t>11</a:t>
             </a:r>
           </a:p>
         </p:txBody>
@@ -5152,7 +5466,7 @@
                 </a:solidFill>
                 <a:latin typeface="Arial"/>
               </a:rPr>
-              <a:t>El problema en sistemes reals</a:t>
+              <a:t>Cas funcional: avaluació econòmica d'una beca</a:t>
             </a:r>
           </a:p>
         </p:txBody>
@@ -5187,7 +5501,7 @@
                 </a:solidFill>
                 <a:latin typeface="Arial"/>
               </a:rPr>
-              <a:t>AGAUR, processos corporatius i informació externa</a:t>
+              <a:t>Abans de parlar d'arquitectura, cal entendre el procediment</a:t>
             </a:r>
           </a:p>
         </p:txBody>
@@ -5262,7 +5576,7 @@
       </p:sp>
       <p:pic>
         <p:nvPicPr>
-          <p:cNvPr id="6" name="Picture 5" descr="agaur-before-coupled.png"/>
+          <p:cNvPr id="6" name="Picture 5" descr="agaur-functional-scholarship.png"/>
           <p:cNvPicPr>
             <a:picLocks noChangeAspect="1"/>
           </p:cNvPicPr>
@@ -5276,8 +5590,8 @@
         </p:blipFill>
         <p:spPr>
           <a:xfrm>
-            <a:off x="502920" y="1450769"/>
-            <a:ext cx="11201400" cy="3224942"/>
+            <a:off x="2211537" y="1234440"/>
+            <a:ext cx="3760806" cy="4526280"/>
           </a:xfrm>
           <a:prstGeom prst="rect">
             <a:avLst/>
@@ -5292,8 +5606,8 @@
         </p:nvSpPr>
         <p:spPr>
           <a:xfrm>
-            <a:off x="777240" y="5074920"/>
-            <a:ext cx="6995160" cy="822960"/>
+            <a:off x="7909560" y="1508760"/>
+            <a:ext cx="3246120" cy="1417320"/>
           </a:xfrm>
           <a:prstGeom prst="rect">
             <a:avLst/>
@@ -5308,27 +5622,114 @@
           <a:p>
             <a:pPr algn="l"/>
             <a:r>
-              <a:rPr sz="1400" b="0">
+              <a:rPr sz="1800" b="1">
                 <a:solidFill>
                   <a:srgbClr val="192D3E"/>
                 </a:solidFill>
                 <a:latin typeface="Arial"/>
               </a:rPr>
-              <a:t>Lectura funcional: una sol·licitud de beca genera un expedient, s'avaluen requisits i es prepara una proposta de resolució. El risc arquitectònic apareix quan aquesta avaluació incorpora directament SOAP/XML, DTOs, mapping i detalls de PICA.</a:t>
-            </a:r>
-          </a:p>
-        </p:txBody>
-      </p:sp>
-      <p:sp>
-        <p:nvSpPr>
-          <p:cNvPr id="8" name="Rounded Rectangle 7"/>
+              <a:t>Una sol·licitud de beca genera un expedient. Després dels requisits generals, AGAUR revisa requisits econòmics de renda i patrimoni. Si no es compleixen, l'expedient no avança a la revisió acadèmica.</a:t>
+            </a:r>
+          </a:p>
+        </p:txBody>
+      </p:sp>
+      <p:sp>
+        <p:nvSpPr>
+          <p:cNvPr id="8" name="TextBox 7"/>
+          <p:cNvSpPr txBox="1"/>
+          <p:nvPr/>
+        </p:nvSpPr>
+        <p:spPr>
+          <a:xfrm>
+            <a:off x="7909560" y="3154680"/>
+            <a:ext cx="3246120" cy="1417320"/>
+          </a:xfrm>
+          <a:prstGeom prst="rect">
+            <a:avLst/>
+          </a:prstGeom>
+          <a:noFill/>
+        </p:spPr>
+        <p:txBody>
+          <a:bodyPr wrap="square">
+            <a:normAutofit/>
+          </a:bodyPr>
+          <a:lstStyle/>
+          <a:p>
+            <a:pPr>
+              <a:spcAft>
+                <a:spcPts val="800"/>
+              </a:spcAft>
+              <a:defRPr sz="1400">
+                <a:solidFill>
+                  <a:srgbClr val="262626"/>
+                </a:solidFill>
+                <a:latin typeface="Arial"/>
+              </a:defRPr>
+            </a:pPr>
+            <a:r>
+              <a:t>Renda familiar.</a:t>
+            </a:r>
+          </a:p>
+          <a:p>
+            <a:pPr>
+              <a:spcAft>
+                <a:spcPts val="800"/>
+              </a:spcAft>
+              <a:defRPr sz="1400">
+                <a:solidFill>
+                  <a:srgbClr val="262626"/>
+                </a:solidFill>
+                <a:latin typeface="Arial"/>
+              </a:defRPr>
+            </a:pPr>
+            <a:r>
+              <a:t>Patrimoni de la unitat familiar.</a:t>
+            </a:r>
+          </a:p>
+          <a:p>
+            <a:pPr>
+              <a:spcAft>
+                <a:spcPts val="800"/>
+              </a:spcAft>
+              <a:defRPr sz="1400">
+                <a:solidFill>
+                  <a:srgbClr val="262626"/>
+                </a:solidFill>
+                <a:latin typeface="Arial"/>
+              </a:defRPr>
+            </a:pPr>
+            <a:r>
+              <a:t>Finques urbanes i rústiques amb valors cadastrals.</a:t>
+            </a:r>
+          </a:p>
+          <a:p>
+            <a:pPr>
+              <a:spcAft>
+                <a:spcPts val="800"/>
+              </a:spcAft>
+              <a:defRPr sz="1400">
+                <a:solidFill>
+                  <a:srgbClr val="262626"/>
+                </a:solidFill>
+                <a:latin typeface="Arial"/>
+              </a:defRPr>
+            </a:pPr>
+            <a:r>
+              <a:t>Proposta de concessió o denegació.</a:t>
+            </a:r>
+          </a:p>
+        </p:txBody>
+      </p:sp>
+      <p:sp>
+        <p:nvSpPr>
+          <p:cNvPr id="9" name="Rounded Rectangle 8"/>
           <p:cNvSpPr/>
           <p:nvPr/>
         </p:nvSpPr>
         <p:spPr>
           <a:xfrm>
-            <a:off x="8138160" y="5074920"/>
-            <a:ext cx="3291840" cy="822960"/>
+            <a:off x="7909560" y="4983480"/>
+            <a:ext cx="3246120" cy="822960"/>
           </a:xfrm>
           <a:prstGeom prst="roundRect">
             <a:avLst/>
@@ -5367,14 +5768,14 @@
       </p:sp>
       <p:sp>
         <p:nvSpPr>
-          <p:cNvPr id="9" name="TextBox 8"/>
+          <p:cNvPr id="10" name="TextBox 9"/>
           <p:cNvSpPr txBox="1"/>
           <p:nvPr/>
         </p:nvSpPr>
         <p:spPr>
           <a:xfrm>
-            <a:off x="8321040" y="5193792"/>
-            <a:ext cx="2926080" cy="530352"/>
+            <a:off x="8092440" y="5138928"/>
+            <a:ext cx="2880360" cy="411480"/>
           </a:xfrm>
           <a:prstGeom prst="rect">
             <a:avLst/>
@@ -5389,21 +5790,20 @@
           <a:p>
             <a:pPr algn="ctr"/>
             <a:r>
-              <a:rPr sz="900" b="0">
+              <a:rPr sz="1000" b="0">
                 <a:solidFill>
                   <a:srgbClr val="66707A"/>
                 </a:solidFill>
                 <a:latin typeface="Arial"/>
               </a:rPr>
-              <a:t>Evidència documental
-Informe AGAUR: formació i consultoria especialitzada, 60 h, maig-juliol 2025, serveis REST i arquitectura hexagonal.</a:t>
-            </a:r>
-          </a:p>
-        </p:txBody>
-      </p:sp>
-      <p:sp>
-        <p:nvSpPr>
-          <p:cNvPr id="10" name="TextBox 9"/>
+              <a:t>Fonts públiques: AGAUR requisits econòmics i BOE 2025-2026 sobre llindars de renda i patrimoni.</a:t>
+            </a:r>
+          </a:p>
+        </p:txBody>
+      </p:sp>
+      <p:sp>
+        <p:nvSpPr>
+          <p:cNvPr id="11" name="TextBox 10"/>
           <p:cNvSpPr txBox="1"/>
           <p:nvPr/>
         </p:nvSpPr>
@@ -5438,7 +5838,7 @@
       </p:sp>
       <p:sp>
         <p:nvSpPr>
-          <p:cNvPr id="11" name="TextBox 10"/>
+          <p:cNvPr id="12" name="TextBox 11"/>
           <p:cNvSpPr txBox="1"/>
           <p:nvPr/>
         </p:nvSpPr>
@@ -5526,7 +5926,7 @@
                 </a:solidFill>
                 <a:latin typeface="Arial"/>
               </a:rPr>
-              <a:t>Quan l'acoblament es fa risc d'evolució</a:t>
+              <a:t>Quina informació externa necessita el procediment?</a:t>
             </a:r>
           </a:p>
         </p:txBody>
@@ -5555,76 +5955,13 @@
           <a:p>
             <a:pPr algn="l"/>
             <a:r>
-              <a:rPr sz="1300" b="0" dirty="0" err="1">
+              <a:rPr sz="1300" b="0">
                 <a:solidFill>
                   <a:srgbClr val="66707A"/>
                 </a:solidFill>
                 <a:latin typeface="Arial"/>
               </a:rPr>
-              <a:t>Lectura</a:t>
-            </a:r>
-            <a:r>
-              <a:rPr sz="1300" b="0" dirty="0">
-                <a:solidFill>
-                  <a:srgbClr val="66707A"/>
-                </a:solidFill>
-                <a:latin typeface="Arial"/>
-              </a:rPr>
-              <a:t> </a:t>
-            </a:r>
-            <a:r>
-              <a:rPr sz="1300" b="0" dirty="0" err="1">
-                <a:solidFill>
-                  <a:srgbClr val="66707A"/>
-                </a:solidFill>
-                <a:latin typeface="Arial"/>
-              </a:rPr>
-              <a:t>institucional</a:t>
-            </a:r>
-            <a:r>
-              <a:rPr sz="1300" b="0" dirty="0">
-                <a:solidFill>
-                  <a:srgbClr val="66707A"/>
-                </a:solidFill>
-                <a:latin typeface="Arial"/>
-              </a:rPr>
-              <a:t>: PICA, web services </a:t>
-            </a:r>
-            <a:r>
-              <a:rPr sz="1300" b="0" dirty="0" err="1">
-                <a:solidFill>
-                  <a:srgbClr val="66707A"/>
-                </a:solidFill>
-                <a:latin typeface="Arial"/>
-              </a:rPr>
-              <a:t>i</a:t>
-            </a:r>
-            <a:r>
-              <a:rPr sz="1300" b="0" dirty="0">
-                <a:solidFill>
-                  <a:srgbClr val="66707A"/>
-                </a:solidFill>
-                <a:latin typeface="Arial"/>
-              </a:rPr>
-              <a:t> </a:t>
-            </a:r>
-            <a:r>
-              <a:rPr sz="1300" b="0" dirty="0" err="1">
-                <a:solidFill>
-                  <a:srgbClr val="66707A"/>
-                </a:solidFill>
-                <a:latin typeface="Arial"/>
-              </a:rPr>
-              <a:t>orientació</a:t>
-            </a:r>
-            <a:r>
-              <a:rPr sz="1300" b="0" dirty="0">
-                <a:solidFill>
-                  <a:srgbClr val="66707A"/>
-                </a:solidFill>
-                <a:latin typeface="Arial"/>
-              </a:rPr>
-              <a:t> CTTI cap a APIs</a:t>
+              <a:t>Renda, patrimoni i informació cadastral</a:t>
             </a:r>
           </a:p>
         </p:txBody>
@@ -5697,16 +6034,40 @@
           </a:p>
         </p:txBody>
       </p:sp>
-      <p:sp>
-        <p:nvSpPr>
-          <p:cNvPr id="6" name="TextBox 5"/>
+      <p:pic>
+        <p:nvPicPr>
+          <p:cNvPr id="6" name="Picture 5" descr="agaur-data-interoperability.png"/>
+          <p:cNvPicPr>
+            <a:picLocks noChangeAspect="1"/>
+          </p:cNvPicPr>
+          <p:nvPr/>
+        </p:nvPicPr>
+        <p:blipFill>
+          <a:blip r:embed="rId3"/>
+          <a:stretch>
+            <a:fillRect/>
+          </a:stretch>
+        </p:blipFill>
+        <p:spPr>
+          <a:xfrm>
+            <a:off x="3053404" y="1234440"/>
+            <a:ext cx="2442831" cy="4526280"/>
+          </a:xfrm>
+          <a:prstGeom prst="rect">
+            <a:avLst/>
+          </a:prstGeom>
+        </p:spPr>
+      </p:pic>
+      <p:sp>
+        <p:nvSpPr>
+          <p:cNvPr id="7" name="TextBox 6"/>
           <p:cNvSpPr txBox="1"/>
           <p:nvPr/>
         </p:nvSpPr>
         <p:spPr>
           <a:xfrm>
-            <a:off x="822960" y="1298448"/>
-            <a:ext cx="10424160" cy="320040"/>
+            <a:off x="8229600" y="1508760"/>
+            <a:ext cx="2926080" cy="1234440"/>
           </a:xfrm>
           <a:prstGeom prst="rect">
             <a:avLst/>
@@ -5719,35 +6080,628 @@
           </a:bodyPr>
           <a:lstStyle/>
           <a:p>
-            <a:pPr algn="ctr"/>
-            <a:r>
-              <a:rPr sz="1600" b="1">
+            <a:pPr algn="l"/>
+            <a:r>
+              <a:rPr sz="1800" b="1" dirty="0">
                 <a:solidFill>
                   <a:srgbClr val="192D3E"/>
                 </a:solidFill>
                 <a:latin typeface="Arial"/>
               </a:rPr>
-              <a:t>La qüestió no és si SOAP desapareix: és que cap tecnologia d'integració ha d'arrossegar el procediment.</a:t>
-            </a:r>
-          </a:p>
-        </p:txBody>
-      </p:sp>
-      <p:sp>
-        <p:nvSpPr>
-          <p:cNvPr id="7" name="Rectangle 6"/>
+              <a:t>La </a:t>
+            </a:r>
+            <a:r>
+              <a:rPr sz="1800" b="1" dirty="0" err="1">
+                <a:solidFill>
+                  <a:srgbClr val="192D3E"/>
+                </a:solidFill>
+                <a:latin typeface="Arial"/>
+              </a:rPr>
+              <a:t>necessitat</a:t>
+            </a:r>
+            <a:r>
+              <a:rPr sz="1800" b="1" dirty="0">
+                <a:solidFill>
+                  <a:srgbClr val="192D3E"/>
+                </a:solidFill>
+                <a:latin typeface="Arial"/>
+              </a:rPr>
+              <a:t> </a:t>
+            </a:r>
+            <a:r>
+              <a:rPr sz="1800" b="1" dirty="0" err="1">
+                <a:solidFill>
+                  <a:srgbClr val="192D3E"/>
+                </a:solidFill>
+                <a:latin typeface="Arial"/>
+              </a:rPr>
+              <a:t>funcional</a:t>
+            </a:r>
+            <a:r>
+              <a:rPr sz="1800" b="1" dirty="0">
+                <a:solidFill>
+                  <a:srgbClr val="192D3E"/>
+                </a:solidFill>
+                <a:latin typeface="Arial"/>
+              </a:rPr>
+              <a:t> no </a:t>
+            </a:r>
+            <a:r>
+              <a:rPr sz="1800" b="1" dirty="0" err="1">
+                <a:solidFill>
+                  <a:srgbClr val="192D3E"/>
+                </a:solidFill>
+                <a:latin typeface="Arial"/>
+              </a:rPr>
+              <a:t>és</a:t>
+            </a:r>
+            <a:r>
+              <a:rPr sz="1800" b="1" dirty="0">
+                <a:solidFill>
+                  <a:srgbClr val="192D3E"/>
+                </a:solidFill>
+                <a:latin typeface="Arial"/>
+              </a:rPr>
+              <a:t> </a:t>
+            </a:r>
+            <a:r>
+              <a:rPr sz="1800" b="1" dirty="0" err="1">
+                <a:solidFill>
+                  <a:srgbClr val="192D3E"/>
+                </a:solidFill>
+                <a:latin typeface="Arial"/>
+              </a:rPr>
+              <a:t>consumir</a:t>
+            </a:r>
+            <a:r>
+              <a:rPr sz="1800" b="1" dirty="0">
+                <a:solidFill>
+                  <a:srgbClr val="192D3E"/>
+                </a:solidFill>
+                <a:latin typeface="Arial"/>
+              </a:rPr>
+              <a:t> </a:t>
+            </a:r>
+            <a:r>
+              <a:rPr sz="1800" b="1" dirty="0" err="1">
+                <a:solidFill>
+                  <a:srgbClr val="192D3E"/>
+                </a:solidFill>
+                <a:latin typeface="Arial"/>
+              </a:rPr>
+              <a:t>una</a:t>
+            </a:r>
+            <a:r>
+              <a:rPr sz="1800" b="1" dirty="0">
+                <a:solidFill>
+                  <a:srgbClr val="192D3E"/>
+                </a:solidFill>
+                <a:latin typeface="Arial"/>
+              </a:rPr>
+              <a:t> API </a:t>
+            </a:r>
+            <a:r>
+              <a:rPr sz="1800" b="1" dirty="0" err="1">
+                <a:solidFill>
+                  <a:srgbClr val="192D3E"/>
+                </a:solidFill>
+                <a:latin typeface="Arial"/>
+              </a:rPr>
+              <a:t>concreta</a:t>
+            </a:r>
+            <a:r>
+              <a:rPr sz="1800" b="1" dirty="0">
+                <a:solidFill>
+                  <a:srgbClr val="192D3E"/>
+                </a:solidFill>
+                <a:latin typeface="Arial"/>
+              </a:rPr>
+              <a:t>. </a:t>
+            </a:r>
+            <a:r>
+              <a:rPr sz="1800" b="1" dirty="0" err="1">
+                <a:solidFill>
+                  <a:srgbClr val="192D3E"/>
+                </a:solidFill>
+                <a:latin typeface="Arial"/>
+              </a:rPr>
+              <a:t>És</a:t>
+            </a:r>
+            <a:r>
+              <a:rPr sz="1800" b="1" dirty="0">
+                <a:solidFill>
+                  <a:srgbClr val="192D3E"/>
+                </a:solidFill>
+                <a:latin typeface="Arial"/>
+              </a:rPr>
+              <a:t> </a:t>
+            </a:r>
+            <a:r>
+              <a:rPr sz="1800" b="1" dirty="0" err="1">
+                <a:solidFill>
+                  <a:srgbClr val="192D3E"/>
+                </a:solidFill>
+                <a:latin typeface="Arial"/>
+              </a:rPr>
+              <a:t>obtenir</a:t>
+            </a:r>
+            <a:r>
+              <a:rPr sz="1800" b="1" dirty="0">
+                <a:solidFill>
+                  <a:srgbClr val="192D3E"/>
+                </a:solidFill>
+                <a:latin typeface="Arial"/>
+              </a:rPr>
+              <a:t> </a:t>
+            </a:r>
+            <a:r>
+              <a:rPr sz="1800" b="1" dirty="0" err="1">
+                <a:solidFill>
+                  <a:srgbClr val="192D3E"/>
+                </a:solidFill>
+                <a:latin typeface="Arial"/>
+              </a:rPr>
+              <a:t>informació</a:t>
+            </a:r>
+            <a:r>
+              <a:rPr sz="1800" b="1" dirty="0">
+                <a:solidFill>
+                  <a:srgbClr val="192D3E"/>
+                </a:solidFill>
+                <a:latin typeface="Arial"/>
+              </a:rPr>
+              <a:t> </a:t>
+            </a:r>
+            <a:r>
+              <a:rPr sz="1800" b="1" dirty="0" err="1">
+                <a:solidFill>
+                  <a:srgbClr val="192D3E"/>
+                </a:solidFill>
+                <a:latin typeface="Arial"/>
+              </a:rPr>
+              <a:t>administrativa</a:t>
+            </a:r>
+            <a:r>
+              <a:rPr sz="1800" b="1" dirty="0">
+                <a:solidFill>
+                  <a:srgbClr val="192D3E"/>
+                </a:solidFill>
+                <a:latin typeface="Arial"/>
+              </a:rPr>
+              <a:t> </a:t>
+            </a:r>
+            <a:r>
+              <a:rPr sz="1800" b="1" dirty="0" err="1">
+                <a:solidFill>
+                  <a:srgbClr val="192D3E"/>
+                </a:solidFill>
+                <a:latin typeface="Arial"/>
+              </a:rPr>
+              <a:t>fiable</a:t>
+            </a:r>
+            <a:r>
+              <a:rPr sz="1800" b="1" dirty="0">
+                <a:solidFill>
+                  <a:srgbClr val="192D3E"/>
+                </a:solidFill>
+                <a:latin typeface="Arial"/>
+              </a:rPr>
+              <a:t> per </a:t>
+            </a:r>
+            <a:r>
+              <a:rPr sz="1800" b="1" dirty="0" err="1">
+                <a:solidFill>
+                  <a:srgbClr val="192D3E"/>
+                </a:solidFill>
+                <a:latin typeface="Arial"/>
+              </a:rPr>
+              <a:t>avaluar</a:t>
+            </a:r>
+            <a:r>
+              <a:rPr sz="1800" b="1" dirty="0">
+                <a:solidFill>
+                  <a:srgbClr val="192D3E"/>
+                </a:solidFill>
+                <a:latin typeface="Arial"/>
+              </a:rPr>
+              <a:t> </a:t>
+            </a:r>
+            <a:r>
+              <a:rPr sz="1800" b="1" dirty="0" err="1">
+                <a:solidFill>
+                  <a:srgbClr val="192D3E"/>
+                </a:solidFill>
+                <a:latin typeface="Arial"/>
+              </a:rPr>
+              <a:t>si</a:t>
+            </a:r>
+            <a:r>
+              <a:rPr sz="1800" b="1" dirty="0">
+                <a:solidFill>
+                  <a:srgbClr val="192D3E"/>
+                </a:solidFill>
+                <a:latin typeface="Arial"/>
+              </a:rPr>
+              <a:t> </a:t>
+            </a:r>
+            <a:r>
+              <a:rPr sz="1800" b="1" dirty="0" err="1">
+                <a:solidFill>
+                  <a:srgbClr val="192D3E"/>
+                </a:solidFill>
+                <a:latin typeface="Arial"/>
+              </a:rPr>
+              <a:t>una</a:t>
+            </a:r>
+            <a:r>
+              <a:rPr sz="1800" b="1" dirty="0">
+                <a:solidFill>
+                  <a:srgbClr val="192D3E"/>
+                </a:solidFill>
+                <a:latin typeface="Arial"/>
+              </a:rPr>
+              <a:t> </a:t>
+            </a:r>
+            <a:r>
+              <a:rPr sz="1800" b="1" dirty="0" err="1">
+                <a:solidFill>
+                  <a:srgbClr val="192D3E"/>
+                </a:solidFill>
+                <a:latin typeface="Arial"/>
+              </a:rPr>
+              <a:t>sol·licitud</a:t>
+            </a:r>
+            <a:r>
+              <a:rPr sz="1800" b="1" dirty="0">
+                <a:solidFill>
+                  <a:srgbClr val="192D3E"/>
+                </a:solidFill>
+                <a:latin typeface="Arial"/>
+              </a:rPr>
+              <a:t> </a:t>
+            </a:r>
+            <a:r>
+              <a:rPr sz="1800" b="1" dirty="0" err="1">
+                <a:solidFill>
+                  <a:srgbClr val="192D3E"/>
+                </a:solidFill>
+                <a:latin typeface="Arial"/>
+              </a:rPr>
+              <a:t>compleix</a:t>
+            </a:r>
+            <a:r>
+              <a:rPr sz="1800" b="1" dirty="0">
+                <a:solidFill>
+                  <a:srgbClr val="192D3E"/>
+                </a:solidFill>
+                <a:latin typeface="Arial"/>
+              </a:rPr>
+              <a:t> </a:t>
+            </a:r>
+            <a:r>
+              <a:rPr sz="1800" b="1" dirty="0" err="1">
+                <a:solidFill>
+                  <a:srgbClr val="192D3E"/>
+                </a:solidFill>
+                <a:latin typeface="Arial"/>
+              </a:rPr>
+              <a:t>els</a:t>
+            </a:r>
+            <a:r>
+              <a:rPr sz="1800" b="1" dirty="0">
+                <a:solidFill>
+                  <a:srgbClr val="192D3E"/>
+                </a:solidFill>
+                <a:latin typeface="Arial"/>
+              </a:rPr>
+              <a:t> </a:t>
+            </a:r>
+            <a:r>
+              <a:rPr sz="1800" b="1" dirty="0" err="1">
+                <a:solidFill>
+                  <a:srgbClr val="192D3E"/>
+                </a:solidFill>
+                <a:latin typeface="Arial"/>
+              </a:rPr>
+              <a:t>requisits</a:t>
+            </a:r>
+            <a:r>
+              <a:rPr sz="1800" b="1" dirty="0">
+                <a:solidFill>
+                  <a:srgbClr val="192D3E"/>
+                </a:solidFill>
+                <a:latin typeface="Arial"/>
+              </a:rPr>
+              <a:t> </a:t>
+            </a:r>
+            <a:r>
+              <a:rPr sz="1800" b="1" dirty="0" err="1">
+                <a:solidFill>
+                  <a:srgbClr val="192D3E"/>
+                </a:solidFill>
+                <a:latin typeface="Arial"/>
+              </a:rPr>
+              <a:t>econòmics</a:t>
+            </a:r>
+            <a:r>
+              <a:rPr sz="1800" b="1" dirty="0">
+                <a:solidFill>
+                  <a:srgbClr val="192D3E"/>
+                </a:solidFill>
+                <a:latin typeface="Arial"/>
+              </a:rPr>
+              <a:t>.</a:t>
+            </a:r>
+          </a:p>
+        </p:txBody>
+      </p:sp>
+      <p:sp>
+        <p:nvSpPr>
+          <p:cNvPr id="8" name="TextBox 7"/>
+          <p:cNvSpPr txBox="1"/>
+          <p:nvPr/>
+        </p:nvSpPr>
+        <p:spPr>
+          <a:xfrm>
+            <a:off x="8229600" y="3063240"/>
+            <a:ext cx="2926080" cy="1691640"/>
+          </a:xfrm>
+          <a:prstGeom prst="rect">
+            <a:avLst/>
+          </a:prstGeom>
+          <a:noFill/>
+        </p:spPr>
+        <p:txBody>
+          <a:bodyPr wrap="square">
+            <a:normAutofit/>
+          </a:bodyPr>
+          <a:lstStyle/>
+          <a:p>
+            <a:pPr>
+              <a:spcAft>
+                <a:spcPts val="800"/>
+              </a:spcAft>
+              <a:defRPr sz="1200">
+                <a:solidFill>
+                  <a:srgbClr val="262626"/>
+                </a:solidFill>
+                <a:latin typeface="Arial"/>
+              </a:defRPr>
+            </a:pPr>
+            <a:r>
+              <a:rPr dirty="0"/>
+              <a:t>La </a:t>
+            </a:r>
+            <a:r>
+              <a:rPr dirty="0" err="1"/>
+              <a:t>sol·licitud</a:t>
+            </a:r>
+            <a:r>
+              <a:rPr dirty="0"/>
+              <a:t> </a:t>
+            </a:r>
+            <a:r>
+              <a:rPr dirty="0" err="1"/>
+              <a:t>autoritza</a:t>
+            </a:r>
+            <a:r>
+              <a:rPr dirty="0"/>
+              <a:t> la consulta de </a:t>
+            </a:r>
+            <a:r>
+              <a:rPr dirty="0" err="1"/>
+              <a:t>renda</a:t>
+            </a:r>
+            <a:r>
+              <a:rPr dirty="0"/>
+              <a:t> </a:t>
+            </a:r>
+            <a:r>
+              <a:rPr dirty="0" err="1"/>
+              <a:t>i</a:t>
+            </a:r>
+            <a:r>
+              <a:rPr dirty="0"/>
+              <a:t> </a:t>
+            </a:r>
+            <a:r>
+              <a:rPr dirty="0" err="1"/>
+              <a:t>patrimoni</a:t>
+            </a:r>
+            <a:r>
+              <a:rPr dirty="0"/>
+              <a:t>.</a:t>
+            </a:r>
+          </a:p>
+          <a:p>
+            <a:pPr>
+              <a:spcAft>
+                <a:spcPts val="800"/>
+              </a:spcAft>
+              <a:defRPr sz="1200">
+                <a:solidFill>
+                  <a:srgbClr val="262626"/>
+                </a:solidFill>
+                <a:latin typeface="Arial"/>
+              </a:defRPr>
+            </a:pPr>
+            <a:r>
+              <a:rPr dirty="0"/>
+              <a:t>El </a:t>
+            </a:r>
+            <a:r>
+              <a:rPr dirty="0" err="1"/>
+              <a:t>patrimoni</a:t>
+            </a:r>
+            <a:r>
+              <a:rPr dirty="0"/>
+              <a:t> pot </a:t>
+            </a:r>
+            <a:r>
+              <a:rPr dirty="0" err="1"/>
+              <a:t>incloure</a:t>
+            </a:r>
+            <a:r>
+              <a:rPr dirty="0"/>
+              <a:t> </a:t>
+            </a:r>
+            <a:r>
+              <a:rPr dirty="0" err="1"/>
+              <a:t>béns</a:t>
+            </a:r>
+            <a:r>
+              <a:rPr dirty="0"/>
+              <a:t> </a:t>
+            </a:r>
+            <a:r>
+              <a:rPr dirty="0" err="1"/>
+              <a:t>immobles</a:t>
+            </a:r>
+            <a:r>
+              <a:rPr dirty="0"/>
+              <a:t>.</a:t>
+            </a:r>
+          </a:p>
+          <a:p>
+            <a:pPr>
+              <a:spcAft>
+                <a:spcPts val="800"/>
+              </a:spcAft>
+              <a:defRPr sz="1200">
+                <a:solidFill>
+                  <a:srgbClr val="262626"/>
+                </a:solidFill>
+                <a:latin typeface="Arial"/>
+              </a:defRPr>
+            </a:pPr>
+            <a:r>
+              <a:rPr dirty="0"/>
+              <a:t>El valor cadastral pot </a:t>
+            </a:r>
+            <a:r>
+              <a:rPr dirty="0" err="1"/>
+              <a:t>influir</a:t>
+            </a:r>
+            <a:r>
+              <a:rPr dirty="0"/>
+              <a:t> </a:t>
+            </a:r>
+            <a:r>
+              <a:rPr dirty="0" err="1"/>
+              <a:t>en</a:t>
+            </a:r>
+            <a:r>
+              <a:rPr dirty="0"/>
+              <a:t> </a:t>
+            </a:r>
+            <a:r>
+              <a:rPr dirty="0" err="1"/>
+              <a:t>el</a:t>
+            </a:r>
+            <a:r>
+              <a:rPr dirty="0"/>
+              <a:t> </a:t>
+            </a:r>
+            <a:r>
+              <a:rPr dirty="0" err="1"/>
+              <a:t>resultat</a:t>
+            </a:r>
+            <a:r>
+              <a:rPr dirty="0"/>
+              <a:t> </a:t>
+            </a:r>
+            <a:r>
+              <a:rPr dirty="0" err="1"/>
+              <a:t>econòmic</a:t>
+            </a:r>
+            <a:r>
+              <a:rPr dirty="0"/>
+              <a:t>.</a:t>
+            </a:r>
+          </a:p>
+          <a:p>
+            <a:pPr>
+              <a:spcAft>
+                <a:spcPts val="800"/>
+              </a:spcAft>
+              <a:defRPr sz="1200">
+                <a:solidFill>
+                  <a:srgbClr val="262626"/>
+                </a:solidFill>
+                <a:latin typeface="Arial"/>
+              </a:defRPr>
+            </a:pPr>
+            <a:r>
+              <a:rPr dirty="0"/>
+              <a:t>La </a:t>
+            </a:r>
+            <a:r>
+              <a:rPr dirty="0" err="1"/>
+              <a:t>documentació</a:t>
+            </a:r>
+            <a:r>
+              <a:rPr dirty="0"/>
+              <a:t> </a:t>
+            </a:r>
+            <a:r>
+              <a:rPr dirty="0" err="1"/>
+              <a:t>pública</a:t>
+            </a:r>
+            <a:r>
+              <a:rPr dirty="0"/>
+              <a:t> vincula PICA </a:t>
+            </a:r>
+            <a:r>
+              <a:rPr dirty="0" err="1"/>
+              <a:t>amb</a:t>
+            </a:r>
+            <a:r>
+              <a:rPr dirty="0"/>
+              <a:t> </a:t>
+            </a:r>
+            <a:r>
+              <a:rPr dirty="0" err="1"/>
+              <a:t>dades</a:t>
+            </a:r>
+            <a:r>
+              <a:rPr dirty="0"/>
+              <a:t> de </a:t>
+            </a:r>
+            <a:r>
+              <a:rPr dirty="0" err="1"/>
+              <a:t>cadastre</a:t>
+            </a:r>
+            <a:r>
+              <a:rPr dirty="0"/>
+              <a:t> </a:t>
+            </a:r>
+            <a:r>
+              <a:rPr dirty="0" err="1"/>
+              <a:t>disponibles</a:t>
+            </a:r>
+            <a:r>
+              <a:rPr dirty="0"/>
+              <a:t> per AEAT.</a:t>
+            </a:r>
+          </a:p>
+        </p:txBody>
+      </p:sp>
+      <p:sp>
+        <p:nvSpPr>
+          <p:cNvPr id="9" name="Rounded Rectangle 8"/>
           <p:cNvSpPr/>
           <p:nvPr/>
         </p:nvSpPr>
         <p:spPr>
           <a:xfrm>
-            <a:off x="777240" y="1783080"/>
-            <a:ext cx="3246120" cy="2971800"/>
-          </a:xfrm>
-          <a:prstGeom prst="rect">
+            <a:off x="8229600" y="4892040"/>
+            <a:ext cx="2926080" cy="1005840"/>
+          </a:xfrm>
+          <a:prstGeom prst="roundRect">
             <a:avLst/>
           </a:prstGeom>
           <a:solidFill>
-            <a:srgbClr val="F8EAEA"/>
+            <a:srgbClr val="F7F8FA"/>
           </a:solidFill>
           <a:ln w="9525">
             <a:solidFill>
@@ -5780,14 +6734,14 @@
       </p:sp>
       <p:sp>
         <p:nvSpPr>
-          <p:cNvPr id="8" name="TextBox 7"/>
+          <p:cNvPr id="10" name="TextBox 9"/>
           <p:cNvSpPr txBox="1"/>
           <p:nvPr/>
         </p:nvSpPr>
         <p:spPr>
           <a:xfrm>
-            <a:off x="1005840" y="2011680"/>
-            <a:ext cx="2788920" cy="292608"/>
+            <a:off x="8394192" y="5029200"/>
+            <a:ext cx="2606040" cy="658368"/>
           </a:xfrm>
           <a:prstGeom prst="rect">
             <a:avLst/>
@@ -5802,51 +6756,27 @@
           <a:p>
             <a:pPr algn="ctr"/>
             <a:r>
-              <a:rPr sz="1800" b="1" dirty="0" err="1">
-                <a:solidFill>
-                  <a:srgbClr val="192D3E"/>
-                </a:solidFill>
-                <a:latin typeface="Arial"/>
-              </a:rPr>
-              <a:t>Situació</a:t>
-            </a:r>
-            <a:r>
-              <a:rPr sz="1800" b="1" dirty="0">
-                <a:solidFill>
-                  <a:srgbClr val="192D3E"/>
-                </a:solidFill>
-                <a:latin typeface="Arial"/>
-              </a:rPr>
-              <a:t> </a:t>
-            </a:r>
-            <a:r>
-              <a:rPr sz="1800" b="1" dirty="0" err="1">
-                <a:solidFill>
-                  <a:srgbClr val="192D3E"/>
-                </a:solidFill>
-                <a:latin typeface="Arial"/>
-              </a:rPr>
-              <a:t>verificable</a:t>
-            </a:r>
-            <a:endParaRPr sz="1800" b="1" dirty="0">
-              <a:solidFill>
-                <a:srgbClr val="192D3E"/>
-              </a:solidFill>
-              <a:latin typeface="Arial"/>
-            </a:endParaRPr>
-          </a:p>
-        </p:txBody>
-      </p:sp>
-      <p:sp>
-        <p:nvSpPr>
-          <p:cNvPr id="9" name="TextBox 8"/>
+              <a:rPr sz="800" b="0">
+                <a:solidFill>
+                  <a:srgbClr val="66707A"/>
+                </a:solidFill>
+                <a:latin typeface="Arial"/>
+              </a:rPr>
+              <a:t>Glossari mínim: PICA és interoperabilitat administrativa; Cadastre és registre de béns immobles; SOAP/XML és missatgeria i format d'integració.</a:t>
+            </a:r>
+          </a:p>
+        </p:txBody>
+      </p:sp>
+      <p:sp>
+        <p:nvSpPr>
+          <p:cNvPr id="11" name="TextBox 10"/>
           <p:cNvSpPr txBox="1"/>
           <p:nvPr/>
         </p:nvSpPr>
         <p:spPr>
           <a:xfrm>
-            <a:off x="1024128" y="2487168"/>
-            <a:ext cx="2788920" cy="640080"/>
+            <a:off x="594360" y="6473952"/>
+            <a:ext cx="8595360" cy="201168"/>
           </a:xfrm>
           <a:prstGeom prst="rect">
             <a:avLst/>
@@ -5859,919 +6789,14 @@
           </a:bodyPr>
           <a:lstStyle/>
           <a:p>
-            <a:pPr algn="ctr"/>
-            <a:r>
-              <a:rPr sz="1600" b="1" dirty="0">
-                <a:solidFill>
-                  <a:srgbClr val="192D3E"/>
-                </a:solidFill>
-                <a:latin typeface="Arial"/>
-              </a:rPr>
-              <a:t>PICA continua </a:t>
-            </a:r>
-            <a:r>
-              <a:rPr sz="1600" b="1" dirty="0" err="1">
-                <a:solidFill>
-                  <a:srgbClr val="192D3E"/>
-                </a:solidFill>
-                <a:latin typeface="Arial"/>
-              </a:rPr>
-              <a:t>essent</a:t>
-            </a:r>
-            <a:r>
-              <a:rPr sz="1600" b="1" dirty="0">
-                <a:solidFill>
-                  <a:srgbClr val="192D3E"/>
-                </a:solidFill>
-                <a:latin typeface="Arial"/>
-              </a:rPr>
-              <a:t> </a:t>
-            </a:r>
-            <a:r>
-              <a:rPr sz="1600" b="1" dirty="0" err="1">
-                <a:solidFill>
-                  <a:srgbClr val="192D3E"/>
-                </a:solidFill>
-                <a:latin typeface="Arial"/>
-              </a:rPr>
-              <a:t>una</a:t>
-            </a:r>
-            <a:r>
-              <a:rPr sz="1600" b="1" dirty="0">
-                <a:solidFill>
-                  <a:srgbClr val="192D3E"/>
-                </a:solidFill>
-                <a:latin typeface="Arial"/>
-              </a:rPr>
-              <a:t> </a:t>
-            </a:r>
-            <a:r>
-              <a:rPr sz="1600" b="1" dirty="0" err="1">
-                <a:solidFill>
-                  <a:srgbClr val="192D3E"/>
-                </a:solidFill>
-                <a:latin typeface="Arial"/>
-              </a:rPr>
-              <a:t>plataforma</a:t>
-            </a:r>
-            <a:r>
-              <a:rPr sz="1600" b="1" dirty="0">
-                <a:solidFill>
-                  <a:srgbClr val="192D3E"/>
-                </a:solidFill>
-                <a:latin typeface="Arial"/>
-              </a:rPr>
-              <a:t> </a:t>
-            </a:r>
-            <a:r>
-              <a:rPr sz="1600" b="1" dirty="0" err="1">
-                <a:solidFill>
-                  <a:srgbClr val="192D3E"/>
-                </a:solidFill>
-                <a:latin typeface="Arial"/>
-              </a:rPr>
-              <a:t>corporativa</a:t>
-            </a:r>
-            <a:r>
-              <a:rPr sz="1600" b="1" dirty="0">
-                <a:solidFill>
-                  <a:srgbClr val="192D3E"/>
-                </a:solidFill>
-                <a:latin typeface="Arial"/>
-              </a:rPr>
-              <a:t> </a:t>
-            </a:r>
-            <a:r>
-              <a:rPr sz="1600" b="1" dirty="0" err="1">
-                <a:solidFill>
-                  <a:srgbClr val="192D3E"/>
-                </a:solidFill>
-                <a:latin typeface="Arial"/>
-              </a:rPr>
-              <a:t>d'interoperabilitat</a:t>
-            </a:r>
-            <a:r>
-              <a:rPr sz="1600" b="1" dirty="0">
-                <a:solidFill>
-                  <a:srgbClr val="192D3E"/>
-                </a:solidFill>
-                <a:latin typeface="Arial"/>
-              </a:rPr>
-              <a:t>.</a:t>
-            </a:r>
-          </a:p>
-        </p:txBody>
-      </p:sp>
-      <p:sp>
-        <p:nvSpPr>
-          <p:cNvPr id="10" name="TextBox 9"/>
-          <p:cNvSpPr txBox="1"/>
-          <p:nvPr/>
-        </p:nvSpPr>
-        <p:spPr>
-          <a:xfrm>
-            <a:off x="1024128" y="3364992"/>
-            <a:ext cx="2788920" cy="640080"/>
-          </a:xfrm>
-          <a:prstGeom prst="rect">
-            <a:avLst/>
-          </a:prstGeom>
-          <a:noFill/>
-        </p:spPr>
-        <p:txBody>
-          <a:bodyPr wrap="square">
-            <a:normAutofit/>
-          </a:bodyPr>
-          <a:lstStyle/>
-          <a:p>
-            <a:pPr algn="ctr"/>
-            <a:r>
-              <a:rPr sz="1400" b="0">
-                <a:solidFill>
-                  <a:srgbClr val="262626"/>
-                </a:solidFill>
-                <a:latin typeface="Arial"/>
-              </a:rPr>
-              <a:t>La documentació pública mostra integració amb web services i antecedents SOAP.</a:t>
-            </a:r>
-          </a:p>
-        </p:txBody>
-      </p:sp>
-      <p:sp>
-        <p:nvSpPr>
-          <p:cNvPr id="11" name="TextBox 10"/>
-          <p:cNvSpPr txBox="1"/>
-          <p:nvPr/>
-        </p:nvSpPr>
-        <p:spPr>
-          <a:xfrm>
-            <a:off x="1024128" y="4114800"/>
-            <a:ext cx="2788920" cy="320040"/>
-          </a:xfrm>
-          <a:prstGeom prst="rect">
-            <a:avLst/>
-          </a:prstGeom>
-          <a:noFill/>
-        </p:spPr>
-        <p:txBody>
-          <a:bodyPr wrap="square">
-            <a:normAutofit/>
-          </a:bodyPr>
-          <a:lstStyle/>
-          <a:p>
-            <a:pPr algn="ctr"/>
-            <a:r>
-              <a:rPr sz="1700" b="1">
-                <a:solidFill>
-                  <a:srgbClr val="236092"/>
-                </a:solidFill>
-                <a:latin typeface="Arial"/>
-              </a:rPr>
-              <a:t>PICA / web services</a:t>
-            </a:r>
-          </a:p>
-        </p:txBody>
-      </p:sp>
-      <p:sp>
-        <p:nvSpPr>
-          <p:cNvPr id="12" name="Rectangle 11"/>
-          <p:cNvSpPr/>
-          <p:nvPr/>
-        </p:nvSpPr>
-        <p:spPr>
-          <a:xfrm>
-            <a:off x="4434840" y="1783080"/>
-            <a:ext cx="3246120" cy="2971800"/>
-          </a:xfrm>
-          <a:prstGeom prst="rect">
-            <a:avLst/>
-          </a:prstGeom>
-          <a:solidFill>
-            <a:srgbClr val="FFF3D6"/>
-          </a:solidFill>
-          <a:ln w="9525">
-            <a:solidFill>
-              <a:srgbClr val="DCE0E4"/>
-            </a:solidFill>
-          </a:ln>
-        </p:spPr>
-        <p:style>
-          <a:lnRef idx="1">
-            <a:schemeClr val="accent1"/>
-          </a:lnRef>
-          <a:fillRef idx="3">
-            <a:schemeClr val="accent1"/>
-          </a:fillRef>
-          <a:effectRef idx="2">
-            <a:schemeClr val="accent1"/>
-          </a:effectRef>
-          <a:fontRef idx="minor">
-            <a:schemeClr val="lt1"/>
-          </a:fontRef>
-        </p:style>
-        <p:txBody>
-          <a:bodyPr rtlCol="0" anchor="ctr"/>
-          <a:lstStyle/>
-          <a:p>
-            <a:pPr algn="ctr"/>
-            <a:endParaRPr/>
-          </a:p>
-        </p:txBody>
-      </p:sp>
-      <p:sp>
-        <p:nvSpPr>
-          <p:cNvPr id="13" name="TextBox 12"/>
-          <p:cNvSpPr txBox="1"/>
-          <p:nvPr/>
-        </p:nvSpPr>
-        <p:spPr>
-          <a:xfrm>
-            <a:off x="4663440" y="2011680"/>
-            <a:ext cx="2788920" cy="292608"/>
-          </a:xfrm>
-          <a:prstGeom prst="rect">
-            <a:avLst/>
-          </a:prstGeom>
-          <a:noFill/>
-        </p:spPr>
-        <p:txBody>
-          <a:bodyPr wrap="square">
-            <a:normAutofit/>
-          </a:bodyPr>
-          <a:lstStyle/>
-          <a:p>
-            <a:pPr algn="ctr"/>
-            <a:r>
-              <a:rPr sz="1800" b="1">
-                <a:solidFill>
-                  <a:srgbClr val="192D3E"/>
-                </a:solidFill>
-                <a:latin typeface="Arial"/>
-              </a:rPr>
-              <a:t>Risc arquitectònic</a:t>
-            </a:r>
-          </a:p>
-        </p:txBody>
-      </p:sp>
-      <p:sp>
-        <p:nvSpPr>
-          <p:cNvPr id="14" name="TextBox 13"/>
-          <p:cNvSpPr txBox="1"/>
-          <p:nvPr/>
-        </p:nvSpPr>
-        <p:spPr>
-          <a:xfrm>
-            <a:off x="4681728" y="2514600"/>
-            <a:ext cx="2788920" cy="1737360"/>
-          </a:xfrm>
-          <a:prstGeom prst="rect">
-            <a:avLst/>
-          </a:prstGeom>
-          <a:noFill/>
-        </p:spPr>
-        <p:txBody>
-          <a:bodyPr wrap="square">
-            <a:normAutofit/>
-          </a:bodyPr>
-          <a:lstStyle/>
-          <a:p>
-            <a:pPr>
-              <a:spcAft>
-                <a:spcPts val="800"/>
-              </a:spcAft>
-              <a:defRPr sz="1200">
-                <a:solidFill>
-                  <a:srgbClr val="262626"/>
-                </a:solidFill>
-                <a:latin typeface="Arial"/>
-              </a:defRPr>
-            </a:pPr>
-            <a:r>
-              <a:rPr dirty="0"/>
-              <a:t>El flux de </a:t>
-            </a:r>
-            <a:r>
-              <a:rPr dirty="0" err="1"/>
-              <a:t>l'expedient</a:t>
-            </a:r>
-            <a:r>
-              <a:rPr dirty="0"/>
-              <a:t> </a:t>
-            </a:r>
-            <a:r>
-              <a:rPr dirty="0" err="1"/>
-              <a:t>coneix</a:t>
-            </a:r>
-            <a:r>
-              <a:rPr dirty="0"/>
-              <a:t> PICA, SOAP/XML, DTOs, mapping </a:t>
-            </a:r>
-            <a:r>
-              <a:rPr dirty="0" err="1"/>
-              <a:t>i</a:t>
-            </a:r>
-            <a:r>
-              <a:rPr dirty="0"/>
-              <a:t> errors </a:t>
-            </a:r>
-            <a:r>
-              <a:rPr dirty="0" err="1"/>
-              <a:t>tècnics</a:t>
-            </a:r>
-            <a:r>
-              <a:rPr dirty="0"/>
-              <a:t>.</a:t>
-            </a:r>
-          </a:p>
-          <a:p>
-            <a:pPr>
-              <a:spcAft>
-                <a:spcPts val="800"/>
-              </a:spcAft>
-              <a:defRPr sz="1200">
-                <a:solidFill>
-                  <a:srgbClr val="262626"/>
-                </a:solidFill>
-                <a:latin typeface="Arial"/>
-              </a:defRPr>
-            </a:pPr>
-            <a:r>
-              <a:rPr dirty="0"/>
-              <a:t>La </a:t>
-            </a:r>
-            <a:r>
-              <a:rPr dirty="0" err="1"/>
-              <a:t>lògica</a:t>
-            </a:r>
-            <a:r>
-              <a:rPr dirty="0"/>
-              <a:t> </a:t>
-            </a:r>
-            <a:r>
-              <a:rPr dirty="0" err="1"/>
-              <a:t>administrativa</a:t>
-            </a:r>
-            <a:r>
-              <a:rPr dirty="0"/>
-              <a:t> </a:t>
-            </a:r>
-            <a:r>
-              <a:rPr dirty="0" err="1"/>
-              <a:t>depèn</a:t>
-            </a:r>
-            <a:r>
-              <a:rPr dirty="0"/>
-              <a:t> </a:t>
-            </a:r>
-            <a:r>
-              <a:rPr dirty="0" err="1"/>
-              <a:t>d'una</a:t>
-            </a:r>
-            <a:r>
-              <a:rPr dirty="0"/>
-              <a:t> </a:t>
-            </a:r>
-            <a:r>
-              <a:rPr dirty="0" err="1"/>
-              <a:t>tecnologia</a:t>
-            </a:r>
-            <a:r>
-              <a:rPr dirty="0"/>
-              <a:t> </a:t>
-            </a:r>
-            <a:r>
-              <a:rPr dirty="0" err="1"/>
-              <a:t>d'integració</a:t>
-            </a:r>
-            <a:r>
-              <a:rPr dirty="0"/>
-              <a:t> </a:t>
-            </a:r>
-            <a:r>
-              <a:rPr dirty="0" err="1"/>
-              <a:t>concreta</a:t>
-            </a:r>
-            <a:r>
-              <a:rPr dirty="0"/>
-              <a:t>.</a:t>
-            </a:r>
-          </a:p>
-          <a:p>
-            <a:pPr>
-              <a:spcAft>
-                <a:spcPts val="800"/>
-              </a:spcAft>
-              <a:defRPr sz="1200">
-                <a:solidFill>
-                  <a:srgbClr val="262626"/>
-                </a:solidFill>
-                <a:latin typeface="Arial"/>
-              </a:defRPr>
-            </a:pPr>
-            <a:r>
-              <a:rPr dirty="0" err="1"/>
-              <a:t>Qualsevol</a:t>
-            </a:r>
-            <a:r>
-              <a:rPr dirty="0"/>
-              <a:t> </a:t>
-            </a:r>
-            <a:r>
-              <a:rPr dirty="0" err="1"/>
-              <a:t>evolució</a:t>
-            </a:r>
-            <a:r>
-              <a:rPr dirty="0"/>
-              <a:t> cap a REST, API Manager o EventHub </a:t>
-            </a:r>
-            <a:r>
-              <a:rPr dirty="0" err="1"/>
-              <a:t>impacta</a:t>
-            </a:r>
-            <a:r>
-              <a:rPr dirty="0"/>
-              <a:t> </a:t>
-            </a:r>
-            <a:r>
-              <a:rPr dirty="0" err="1"/>
-              <a:t>massa</a:t>
-            </a:r>
-            <a:r>
-              <a:rPr dirty="0"/>
-              <a:t> capes.</a:t>
-            </a:r>
-          </a:p>
-        </p:txBody>
-      </p:sp>
-      <p:sp>
-        <p:nvSpPr>
-          <p:cNvPr id="15" name="Rectangle 14"/>
-          <p:cNvSpPr/>
-          <p:nvPr/>
-        </p:nvSpPr>
-        <p:spPr>
-          <a:xfrm>
-            <a:off x="8092440" y="1783080"/>
-            <a:ext cx="3246120" cy="2971800"/>
-          </a:xfrm>
-          <a:prstGeom prst="rect">
-            <a:avLst/>
-          </a:prstGeom>
-          <a:solidFill>
-            <a:srgbClr val="E8F1F8"/>
-          </a:solidFill>
-          <a:ln w="9525">
-            <a:solidFill>
-              <a:srgbClr val="DCE0E4"/>
-            </a:solidFill>
-          </a:ln>
-        </p:spPr>
-        <p:style>
-          <a:lnRef idx="1">
-            <a:schemeClr val="accent1"/>
-          </a:lnRef>
-          <a:fillRef idx="3">
-            <a:schemeClr val="accent1"/>
-          </a:fillRef>
-          <a:effectRef idx="2">
-            <a:schemeClr val="accent1"/>
-          </a:effectRef>
-          <a:fontRef idx="minor">
-            <a:schemeClr val="lt1"/>
-          </a:fontRef>
-        </p:style>
-        <p:txBody>
-          <a:bodyPr rtlCol="0" anchor="ctr"/>
-          <a:lstStyle/>
-          <a:p>
-            <a:pPr algn="ctr"/>
-            <a:endParaRPr/>
-          </a:p>
-        </p:txBody>
-      </p:sp>
-      <p:sp>
-        <p:nvSpPr>
-          <p:cNvPr id="16" name="TextBox 15"/>
-          <p:cNvSpPr txBox="1"/>
-          <p:nvPr/>
-        </p:nvSpPr>
-        <p:spPr>
-          <a:xfrm>
-            <a:off x="8321040" y="2011680"/>
-            <a:ext cx="2788920" cy="292608"/>
-          </a:xfrm>
-          <a:prstGeom prst="rect">
-            <a:avLst/>
-          </a:prstGeom>
-          <a:noFill/>
-        </p:spPr>
-        <p:txBody>
-          <a:bodyPr wrap="square">
-            <a:normAutofit/>
-          </a:bodyPr>
-          <a:lstStyle/>
-          <a:p>
-            <a:pPr algn="ctr"/>
-            <a:r>
-              <a:rPr sz="1800" b="1">
-                <a:solidFill>
-                  <a:srgbClr val="192D3E"/>
-                </a:solidFill>
-                <a:latin typeface="Arial"/>
-              </a:rPr>
-              <a:t>Criteri docent</a:t>
-            </a:r>
-          </a:p>
-        </p:txBody>
-      </p:sp>
-      <p:sp>
-        <p:nvSpPr>
-          <p:cNvPr id="17" name="TextBox 16"/>
-          <p:cNvSpPr txBox="1"/>
-          <p:nvPr/>
-        </p:nvSpPr>
-        <p:spPr>
-          <a:xfrm>
-            <a:off x="8339327" y="2542032"/>
-            <a:ext cx="2788920" cy="685800"/>
-          </a:xfrm>
-          <a:prstGeom prst="rect">
-            <a:avLst/>
-          </a:prstGeom>
-          <a:noFill/>
-        </p:spPr>
-        <p:txBody>
-          <a:bodyPr wrap="square">
-            <a:normAutofit/>
-          </a:bodyPr>
-          <a:lstStyle/>
-          <a:p>
-            <a:pPr algn="ctr"/>
-            <a:r>
-              <a:rPr sz="1600" b="1">
-                <a:solidFill>
-                  <a:srgbClr val="192D3E"/>
-                </a:solidFill>
-                <a:latin typeface="Arial"/>
-              </a:rPr>
-              <a:t>Separar criteris del procediment, casos d'ús i infraestructura.</a:t>
-            </a:r>
-          </a:p>
-        </p:txBody>
-      </p:sp>
-      <p:sp>
-        <p:nvSpPr>
-          <p:cNvPr id="18" name="TextBox 17"/>
-          <p:cNvSpPr txBox="1"/>
-          <p:nvPr/>
-        </p:nvSpPr>
-        <p:spPr>
-          <a:xfrm>
-            <a:off x="8339327" y="3474720"/>
-            <a:ext cx="2788920" cy="777240"/>
-          </a:xfrm>
-          <a:prstGeom prst="rect">
-            <a:avLst/>
-          </a:prstGeom>
-          <a:noFill/>
-        </p:spPr>
-        <p:txBody>
-          <a:bodyPr wrap="square">
-            <a:normAutofit/>
-          </a:bodyPr>
-          <a:lstStyle/>
-          <a:p>
-            <a:pPr algn="ctr"/>
-            <a:r>
-              <a:rPr sz="1800" b="1">
-                <a:solidFill>
-                  <a:srgbClr val="236092"/>
-                </a:solidFill>
-                <a:latin typeface="Arial"/>
-              </a:rPr>
-              <a:t>Port de sortida
-+
-adaptadors substituïbles</a:t>
-            </a:r>
-          </a:p>
-        </p:txBody>
-      </p:sp>
-      <p:sp>
-        <p:nvSpPr>
-          <p:cNvPr id="19" name="TextBox 18"/>
-          <p:cNvSpPr txBox="1"/>
-          <p:nvPr/>
-        </p:nvSpPr>
-        <p:spPr>
-          <a:xfrm>
-            <a:off x="1051560" y="5074920"/>
-            <a:ext cx="6949440" cy="566928"/>
-          </a:xfrm>
-          <a:prstGeom prst="rect">
-            <a:avLst/>
-          </a:prstGeom>
-          <a:noFill/>
-        </p:spPr>
-        <p:txBody>
-          <a:bodyPr wrap="square">
-            <a:normAutofit/>
-          </a:bodyPr>
-          <a:lstStyle/>
-          <a:p>
             <a:pPr algn="l"/>
             <a:r>
-              <a:rPr sz="1700" b="1" dirty="0">
-                <a:solidFill>
-                  <a:srgbClr val="192D3E"/>
-                </a:solidFill>
-                <a:latin typeface="Arial"/>
-              </a:rPr>
-              <a:t>El </a:t>
-            </a:r>
-            <a:r>
-              <a:rPr sz="1700" b="1" dirty="0" err="1">
-                <a:solidFill>
-                  <a:srgbClr val="192D3E"/>
-                </a:solidFill>
-                <a:latin typeface="Arial"/>
-              </a:rPr>
-              <a:t>motiu</a:t>
-            </a:r>
-            <a:r>
-              <a:rPr sz="1700" b="1" dirty="0">
-                <a:solidFill>
-                  <a:srgbClr val="192D3E"/>
-                </a:solidFill>
-                <a:latin typeface="Arial"/>
-              </a:rPr>
-              <a:t> </a:t>
-            </a:r>
-            <a:r>
-              <a:rPr sz="1700" b="1" dirty="0" err="1">
-                <a:solidFill>
-                  <a:srgbClr val="192D3E"/>
-                </a:solidFill>
-                <a:latin typeface="Arial"/>
-              </a:rPr>
-              <a:t>arquitectònic</a:t>
-            </a:r>
-            <a:r>
-              <a:rPr sz="1700" b="1" dirty="0">
-                <a:solidFill>
-                  <a:srgbClr val="192D3E"/>
-                </a:solidFill>
-                <a:latin typeface="Arial"/>
-              </a:rPr>
-              <a:t> no </a:t>
-            </a:r>
-            <a:r>
-              <a:rPr sz="1700" b="1" dirty="0" err="1">
-                <a:solidFill>
-                  <a:srgbClr val="192D3E"/>
-                </a:solidFill>
-                <a:latin typeface="Arial"/>
-              </a:rPr>
-              <a:t>és</a:t>
-            </a:r>
-            <a:r>
-              <a:rPr sz="1700" b="1" dirty="0">
-                <a:solidFill>
-                  <a:srgbClr val="192D3E"/>
-                </a:solidFill>
-                <a:latin typeface="Arial"/>
-              </a:rPr>
-              <a:t> </a:t>
-            </a:r>
-            <a:r>
-              <a:rPr sz="1700" b="1" dirty="0" err="1">
-                <a:solidFill>
-                  <a:srgbClr val="192D3E"/>
-                </a:solidFill>
-                <a:latin typeface="Arial"/>
-              </a:rPr>
-              <a:t>només</a:t>
-            </a:r>
-            <a:r>
-              <a:rPr sz="1700" b="1" dirty="0">
-                <a:solidFill>
-                  <a:srgbClr val="192D3E"/>
-                </a:solidFill>
-                <a:latin typeface="Arial"/>
-              </a:rPr>
-              <a:t> "fer REST": </a:t>
-            </a:r>
-            <a:r>
-              <a:rPr sz="1700" b="1" dirty="0" err="1">
-                <a:solidFill>
-                  <a:srgbClr val="192D3E"/>
-                </a:solidFill>
-                <a:latin typeface="Arial"/>
-              </a:rPr>
-              <a:t>és</a:t>
-            </a:r>
-            <a:r>
-              <a:rPr sz="1700" b="1" dirty="0">
-                <a:solidFill>
-                  <a:srgbClr val="192D3E"/>
-                </a:solidFill>
-                <a:latin typeface="Arial"/>
-              </a:rPr>
-              <a:t> </a:t>
-            </a:r>
-            <a:r>
-              <a:rPr sz="1700" b="1" dirty="0" err="1">
-                <a:solidFill>
-                  <a:srgbClr val="192D3E"/>
-                </a:solidFill>
-                <a:latin typeface="Arial"/>
-              </a:rPr>
-              <a:t>evitar</a:t>
-            </a:r>
-            <a:r>
-              <a:rPr sz="1700" b="1" dirty="0">
-                <a:solidFill>
-                  <a:srgbClr val="192D3E"/>
-                </a:solidFill>
-                <a:latin typeface="Arial"/>
-              </a:rPr>
-              <a:t> que </a:t>
-            </a:r>
-            <a:r>
-              <a:rPr sz="1700" b="1" dirty="0" err="1">
-                <a:solidFill>
-                  <a:srgbClr val="192D3E"/>
-                </a:solidFill>
-                <a:latin typeface="Arial"/>
-              </a:rPr>
-              <a:t>l'evolució</a:t>
-            </a:r>
-            <a:r>
-              <a:rPr sz="1700" b="1" dirty="0">
-                <a:solidFill>
-                  <a:srgbClr val="192D3E"/>
-                </a:solidFill>
-                <a:latin typeface="Arial"/>
-              </a:rPr>
-              <a:t> </a:t>
-            </a:r>
-            <a:r>
-              <a:rPr sz="1700" b="1" dirty="0" err="1">
-                <a:solidFill>
-                  <a:srgbClr val="192D3E"/>
-                </a:solidFill>
-                <a:latin typeface="Arial"/>
-              </a:rPr>
-              <a:t>tecnològica</a:t>
-            </a:r>
-            <a:r>
-              <a:rPr sz="1700" b="1" dirty="0">
-                <a:solidFill>
-                  <a:srgbClr val="192D3E"/>
-                </a:solidFill>
-                <a:latin typeface="Arial"/>
-              </a:rPr>
-              <a:t> </a:t>
-            </a:r>
-            <a:r>
-              <a:rPr sz="1700" b="1" dirty="0" err="1">
-                <a:solidFill>
-                  <a:srgbClr val="192D3E"/>
-                </a:solidFill>
-                <a:latin typeface="Arial"/>
-              </a:rPr>
-              <a:t>arrossegui</a:t>
-            </a:r>
-            <a:r>
-              <a:rPr sz="1700" b="1" dirty="0">
-                <a:solidFill>
-                  <a:srgbClr val="192D3E"/>
-                </a:solidFill>
-                <a:latin typeface="Arial"/>
-              </a:rPr>
-              <a:t> </a:t>
-            </a:r>
-            <a:r>
-              <a:rPr sz="1700" b="1" dirty="0" err="1">
-                <a:solidFill>
-                  <a:srgbClr val="192D3E"/>
-                </a:solidFill>
-                <a:latin typeface="Arial"/>
-              </a:rPr>
-              <a:t>els</a:t>
-            </a:r>
-            <a:r>
-              <a:rPr sz="1700" b="1" dirty="0">
-                <a:solidFill>
-                  <a:srgbClr val="192D3E"/>
-                </a:solidFill>
-                <a:latin typeface="Arial"/>
-              </a:rPr>
-              <a:t> </a:t>
-            </a:r>
-            <a:r>
-              <a:rPr sz="1700" b="1" dirty="0" err="1">
-                <a:solidFill>
-                  <a:srgbClr val="192D3E"/>
-                </a:solidFill>
-                <a:latin typeface="Arial"/>
-              </a:rPr>
-              <a:t>casos</a:t>
-            </a:r>
-            <a:r>
-              <a:rPr sz="1700" b="1" dirty="0">
-                <a:solidFill>
-                  <a:srgbClr val="192D3E"/>
-                </a:solidFill>
-                <a:latin typeface="Arial"/>
-              </a:rPr>
-              <a:t> </a:t>
-            </a:r>
-            <a:r>
-              <a:rPr sz="1700" b="1" dirty="0" err="1">
-                <a:solidFill>
-                  <a:srgbClr val="192D3E"/>
-                </a:solidFill>
-                <a:latin typeface="Arial"/>
-              </a:rPr>
-              <a:t>d'ús</a:t>
-            </a:r>
-            <a:r>
-              <a:rPr sz="1700" b="1" dirty="0">
-                <a:solidFill>
-                  <a:srgbClr val="192D3E"/>
-                </a:solidFill>
-                <a:latin typeface="Arial"/>
-              </a:rPr>
-              <a:t>.</a:t>
-            </a:r>
-          </a:p>
-        </p:txBody>
-      </p:sp>
-      <p:sp>
-        <p:nvSpPr>
-          <p:cNvPr id="20" name="TextBox 19"/>
-          <p:cNvSpPr txBox="1"/>
-          <p:nvPr/>
-        </p:nvSpPr>
-        <p:spPr>
-          <a:xfrm>
-            <a:off x="8229600" y="5102352"/>
-            <a:ext cx="2971800" cy="502920"/>
-          </a:xfrm>
-          <a:prstGeom prst="rect">
-            <a:avLst/>
-          </a:prstGeom>
-          <a:noFill/>
-        </p:spPr>
-        <p:txBody>
-          <a:bodyPr wrap="square">
-            <a:normAutofit/>
-          </a:bodyPr>
-          <a:lstStyle/>
-          <a:p>
-            <a:pPr algn="ctr"/>
-            <a:r>
-              <a:rPr sz="1000" b="0">
+              <a:rPr sz="800" b="0">
                 <a:solidFill>
                   <a:srgbClr val="66707A"/>
                 </a:solidFill>
                 <a:latin typeface="Arial"/>
               </a:rPr>
-              <a:t>Evidència: l'informe AGAUR acredita refactorització SOAP cap a REST i reducció d'acoblament.</a:t>
-            </a:r>
-          </a:p>
-        </p:txBody>
-      </p:sp>
-      <p:sp>
-        <p:nvSpPr>
-          <p:cNvPr id="21" name="TextBox 20"/>
-          <p:cNvSpPr txBox="1"/>
-          <p:nvPr/>
-        </p:nvSpPr>
-        <p:spPr>
-          <a:xfrm>
-            <a:off x="594360" y="6473952"/>
-            <a:ext cx="8595360" cy="201168"/>
-          </a:xfrm>
-          <a:prstGeom prst="rect">
-            <a:avLst/>
-          </a:prstGeom>
-          <a:noFill/>
-        </p:spPr>
-        <p:txBody>
-          <a:bodyPr wrap="square">
-            <a:normAutofit/>
-          </a:bodyPr>
-          <a:lstStyle/>
-          <a:p>
-            <a:pPr algn="l"/>
-            <a:r>
-              <a:rPr sz="800" b="0">
-                <a:solidFill>
-                  <a:srgbClr val="66707A"/>
-                </a:solidFill>
-                <a:latin typeface="Arial"/>
-              </a:rPr>
               <a:t>Disseny de Sistemes d'Informació · Ports de sortida en arquitectura hexagonal</a:t>
             </a:r>
           </a:p>
@@ -6779,7 +6804,7 @@
       </p:sp>
       <p:sp>
         <p:nvSpPr>
-          <p:cNvPr id="22" name="TextBox 21"/>
+          <p:cNvPr id="12" name="TextBox 11"/>
           <p:cNvSpPr txBox="1"/>
           <p:nvPr/>
         </p:nvSpPr>
@@ -6867,14 +6892,49 @@
                 </a:solidFill>
                 <a:latin typeface="Arial"/>
               </a:rPr>
-              <a:t>Solució AGAUR: port de sortida i adaptador</a:t>
+              <a:t>Quan l'acoblament es fa risc d'evolució</a:t>
+            </a:r>
+          </a:p>
+        </p:txBody>
+      </p:sp>
+      <p:sp>
+        <p:nvSpPr>
+          <p:cNvPr id="3" name="TextBox 2"/>
+          <p:cNvSpPr txBox="1"/>
+          <p:nvPr/>
+        </p:nvSpPr>
+        <p:spPr>
+          <a:xfrm>
+            <a:off x="612648" y="822960"/>
+            <a:ext cx="8869680" cy="320040"/>
+          </a:xfrm>
+          <a:prstGeom prst="rect">
+            <a:avLst/>
+          </a:prstGeom>
+          <a:noFill/>
+        </p:spPr>
+        <p:txBody>
+          <a:bodyPr wrap="square">
+            <a:normAutofit/>
+          </a:bodyPr>
+          <a:lstStyle/>
+          <a:p>
+            <a:pPr algn="l"/>
+            <a:r>
+              <a:rPr sz="1300" b="0">
+                <a:solidFill>
+                  <a:srgbClr val="66707A"/>
+                </a:solidFill>
+                <a:latin typeface="Arial"/>
+              </a:rPr>
+              <a:t>Lectura institucional prudent: PICA, web services i orientació CTTI cap a APIs</a:t>
             </a:r>
           </a:p>
         </p:txBody>
       </p:sp>
       <p:pic>
         <p:nvPicPr>
-          <p:cNvPr id="3" name="Picture 2" descr="logotip-oficial-tecnocampus-upf-horitzontal-color.png"/>
+          <p:cNvPr id="4" name="Picture 3" descr="logotip-oficial-tecnocampus-upf-horitzontal-color.png"/>
           <p:cNvPicPr>
             <a:picLocks noChangeAspect="1"/>
           </p:cNvPicPr>
@@ -6898,7 +6958,7 @@
       </p:pic>
       <p:sp>
         <p:nvSpPr>
-          <p:cNvPr id="4" name="Rectangle 3"/>
+          <p:cNvPr id="5" name="Rectangle 4"/>
           <p:cNvSpPr/>
           <p:nvPr/>
         </p:nvSpPr>
@@ -6940,30 +7000,6 @@
           </a:p>
         </p:txBody>
       </p:sp>
-      <p:pic>
-        <p:nvPicPr>
-          <p:cNvPr id="5" name="Picture 4" descr="agaur-after-hexagonal.png"/>
-          <p:cNvPicPr>
-            <a:picLocks noChangeAspect="1"/>
-          </p:cNvPicPr>
-          <p:nvPr/>
-        </p:nvPicPr>
-        <p:blipFill>
-          <a:blip r:embed="rId3"/>
-          <a:stretch>
-            <a:fillRect/>
-          </a:stretch>
-        </p:blipFill>
-        <p:spPr>
-          <a:xfrm>
-            <a:off x="685800" y="2511212"/>
-            <a:ext cx="7315200" cy="2475655"/>
-          </a:xfrm>
-          <a:prstGeom prst="rect">
-            <a:avLst/>
-          </a:prstGeom>
-        </p:spPr>
-      </p:pic>
       <p:sp>
         <p:nvSpPr>
           <p:cNvPr id="6" name="TextBox 5"/>
@@ -6972,8 +7008,8 @@
         </p:nvSpPr>
         <p:spPr>
           <a:xfrm>
-            <a:off x="8229600" y="1828800"/>
-            <a:ext cx="2971800" cy="1920240"/>
+            <a:off x="822960" y="1298448"/>
+            <a:ext cx="10424160" cy="320040"/>
           </a:xfrm>
           <a:prstGeom prst="rect">
             <a:avLst/>
@@ -6986,30 +7022,75 @@
           </a:bodyPr>
           <a:lstStyle/>
           <a:p>
-            <a:pPr algn="l"/>
-            <a:r>
-              <a:rPr sz="2100" b="1">
+            <a:pPr algn="ctr"/>
+            <a:r>
+              <a:rPr sz="1600" b="1">
                 <a:solidFill>
                   <a:srgbClr val="192D3E"/>
                 </a:solidFill>
                 <a:latin typeface="Arial"/>
               </a:rPr>
-              <a:t>El port defineix què necessita l'aplicació.
-L'adaptador resol com obtenir-ho amb una tecnologia concreta.</a:t>
-            </a:r>
-          </a:p>
-        </p:txBody>
-      </p:sp>
-      <p:sp>
-        <p:nvSpPr>
-          <p:cNvPr id="7" name="TextBox 6"/>
+              <a:t>La qüestió no és predir l'evolució concreta de SOAP: és que cap tecnologia d'integració ha d'arrossegar el procediment.</a:t>
+            </a:r>
+          </a:p>
+        </p:txBody>
+      </p:sp>
+      <p:sp>
+        <p:nvSpPr>
+          <p:cNvPr id="7" name="Rectangle 6"/>
+          <p:cNvSpPr/>
+          <p:nvPr/>
+        </p:nvSpPr>
+        <p:spPr>
+          <a:xfrm>
+            <a:off x="777240" y="1783080"/>
+            <a:ext cx="3246120" cy="2971800"/>
+          </a:xfrm>
+          <a:prstGeom prst="rect">
+            <a:avLst/>
+          </a:prstGeom>
+          <a:solidFill>
+            <a:srgbClr val="F8EAEA"/>
+          </a:solidFill>
+          <a:ln w="9525">
+            <a:solidFill>
+              <a:srgbClr val="DCE0E4"/>
+            </a:solidFill>
+          </a:ln>
+        </p:spPr>
+        <p:style>
+          <a:lnRef idx="1">
+            <a:schemeClr val="accent1"/>
+          </a:lnRef>
+          <a:fillRef idx="3">
+            <a:schemeClr val="accent1"/>
+          </a:fillRef>
+          <a:effectRef idx="2">
+            <a:schemeClr val="accent1"/>
+          </a:effectRef>
+          <a:fontRef idx="minor">
+            <a:schemeClr val="lt1"/>
+          </a:fontRef>
+        </p:style>
+        <p:txBody>
+          <a:bodyPr rtlCol="0" anchor="ctr"/>
+          <a:lstStyle/>
+          <a:p>
+            <a:pPr algn="ctr"/>
+            <a:endParaRPr/>
+          </a:p>
+        </p:txBody>
+      </p:sp>
+      <p:sp>
+        <p:nvSpPr>
+          <p:cNvPr id="8" name="TextBox 7"/>
           <p:cNvSpPr txBox="1"/>
           <p:nvPr/>
         </p:nvSpPr>
         <p:spPr>
           <a:xfrm>
-            <a:off x="8229600" y="4160520"/>
-            <a:ext cx="2971800" cy="822960"/>
+            <a:off x="1005840" y="2011680"/>
+            <a:ext cx="2788920" cy="292608"/>
           </a:xfrm>
           <a:prstGeom prst="rect">
             <a:avLst/>
@@ -7022,29 +7103,29 @@
           </a:bodyPr>
           <a:lstStyle/>
           <a:p>
-            <a:pPr algn="l"/>
-            <a:r>
-              <a:rPr sz="1700" b="0">
-                <a:solidFill>
-                  <a:srgbClr val="236092"/>
-                </a:solidFill>
-                <a:latin typeface="Arial"/>
-              </a:rPr>
-              <a:t>El cas d'ús necessita una capacitat externa, no una tecnologia externa concreta.</a:t>
-            </a:r>
-          </a:p>
-        </p:txBody>
-      </p:sp>
-      <p:sp>
-        <p:nvSpPr>
-          <p:cNvPr id="8" name="TextBox 7"/>
+            <a:pPr algn="ctr"/>
+            <a:r>
+              <a:rPr sz="1800" b="1">
+                <a:solidFill>
+                  <a:srgbClr val="192D3E"/>
+                </a:solidFill>
+                <a:latin typeface="Arial"/>
+              </a:rPr>
+              <a:t>Situació verificable</a:t>
+            </a:r>
+          </a:p>
+        </p:txBody>
+      </p:sp>
+      <p:sp>
+        <p:nvSpPr>
+          <p:cNvPr id="9" name="TextBox 8"/>
           <p:cNvSpPr txBox="1"/>
           <p:nvPr/>
         </p:nvSpPr>
         <p:spPr>
           <a:xfrm>
-            <a:off x="594360" y="6473952"/>
-            <a:ext cx="8595360" cy="201168"/>
+            <a:off x="1024128" y="2487168"/>
+            <a:ext cx="2788920" cy="640080"/>
           </a:xfrm>
           <a:prstGeom prst="rect">
             <a:avLst/>
@@ -7057,8 +7138,488 @@
           </a:bodyPr>
           <a:lstStyle/>
           <a:p>
+            <a:pPr algn="ctr"/>
+            <a:r>
+              <a:rPr sz="1600" b="1">
+                <a:solidFill>
+                  <a:srgbClr val="192D3E"/>
+                </a:solidFill>
+                <a:latin typeface="Arial"/>
+              </a:rPr>
+              <a:t>PICA continua essent una plataforma corporativa d'interoperabilitat.</a:t>
+            </a:r>
+          </a:p>
+        </p:txBody>
+      </p:sp>
+      <p:sp>
+        <p:nvSpPr>
+          <p:cNvPr id="10" name="TextBox 9"/>
+          <p:cNvSpPr txBox="1"/>
+          <p:nvPr/>
+        </p:nvSpPr>
+        <p:spPr>
+          <a:xfrm>
+            <a:off x="1024128" y="3364992"/>
+            <a:ext cx="2788920" cy="640080"/>
+          </a:xfrm>
+          <a:prstGeom prst="rect">
+            <a:avLst/>
+          </a:prstGeom>
+          <a:noFill/>
+        </p:spPr>
+        <p:txBody>
+          <a:bodyPr wrap="square">
+            <a:normAutofit/>
+          </a:bodyPr>
+          <a:lstStyle/>
+          <a:p>
+            <a:pPr algn="ctr"/>
+            <a:r>
+              <a:rPr sz="1400" b="0">
+                <a:solidFill>
+                  <a:srgbClr val="262626"/>
+                </a:solidFill>
+                <a:latin typeface="Arial"/>
+              </a:rPr>
+              <a:t>La documentació pública mostra integració amb web services i antecedents SOAP.</a:t>
+            </a:r>
+          </a:p>
+        </p:txBody>
+      </p:sp>
+      <p:sp>
+        <p:nvSpPr>
+          <p:cNvPr id="11" name="TextBox 10"/>
+          <p:cNvSpPr txBox="1"/>
+          <p:nvPr/>
+        </p:nvSpPr>
+        <p:spPr>
+          <a:xfrm>
+            <a:off x="1024128" y="4114800"/>
+            <a:ext cx="2788920" cy="320040"/>
+          </a:xfrm>
+          <a:prstGeom prst="rect">
+            <a:avLst/>
+          </a:prstGeom>
+          <a:noFill/>
+        </p:spPr>
+        <p:txBody>
+          <a:bodyPr wrap="square">
+            <a:normAutofit/>
+          </a:bodyPr>
+          <a:lstStyle/>
+          <a:p>
+            <a:pPr algn="ctr"/>
+            <a:r>
+              <a:rPr sz="1700" b="1">
+                <a:solidFill>
+                  <a:srgbClr val="236092"/>
+                </a:solidFill>
+                <a:latin typeface="Arial"/>
+              </a:rPr>
+              <a:t>PICA / web services</a:t>
+            </a:r>
+          </a:p>
+        </p:txBody>
+      </p:sp>
+      <p:sp>
+        <p:nvSpPr>
+          <p:cNvPr id="12" name="Rectangle 11"/>
+          <p:cNvSpPr/>
+          <p:nvPr/>
+        </p:nvSpPr>
+        <p:spPr>
+          <a:xfrm>
+            <a:off x="4434840" y="1783080"/>
+            <a:ext cx="3246120" cy="2971800"/>
+          </a:xfrm>
+          <a:prstGeom prst="rect">
+            <a:avLst/>
+          </a:prstGeom>
+          <a:solidFill>
+            <a:srgbClr val="FFF3D6"/>
+          </a:solidFill>
+          <a:ln w="9525">
+            <a:solidFill>
+              <a:srgbClr val="DCE0E4"/>
+            </a:solidFill>
+          </a:ln>
+        </p:spPr>
+        <p:style>
+          <a:lnRef idx="1">
+            <a:schemeClr val="accent1"/>
+          </a:lnRef>
+          <a:fillRef idx="3">
+            <a:schemeClr val="accent1"/>
+          </a:fillRef>
+          <a:effectRef idx="2">
+            <a:schemeClr val="accent1"/>
+          </a:effectRef>
+          <a:fontRef idx="minor">
+            <a:schemeClr val="lt1"/>
+          </a:fontRef>
+        </p:style>
+        <p:txBody>
+          <a:bodyPr rtlCol="0" anchor="ctr"/>
+          <a:lstStyle/>
+          <a:p>
+            <a:pPr algn="ctr"/>
+            <a:endParaRPr/>
+          </a:p>
+        </p:txBody>
+      </p:sp>
+      <p:sp>
+        <p:nvSpPr>
+          <p:cNvPr id="13" name="TextBox 12"/>
+          <p:cNvSpPr txBox="1"/>
+          <p:nvPr/>
+        </p:nvSpPr>
+        <p:spPr>
+          <a:xfrm>
+            <a:off x="4663440" y="2011680"/>
+            <a:ext cx="2788920" cy="292608"/>
+          </a:xfrm>
+          <a:prstGeom prst="rect">
+            <a:avLst/>
+          </a:prstGeom>
+          <a:noFill/>
+        </p:spPr>
+        <p:txBody>
+          <a:bodyPr wrap="square">
+            <a:normAutofit/>
+          </a:bodyPr>
+          <a:lstStyle/>
+          <a:p>
+            <a:pPr algn="ctr"/>
+            <a:r>
+              <a:rPr sz="1800" b="1">
+                <a:solidFill>
+                  <a:srgbClr val="192D3E"/>
+                </a:solidFill>
+                <a:latin typeface="Arial"/>
+              </a:rPr>
+              <a:t>Risc arquitectònic</a:t>
+            </a:r>
+          </a:p>
+        </p:txBody>
+      </p:sp>
+      <p:sp>
+        <p:nvSpPr>
+          <p:cNvPr id="14" name="TextBox 13"/>
+          <p:cNvSpPr txBox="1"/>
+          <p:nvPr/>
+        </p:nvSpPr>
+        <p:spPr>
+          <a:xfrm>
+            <a:off x="4681728" y="2514600"/>
+            <a:ext cx="2788920" cy="1737360"/>
+          </a:xfrm>
+          <a:prstGeom prst="rect">
+            <a:avLst/>
+          </a:prstGeom>
+          <a:noFill/>
+        </p:spPr>
+        <p:txBody>
+          <a:bodyPr wrap="square">
+            <a:normAutofit/>
+          </a:bodyPr>
+          <a:lstStyle/>
+          <a:p>
+            <a:pPr>
+              <a:spcAft>
+                <a:spcPts val="800"/>
+              </a:spcAft>
+              <a:defRPr sz="1200">
+                <a:solidFill>
+                  <a:srgbClr val="262626"/>
+                </a:solidFill>
+                <a:latin typeface="Arial"/>
+              </a:defRPr>
+            </a:pPr>
+            <a:r>
+              <a:t>El flux de l'expedient coneix PICA, SOAP/XML, DTOs, mapping i errors tècnics.</a:t>
+            </a:r>
+          </a:p>
+          <a:p>
+            <a:pPr>
+              <a:spcAft>
+                <a:spcPts val="800"/>
+              </a:spcAft>
+              <a:defRPr sz="1200">
+                <a:solidFill>
+                  <a:srgbClr val="262626"/>
+                </a:solidFill>
+                <a:latin typeface="Arial"/>
+              </a:defRPr>
+            </a:pPr>
+            <a:r>
+              <a:t>La lògica administrativa depèn d'una tecnologia d'integració concreta.</a:t>
+            </a:r>
+          </a:p>
+          <a:p>
+            <a:pPr>
+              <a:spcAft>
+                <a:spcPts val="800"/>
+              </a:spcAft>
+              <a:defRPr sz="1200">
+                <a:solidFill>
+                  <a:srgbClr val="262626"/>
+                </a:solidFill>
+                <a:latin typeface="Arial"/>
+              </a:defRPr>
+            </a:pPr>
+            <a:r>
+              <a:t>Qualsevol evolució cap a REST, API Manager o EventHub impacta massa capes.</a:t>
+            </a:r>
+          </a:p>
+        </p:txBody>
+      </p:sp>
+      <p:sp>
+        <p:nvSpPr>
+          <p:cNvPr id="15" name="Rectangle 14"/>
+          <p:cNvSpPr/>
+          <p:nvPr/>
+        </p:nvSpPr>
+        <p:spPr>
+          <a:xfrm>
+            <a:off x="8092440" y="1783080"/>
+            <a:ext cx="3246120" cy="2971800"/>
+          </a:xfrm>
+          <a:prstGeom prst="rect">
+            <a:avLst/>
+          </a:prstGeom>
+          <a:solidFill>
+            <a:srgbClr val="E8F1F8"/>
+          </a:solidFill>
+          <a:ln w="9525">
+            <a:solidFill>
+              <a:srgbClr val="DCE0E4"/>
+            </a:solidFill>
+          </a:ln>
+        </p:spPr>
+        <p:style>
+          <a:lnRef idx="1">
+            <a:schemeClr val="accent1"/>
+          </a:lnRef>
+          <a:fillRef idx="3">
+            <a:schemeClr val="accent1"/>
+          </a:fillRef>
+          <a:effectRef idx="2">
+            <a:schemeClr val="accent1"/>
+          </a:effectRef>
+          <a:fontRef idx="minor">
+            <a:schemeClr val="lt1"/>
+          </a:fontRef>
+        </p:style>
+        <p:txBody>
+          <a:bodyPr rtlCol="0" anchor="ctr"/>
+          <a:lstStyle/>
+          <a:p>
+            <a:pPr algn="ctr"/>
+            <a:endParaRPr/>
+          </a:p>
+        </p:txBody>
+      </p:sp>
+      <p:sp>
+        <p:nvSpPr>
+          <p:cNvPr id="16" name="TextBox 15"/>
+          <p:cNvSpPr txBox="1"/>
+          <p:nvPr/>
+        </p:nvSpPr>
+        <p:spPr>
+          <a:xfrm>
+            <a:off x="8321040" y="2011680"/>
+            <a:ext cx="2788920" cy="292608"/>
+          </a:xfrm>
+          <a:prstGeom prst="rect">
+            <a:avLst/>
+          </a:prstGeom>
+          <a:noFill/>
+        </p:spPr>
+        <p:txBody>
+          <a:bodyPr wrap="square">
+            <a:normAutofit/>
+          </a:bodyPr>
+          <a:lstStyle/>
+          <a:p>
+            <a:pPr algn="ctr"/>
+            <a:r>
+              <a:rPr sz="1800" b="1">
+                <a:solidFill>
+                  <a:srgbClr val="192D3E"/>
+                </a:solidFill>
+                <a:latin typeface="Arial"/>
+              </a:rPr>
+              <a:t>Criteri docent</a:t>
+            </a:r>
+          </a:p>
+        </p:txBody>
+      </p:sp>
+      <p:sp>
+        <p:nvSpPr>
+          <p:cNvPr id="17" name="TextBox 16"/>
+          <p:cNvSpPr txBox="1"/>
+          <p:nvPr/>
+        </p:nvSpPr>
+        <p:spPr>
+          <a:xfrm>
+            <a:off x="8339327" y="2542032"/>
+            <a:ext cx="2788920" cy="685800"/>
+          </a:xfrm>
+          <a:prstGeom prst="rect">
+            <a:avLst/>
+          </a:prstGeom>
+          <a:noFill/>
+        </p:spPr>
+        <p:txBody>
+          <a:bodyPr wrap="square">
+            <a:normAutofit/>
+          </a:bodyPr>
+          <a:lstStyle/>
+          <a:p>
+            <a:pPr algn="ctr"/>
+            <a:r>
+              <a:rPr sz="1600" b="1">
+                <a:solidFill>
+                  <a:srgbClr val="192D3E"/>
+                </a:solidFill>
+                <a:latin typeface="Arial"/>
+              </a:rPr>
+              <a:t>Separar criteris del procediment, casos d'ús i infraestructura.</a:t>
+            </a:r>
+          </a:p>
+        </p:txBody>
+      </p:sp>
+      <p:sp>
+        <p:nvSpPr>
+          <p:cNvPr id="18" name="TextBox 17"/>
+          <p:cNvSpPr txBox="1"/>
+          <p:nvPr/>
+        </p:nvSpPr>
+        <p:spPr>
+          <a:xfrm>
+            <a:off x="8339327" y="3474720"/>
+            <a:ext cx="2788920" cy="777240"/>
+          </a:xfrm>
+          <a:prstGeom prst="rect">
+            <a:avLst/>
+          </a:prstGeom>
+          <a:noFill/>
+        </p:spPr>
+        <p:txBody>
+          <a:bodyPr wrap="square">
+            <a:normAutofit/>
+          </a:bodyPr>
+          <a:lstStyle/>
+          <a:p>
+            <a:pPr algn="ctr"/>
+            <a:r>
+              <a:rPr sz="1800" b="1">
+                <a:solidFill>
+                  <a:srgbClr val="236092"/>
+                </a:solidFill>
+                <a:latin typeface="Arial"/>
+              </a:rPr>
+              <a:t>Port de sortida
++
+adaptadors substituïbles</a:t>
+            </a:r>
+          </a:p>
+        </p:txBody>
+      </p:sp>
+      <p:sp>
+        <p:nvSpPr>
+          <p:cNvPr id="19" name="TextBox 18"/>
+          <p:cNvSpPr txBox="1"/>
+          <p:nvPr/>
+        </p:nvSpPr>
+        <p:spPr>
+          <a:xfrm>
+            <a:off x="1051560" y="5074920"/>
+            <a:ext cx="6949440" cy="566928"/>
+          </a:xfrm>
+          <a:prstGeom prst="rect">
+            <a:avLst/>
+          </a:prstGeom>
+          <a:noFill/>
+        </p:spPr>
+        <p:txBody>
+          <a:bodyPr wrap="square">
+            <a:normAutofit/>
+          </a:bodyPr>
+          <a:lstStyle/>
+          <a:p>
             <a:pPr algn="l"/>
             <a:r>
+              <a:rPr sz="1700" b="1">
+                <a:solidFill>
+                  <a:srgbClr val="192D3E"/>
+                </a:solidFill>
+                <a:latin typeface="Arial"/>
+              </a:rPr>
+              <a:t>El motiu arquitectònic no és només "fer REST": és evitar que l'evolució tecnològica arrossegui els casos d'ús.</a:t>
+            </a:r>
+          </a:p>
+        </p:txBody>
+      </p:sp>
+      <p:sp>
+        <p:nvSpPr>
+          <p:cNvPr id="20" name="TextBox 19"/>
+          <p:cNvSpPr txBox="1"/>
+          <p:nvPr/>
+        </p:nvSpPr>
+        <p:spPr>
+          <a:xfrm>
+            <a:off x="8229600" y="5102352"/>
+            <a:ext cx="2971800" cy="502920"/>
+          </a:xfrm>
+          <a:prstGeom prst="rect">
+            <a:avLst/>
+          </a:prstGeom>
+          <a:noFill/>
+        </p:spPr>
+        <p:txBody>
+          <a:bodyPr wrap="square">
+            <a:normAutofit/>
+          </a:bodyPr>
+          <a:lstStyle/>
+          <a:p>
+            <a:pPr algn="ctr"/>
+            <a:r>
+              <a:rPr sz="1000" b="0">
+                <a:solidFill>
+                  <a:srgbClr val="66707A"/>
+                </a:solidFill>
+                <a:latin typeface="Arial"/>
+              </a:rPr>
+              <a:t>Evidència: l'informe AGAUR acredita refactorització SOAP cap a REST i reducció d'acoblament.</a:t>
+            </a:r>
+          </a:p>
+        </p:txBody>
+      </p:sp>
+      <p:sp>
+        <p:nvSpPr>
+          <p:cNvPr id="21" name="TextBox 20"/>
+          <p:cNvSpPr txBox="1"/>
+          <p:nvPr/>
+        </p:nvSpPr>
+        <p:spPr>
+          <a:xfrm>
+            <a:off x="594360" y="6473952"/>
+            <a:ext cx="8595360" cy="201168"/>
+          </a:xfrm>
+          <a:prstGeom prst="rect">
+            <a:avLst/>
+          </a:prstGeom>
+          <a:noFill/>
+        </p:spPr>
+        <p:txBody>
+          <a:bodyPr wrap="square">
+            <a:normAutofit/>
+          </a:bodyPr>
+          <a:lstStyle/>
+          <a:p>
+            <a:pPr algn="l"/>
+            <a:r>
               <a:rPr sz="800" b="0">
                 <a:solidFill>
                   <a:srgbClr val="66707A"/>
@@ -7072,7 +7633,7 @@
       </p:sp>
       <p:sp>
         <p:nvSpPr>
-          <p:cNvPr id="9" name="TextBox 8"/>
+          <p:cNvPr id="22" name="TextBox 21"/>
           <p:cNvSpPr txBox="1"/>
           <p:nvPr/>
         </p:nvSpPr>
@@ -7160,49 +7721,14 @@
                 </a:solidFill>
                 <a:latin typeface="Arial"/>
               </a:rPr>
-              <a:t>De la interface al port</a:t>
-            </a:r>
-          </a:p>
-        </p:txBody>
-      </p:sp>
-      <p:sp>
-        <p:nvSpPr>
-          <p:cNvPr id="3" name="TextBox 2"/>
-          <p:cNvSpPr txBox="1"/>
-          <p:nvPr/>
-        </p:nvSpPr>
-        <p:spPr>
-          <a:xfrm>
-            <a:off x="612648" y="822960"/>
-            <a:ext cx="8869680" cy="320040"/>
-          </a:xfrm>
-          <a:prstGeom prst="rect">
-            <a:avLst/>
-          </a:prstGeom>
-          <a:noFill/>
-        </p:spPr>
-        <p:txBody>
-          <a:bodyPr wrap="square">
-            <a:normAutofit/>
-          </a:bodyPr>
-          <a:lstStyle/>
-          <a:p>
-            <a:pPr algn="l"/>
-            <a:r>
-              <a:rPr sz="1300" b="0">
-                <a:solidFill>
-                  <a:srgbClr val="66707A"/>
-                </a:solidFill>
-                <a:latin typeface="Arial"/>
-              </a:rPr>
-              <a:t>Una frontera arquitectònica, no només un contracte Java</a:t>
+              <a:t>Solució AGAUR: port de sortida i adaptador</a:t>
             </a:r>
           </a:p>
         </p:txBody>
       </p:sp>
       <p:pic>
         <p:nvPicPr>
-          <p:cNvPr id="4" name="Picture 3" descr="logotip-oficial-tecnocampus-upf-horitzontal-color.png"/>
+          <p:cNvPr id="3" name="Picture 2" descr="logotip-oficial-tecnocampus-upf-horitzontal-color.png"/>
           <p:cNvPicPr>
             <a:picLocks noChangeAspect="1"/>
           </p:cNvPicPr>
@@ -7226,7 +7752,7 @@
       </p:pic>
       <p:sp>
         <p:nvSpPr>
-          <p:cNvPr id="5" name="Rectangle 4"/>
+          <p:cNvPr id="4" name="Rectangle 3"/>
           <p:cNvSpPr/>
           <p:nvPr/>
         </p:nvSpPr>
@@ -7270,7 +7796,7 @@
       </p:sp>
       <p:pic>
         <p:nvPicPr>
-          <p:cNvPr id="6" name="Picture 5" descr="output-port-pattern.png"/>
+          <p:cNvPr id="5" name="Picture 4" descr="agaur-after-hexagonal.png"/>
           <p:cNvPicPr>
             <a:picLocks noChangeAspect="1"/>
           </p:cNvPicPr>
@@ -7284,8 +7810,8 @@
         </p:blipFill>
         <p:spPr>
           <a:xfrm>
-            <a:off x="685800" y="2281557"/>
-            <a:ext cx="6766560" cy="2889246"/>
+            <a:off x="685800" y="2511212"/>
+            <a:ext cx="7315200" cy="2475655"/>
           </a:xfrm>
           <a:prstGeom prst="rect">
             <a:avLst/>
@@ -7294,60 +7820,14 @@
       </p:pic>
       <p:sp>
         <p:nvSpPr>
-          <p:cNvPr id="7" name="Rounded Rectangle 6"/>
-          <p:cNvSpPr/>
-          <p:nvPr/>
-        </p:nvSpPr>
-        <p:spPr>
-          <a:xfrm>
-            <a:off x="7726679" y="1600200"/>
-            <a:ext cx="3337560" cy="3474720"/>
-          </a:xfrm>
-          <a:prstGeom prst="roundRect">
-            <a:avLst/>
-          </a:prstGeom>
-          <a:solidFill>
-            <a:srgbClr val="F7F8FA"/>
-          </a:solidFill>
-          <a:ln w="9525">
-            <a:solidFill>
-              <a:srgbClr val="DCE0E4"/>
-            </a:solidFill>
-          </a:ln>
-        </p:spPr>
-        <p:style>
-          <a:lnRef idx="1">
-            <a:schemeClr val="accent1"/>
-          </a:lnRef>
-          <a:fillRef idx="3">
-            <a:schemeClr val="accent1"/>
-          </a:fillRef>
-          <a:effectRef idx="2">
-            <a:schemeClr val="accent1"/>
-          </a:effectRef>
-          <a:fontRef idx="minor">
-            <a:schemeClr val="lt1"/>
-          </a:fontRef>
-        </p:style>
-        <p:txBody>
-          <a:bodyPr rtlCol="0" anchor="ctr"/>
-          <a:lstStyle/>
-          <a:p>
-            <a:pPr algn="ctr"/>
-            <a:endParaRPr/>
-          </a:p>
-        </p:txBody>
-      </p:sp>
-      <p:sp>
-        <p:nvSpPr>
-          <p:cNvPr id="8" name="TextBox 7"/>
+          <p:cNvPr id="6" name="TextBox 5"/>
           <p:cNvSpPr txBox="1"/>
           <p:nvPr/>
         </p:nvSpPr>
         <p:spPr>
           <a:xfrm>
-            <a:off x="8001000" y="2011680"/>
-            <a:ext cx="2788920" cy="2194560"/>
+            <a:off x="8229600" y="1828800"/>
+            <a:ext cx="2971800" cy="1920240"/>
           </a:xfrm>
           <a:prstGeom prst="rect">
             <a:avLst/>
@@ -7360,30 +7840,30 @@
           </a:bodyPr>
           <a:lstStyle/>
           <a:p>
-            <a:pPr algn="ctr"/>
-            <a:r>
-              <a:rPr sz="2200" b="1">
+            <a:pPr algn="l"/>
+            <a:r>
+              <a:rPr sz="2100" b="1">
                 <a:solidFill>
                   <a:srgbClr val="192D3E"/>
                 </a:solidFill>
                 <a:latin typeface="Arial"/>
               </a:rPr>
-              <a:t>Una interface pot desacoblar dues classes.
-Un port de sortida defineix una frontera arquitectònica.</a:t>
-            </a:r>
-          </a:p>
-        </p:txBody>
-      </p:sp>
-      <p:sp>
-        <p:nvSpPr>
-          <p:cNvPr id="9" name="TextBox 8"/>
+              <a:t>El port defineix què necessita l'aplicació.
+L'adaptador resol com obtenir-ho amb una tecnologia concreta.</a:t>
+            </a:r>
+          </a:p>
+        </p:txBody>
+      </p:sp>
+      <p:sp>
+        <p:nvSpPr>
+          <p:cNvPr id="7" name="TextBox 6"/>
           <p:cNvSpPr txBox="1"/>
           <p:nvPr/>
         </p:nvSpPr>
         <p:spPr>
           <a:xfrm>
-            <a:off x="594360" y="6473952"/>
-            <a:ext cx="8595360" cy="201168"/>
+            <a:off x="8229600" y="4160520"/>
+            <a:ext cx="2971800" cy="822960"/>
           </a:xfrm>
           <a:prstGeom prst="rect">
             <a:avLst/>
@@ -7398,6 +7878,41 @@
           <a:p>
             <a:pPr algn="l"/>
             <a:r>
+              <a:rPr sz="1700" b="0">
+                <a:solidFill>
+                  <a:srgbClr val="236092"/>
+                </a:solidFill>
+                <a:latin typeface="Arial"/>
+              </a:rPr>
+              <a:t>El cas d'ús necessita una capacitat externa, no una tecnologia externa concreta.</a:t>
+            </a:r>
+          </a:p>
+        </p:txBody>
+      </p:sp>
+      <p:sp>
+        <p:nvSpPr>
+          <p:cNvPr id="8" name="TextBox 7"/>
+          <p:cNvSpPr txBox="1"/>
+          <p:nvPr/>
+        </p:nvSpPr>
+        <p:spPr>
+          <a:xfrm>
+            <a:off x="594360" y="6473952"/>
+            <a:ext cx="8595360" cy="201168"/>
+          </a:xfrm>
+          <a:prstGeom prst="rect">
+            <a:avLst/>
+          </a:prstGeom>
+          <a:noFill/>
+        </p:spPr>
+        <p:txBody>
+          <a:bodyPr wrap="square">
+            <a:normAutofit/>
+          </a:bodyPr>
+          <a:lstStyle/>
+          <a:p>
+            <a:pPr algn="l"/>
+            <a:r>
               <a:rPr sz="800" b="0">
                 <a:solidFill>
                   <a:srgbClr val="66707A"/>
@@ -7411,7 +7926,7 @@
       </p:sp>
       <p:sp>
         <p:nvSpPr>
-          <p:cNvPr id="10" name="TextBox 9"/>
+          <p:cNvPr id="9" name="TextBox 8"/>
           <p:cNvSpPr txBox="1"/>
           <p:nvPr/>
         </p:nvSpPr>
@@ -7499,7 +8014,7 @@
                 </a:solidFill>
                 <a:latin typeface="Arial"/>
               </a:rPr>
-              <a:t>Transferència a HexaStock</a:t>
+              <a:t>De la interface al port</a:t>
             </a:r>
           </a:p>
         </p:txBody>
@@ -7534,7 +8049,7 @@
                 </a:solidFill>
                 <a:latin typeface="Arial"/>
               </a:rPr>
-              <a:t>Venda d'accions amb proveïdor de preus substituïble</a:t>
+              <a:t>Una frontera arquitectònica, no només un contracte Java</a:t>
             </a:r>
           </a:p>
         </p:txBody>
@@ -7609,7 +8124,7 @@
       </p:sp>
       <p:pic>
         <p:nvPicPr>
-          <p:cNvPr id="6" name="Picture 5" descr="hexastock-sellstocks-arquitectura-vpd.png"/>
+          <p:cNvPr id="6" name="Picture 5" descr="output-port-pattern.png"/>
           <p:cNvPicPr>
             <a:picLocks noChangeAspect="1"/>
           </p:cNvPicPr>
@@ -7623,8 +8138,8 @@
         </p:blipFill>
         <p:spPr>
           <a:xfrm>
-            <a:off x="502920" y="1600138"/>
-            <a:ext cx="7818120" cy="4389244"/>
+            <a:off x="685800" y="2281557"/>
+            <a:ext cx="6766560" cy="2889246"/>
           </a:xfrm>
           <a:prstGeom prst="rect">
             <a:avLst/>
@@ -7633,14 +8148,60 @@
       </p:pic>
       <p:sp>
         <p:nvSpPr>
-          <p:cNvPr id="7" name="TextBox 6"/>
+          <p:cNvPr id="7" name="Rounded Rectangle 6"/>
+          <p:cNvSpPr/>
+          <p:nvPr/>
+        </p:nvSpPr>
+        <p:spPr>
+          <a:xfrm>
+            <a:off x="7726679" y="1600200"/>
+            <a:ext cx="3337560" cy="3474720"/>
+          </a:xfrm>
+          <a:prstGeom prst="roundRect">
+            <a:avLst/>
+          </a:prstGeom>
+          <a:solidFill>
+            <a:srgbClr val="F7F8FA"/>
+          </a:solidFill>
+          <a:ln w="9525">
+            <a:solidFill>
+              <a:srgbClr val="DCE0E4"/>
+            </a:solidFill>
+          </a:ln>
+        </p:spPr>
+        <p:style>
+          <a:lnRef idx="1">
+            <a:schemeClr val="accent1"/>
+          </a:lnRef>
+          <a:fillRef idx="3">
+            <a:schemeClr val="accent1"/>
+          </a:fillRef>
+          <a:effectRef idx="2">
+            <a:schemeClr val="accent1"/>
+          </a:effectRef>
+          <a:fontRef idx="minor">
+            <a:schemeClr val="lt1"/>
+          </a:fontRef>
+        </p:style>
+        <p:txBody>
+          <a:bodyPr rtlCol="0" anchor="ctr"/>
+          <a:lstStyle/>
+          <a:p>
+            <a:pPr algn="ctr"/>
+            <a:endParaRPr/>
+          </a:p>
+        </p:txBody>
+      </p:sp>
+      <p:sp>
+        <p:nvSpPr>
+          <p:cNvPr id="8" name="TextBox 7"/>
           <p:cNvSpPr txBox="1"/>
           <p:nvPr/>
         </p:nvSpPr>
         <p:spPr>
           <a:xfrm>
-            <a:off x="8549640" y="1600200"/>
-            <a:ext cx="2743200" cy="2011680"/>
+            <a:off x="8001000" y="2011680"/>
+            <a:ext cx="2788920" cy="2194560"/>
           </a:xfrm>
           <a:prstGeom prst="rect">
             <a:avLst/>
@@ -7653,29 +8214,30 @@
           </a:bodyPr>
           <a:lstStyle/>
           <a:p>
-            <a:pPr algn="l"/>
-            <a:r>
-              <a:rPr sz="1700" b="1">
+            <a:pPr algn="ctr"/>
+            <a:r>
+              <a:rPr sz="2200" b="1">
                 <a:solidFill>
                   <a:srgbClr val="192D3E"/>
                 </a:solidFill>
                 <a:latin typeface="Arial"/>
               </a:rPr>
-              <a:t>El cas d'ús necessita el preu actual d'un ticker, però no ha de dependre de Finnhub, Alpha Vantage, REST, JSON, tokens, endpoints ni clients HTTP.</a:t>
-            </a:r>
-          </a:p>
-        </p:txBody>
-      </p:sp>
-      <p:sp>
-        <p:nvSpPr>
-          <p:cNvPr id="8" name="TextBox 7"/>
+              <a:t>Una interface pot desacoblar dues classes.
+Un port de sortida defineix una frontera arquitectònica.</a:t>
+            </a:r>
+          </a:p>
+        </p:txBody>
+      </p:sp>
+      <p:sp>
+        <p:nvSpPr>
+          <p:cNvPr id="9" name="TextBox 8"/>
           <p:cNvSpPr txBox="1"/>
           <p:nvPr/>
         </p:nvSpPr>
         <p:spPr>
           <a:xfrm>
-            <a:off x="8549640" y="3931920"/>
-            <a:ext cx="2743200" cy="1417320"/>
+            <a:off x="594360" y="6473952"/>
+            <a:ext cx="8595360" cy="201168"/>
           </a:xfrm>
           <a:prstGeom prst="rect">
             <a:avLst/>
@@ -7688,86 +8250,15 @@
           </a:bodyPr>
           <a:lstStyle/>
           <a:p>
-            <a:pPr>
-              <a:spcAft>
-                <a:spcPts val="800"/>
-              </a:spcAft>
-              <a:defRPr sz="1300">
-                <a:solidFill>
-                  <a:srgbClr val="262626"/>
-                </a:solidFill>
-                <a:latin typeface="Arial"/>
-              </a:defRPr>
-            </a:pPr>
-            <a:r>
-              <a:t>Port: StockPriceProviderPort</a:t>
-            </a:r>
-          </a:p>
-          <a:p>
-            <a:pPr>
-              <a:spcAft>
-                <a:spcPts val="800"/>
-              </a:spcAft>
-              <a:defRPr sz="1300">
-                <a:solidFill>
-                  <a:srgbClr val="262626"/>
-                </a:solidFill>
-                <a:latin typeface="Arial"/>
-              </a:defRPr>
-            </a:pPr>
-            <a:r>
-              <a:t>Adaptadors: Finnhub, Alpha Vantage, mock</a:t>
-            </a:r>
-          </a:p>
-          <a:p>
-            <a:pPr>
-              <a:spcAft>
-                <a:spcPts val="800"/>
-              </a:spcAft>
-              <a:defRPr sz="1300">
-                <a:solidFill>
-                  <a:srgbClr val="262626"/>
-                </a:solidFill>
-                <a:latin typeface="Arial"/>
-              </a:defRPr>
-            </a:pPr>
-            <a:r>
-              <a:t>Domini: Portfolio, Holding, Price, Ticker, ShareQuantity</a:t>
-            </a:r>
-          </a:p>
-        </p:txBody>
-      </p:sp>
-      <p:sp>
-        <p:nvSpPr>
-          <p:cNvPr id="9" name="TextBox 8"/>
-          <p:cNvSpPr txBox="1"/>
-          <p:nvPr/>
-        </p:nvSpPr>
-        <p:spPr>
-          <a:xfrm>
-            <a:off x="8549640" y="5669280"/>
-            <a:ext cx="2743200" cy="228600"/>
-          </a:xfrm>
-          <a:prstGeom prst="rect">
-            <a:avLst/>
-          </a:prstGeom>
-          <a:noFill/>
-        </p:spPr>
-        <p:txBody>
-          <a:bodyPr wrap="square">
-            <a:normAutofit/>
-          </a:bodyPr>
-          <a:lstStyle/>
-          <a:p>
-            <a:pPr algn="ctr"/>
-            <a:r>
-              <a:rPr sz="1000" b="0">
+            <a:pPr algn="l"/>
+            <a:r>
+              <a:rPr sz="800" b="0">
                 <a:solidFill>
                   <a:srgbClr val="66707A"/>
                 </a:solidFill>
                 <a:latin typeface="Arial"/>
               </a:rPr>
-              <a:t>Diagrama del tutorial HexaStock Sell Stocks.</a:t>
+              <a:t>Disseny de Sistemes d'Informació · Ports de sortida en arquitectura hexagonal</a:t>
             </a:r>
           </a:p>
         </p:txBody>
@@ -7775,41 +8266,6 @@
       <p:sp>
         <p:nvSpPr>
           <p:cNvPr id="10" name="TextBox 9"/>
-          <p:cNvSpPr txBox="1"/>
-          <p:nvPr/>
-        </p:nvSpPr>
-        <p:spPr>
-          <a:xfrm>
-            <a:off x="594360" y="6473952"/>
-            <a:ext cx="8595360" cy="201168"/>
-          </a:xfrm>
-          <a:prstGeom prst="rect">
-            <a:avLst/>
-          </a:prstGeom>
-          <a:noFill/>
-        </p:spPr>
-        <p:txBody>
-          <a:bodyPr wrap="square">
-            <a:normAutofit/>
-          </a:bodyPr>
-          <a:lstStyle/>
-          <a:p>
-            <a:pPr algn="l"/>
-            <a:r>
-              <a:rPr sz="800" b="0">
-                <a:solidFill>
-                  <a:srgbClr val="66707A"/>
-                </a:solidFill>
-                <a:latin typeface="Arial"/>
-              </a:rPr>
-              <a:t>Disseny de Sistemes d'Informació · Ports de sortida en arquitectura hexagonal</a:t>
-            </a:r>
-          </a:p>
-        </p:txBody>
-      </p:sp>
-      <p:sp>
-        <p:nvSpPr>
-          <p:cNvPr id="11" name="TextBox 10"/>
           <p:cNvSpPr txBox="1"/>
           <p:nvPr/>
         </p:nvSpPr>
@@ -7897,7 +8353,7 @@
                 </a:solidFill>
                 <a:latin typeface="Arial"/>
               </a:rPr>
-              <a:t>Flux i codi essencial</a:t>
+              <a:t>Transferència a HexaStock</a:t>
             </a:r>
           </a:p>
         </p:txBody>
@@ -7932,7 +8388,7 @@
                 </a:solidFill>
                 <a:latin typeface="Arial"/>
               </a:rPr>
-              <a:t>El servei coordina. El domini decideix. La infraestructura adapta.</a:t>
+              <a:t>Venda d'accions amb proveïdor de preus substituïble</a:t>
             </a:r>
           </a:p>
         </p:txBody>
@@ -8007,7 +8463,7 @@
       </p:sp>
       <p:pic>
         <p:nvPicPr>
-          <p:cNvPr id="6" name="Picture 5" descr="sell-stock-sequence.png"/>
+          <p:cNvPr id="6" name="Picture 5" descr="hexastock-sellstocks-arquitectura-vpd.png"/>
           <p:cNvPicPr>
             <a:picLocks noChangeAspect="1"/>
           </p:cNvPicPr>
@@ -8021,8 +8477,8 @@
         </p:blipFill>
         <p:spPr>
           <a:xfrm>
-            <a:off x="502920" y="1962677"/>
-            <a:ext cx="7315200" cy="3069806"/>
+            <a:off x="502920" y="1600138"/>
+            <a:ext cx="7818120" cy="4389244"/>
           </a:xfrm>
           <a:prstGeom prst="rect">
             <a:avLst/>
@@ -8031,98 +8487,14 @@
       </p:pic>
       <p:sp>
         <p:nvSpPr>
-          <p:cNvPr id="7" name="Rounded Rectangle 6"/>
-          <p:cNvSpPr/>
-          <p:nvPr/>
-        </p:nvSpPr>
-        <p:spPr>
-          <a:xfrm>
-            <a:off x="8092440" y="1645920"/>
-            <a:ext cx="3520440" cy="2423160"/>
-          </a:xfrm>
-          <a:prstGeom prst="roundRect">
-            <a:avLst/>
-          </a:prstGeom>
-          <a:solidFill>
-            <a:srgbClr val="1F2429"/>
-          </a:solidFill>
-          <a:ln>
-            <a:solidFill>
-              <a:srgbClr val="1F2429"/>
-            </a:solidFill>
-          </a:ln>
-        </p:spPr>
-        <p:style>
-          <a:lnRef idx="1">
-            <a:schemeClr val="accent1"/>
-          </a:lnRef>
-          <a:fillRef idx="3">
-            <a:schemeClr val="accent1"/>
-          </a:fillRef>
-          <a:effectRef idx="2">
-            <a:schemeClr val="accent1"/>
-          </a:effectRef>
-          <a:fontRef idx="minor">
-            <a:schemeClr val="lt1"/>
-          </a:fontRef>
-        </p:style>
-        <p:txBody>
-          <a:bodyPr rtlCol="0" anchor="ctr"/>
-          <a:lstStyle/>
-          <a:p>
-            <a:pPr algn="ctr"/>
-            <a:endParaRPr/>
-          </a:p>
-        </p:txBody>
-      </p:sp>
-      <p:sp>
-        <p:nvSpPr>
-          <p:cNvPr id="8" name="TextBox 7"/>
+          <p:cNvPr id="7" name="TextBox 6"/>
           <p:cNvSpPr txBox="1"/>
           <p:nvPr/>
         </p:nvSpPr>
         <p:spPr>
           <a:xfrm>
-            <a:off x="8293608" y="1810512"/>
-            <a:ext cx="3118104" cy="2093976"/>
-          </a:xfrm>
-          <a:prstGeom prst="rect">
-            <a:avLst/>
-          </a:prstGeom>
-          <a:noFill/>
-        </p:spPr>
-        <p:txBody>
-          <a:bodyPr wrap="square">
-            <a:spAutoFit/>
-          </a:bodyPr>
-          <a:lstStyle/>
-          <a:p>
-            <a:r>
-              <a:rPr sz="1500">
-                <a:solidFill>
-                  <a:srgbClr val="F5F6F7"/>
-                </a:solidFill>
-                <a:latin typeface="Consolas"/>
-              </a:rPr>
-              <a:t>StockPrice stockPrice =
-    stockPriceProviderPort.fetchStockPrice(ticker);
-Price price = stockPrice.price();
-SellResult sellResult =
-    portfolio.sell(ticker, quantity, price);</a:t>
-            </a:r>
-          </a:p>
-        </p:txBody>
-      </p:sp>
-      <p:sp>
-        <p:nvSpPr>
-          <p:cNvPr id="9" name="TextBox 8"/>
-          <p:cNvSpPr txBox="1"/>
-          <p:nvPr/>
-        </p:nvSpPr>
-        <p:spPr>
-          <a:xfrm>
-            <a:off x="8138160" y="4434840"/>
-            <a:ext cx="3429000" cy="822960"/>
+            <a:off x="8549640" y="1600200"/>
+            <a:ext cx="2743200" cy="2011680"/>
           </a:xfrm>
           <a:prstGeom prst="rect">
             <a:avLst/>
@@ -8137,13 +8509,119 @@
           <a:p>
             <a:pPr algn="l"/>
             <a:r>
-              <a:rPr sz="1700" b="0">
+              <a:rPr sz="1700" b="1">
                 <a:solidFill>
                   <a:srgbClr val="192D3E"/>
                 </a:solidFill>
                 <a:latin typeface="Arial"/>
               </a:rPr>
-              <a:t>El servei obté informació externa a través d'un port i delega la decisió al domini ric.</a:t>
+              <a:t>El cas d'ús necessita el preu actual d'un ticker, però no ha de dependre de Finnhub, Alpha Vantage, REST, JSON, tokens, endpoints ni clients HTTP.</a:t>
+            </a:r>
+          </a:p>
+        </p:txBody>
+      </p:sp>
+      <p:sp>
+        <p:nvSpPr>
+          <p:cNvPr id="8" name="TextBox 7"/>
+          <p:cNvSpPr txBox="1"/>
+          <p:nvPr/>
+        </p:nvSpPr>
+        <p:spPr>
+          <a:xfrm>
+            <a:off x="8549640" y="3931920"/>
+            <a:ext cx="2743200" cy="1417320"/>
+          </a:xfrm>
+          <a:prstGeom prst="rect">
+            <a:avLst/>
+          </a:prstGeom>
+          <a:noFill/>
+        </p:spPr>
+        <p:txBody>
+          <a:bodyPr wrap="square">
+            <a:normAutofit/>
+          </a:bodyPr>
+          <a:lstStyle/>
+          <a:p>
+            <a:pPr>
+              <a:spcAft>
+                <a:spcPts val="800"/>
+              </a:spcAft>
+              <a:defRPr sz="1300">
+                <a:solidFill>
+                  <a:srgbClr val="262626"/>
+                </a:solidFill>
+                <a:latin typeface="Arial"/>
+              </a:defRPr>
+            </a:pPr>
+            <a:r>
+              <a:t>Port: StockPriceProviderPort</a:t>
+            </a:r>
+          </a:p>
+          <a:p>
+            <a:pPr>
+              <a:spcAft>
+                <a:spcPts val="800"/>
+              </a:spcAft>
+              <a:defRPr sz="1300">
+                <a:solidFill>
+                  <a:srgbClr val="262626"/>
+                </a:solidFill>
+                <a:latin typeface="Arial"/>
+              </a:defRPr>
+            </a:pPr>
+            <a:r>
+              <a:t>Adaptadors: Finnhub, Alpha Vantage, mock</a:t>
+            </a:r>
+          </a:p>
+          <a:p>
+            <a:pPr>
+              <a:spcAft>
+                <a:spcPts val="800"/>
+              </a:spcAft>
+              <a:defRPr sz="1300">
+                <a:solidFill>
+                  <a:srgbClr val="262626"/>
+                </a:solidFill>
+                <a:latin typeface="Arial"/>
+              </a:defRPr>
+            </a:pPr>
+            <a:r>
+              <a:t>Domini: Portfolio, Holding, Price, Ticker, ShareQuantity</a:t>
+            </a:r>
+          </a:p>
+        </p:txBody>
+      </p:sp>
+      <p:sp>
+        <p:nvSpPr>
+          <p:cNvPr id="9" name="TextBox 8"/>
+          <p:cNvSpPr txBox="1"/>
+          <p:nvPr/>
+        </p:nvSpPr>
+        <p:spPr>
+          <a:xfrm>
+            <a:off x="8549640" y="5669280"/>
+            <a:ext cx="2743200" cy="228600"/>
+          </a:xfrm>
+          <a:prstGeom prst="rect">
+            <a:avLst/>
+          </a:prstGeom>
+          <a:noFill/>
+        </p:spPr>
+        <p:txBody>
+          <a:bodyPr wrap="square">
+            <a:normAutofit/>
+          </a:bodyPr>
+          <a:lstStyle/>
+          <a:p>
+            <a:pPr algn="ctr"/>
+            <a:r>
+              <a:rPr sz="1000" b="0">
+                <a:solidFill>
+                  <a:srgbClr val="66707A"/>
+                </a:solidFill>
+                <a:latin typeface="Arial"/>
+              </a:rPr>
+              <a:t>Diagrama del tutorial HexaStock Sell Stocks.</a:t>
             </a:r>
           </a:p>
         </p:txBody>

--- a/doc/presentations/defensa-placa-permanent-dsi-ports-sortida-hexagonal/output/defensa-dsi-ports-sortida-hexagonal.pptx
+++ b/doc/presentations/defensa-placa-permanent-dsi-ports-sortida-hexagonal/output/defensa-dsi-ports-sortida-hexagonal.pptx
@@ -8,14 +8,17 @@
     <p:sldId id="256" r:id="rId2"/>
     <p:sldId id="257" r:id="rId3"/>
     <p:sldId id="258" r:id="rId4"/>
-    <p:sldId id="259" r:id="rId5"/>
-    <p:sldId id="260" r:id="rId6"/>
-    <p:sldId id="261" r:id="rId7"/>
-    <p:sldId id="262" r:id="rId8"/>
-    <p:sldId id="263" r:id="rId9"/>
-    <p:sldId id="264" r:id="rId10"/>
-    <p:sldId id="265" r:id="rId11"/>
-    <p:sldId id="266" r:id="rId12"/>
+    <p:sldId id="269" r:id="rId5"/>
+    <p:sldId id="259" r:id="rId6"/>
+    <p:sldId id="260" r:id="rId7"/>
+    <p:sldId id="261" r:id="rId8"/>
+    <p:sldId id="262" r:id="rId9"/>
+    <p:sldId id="263" r:id="rId10"/>
+    <p:sldId id="264" r:id="rId11"/>
+    <p:sldId id="265" r:id="rId12"/>
+    <p:sldId id="266" r:id="rId13"/>
+    <p:sldId id="267" r:id="rId14"/>
+    <p:sldId id="268" r:id="rId15"/>
   </p:sldIdLst>
   <p:sldSz cx="12192000" cy="6858000"/>
   <p:notesSz cx="6858000" cy="9144000"/>
@@ -3142,7 +3145,7 @@
         </p:spPr>
         <p:txBody>
           <a:bodyPr wrap="square">
-            <a:normAutofit/>
+            <a:normAutofit fontScale="92500" lnSpcReduction="20000"/>
           </a:bodyPr>
           <a:lstStyle/>
           <a:p>
@@ -3167,7 +3170,7 @@
         </p:nvSpPr>
         <p:spPr>
           <a:xfrm>
-            <a:off x="685800" y="2216685"/>
+            <a:off x="685800" y="1993392"/>
             <a:ext cx="9326880" cy="411480"/>
           </a:xfrm>
           <a:prstGeom prst="rect">
@@ -3183,85 +3186,13 @@
           <a:p>
             <a:pPr algn="l"/>
             <a:r>
-              <a:rPr lang="es-ES" sz="2100" dirty="0">
+              <a:rPr sz="2100" b="0">
                 <a:solidFill>
                   <a:srgbClr val="236092"/>
                 </a:solidFill>
                 <a:latin typeface="Arial"/>
               </a:rPr>
-              <a:t>D</a:t>
-            </a:r>
-            <a:r>
-              <a:rPr sz="2100" b="0" dirty="0" err="1">
-                <a:solidFill>
-                  <a:srgbClr val="236092"/>
-                </a:solidFill>
-                <a:latin typeface="Arial"/>
-              </a:rPr>
-              <a:t>esacoblament</a:t>
-            </a:r>
-            <a:r>
-              <a:rPr sz="2100" b="0" dirty="0">
-                <a:solidFill>
-                  <a:srgbClr val="236092"/>
-                </a:solidFill>
-                <a:latin typeface="Arial"/>
-              </a:rPr>
-              <a:t> entre </a:t>
-            </a:r>
-            <a:r>
-              <a:rPr sz="2100" b="0" dirty="0" err="1">
-                <a:solidFill>
-                  <a:srgbClr val="236092"/>
-                </a:solidFill>
-                <a:latin typeface="Arial"/>
-              </a:rPr>
-              <a:t>casos</a:t>
-            </a:r>
-            <a:r>
-              <a:rPr sz="2100" b="0" dirty="0">
-                <a:solidFill>
-                  <a:srgbClr val="236092"/>
-                </a:solidFill>
-                <a:latin typeface="Arial"/>
-              </a:rPr>
-              <a:t> </a:t>
-            </a:r>
-            <a:r>
-              <a:rPr sz="2100" b="0" dirty="0" err="1">
-                <a:solidFill>
-                  <a:srgbClr val="236092"/>
-                </a:solidFill>
-                <a:latin typeface="Arial"/>
-              </a:rPr>
-              <a:t>d'ús</a:t>
-            </a:r>
-            <a:r>
-              <a:rPr sz="2100" b="0" dirty="0">
-                <a:solidFill>
-                  <a:srgbClr val="236092"/>
-                </a:solidFill>
-                <a:latin typeface="Arial"/>
-              </a:rPr>
-              <a:t>, domini </a:t>
-            </a:r>
-            <a:r>
-              <a:rPr sz="2100" b="0" dirty="0" err="1">
-                <a:solidFill>
-                  <a:srgbClr val="236092"/>
-                </a:solidFill>
-                <a:latin typeface="Arial"/>
-              </a:rPr>
-              <a:t>i</a:t>
-            </a:r>
-            <a:r>
-              <a:rPr sz="2100" b="0" dirty="0">
-                <a:solidFill>
-                  <a:srgbClr val="236092"/>
-                </a:solidFill>
-                <a:latin typeface="Arial"/>
-              </a:rPr>
-              <a:t> APIs externes</a:t>
+              <a:t>desacoblament entre casos d'ús, domini i APIs externes</a:t>
             </a:r>
           </a:p>
         </p:txBody>
@@ -3356,7 +3287,7 @@
         </p:spPr>
         <p:txBody>
           <a:bodyPr wrap="square">
-            <a:normAutofit/>
+            <a:normAutofit lnSpcReduction="10000"/>
           </a:bodyPr>
           <a:lstStyle/>
           <a:p>
@@ -3391,7 +3322,7 @@
         </p:spPr>
         <p:txBody>
           <a:bodyPr wrap="square">
-            <a:normAutofit/>
+            <a:normAutofit lnSpcReduction="10000"/>
           </a:bodyPr>
           <a:lstStyle/>
           <a:p>
@@ -3451,20 +3382,71 @@
         </p:spPr>
         <p:txBody>
           <a:bodyPr wrap="square">
-            <a:normAutofit/>
+            <a:normAutofit lnSpcReduction="10000"/>
           </a:bodyPr>
           <a:lstStyle/>
           <a:p>
             <a:pPr algn="l"/>
             <a:r>
-              <a:rPr sz="2800" b="1">
+              <a:rPr sz="2800" b="1" dirty="0" err="1">
                 <a:solidFill>
                   <a:srgbClr val="192D3E"/>
                 </a:solidFill>
                 <a:latin typeface="Arial"/>
               </a:rPr>
-              <a:t>Flux i codi essencial</a:t>
-            </a:r>
+              <a:t>Transferència</a:t>
+            </a:r>
+            <a:r>
+              <a:rPr sz="2800" b="1" dirty="0">
+                <a:solidFill>
+                  <a:srgbClr val="192D3E"/>
+                </a:solidFill>
+                <a:latin typeface="Arial"/>
+              </a:rPr>
+              <a:t> a</a:t>
+            </a:r>
+            <a:r>
+              <a:rPr lang="es-ES" sz="2800" b="1" dirty="0">
+                <a:solidFill>
+                  <a:srgbClr val="192D3E"/>
+                </a:solidFill>
+                <a:latin typeface="Arial"/>
+              </a:rPr>
+              <a:t> </a:t>
+            </a:r>
+            <a:r>
+              <a:rPr lang="es-ES" sz="2800" b="1" dirty="0" err="1">
+                <a:solidFill>
+                  <a:srgbClr val="192D3E"/>
+                </a:solidFill>
+                <a:latin typeface="Arial"/>
+              </a:rPr>
+              <a:t>domini</a:t>
+            </a:r>
+            <a:r>
+              <a:rPr lang="es-ES" sz="2800" b="1" dirty="0">
+                <a:solidFill>
+                  <a:srgbClr val="192D3E"/>
+                </a:solidFill>
+                <a:latin typeface="Arial"/>
+              </a:rPr>
+              <a:t> </a:t>
+            </a:r>
+            <a:r>
+              <a:rPr lang="es-ES" sz="2800" b="1" dirty="0" err="1">
+                <a:solidFill>
+                  <a:srgbClr val="192D3E"/>
+                </a:solidFill>
+                <a:latin typeface="Arial"/>
+              </a:rPr>
+              <a:t>financer</a:t>
+            </a:r>
+            <a:endParaRPr sz="2800" b="1" dirty="0">
+              <a:solidFill>
+                <a:srgbClr val="192D3E"/>
+              </a:solidFill>
+              <a:latin typeface="Arial"/>
+            </a:endParaRPr>
           </a:p>
         </p:txBody>
       </p:sp>
@@ -3498,7 +3480,7 @@
                 </a:solidFill>
                 <a:latin typeface="Arial"/>
               </a:rPr>
-              <a:t>El servei coordina. El domini decideix. La infraestructura adapta.</a:t>
+              <a:t>Venda d'accions amb proveïdor de preus substituïble</a:t>
             </a:r>
           </a:p>
         </p:txBody>
@@ -3573,7 +3555,7 @@
       </p:sp>
       <p:pic>
         <p:nvPicPr>
-          <p:cNvPr id="6" name="Picture 5" descr="sell-stock-sequence.png"/>
+          <p:cNvPr id="6" name="Picture 5" descr="hexastock-sellstocks-arquitectura-vpd.png"/>
           <p:cNvPicPr>
             <a:picLocks noChangeAspect="1"/>
           </p:cNvPicPr>
@@ -3587,8 +3569,8 @@
         </p:blipFill>
         <p:spPr>
           <a:xfrm>
-            <a:off x="502920" y="1962677"/>
-            <a:ext cx="7315200" cy="3069806"/>
+            <a:off x="502920" y="1564444"/>
+            <a:ext cx="7863840" cy="4414912"/>
           </a:xfrm>
           <a:prstGeom prst="rect">
             <a:avLst/>
@@ -3597,47 +3579,82 @@
       </p:pic>
       <p:sp>
         <p:nvSpPr>
-          <p:cNvPr id="7" name="Rounded Rectangle 6"/>
-          <p:cNvSpPr/>
-          <p:nvPr/>
-        </p:nvSpPr>
-        <p:spPr>
-          <a:xfrm>
-            <a:off x="8092440" y="1645920"/>
-            <a:ext cx="3520440" cy="2423160"/>
-          </a:xfrm>
-          <a:prstGeom prst="roundRect">
-            <a:avLst/>
-          </a:prstGeom>
-          <a:solidFill>
-            <a:srgbClr val="1F2429"/>
-          </a:solidFill>
-          <a:ln>
-            <a:solidFill>
-              <a:srgbClr val="1F2429"/>
-            </a:solidFill>
-          </a:ln>
-        </p:spPr>
-        <p:style>
-          <a:lnRef idx="1">
-            <a:schemeClr val="accent1"/>
-          </a:lnRef>
-          <a:fillRef idx="3">
-            <a:schemeClr val="accent1"/>
-          </a:fillRef>
-          <a:effectRef idx="2">
-            <a:schemeClr val="accent1"/>
-          </a:effectRef>
-          <a:fontRef idx="minor">
-            <a:schemeClr val="lt1"/>
-          </a:fontRef>
-        </p:style>
-        <p:txBody>
-          <a:bodyPr rtlCol="0" anchor="ctr"/>
+          <p:cNvPr id="7" name="TextBox 6"/>
+          <p:cNvSpPr txBox="1"/>
+          <p:nvPr/>
+        </p:nvSpPr>
+        <p:spPr>
+          <a:xfrm>
+            <a:off x="8549640" y="1481328"/>
+            <a:ext cx="2743200" cy="731520"/>
+          </a:xfrm>
+          <a:prstGeom prst="rect">
+            <a:avLst/>
+          </a:prstGeom>
+          <a:noFill/>
+        </p:spPr>
+        <p:txBody>
+          <a:bodyPr wrap="square">
+            <a:normAutofit lnSpcReduction="10000"/>
+          </a:bodyPr>
           <a:lstStyle/>
           <a:p>
             <a:pPr algn="ctr"/>
-            <a:endParaRPr/>
+            <a:r>
+              <a:rPr sz="2200" b="1" dirty="0" err="1">
+                <a:solidFill>
+                  <a:srgbClr val="192D3E"/>
+                </a:solidFill>
+                <a:latin typeface="Arial"/>
+              </a:rPr>
+              <a:t>Mateix</a:t>
+            </a:r>
+            <a:r>
+              <a:rPr sz="2200" b="1" dirty="0">
+                <a:solidFill>
+                  <a:srgbClr val="192D3E"/>
+                </a:solidFill>
+                <a:latin typeface="Arial"/>
+              </a:rPr>
+              <a:t> </a:t>
+            </a:r>
+            <a:r>
+              <a:rPr sz="2200" b="1" dirty="0" err="1">
+                <a:solidFill>
+                  <a:srgbClr val="192D3E"/>
+                </a:solidFill>
+                <a:latin typeface="Arial"/>
+              </a:rPr>
+              <a:t>problema</a:t>
+            </a:r>
+            <a:r>
+              <a:rPr sz="2200" b="1" dirty="0">
+                <a:solidFill>
+                  <a:srgbClr val="192D3E"/>
+                </a:solidFill>
+                <a:latin typeface="Arial"/>
+              </a:rPr>
+              <a:t>,
+</a:t>
+            </a:r>
+            <a:r>
+              <a:rPr sz="2200" b="1" dirty="0" err="1">
+                <a:solidFill>
+                  <a:srgbClr val="192D3E"/>
+                </a:solidFill>
+                <a:latin typeface="Arial"/>
+              </a:rPr>
+              <a:t>diferent</a:t>
+            </a:r>
+            <a:r>
+              <a:rPr sz="2200" b="1" dirty="0">
+                <a:solidFill>
+                  <a:srgbClr val="192D3E"/>
+                </a:solidFill>
+                <a:latin typeface="Arial"/>
+              </a:rPr>
+              <a:t> domini</a:t>
+            </a:r>
           </a:p>
         </p:txBody>
       </p:sp>
@@ -3649,46 +3666,8 @@
         </p:nvSpPr>
         <p:spPr>
           <a:xfrm>
-            <a:off x="8293608" y="1810512"/>
-            <a:ext cx="3118104" cy="2093976"/>
-          </a:xfrm>
-          <a:prstGeom prst="rect">
-            <a:avLst/>
-          </a:prstGeom>
-          <a:noFill/>
-        </p:spPr>
-        <p:txBody>
-          <a:bodyPr wrap="square">
-            <a:spAutoFit/>
-          </a:bodyPr>
-          <a:lstStyle/>
-          <a:p>
-            <a:r>
-              <a:rPr sz="1500">
-                <a:solidFill>
-                  <a:srgbClr val="F5F6F7"/>
-                </a:solidFill>
-                <a:latin typeface="Consolas"/>
-              </a:rPr>
-              <a:t>StockPrice stockPrice =
-    stockPriceProviderPort.fetchStockPrice(ticker);
-Price price = stockPrice.price();
-SellResult sellResult =
-    portfolio.sell(ticker, quantity, price);</a:t>
-            </a:r>
-          </a:p>
-        </p:txBody>
-      </p:sp>
-      <p:sp>
-        <p:nvSpPr>
-          <p:cNvPr id="9" name="TextBox 8"/>
-          <p:cNvSpPr txBox="1"/>
-          <p:nvPr/>
-        </p:nvSpPr>
-        <p:spPr>
-          <a:xfrm>
-            <a:off x="8138160" y="4434840"/>
-            <a:ext cx="3429000" cy="822960"/>
+            <a:off x="8549640" y="2788920"/>
+            <a:ext cx="2743200" cy="1417320"/>
           </a:xfrm>
           <a:prstGeom prst="rect">
             <a:avLst/>
@@ -3701,15 +3680,144 @@
           </a:bodyPr>
           <a:lstStyle/>
           <a:p>
-            <a:pPr algn="l"/>
-            <a:r>
-              <a:rPr sz="1700" b="0">
-                <a:solidFill>
-                  <a:srgbClr val="192D3E"/>
-                </a:solidFill>
-                <a:latin typeface="Arial"/>
-              </a:rPr>
-              <a:t>El servei obté informació externa a través d'un port i delega la decisió al domini ric.</a:t>
+            <a:pPr>
+              <a:spcAft>
+                <a:spcPts val="800"/>
+              </a:spcAft>
+              <a:defRPr sz="1500">
+                <a:solidFill>
+                  <a:srgbClr val="262626"/>
+                </a:solidFill>
+                <a:latin typeface="Arial"/>
+              </a:defRPr>
+            </a:pPr>
+            <a:r>
+              <a:rPr dirty="0"/>
+              <a:t>Cas </a:t>
+            </a:r>
+            <a:r>
+              <a:rPr dirty="0" err="1"/>
+              <a:t>d'ús</a:t>
+            </a:r>
+            <a:r>
+              <a:rPr dirty="0"/>
+              <a:t>: </a:t>
+            </a:r>
+            <a:r>
+              <a:rPr dirty="0" err="1"/>
+              <a:t>venda</a:t>
+            </a:r>
+            <a:r>
+              <a:rPr dirty="0"/>
+              <a:t> </a:t>
+            </a:r>
+            <a:r>
+              <a:rPr dirty="0" err="1"/>
+              <a:t>d'accions</a:t>
+            </a:r>
+            <a:endParaRPr dirty="0"/>
+          </a:p>
+          <a:p>
+            <a:pPr>
+              <a:spcAft>
+                <a:spcPts val="800"/>
+              </a:spcAft>
+              <a:defRPr sz="1500">
+                <a:solidFill>
+                  <a:srgbClr val="262626"/>
+                </a:solidFill>
+                <a:latin typeface="Arial"/>
+              </a:defRPr>
+            </a:pPr>
+            <a:r>
+              <a:rPr dirty="0" err="1"/>
+              <a:t>Necessitat</a:t>
+            </a:r>
+            <a:r>
+              <a:rPr dirty="0"/>
+              <a:t>: </a:t>
+            </a:r>
+            <a:r>
+              <a:rPr dirty="0" err="1"/>
+              <a:t>preu</a:t>
+            </a:r>
+            <a:r>
+              <a:rPr dirty="0"/>
+              <a:t> actual</a:t>
+            </a:r>
+          </a:p>
+          <a:p>
+            <a:pPr>
+              <a:spcAft>
+                <a:spcPts val="800"/>
+              </a:spcAft>
+              <a:defRPr sz="1500">
+                <a:solidFill>
+                  <a:srgbClr val="262626"/>
+                </a:solidFill>
+                <a:latin typeface="Arial"/>
+              </a:defRPr>
+            </a:pPr>
+            <a:r>
+              <a:rPr dirty="0"/>
+              <a:t>No </a:t>
+            </a:r>
+            <a:r>
+              <a:rPr dirty="0" err="1"/>
+              <a:t>depèn</a:t>
+            </a:r>
+            <a:r>
+              <a:rPr dirty="0"/>
+              <a:t> de </a:t>
+            </a:r>
+            <a:r>
+              <a:rPr dirty="0" err="1"/>
+              <a:t>proveïdors</a:t>
+            </a:r>
+            <a:r>
+              <a:rPr dirty="0"/>
+              <a:t> </a:t>
+            </a:r>
+            <a:r>
+              <a:rPr dirty="0" err="1"/>
+              <a:t>concrets</a:t>
+            </a:r>
+            <a:endParaRPr dirty="0"/>
+          </a:p>
+        </p:txBody>
+      </p:sp>
+      <p:sp>
+        <p:nvSpPr>
+          <p:cNvPr id="9" name="TextBox 8"/>
+          <p:cNvSpPr txBox="1"/>
+          <p:nvPr/>
+        </p:nvSpPr>
+        <p:spPr>
+          <a:xfrm>
+            <a:off x="8549640" y="5669280"/>
+            <a:ext cx="2743200" cy="228600"/>
+          </a:xfrm>
+          <a:prstGeom prst="rect">
+            <a:avLst/>
+          </a:prstGeom>
+          <a:noFill/>
+        </p:spPr>
+        <p:txBody>
+          <a:bodyPr wrap="square">
+            <a:normAutofit fontScale="47500" lnSpcReduction="20000"/>
+          </a:bodyPr>
+          <a:lstStyle/>
+          <a:p>
+            <a:pPr algn="ctr"/>
+            <a:r>
+              <a:rPr sz="1000" b="0">
+                <a:solidFill>
+                  <a:srgbClr val="66707A"/>
+                </a:solidFill>
+                <a:latin typeface="Arial"/>
+              </a:rPr>
+              <a:t>Port: StockPriceProviderPort
+Adaptadors: Finnhub, Alpha Vantage, mock</a:t>
             </a:r>
           </a:p>
         </p:txBody>
@@ -3732,7 +3840,7 @@
         </p:spPr>
         <p:txBody>
           <a:bodyPr wrap="square">
-            <a:normAutofit/>
+            <a:normAutofit lnSpcReduction="10000"/>
           </a:bodyPr>
           <a:lstStyle/>
           <a:p>
@@ -3767,7 +3875,7 @@
         </p:spPr>
         <p:txBody>
           <a:bodyPr wrap="square">
-            <a:normAutofit/>
+            <a:normAutofit lnSpcReduction="10000"/>
           </a:bodyPr>
           <a:lstStyle/>
           <a:p>
@@ -3779,7 +3887,7 @@
                 </a:solidFill>
                 <a:latin typeface="Arial"/>
               </a:rPr>
-              <a:t>10</a:t>
+              <a:t>9</a:t>
             </a:r>
           </a:p>
         </p:txBody>
@@ -3827,7 +3935,7 @@
         </p:spPr>
         <p:txBody>
           <a:bodyPr wrap="square">
-            <a:normAutofit/>
+            <a:normAutofit lnSpcReduction="10000"/>
           </a:bodyPr>
           <a:lstStyle/>
           <a:p>
@@ -3839,7 +3947,7 @@
                 </a:solidFill>
                 <a:latin typeface="Arial"/>
               </a:rPr>
-              <a:t>Conclusió</a:t>
+              <a:t>Flux i codi essencial</a:t>
             </a:r>
           </a:p>
         </p:txBody>
@@ -3874,7 +3982,7 @@
                 </a:solidFill>
                 <a:latin typeface="Arial"/>
               </a:rPr>
-              <a:t>L'arquitectura no elimina el canvi. El localitza.</a:t>
+              <a:t>El servei coordina. El domini decideix. La infraestructura adapta.</a:t>
             </a:r>
           </a:p>
         </p:txBody>
@@ -3949,7 +4057,7 @@
       </p:sp>
       <p:pic>
         <p:nvPicPr>
-          <p:cNvPr id="6" name="Picture 5" descr="before-after-comparison.png"/>
+          <p:cNvPr id="6" name="Picture 5" descr="sell-stock-sequence.png"/>
           <p:cNvPicPr>
             <a:picLocks noChangeAspect="1"/>
           </p:cNvPicPr>
@@ -3963,8 +4071,8 @@
         </p:blipFill>
         <p:spPr>
           <a:xfrm>
-            <a:off x="685800" y="1391858"/>
-            <a:ext cx="7086600" cy="4485763"/>
+            <a:off x="502920" y="1962677"/>
+            <a:ext cx="7315200" cy="3069806"/>
           </a:xfrm>
           <a:prstGeom prst="rect">
             <a:avLst/>
@@ -3973,14 +4081,95 @@
       </p:pic>
       <p:sp>
         <p:nvSpPr>
-          <p:cNvPr id="7" name="TextBox 6"/>
+          <p:cNvPr id="7" name="Rounded Rectangle 6"/>
+          <p:cNvSpPr/>
+          <p:nvPr/>
+        </p:nvSpPr>
+        <p:spPr>
+          <a:xfrm>
+            <a:off x="8092440" y="1645920"/>
+            <a:ext cx="3520440" cy="1417320"/>
+          </a:xfrm>
+          <a:prstGeom prst="roundRect">
+            <a:avLst/>
+          </a:prstGeom>
+          <a:solidFill>
+            <a:srgbClr val="1F2429"/>
+          </a:solidFill>
+          <a:ln>
+            <a:solidFill>
+              <a:srgbClr val="1F2429"/>
+            </a:solidFill>
+          </a:ln>
+        </p:spPr>
+        <p:style>
+          <a:lnRef idx="1">
+            <a:schemeClr val="accent1"/>
+          </a:lnRef>
+          <a:fillRef idx="3">
+            <a:schemeClr val="accent1"/>
+          </a:fillRef>
+          <a:effectRef idx="2">
+            <a:schemeClr val="accent1"/>
+          </a:effectRef>
+          <a:fontRef idx="minor">
+            <a:schemeClr val="lt1"/>
+          </a:fontRef>
+        </p:style>
+        <p:txBody>
+          <a:bodyPr rtlCol="0" anchor="ctr"/>
+          <a:lstStyle/>
+          <a:p>
+            <a:pPr algn="ctr"/>
+            <a:endParaRPr/>
+          </a:p>
+        </p:txBody>
+      </p:sp>
+      <p:sp>
+        <p:nvSpPr>
+          <p:cNvPr id="8" name="TextBox 7"/>
           <p:cNvSpPr txBox="1"/>
           <p:nvPr/>
         </p:nvSpPr>
         <p:spPr>
           <a:xfrm>
-            <a:off x="8183879" y="1874519"/>
-            <a:ext cx="2971800" cy="1737360"/>
+            <a:off x="8293608" y="1810512"/>
+            <a:ext cx="3118104" cy="1088136"/>
+          </a:xfrm>
+          <a:prstGeom prst="rect">
+            <a:avLst/>
+          </a:prstGeom>
+          <a:noFill/>
+        </p:spPr>
+        <p:txBody>
+          <a:bodyPr wrap="square">
+            <a:spAutoFit/>
+          </a:bodyPr>
+          <a:lstStyle/>
+          <a:p>
+            <a:r>
+              <a:rPr sz="1500">
+                <a:solidFill>
+                  <a:srgbClr val="F5F6F7"/>
+                </a:solidFill>
+                <a:latin typeface="Consolas"/>
+              </a:rPr>
+              <a:t>stockPrice = port.fetch(ticker);
+result = portfolio.sell(...);</a:t>
+            </a:r>
+          </a:p>
+        </p:txBody>
+      </p:sp>
+      <p:sp>
+        <p:nvSpPr>
+          <p:cNvPr id="9" name="TextBox 8"/>
+          <p:cNvSpPr txBox="1"/>
+          <p:nvPr/>
+        </p:nvSpPr>
+        <p:spPr>
+          <a:xfrm>
+            <a:off x="8229600" y="3657600"/>
+            <a:ext cx="3063240" cy="1143000"/>
           </a:xfrm>
           <a:prstGeom prst="rect">
             <a:avLst/>
@@ -3993,29 +4182,195 @@
           </a:bodyPr>
           <a:lstStyle/>
           <a:p>
-            <a:pPr algn="ctr"/>
-            <a:r>
-              <a:rPr sz="2400" b="1">
+            <a:pPr>
+              <a:spcAft>
+                <a:spcPts val="800"/>
+              </a:spcAft>
+              <a:defRPr sz="1600">
+                <a:solidFill>
+                  <a:srgbClr val="262626"/>
+                </a:solidFill>
+                <a:latin typeface="Arial"/>
+              </a:defRPr>
+            </a:pPr>
+            <a:r>
+              <a:t>El servei coordina</a:t>
+            </a:r>
+          </a:p>
+          <a:p>
+            <a:pPr>
+              <a:spcAft>
+                <a:spcPts val="800"/>
+              </a:spcAft>
+              <a:defRPr sz="1600">
+                <a:solidFill>
+                  <a:srgbClr val="262626"/>
+                </a:solidFill>
+                <a:latin typeface="Arial"/>
+              </a:defRPr>
+            </a:pPr>
+            <a:r>
+              <a:t>El port obté informació</a:t>
+            </a:r>
+          </a:p>
+          <a:p>
+            <a:pPr>
+              <a:spcAft>
+                <a:spcPts val="800"/>
+              </a:spcAft>
+              <a:defRPr sz="1600">
+                <a:solidFill>
+                  <a:srgbClr val="262626"/>
+                </a:solidFill>
+                <a:latin typeface="Arial"/>
+              </a:defRPr>
+            </a:pPr>
+            <a:r>
+              <a:t>El domini decideix</a:t>
+            </a:r>
+          </a:p>
+        </p:txBody>
+      </p:sp>
+      <p:sp>
+        <p:nvSpPr>
+          <p:cNvPr id="10" name="TextBox 9"/>
+          <p:cNvSpPr txBox="1"/>
+          <p:nvPr/>
+        </p:nvSpPr>
+        <p:spPr>
+          <a:xfrm>
+            <a:off x="594360" y="6473952"/>
+            <a:ext cx="8595360" cy="201168"/>
+          </a:xfrm>
+          <a:prstGeom prst="rect">
+            <a:avLst/>
+          </a:prstGeom>
+          <a:noFill/>
+        </p:spPr>
+        <p:txBody>
+          <a:bodyPr wrap="square">
+            <a:normAutofit lnSpcReduction="10000"/>
+          </a:bodyPr>
+          <a:lstStyle/>
+          <a:p>
+            <a:pPr algn="l"/>
+            <a:r>
+              <a:rPr sz="800" b="0">
+                <a:solidFill>
+                  <a:srgbClr val="66707A"/>
+                </a:solidFill>
+                <a:latin typeface="Arial"/>
+              </a:rPr>
+              <a:t>Disseny de Sistemes d'Informació · Ports de sortida en arquitectura hexagonal</a:t>
+            </a:r>
+          </a:p>
+        </p:txBody>
+      </p:sp>
+      <p:sp>
+        <p:nvSpPr>
+          <p:cNvPr id="11" name="TextBox 10"/>
+          <p:cNvSpPr txBox="1"/>
+          <p:nvPr/>
+        </p:nvSpPr>
+        <p:spPr>
+          <a:xfrm>
+            <a:off x="11155680" y="6473952"/>
+            <a:ext cx="411480" cy="201168"/>
+          </a:xfrm>
+          <a:prstGeom prst="rect">
+            <a:avLst/>
+          </a:prstGeom>
+          <a:noFill/>
+        </p:spPr>
+        <p:txBody>
+          <a:bodyPr wrap="square">
+            <a:normAutofit lnSpcReduction="10000"/>
+          </a:bodyPr>
+          <a:lstStyle/>
+          <a:p>
+            <a:pPr algn="r"/>
+            <a:r>
+              <a:rPr sz="800" b="0">
+                <a:solidFill>
+                  <a:srgbClr val="66707A"/>
+                </a:solidFill>
+                <a:latin typeface="Arial"/>
+              </a:rPr>
+              <a:t>10</a:t>
+            </a:r>
+          </a:p>
+        </p:txBody>
+      </p:sp>
+    </p:spTree>
+  </p:cSld>
+  <p:clrMapOvr>
+    <a:masterClrMapping/>
+  </p:clrMapOvr>
+</p:sld>
+</file>
+
+<file path=ppt/slides/slide12.xml><?xml version="1.0" encoding="utf-8"?>
+<p:sld xmlns:a="http://schemas.openxmlformats.org/drawingml/2006/main" xmlns:r="http://schemas.openxmlformats.org/officeDocument/2006/relationships" xmlns:p="http://schemas.openxmlformats.org/presentationml/2006/main">
+  <p:cSld>
+    <p:spTree>
+      <p:nvGrpSpPr>
+        <p:cNvPr id="1" name=""/>
+        <p:cNvGrpSpPr/>
+        <p:nvPr/>
+      </p:nvGrpSpPr>
+      <p:grpSpPr>
+        <a:xfrm>
+          <a:off x="0" y="0"/>
+          <a:ext cx="0" cy="0"/>
+          <a:chOff x="0" y="0"/>
+          <a:chExt cx="0" cy="0"/>
+        </a:xfrm>
+      </p:grpSpPr>
+      <p:sp>
+        <p:nvSpPr>
+          <p:cNvPr id="2" name="TextBox 1"/>
+          <p:cNvSpPr txBox="1"/>
+          <p:nvPr/>
+        </p:nvSpPr>
+        <p:spPr>
+          <a:xfrm>
+            <a:off x="594360" y="320040"/>
+            <a:ext cx="8961120" cy="502920"/>
+          </a:xfrm>
+          <a:prstGeom prst="rect">
+            <a:avLst/>
+          </a:prstGeom>
+          <a:noFill/>
+        </p:spPr>
+        <p:txBody>
+          <a:bodyPr wrap="square">
+            <a:normAutofit lnSpcReduction="10000"/>
+          </a:bodyPr>
+          <a:lstStyle/>
+          <a:p>
+            <a:pPr algn="l"/>
+            <a:r>
+              <a:rPr sz="2800" b="1">
                 <a:solidFill>
                   <a:srgbClr val="192D3E"/>
                 </a:solidFill>
                 <a:latin typeface="Arial"/>
               </a:rPr>
-              <a:t>Quan el proveïdor canvia, volem canviar l'adaptador, no el cas d'ús ni el model de domini.</a:t>
-            </a:r>
-          </a:p>
-        </p:txBody>
-      </p:sp>
-      <p:sp>
-        <p:nvSpPr>
-          <p:cNvPr id="8" name="TextBox 7"/>
+              <a:t>Demo controlada</a:t>
+            </a:r>
+          </a:p>
+        </p:txBody>
+      </p:sp>
+      <p:sp>
+        <p:nvSpPr>
+          <p:cNvPr id="3" name="TextBox 2"/>
           <p:cNvSpPr txBox="1"/>
           <p:nvPr/>
         </p:nvSpPr>
         <p:spPr>
           <a:xfrm>
-            <a:off x="8183879" y="4160520"/>
-            <a:ext cx="2971800" cy="868680"/>
+            <a:off x="612648" y="822960"/>
+            <a:ext cx="8869680" cy="320040"/>
           </a:xfrm>
           <a:prstGeom prst="rect">
             <a:avLst/>
@@ -4028,29 +4383,375 @@
           </a:bodyPr>
           <a:lstStyle/>
           <a:p>
+            <a:pPr algn="l"/>
+            <a:r>
+              <a:rPr sz="1300" b="0">
+                <a:solidFill>
+                  <a:srgbClr val="66707A"/>
+                </a:solidFill>
+                <a:latin typeface="Arial"/>
+              </a:rPr>
+              <a:t>Mateix cas d'ús, adaptador substituïble</a:t>
+            </a:r>
+          </a:p>
+        </p:txBody>
+      </p:sp>
+      <p:pic>
+        <p:nvPicPr>
+          <p:cNvPr id="4" name="Picture 3" descr="logotip-oficial-tecnocampus-upf-horitzontal-color.png"/>
+          <p:cNvPicPr>
+            <a:picLocks noChangeAspect="1"/>
+          </p:cNvPicPr>
+          <p:nvPr/>
+        </p:nvPicPr>
+        <p:blipFill>
+          <a:blip r:embed="rId2"/>
+          <a:stretch>
+            <a:fillRect/>
+          </a:stretch>
+        </p:blipFill>
+        <p:spPr>
+          <a:xfrm>
+            <a:off x="9738360" y="293025"/>
+            <a:ext cx="1783079" cy="337493"/>
+          </a:xfrm>
+          <a:prstGeom prst="rect">
+            <a:avLst/>
+          </a:prstGeom>
+        </p:spPr>
+      </p:pic>
+      <p:sp>
+        <p:nvSpPr>
+          <p:cNvPr id="5" name="Rectangle 4"/>
+          <p:cNvSpPr/>
+          <p:nvPr/>
+        </p:nvSpPr>
+        <p:spPr>
+          <a:xfrm>
+            <a:off x="594360" y="1115568"/>
+            <a:ext cx="10972800" cy="13716"/>
+          </a:xfrm>
+          <a:prstGeom prst="rect">
+            <a:avLst/>
+          </a:prstGeom>
+          <a:solidFill>
+            <a:srgbClr val="D6DBE0"/>
+          </a:solidFill>
+          <a:ln>
+            <a:noFill/>
+          </a:ln>
+        </p:spPr>
+        <p:style>
+          <a:lnRef idx="1">
+            <a:schemeClr val="accent1"/>
+          </a:lnRef>
+          <a:fillRef idx="3">
+            <a:schemeClr val="accent1"/>
+          </a:fillRef>
+          <a:effectRef idx="2">
+            <a:schemeClr val="accent1"/>
+          </a:effectRef>
+          <a:fontRef idx="minor">
+            <a:schemeClr val="lt1"/>
+          </a:fontRef>
+        </p:style>
+        <p:txBody>
+          <a:bodyPr rtlCol="0" anchor="ctr"/>
+          <a:lstStyle/>
+          <a:p>
             <a:pPr algn="ctr"/>
-            <a:r>
-              <a:rPr sz="1700" b="0">
-                <a:solidFill>
-                  <a:srgbClr val="236092"/>
-                </a:solidFill>
-                <a:latin typeface="Arial"/>
-              </a:rPr>
-              <a:t>L'arquitectura fa explícita, substituïble i localitzada la dependència del món exterior.</a:t>
-            </a:r>
-          </a:p>
-        </p:txBody>
-      </p:sp>
-      <p:sp>
-        <p:nvSpPr>
-          <p:cNvPr id="9" name="TextBox 8"/>
+            <a:endParaRPr/>
+          </a:p>
+        </p:txBody>
+      </p:sp>
+      <p:sp>
+        <p:nvSpPr>
+          <p:cNvPr id="6" name="TextBox 5"/>
           <p:cNvSpPr txBox="1"/>
           <p:nvPr/>
         </p:nvSpPr>
         <p:spPr>
           <a:xfrm>
-            <a:off x="594360" y="6473952"/>
-            <a:ext cx="8595360" cy="201168"/>
+            <a:off x="914400" y="1325880"/>
+            <a:ext cx="10287000" cy="502920"/>
+          </a:xfrm>
+          <a:prstGeom prst="rect">
+            <a:avLst/>
+          </a:prstGeom>
+          <a:noFill/>
+        </p:spPr>
+        <p:txBody>
+          <a:bodyPr wrap="square">
+            <a:normAutofit fontScale="85000" lnSpcReduction="10000"/>
+          </a:bodyPr>
+          <a:lstStyle/>
+          <a:p>
+            <a:pPr algn="ctr"/>
+            <a:r>
+              <a:rPr sz="1800" b="0">
+                <a:solidFill>
+                  <a:srgbClr val="192D3E"/>
+                </a:solidFill>
+                <a:latin typeface="Arial"/>
+              </a:rPr>
+              <a:t>HexaStock és un projecte open source propi utilitzat en docència universitària i formació o consultoria amb institucions financeres.</a:t>
+            </a:r>
+          </a:p>
+        </p:txBody>
+      </p:sp>
+      <p:sp>
+        <p:nvSpPr>
+          <p:cNvPr id="7" name="Rounded Rectangle 6"/>
+          <p:cNvSpPr/>
+          <p:nvPr/>
+        </p:nvSpPr>
+        <p:spPr>
+          <a:xfrm>
+            <a:off x="868680" y="2240280"/>
+            <a:ext cx="3246120" cy="960120"/>
+          </a:xfrm>
+          <a:prstGeom prst="roundRect">
+            <a:avLst/>
+          </a:prstGeom>
+          <a:solidFill>
+            <a:srgbClr val="E8F1F8"/>
+          </a:solidFill>
+          <a:ln w="9525">
+            <a:solidFill>
+              <a:srgbClr val="DCE0E4"/>
+            </a:solidFill>
+          </a:ln>
+        </p:spPr>
+        <p:style>
+          <a:lnRef idx="1">
+            <a:schemeClr val="accent1"/>
+          </a:lnRef>
+          <a:fillRef idx="3">
+            <a:schemeClr val="accent1"/>
+          </a:fillRef>
+          <a:effectRef idx="2">
+            <a:schemeClr val="accent1"/>
+          </a:effectRef>
+          <a:fontRef idx="minor">
+            <a:schemeClr val="lt1"/>
+          </a:fontRef>
+        </p:style>
+        <p:txBody>
+          <a:bodyPr rtlCol="0" anchor="ctr"/>
+          <a:lstStyle/>
+          <a:p>
+            <a:pPr algn="ctr"/>
+            <a:endParaRPr/>
+          </a:p>
+        </p:txBody>
+      </p:sp>
+      <p:sp>
+        <p:nvSpPr>
+          <p:cNvPr id="8" name="TextBox 7"/>
+          <p:cNvSpPr txBox="1"/>
+          <p:nvPr/>
+        </p:nvSpPr>
+        <p:spPr>
+          <a:xfrm>
+            <a:off x="1051560" y="2542032"/>
+            <a:ext cx="2880360" cy="256032"/>
+          </a:xfrm>
+          <a:prstGeom prst="rect">
+            <a:avLst/>
+          </a:prstGeom>
+          <a:noFill/>
+        </p:spPr>
+        <p:txBody>
+          <a:bodyPr wrap="square">
+            <a:normAutofit fontScale="70000" lnSpcReduction="20000"/>
+          </a:bodyPr>
+          <a:lstStyle/>
+          <a:p>
+            <a:pPr algn="ctr"/>
+            <a:r>
+              <a:rPr sz="1900" b="1">
+                <a:solidFill>
+                  <a:srgbClr val="192D3E"/>
+                </a:solidFill>
+                <a:latin typeface="Arial"/>
+              </a:rPr>
+              <a:t>Mateix cas d'ús</a:t>
+            </a:r>
+          </a:p>
+        </p:txBody>
+      </p:sp>
+      <p:sp>
+        <p:nvSpPr>
+          <p:cNvPr id="9" name="Rounded Rectangle 8"/>
+          <p:cNvSpPr/>
+          <p:nvPr/>
+        </p:nvSpPr>
+        <p:spPr>
+          <a:xfrm>
+            <a:off x="4572000" y="2240280"/>
+            <a:ext cx="3246120" cy="960120"/>
+          </a:xfrm>
+          <a:prstGeom prst="roundRect">
+            <a:avLst/>
+          </a:prstGeom>
+          <a:solidFill>
+            <a:srgbClr val="FFF3D6"/>
+          </a:solidFill>
+          <a:ln w="9525">
+            <a:solidFill>
+              <a:srgbClr val="DCE0E4"/>
+            </a:solidFill>
+          </a:ln>
+        </p:spPr>
+        <p:style>
+          <a:lnRef idx="1">
+            <a:schemeClr val="accent1"/>
+          </a:lnRef>
+          <a:fillRef idx="3">
+            <a:schemeClr val="accent1"/>
+          </a:fillRef>
+          <a:effectRef idx="2">
+            <a:schemeClr val="accent1"/>
+          </a:effectRef>
+          <a:fontRef idx="minor">
+            <a:schemeClr val="lt1"/>
+          </a:fontRef>
+        </p:style>
+        <p:txBody>
+          <a:bodyPr rtlCol="0" anchor="ctr"/>
+          <a:lstStyle/>
+          <a:p>
+            <a:pPr algn="ctr"/>
+            <a:endParaRPr/>
+          </a:p>
+        </p:txBody>
+      </p:sp>
+      <p:sp>
+        <p:nvSpPr>
+          <p:cNvPr id="10" name="TextBox 9"/>
+          <p:cNvSpPr txBox="1"/>
+          <p:nvPr/>
+        </p:nvSpPr>
+        <p:spPr>
+          <a:xfrm>
+            <a:off x="4754880" y="2542032"/>
+            <a:ext cx="2880360" cy="256032"/>
+          </a:xfrm>
+          <a:prstGeom prst="rect">
+            <a:avLst/>
+          </a:prstGeom>
+          <a:noFill/>
+        </p:spPr>
+        <p:txBody>
+          <a:bodyPr wrap="square">
+            <a:normAutofit fontScale="70000" lnSpcReduction="20000"/>
+          </a:bodyPr>
+          <a:lstStyle/>
+          <a:p>
+            <a:pPr algn="ctr"/>
+            <a:r>
+              <a:rPr sz="1900" b="1">
+                <a:solidFill>
+                  <a:srgbClr val="192D3E"/>
+                </a:solidFill>
+                <a:latin typeface="Arial"/>
+              </a:rPr>
+              <a:t>Mateix servei</a:t>
+            </a:r>
+          </a:p>
+        </p:txBody>
+      </p:sp>
+      <p:sp>
+        <p:nvSpPr>
+          <p:cNvPr id="11" name="Rounded Rectangle 10"/>
+          <p:cNvSpPr/>
+          <p:nvPr/>
+        </p:nvSpPr>
+        <p:spPr>
+          <a:xfrm>
+            <a:off x="8275319" y="2240280"/>
+            <a:ext cx="3246120" cy="960120"/>
+          </a:xfrm>
+          <a:prstGeom prst="roundRect">
+            <a:avLst/>
+          </a:prstGeom>
+          <a:solidFill>
+            <a:srgbClr val="EBF6F0"/>
+          </a:solidFill>
+          <a:ln w="9525">
+            <a:solidFill>
+              <a:srgbClr val="DCE0E4"/>
+            </a:solidFill>
+          </a:ln>
+        </p:spPr>
+        <p:style>
+          <a:lnRef idx="1">
+            <a:schemeClr val="accent1"/>
+          </a:lnRef>
+          <a:fillRef idx="3">
+            <a:schemeClr val="accent1"/>
+          </a:fillRef>
+          <a:effectRef idx="2">
+            <a:schemeClr val="accent1"/>
+          </a:effectRef>
+          <a:fontRef idx="minor">
+            <a:schemeClr val="lt1"/>
+          </a:fontRef>
+        </p:style>
+        <p:txBody>
+          <a:bodyPr rtlCol="0" anchor="ctr"/>
+          <a:lstStyle/>
+          <a:p>
+            <a:pPr algn="ctr"/>
+            <a:endParaRPr/>
+          </a:p>
+        </p:txBody>
+      </p:sp>
+      <p:sp>
+        <p:nvSpPr>
+          <p:cNvPr id="12" name="TextBox 11"/>
+          <p:cNvSpPr txBox="1"/>
+          <p:nvPr/>
+        </p:nvSpPr>
+        <p:spPr>
+          <a:xfrm>
+            <a:off x="8458199" y="2542032"/>
+            <a:ext cx="2880360" cy="256032"/>
+          </a:xfrm>
+          <a:prstGeom prst="rect">
+            <a:avLst/>
+          </a:prstGeom>
+          <a:noFill/>
+        </p:spPr>
+        <p:txBody>
+          <a:bodyPr wrap="square">
+            <a:normAutofit fontScale="70000" lnSpcReduction="20000"/>
+          </a:bodyPr>
+          <a:lstStyle/>
+          <a:p>
+            <a:pPr algn="ctr"/>
+            <a:r>
+              <a:rPr sz="1900" b="1">
+                <a:solidFill>
+                  <a:srgbClr val="192D3E"/>
+                </a:solidFill>
+                <a:latin typeface="Arial"/>
+              </a:rPr>
+              <a:t>Mateix domini</a:t>
+            </a:r>
+          </a:p>
+        </p:txBody>
+      </p:sp>
+      <p:sp>
+        <p:nvSpPr>
+          <p:cNvPr id="13" name="TextBox 12"/>
+          <p:cNvSpPr txBox="1"/>
+          <p:nvPr/>
+        </p:nvSpPr>
+        <p:spPr>
+          <a:xfrm>
+            <a:off x="1051560" y="3886200"/>
+            <a:ext cx="10058400" cy="502920"/>
           </a:xfrm>
           <a:prstGeom prst="rect">
             <a:avLst/>
@@ -4063,29 +4764,29 @@
           </a:bodyPr>
           <a:lstStyle/>
           <a:p>
-            <a:pPr algn="l"/>
-            <a:r>
-              <a:rPr sz="800" b="0">
-                <a:solidFill>
-                  <a:srgbClr val="66707A"/>
-                </a:solidFill>
-                <a:latin typeface="Arial"/>
-              </a:rPr>
-              <a:t>Disseny de Sistemes d'Informació · Ports de sortida en arquitectura hexagonal</a:t>
-            </a:r>
-          </a:p>
-        </p:txBody>
-      </p:sp>
-      <p:sp>
-        <p:nvSpPr>
-          <p:cNvPr id="10" name="TextBox 9"/>
+            <a:pPr algn="ctr"/>
+            <a:r>
+              <a:rPr sz="2600" b="1">
+                <a:solidFill>
+                  <a:srgbClr val="236092"/>
+                </a:solidFill>
+                <a:latin typeface="Arial"/>
+              </a:rPr>
+              <a:t>Canvi: adaptador real  ↔  adaptador mock</a:t>
+            </a:r>
+          </a:p>
+        </p:txBody>
+      </p:sp>
+      <p:sp>
+        <p:nvSpPr>
+          <p:cNvPr id="14" name="TextBox 13"/>
           <p:cNvSpPr txBox="1"/>
           <p:nvPr/>
         </p:nvSpPr>
         <p:spPr>
           <a:xfrm>
-            <a:off x="11155680" y="6473952"/>
-            <a:ext cx="411480" cy="201168"/>
+            <a:off x="1051560" y="5074920"/>
+            <a:ext cx="10058400" cy="457200"/>
           </a:xfrm>
           <a:prstGeom prst="rect">
             <a:avLst/>
@@ -4098,6 +4799,76 @@
           </a:bodyPr>
           <a:lstStyle/>
           <a:p>
+            <a:pPr algn="ctr"/>
+            <a:r>
+              <a:rPr sz="2400" b="1">
+                <a:solidFill>
+                  <a:srgbClr val="192D3E"/>
+                </a:solidFill>
+                <a:latin typeface="Arial"/>
+              </a:rPr>
+              <a:t>Canvia la infraestructura; el cas d'ús roman estable.</a:t>
+            </a:r>
+          </a:p>
+        </p:txBody>
+      </p:sp>
+      <p:sp>
+        <p:nvSpPr>
+          <p:cNvPr id="15" name="TextBox 14"/>
+          <p:cNvSpPr txBox="1"/>
+          <p:nvPr/>
+        </p:nvSpPr>
+        <p:spPr>
+          <a:xfrm>
+            <a:off x="594360" y="6473952"/>
+            <a:ext cx="8595360" cy="201168"/>
+          </a:xfrm>
+          <a:prstGeom prst="rect">
+            <a:avLst/>
+          </a:prstGeom>
+          <a:noFill/>
+        </p:spPr>
+        <p:txBody>
+          <a:bodyPr wrap="square">
+            <a:normAutofit lnSpcReduction="10000"/>
+          </a:bodyPr>
+          <a:lstStyle/>
+          <a:p>
+            <a:pPr algn="l"/>
+            <a:r>
+              <a:rPr sz="800" b="0">
+                <a:solidFill>
+                  <a:srgbClr val="66707A"/>
+                </a:solidFill>
+                <a:latin typeface="Arial"/>
+              </a:rPr>
+              <a:t>Disseny de Sistemes d'Informació · Ports de sortida en arquitectura hexagonal</a:t>
+            </a:r>
+          </a:p>
+        </p:txBody>
+      </p:sp>
+      <p:sp>
+        <p:nvSpPr>
+          <p:cNvPr id="16" name="TextBox 15"/>
+          <p:cNvSpPr txBox="1"/>
+          <p:nvPr/>
+        </p:nvSpPr>
+        <p:spPr>
+          <a:xfrm>
+            <a:off x="11155680" y="6473952"/>
+            <a:ext cx="411480" cy="201168"/>
+          </a:xfrm>
+          <a:prstGeom prst="rect">
+            <a:avLst/>
+          </a:prstGeom>
+          <a:noFill/>
+        </p:spPr>
+        <p:txBody>
+          <a:bodyPr wrap="square">
+            <a:normAutofit lnSpcReduction="10000"/>
+          </a:bodyPr>
+          <a:lstStyle/>
+          <a:p>
             <a:pPr algn="r"/>
             <a:r>
               <a:rPr sz="800" b="0">
@@ -4107,6 +4878,647 @@
                 <a:latin typeface="Arial"/>
               </a:rPr>
               <a:t>11</a:t>
+            </a:r>
+          </a:p>
+        </p:txBody>
+      </p:sp>
+    </p:spTree>
+  </p:cSld>
+  <p:clrMapOvr>
+    <a:masterClrMapping/>
+  </p:clrMapOvr>
+</p:sld>
+</file>
+
+<file path=ppt/slides/slide13.xml><?xml version="1.0" encoding="utf-8"?>
+<p:sld xmlns:a="http://schemas.openxmlformats.org/drawingml/2006/main" xmlns:r="http://schemas.openxmlformats.org/officeDocument/2006/relationships" xmlns:p="http://schemas.openxmlformats.org/presentationml/2006/main">
+  <p:cSld>
+    <p:spTree>
+      <p:nvGrpSpPr>
+        <p:cNvPr id="1" name=""/>
+        <p:cNvGrpSpPr/>
+        <p:nvPr/>
+      </p:nvGrpSpPr>
+      <p:grpSpPr>
+        <a:xfrm>
+          <a:off x="0" y="0"/>
+          <a:ext cx="0" cy="0"/>
+          <a:chOff x="0" y="0"/>
+          <a:chExt cx="0" cy="0"/>
+        </a:xfrm>
+      </p:grpSpPr>
+      <p:sp>
+        <p:nvSpPr>
+          <p:cNvPr id="2" name="TextBox 1"/>
+          <p:cNvSpPr txBox="1"/>
+          <p:nvPr/>
+        </p:nvSpPr>
+        <p:spPr>
+          <a:xfrm>
+            <a:off x="594360" y="320040"/>
+            <a:ext cx="8961120" cy="502920"/>
+          </a:xfrm>
+          <a:prstGeom prst="rect">
+            <a:avLst/>
+          </a:prstGeom>
+          <a:noFill/>
+        </p:spPr>
+        <p:txBody>
+          <a:bodyPr wrap="square">
+            <a:normAutofit lnSpcReduction="10000"/>
+          </a:bodyPr>
+          <a:lstStyle/>
+          <a:p>
+            <a:pPr algn="l"/>
+            <a:r>
+              <a:rPr sz="2800" b="1">
+                <a:solidFill>
+                  <a:srgbClr val="192D3E"/>
+                </a:solidFill>
+                <a:latin typeface="Arial"/>
+              </a:rPr>
+              <a:t>Conclusió</a:t>
+            </a:r>
+          </a:p>
+        </p:txBody>
+      </p:sp>
+      <p:sp>
+        <p:nvSpPr>
+          <p:cNvPr id="3" name="TextBox 2"/>
+          <p:cNvSpPr txBox="1"/>
+          <p:nvPr/>
+        </p:nvSpPr>
+        <p:spPr>
+          <a:xfrm>
+            <a:off x="612648" y="822960"/>
+            <a:ext cx="8869680" cy="320040"/>
+          </a:xfrm>
+          <a:prstGeom prst="rect">
+            <a:avLst/>
+          </a:prstGeom>
+          <a:noFill/>
+        </p:spPr>
+        <p:txBody>
+          <a:bodyPr wrap="square">
+            <a:normAutofit/>
+          </a:bodyPr>
+          <a:lstStyle/>
+          <a:p>
+            <a:pPr algn="l"/>
+            <a:r>
+              <a:rPr sz="1300" b="0">
+                <a:solidFill>
+                  <a:srgbClr val="66707A"/>
+                </a:solidFill>
+                <a:latin typeface="Arial"/>
+              </a:rPr>
+              <a:t>L'arquitectura no elimina el canvi. El localitza.</a:t>
+            </a:r>
+          </a:p>
+        </p:txBody>
+      </p:sp>
+      <p:pic>
+        <p:nvPicPr>
+          <p:cNvPr id="4" name="Picture 3" descr="logotip-oficial-tecnocampus-upf-horitzontal-color.png"/>
+          <p:cNvPicPr>
+            <a:picLocks noChangeAspect="1"/>
+          </p:cNvPicPr>
+          <p:nvPr/>
+        </p:nvPicPr>
+        <p:blipFill>
+          <a:blip r:embed="rId2"/>
+          <a:stretch>
+            <a:fillRect/>
+          </a:stretch>
+        </p:blipFill>
+        <p:spPr>
+          <a:xfrm>
+            <a:off x="9738360" y="293025"/>
+            <a:ext cx="1783079" cy="337493"/>
+          </a:xfrm>
+          <a:prstGeom prst="rect">
+            <a:avLst/>
+          </a:prstGeom>
+        </p:spPr>
+      </p:pic>
+      <p:sp>
+        <p:nvSpPr>
+          <p:cNvPr id="5" name="Rectangle 4"/>
+          <p:cNvSpPr/>
+          <p:nvPr/>
+        </p:nvSpPr>
+        <p:spPr>
+          <a:xfrm>
+            <a:off x="594360" y="1115568"/>
+            <a:ext cx="10972800" cy="13716"/>
+          </a:xfrm>
+          <a:prstGeom prst="rect">
+            <a:avLst/>
+          </a:prstGeom>
+          <a:solidFill>
+            <a:srgbClr val="D6DBE0"/>
+          </a:solidFill>
+          <a:ln>
+            <a:noFill/>
+          </a:ln>
+        </p:spPr>
+        <p:style>
+          <a:lnRef idx="1">
+            <a:schemeClr val="accent1"/>
+          </a:lnRef>
+          <a:fillRef idx="3">
+            <a:schemeClr val="accent1"/>
+          </a:fillRef>
+          <a:effectRef idx="2">
+            <a:schemeClr val="accent1"/>
+          </a:effectRef>
+          <a:fontRef idx="minor">
+            <a:schemeClr val="lt1"/>
+          </a:fontRef>
+        </p:style>
+        <p:txBody>
+          <a:bodyPr rtlCol="0" anchor="ctr"/>
+          <a:lstStyle/>
+          <a:p>
+            <a:pPr algn="ctr"/>
+            <a:endParaRPr/>
+          </a:p>
+        </p:txBody>
+      </p:sp>
+      <p:pic>
+        <p:nvPicPr>
+          <p:cNvPr id="6" name="Picture 5" descr="before-after-comparison.png"/>
+          <p:cNvPicPr>
+            <a:picLocks noChangeAspect="1"/>
+          </p:cNvPicPr>
+          <p:nvPr/>
+        </p:nvPicPr>
+        <p:blipFill>
+          <a:blip r:embed="rId3"/>
+          <a:stretch>
+            <a:fillRect/>
+          </a:stretch>
+        </p:blipFill>
+        <p:spPr>
+          <a:xfrm>
+            <a:off x="685800" y="1391858"/>
+            <a:ext cx="7086600" cy="4485763"/>
+          </a:xfrm>
+          <a:prstGeom prst="rect">
+            <a:avLst/>
+          </a:prstGeom>
+        </p:spPr>
+      </p:pic>
+      <p:sp>
+        <p:nvSpPr>
+          <p:cNvPr id="7" name="TextBox 6"/>
+          <p:cNvSpPr txBox="1"/>
+          <p:nvPr/>
+        </p:nvSpPr>
+        <p:spPr>
+          <a:xfrm>
+            <a:off x="8183879" y="1874519"/>
+            <a:ext cx="2971800" cy="1737360"/>
+          </a:xfrm>
+          <a:prstGeom prst="rect">
+            <a:avLst/>
+          </a:prstGeom>
+          <a:noFill/>
+        </p:spPr>
+        <p:txBody>
+          <a:bodyPr wrap="square">
+            <a:normAutofit fontScale="92500" lnSpcReduction="10000"/>
+          </a:bodyPr>
+          <a:lstStyle/>
+          <a:p>
+            <a:pPr algn="ctr"/>
+            <a:r>
+              <a:rPr sz="2400" b="1">
+                <a:solidFill>
+                  <a:srgbClr val="192D3E"/>
+                </a:solidFill>
+                <a:latin typeface="Arial"/>
+              </a:rPr>
+              <a:t>Quan el proveïdor canvia, volem canviar l'adaptador, no el cas d'ús ni el model de domini.</a:t>
+            </a:r>
+          </a:p>
+        </p:txBody>
+      </p:sp>
+      <p:sp>
+        <p:nvSpPr>
+          <p:cNvPr id="8" name="TextBox 7"/>
+          <p:cNvSpPr txBox="1"/>
+          <p:nvPr/>
+        </p:nvSpPr>
+        <p:spPr>
+          <a:xfrm>
+            <a:off x="594360" y="6473952"/>
+            <a:ext cx="8595360" cy="201168"/>
+          </a:xfrm>
+          <a:prstGeom prst="rect">
+            <a:avLst/>
+          </a:prstGeom>
+          <a:noFill/>
+        </p:spPr>
+        <p:txBody>
+          <a:bodyPr wrap="square">
+            <a:normAutofit lnSpcReduction="10000"/>
+          </a:bodyPr>
+          <a:lstStyle/>
+          <a:p>
+            <a:pPr algn="l"/>
+            <a:r>
+              <a:rPr sz="800" b="0">
+                <a:solidFill>
+                  <a:srgbClr val="66707A"/>
+                </a:solidFill>
+                <a:latin typeface="Arial"/>
+              </a:rPr>
+              <a:t>Disseny de Sistemes d'Informació · Ports de sortida en arquitectura hexagonal</a:t>
+            </a:r>
+          </a:p>
+        </p:txBody>
+      </p:sp>
+      <p:sp>
+        <p:nvSpPr>
+          <p:cNvPr id="9" name="TextBox 8"/>
+          <p:cNvSpPr txBox="1"/>
+          <p:nvPr/>
+        </p:nvSpPr>
+        <p:spPr>
+          <a:xfrm>
+            <a:off x="11155680" y="6473952"/>
+            <a:ext cx="411480" cy="201168"/>
+          </a:xfrm>
+          <a:prstGeom prst="rect">
+            <a:avLst/>
+          </a:prstGeom>
+          <a:noFill/>
+        </p:spPr>
+        <p:txBody>
+          <a:bodyPr wrap="square">
+            <a:normAutofit lnSpcReduction="10000"/>
+          </a:bodyPr>
+          <a:lstStyle/>
+          <a:p>
+            <a:pPr algn="r"/>
+            <a:r>
+              <a:rPr sz="800" b="0">
+                <a:solidFill>
+                  <a:srgbClr val="66707A"/>
+                </a:solidFill>
+                <a:latin typeface="Arial"/>
+              </a:rPr>
+              <a:t>12</a:t>
+            </a:r>
+          </a:p>
+        </p:txBody>
+      </p:sp>
+    </p:spTree>
+  </p:cSld>
+  <p:clrMapOvr>
+    <a:masterClrMapping/>
+  </p:clrMapOvr>
+</p:sld>
+</file>
+
+<file path=ppt/slides/slide14.xml><?xml version="1.0" encoding="utf-8"?>
+<p:sld xmlns:a="http://schemas.openxmlformats.org/drawingml/2006/main" xmlns:r="http://schemas.openxmlformats.org/officeDocument/2006/relationships" xmlns:p="http://schemas.openxmlformats.org/presentationml/2006/main">
+  <p:cSld>
+    <p:spTree>
+      <p:nvGrpSpPr>
+        <p:cNvPr id="1" name=""/>
+        <p:cNvGrpSpPr/>
+        <p:nvPr/>
+      </p:nvGrpSpPr>
+      <p:grpSpPr>
+        <a:xfrm>
+          <a:off x="0" y="0"/>
+          <a:ext cx="0" cy="0"/>
+          <a:chOff x="0" y="0"/>
+          <a:chExt cx="0" cy="0"/>
+        </a:xfrm>
+      </p:grpSpPr>
+      <p:sp>
+        <p:nvSpPr>
+          <p:cNvPr id="2" name="TextBox 1"/>
+          <p:cNvSpPr txBox="1"/>
+          <p:nvPr/>
+        </p:nvSpPr>
+        <p:spPr>
+          <a:xfrm>
+            <a:off x="594360" y="320040"/>
+            <a:ext cx="8961120" cy="502920"/>
+          </a:xfrm>
+          <a:prstGeom prst="rect">
+            <a:avLst/>
+          </a:prstGeom>
+          <a:noFill/>
+        </p:spPr>
+        <p:txBody>
+          <a:bodyPr wrap="square">
+            <a:normAutofit lnSpcReduction="10000"/>
+          </a:bodyPr>
+          <a:lstStyle/>
+          <a:p>
+            <a:pPr algn="l"/>
+            <a:r>
+              <a:rPr sz="2800" b="1">
+                <a:solidFill>
+                  <a:srgbClr val="192D3E"/>
+                </a:solidFill>
+                <a:latin typeface="Arial"/>
+              </a:rPr>
+              <a:t>Agraïment</a:t>
+            </a:r>
+          </a:p>
+        </p:txBody>
+      </p:sp>
+      <p:pic>
+        <p:nvPicPr>
+          <p:cNvPr id="3" name="Picture 2" descr="logotip-oficial-tecnocampus-upf-horitzontal-color.png"/>
+          <p:cNvPicPr>
+            <a:picLocks noChangeAspect="1"/>
+          </p:cNvPicPr>
+          <p:nvPr/>
+        </p:nvPicPr>
+        <p:blipFill>
+          <a:blip r:embed="rId2"/>
+          <a:stretch>
+            <a:fillRect/>
+          </a:stretch>
+        </p:blipFill>
+        <p:spPr>
+          <a:xfrm>
+            <a:off x="9738360" y="293025"/>
+            <a:ext cx="1783079" cy="337493"/>
+          </a:xfrm>
+          <a:prstGeom prst="rect">
+            <a:avLst/>
+          </a:prstGeom>
+        </p:spPr>
+      </p:pic>
+      <p:sp>
+        <p:nvSpPr>
+          <p:cNvPr id="4" name="Rectangle 3"/>
+          <p:cNvSpPr/>
+          <p:nvPr/>
+        </p:nvSpPr>
+        <p:spPr>
+          <a:xfrm>
+            <a:off x="594360" y="1115568"/>
+            <a:ext cx="10972800" cy="13716"/>
+          </a:xfrm>
+          <a:prstGeom prst="rect">
+            <a:avLst/>
+          </a:prstGeom>
+          <a:solidFill>
+            <a:srgbClr val="D6DBE0"/>
+          </a:solidFill>
+          <a:ln>
+            <a:noFill/>
+          </a:ln>
+        </p:spPr>
+        <p:style>
+          <a:lnRef idx="1">
+            <a:schemeClr val="accent1"/>
+          </a:lnRef>
+          <a:fillRef idx="3">
+            <a:schemeClr val="accent1"/>
+          </a:fillRef>
+          <a:effectRef idx="2">
+            <a:schemeClr val="accent1"/>
+          </a:effectRef>
+          <a:fontRef idx="minor">
+            <a:schemeClr val="lt1"/>
+          </a:fontRef>
+        </p:style>
+        <p:txBody>
+          <a:bodyPr rtlCol="0" anchor="ctr"/>
+          <a:lstStyle/>
+          <a:p>
+            <a:pPr algn="ctr"/>
+            <a:endParaRPr/>
+          </a:p>
+        </p:txBody>
+      </p:sp>
+      <p:sp>
+        <p:nvSpPr>
+          <p:cNvPr id="5" name="TextBox 4"/>
+          <p:cNvSpPr txBox="1"/>
+          <p:nvPr/>
+        </p:nvSpPr>
+        <p:spPr>
+          <a:xfrm>
+            <a:off x="1234440" y="1600200"/>
+            <a:ext cx="9601200" cy="1005840"/>
+          </a:xfrm>
+          <a:prstGeom prst="rect">
+            <a:avLst/>
+          </a:prstGeom>
+          <a:noFill/>
+        </p:spPr>
+        <p:txBody>
+          <a:bodyPr wrap="square">
+            <a:normAutofit fontScale="92500" lnSpcReduction="10000"/>
+          </a:bodyPr>
+          <a:lstStyle/>
+          <a:p>
+            <a:pPr algn="ctr"/>
+            <a:r>
+              <a:rPr sz="2400" b="0">
+                <a:solidFill>
+                  <a:srgbClr val="192D3E"/>
+                </a:solidFill>
+                <a:latin typeface="Arial"/>
+              </a:rPr>
+              <a:t>Vull expressar el meu agraïment al TecnoCampus per l'oportunitat d'aprendre, créixer com a docent i transferir coneixement entre l'empresa i la universitat.</a:t>
+            </a:r>
+          </a:p>
+        </p:txBody>
+      </p:sp>
+      <p:sp>
+        <p:nvSpPr>
+          <p:cNvPr id="6" name="TextBox 5"/>
+          <p:cNvSpPr txBox="1"/>
+          <p:nvPr/>
+        </p:nvSpPr>
+        <p:spPr>
+          <a:xfrm>
+            <a:off x="1508760" y="2971800"/>
+            <a:ext cx="9052560" cy="685800"/>
+          </a:xfrm>
+          <a:prstGeom prst="rect">
+            <a:avLst/>
+          </a:prstGeom>
+          <a:noFill/>
+        </p:spPr>
+        <p:txBody>
+          <a:bodyPr wrap="square">
+            <a:normAutofit lnSpcReduction="10000"/>
+          </a:bodyPr>
+          <a:lstStyle/>
+          <a:p>
+            <a:pPr algn="ctr"/>
+            <a:r>
+              <a:rPr sz="2100" b="0">
+                <a:solidFill>
+                  <a:srgbClr val="262626"/>
+                </a:solidFill>
+                <a:latin typeface="Arial"/>
+              </a:rPr>
+              <a:t>Aquesta experiència m'ha permès portar casos reals, criteri professional i arquitectura aplicada a l'aula.</a:t>
+            </a:r>
+          </a:p>
+        </p:txBody>
+      </p:sp>
+      <p:sp>
+        <p:nvSpPr>
+          <p:cNvPr id="7" name="Rounded Rectangle 6"/>
+          <p:cNvSpPr/>
+          <p:nvPr/>
+        </p:nvSpPr>
+        <p:spPr>
+          <a:xfrm>
+            <a:off x="1965960" y="4343400"/>
+            <a:ext cx="8275320" cy="914400"/>
+          </a:xfrm>
+          <a:prstGeom prst="roundRect">
+            <a:avLst/>
+          </a:prstGeom>
+          <a:solidFill>
+            <a:srgbClr val="F7F8FA"/>
+          </a:solidFill>
+          <a:ln w="9525">
+            <a:solidFill>
+              <a:srgbClr val="DCE0E4"/>
+            </a:solidFill>
+          </a:ln>
+        </p:spPr>
+        <p:style>
+          <a:lnRef idx="1">
+            <a:schemeClr val="accent1"/>
+          </a:lnRef>
+          <a:fillRef idx="3">
+            <a:schemeClr val="accent1"/>
+          </a:fillRef>
+          <a:effectRef idx="2">
+            <a:schemeClr val="accent1"/>
+          </a:effectRef>
+          <a:fontRef idx="minor">
+            <a:schemeClr val="lt1"/>
+          </a:fontRef>
+        </p:style>
+        <p:txBody>
+          <a:bodyPr rtlCol="0" anchor="ctr"/>
+          <a:lstStyle/>
+          <a:p>
+            <a:pPr algn="ctr"/>
+            <a:endParaRPr/>
+          </a:p>
+        </p:txBody>
+      </p:sp>
+      <p:sp>
+        <p:nvSpPr>
+          <p:cNvPr id="8" name="TextBox 7"/>
+          <p:cNvSpPr txBox="1"/>
+          <p:nvPr/>
+        </p:nvSpPr>
+        <p:spPr>
+          <a:xfrm>
+            <a:off x="2240280" y="4553712"/>
+            <a:ext cx="7726679" cy="438912"/>
+          </a:xfrm>
+          <a:prstGeom prst="rect">
+            <a:avLst/>
+          </a:prstGeom>
+          <a:noFill/>
+        </p:spPr>
+        <p:txBody>
+          <a:bodyPr wrap="square">
+            <a:normAutofit fontScale="85000" lnSpcReduction="20000"/>
+          </a:bodyPr>
+          <a:lstStyle/>
+          <a:p>
+            <a:pPr algn="ctr"/>
+            <a:r>
+              <a:rPr sz="1600" b="0">
+                <a:solidFill>
+                  <a:srgbClr val="192D3E"/>
+                </a:solidFill>
+                <a:latin typeface="Arial"/>
+              </a:rPr>
+              <a:t>Agraïment especial al Dr. Josep Roure, company professor del TecnoCampus, amb qui he tingut l'oportunitat d'aprendre molt sobre arquitectura i software.</a:t>
+            </a:r>
+          </a:p>
+        </p:txBody>
+      </p:sp>
+      <p:sp>
+        <p:nvSpPr>
+          <p:cNvPr id="9" name="TextBox 8"/>
+          <p:cNvSpPr txBox="1"/>
+          <p:nvPr/>
+        </p:nvSpPr>
+        <p:spPr>
+          <a:xfrm>
+            <a:off x="594360" y="6473952"/>
+            <a:ext cx="8595360" cy="201168"/>
+          </a:xfrm>
+          <a:prstGeom prst="rect">
+            <a:avLst/>
+          </a:prstGeom>
+          <a:noFill/>
+        </p:spPr>
+        <p:txBody>
+          <a:bodyPr wrap="square">
+            <a:normAutofit lnSpcReduction="10000"/>
+          </a:bodyPr>
+          <a:lstStyle/>
+          <a:p>
+            <a:pPr algn="l"/>
+            <a:r>
+              <a:rPr sz="800" b="0">
+                <a:solidFill>
+                  <a:srgbClr val="66707A"/>
+                </a:solidFill>
+                <a:latin typeface="Arial"/>
+              </a:rPr>
+              <a:t>Disseny de Sistemes d'Informació · Ports de sortida en arquitectura hexagonal</a:t>
+            </a:r>
+          </a:p>
+        </p:txBody>
+      </p:sp>
+      <p:sp>
+        <p:nvSpPr>
+          <p:cNvPr id="10" name="TextBox 9"/>
+          <p:cNvSpPr txBox="1"/>
+          <p:nvPr/>
+        </p:nvSpPr>
+        <p:spPr>
+          <a:xfrm>
+            <a:off x="11155680" y="6473952"/>
+            <a:ext cx="411480" cy="201168"/>
+          </a:xfrm>
+          <a:prstGeom prst="rect">
+            <a:avLst/>
+          </a:prstGeom>
+          <a:noFill/>
+        </p:spPr>
+        <p:txBody>
+          <a:bodyPr wrap="square">
+            <a:normAutofit lnSpcReduction="10000"/>
+          </a:bodyPr>
+          <a:lstStyle/>
+          <a:p>
+            <a:pPr algn="r"/>
+            <a:r>
+              <a:rPr sz="800" b="0">
+                <a:solidFill>
+                  <a:srgbClr val="66707A"/>
+                </a:solidFill>
+                <a:latin typeface="Arial"/>
+              </a:rPr>
+              <a:t>13</a:t>
             </a:r>
           </a:p>
         </p:txBody>
@@ -4154,7 +5566,7 @@
         </p:spPr>
         <p:txBody>
           <a:bodyPr wrap="square">
-            <a:normAutofit/>
+            <a:normAutofit lnSpcReduction="10000"/>
           </a:bodyPr>
           <a:lstStyle/>
           <a:p>
@@ -4222,8 +5634,8 @@
         </p:blipFill>
         <p:spPr>
           <a:xfrm>
-            <a:off x="9738360" y="293025"/>
-            <a:ext cx="1783079" cy="337493"/>
+            <a:off x="8480078" y="293025"/>
+            <a:ext cx="3041362" cy="575655"/>
           </a:xfrm>
           <a:prstGeom prst="rect">
             <a:avLst/>
@@ -4282,8 +5694,8 @@
         </p:nvSpPr>
         <p:spPr>
           <a:xfrm>
-            <a:off x="731520" y="1353312"/>
-            <a:ext cx="10607040" cy="438912"/>
+            <a:off x="822960" y="1508760"/>
+            <a:ext cx="3749039" cy="914400"/>
           </a:xfrm>
           <a:prstGeom prst="rect">
             <a:avLst/>
@@ -4292,78 +5704,44 @@
         </p:spPr>
         <p:txBody>
           <a:bodyPr wrap="square">
-            <a:normAutofit/>
+            <a:normAutofit fontScale="77500" lnSpcReduction="20000"/>
           </a:bodyPr>
           <a:lstStyle/>
           <a:p>
-            <a:pPr algn="l"/>
-            <a:r>
-              <a:rPr sz="1600" b="1">
+            <a:pPr algn="ctr"/>
+            <a:r>
+              <a:rPr sz="2800" b="1">
                 <a:solidFill>
                   <a:srgbClr val="192D3E"/>
                 </a:solidFill>
                 <a:latin typeface="Arial"/>
               </a:rPr>
-              <a:t>Guia docent oficial 2025/26: assignatura 103322, tercer curs, segon trimestre, 6 ECTS. Professorat: Josep Roure Alcobé i Alfredo Rueda Unsain.</a:t>
-            </a:r>
-          </a:p>
-        </p:txBody>
-      </p:sp>
-      <p:sp>
-        <p:nvSpPr>
-          <p:cNvPr id="7" name="TextBox 6"/>
-          <p:cNvSpPr txBox="1"/>
-          <p:nvPr/>
-        </p:nvSpPr>
-        <p:spPr>
-          <a:xfrm>
-            <a:off x="731520" y="1847088"/>
-            <a:ext cx="10607040" cy="621792"/>
-          </a:xfrm>
-          <a:prstGeom prst="rect">
-            <a:avLst/>
-          </a:prstGeom>
-          <a:noFill/>
-        </p:spPr>
-        <p:txBody>
-          <a:bodyPr wrap="square">
-            <a:normAutofit/>
-          </a:bodyPr>
-          <a:lstStyle/>
-          <a:p>
-            <a:pPr algn="l"/>
-            <a:r>
-              <a:rPr sz="1800" b="0">
-                <a:solidFill>
-                  <a:srgbClr val="262626"/>
-                </a:solidFill>
-                <a:latin typeface="Arial"/>
-              </a:rPr>
-              <a:t>No explicarem tota l'arquitectura hexagonal. Ens centrarem en una decisió concreta: consumir APIs externes sense acoblar casos d'ús i domini a la infraestructura.</a:t>
-            </a:r>
-          </a:p>
-        </p:txBody>
-      </p:sp>
-      <p:sp>
-        <p:nvSpPr>
-          <p:cNvPr id="8" name="Rounded Rectangle 7"/>
+              <a:t>Disseny de Sistemes d'Informació
+3r curs · 6 ECTS</a:t>
+            </a:r>
+          </a:p>
+        </p:txBody>
+      </p:sp>
+      <p:sp>
+        <p:nvSpPr>
+          <p:cNvPr id="7" name="Rounded Rectangle 6"/>
           <p:cNvSpPr/>
           <p:nvPr/>
         </p:nvSpPr>
         <p:spPr>
           <a:xfrm>
-            <a:off x="960120" y="2697480"/>
-            <a:ext cx="9875520" cy="347472"/>
+            <a:off x="4800600" y="1508760"/>
+            <a:ext cx="45720" cy="3200400"/>
           </a:xfrm>
           <a:prstGeom prst="roundRect">
             <a:avLst/>
           </a:prstGeom>
           <a:solidFill>
-            <a:srgbClr val="F7F8FA"/>
+            <a:srgbClr val="236092"/>
           </a:solidFill>
           <a:ln w="9525">
             <a:solidFill>
-              <a:srgbClr val="DCE0E4"/>
+              <a:srgbClr val="236092"/>
             </a:solidFill>
           </a:ln>
         </p:spPr>
@@ -4392,14 +5770,14 @@
       </p:sp>
       <p:sp>
         <p:nvSpPr>
-          <p:cNvPr id="9" name="TextBox 8"/>
+          <p:cNvPr id="8" name="TextBox 7"/>
           <p:cNvSpPr txBox="1"/>
           <p:nvPr/>
         </p:nvSpPr>
         <p:spPr>
           <a:xfrm>
-            <a:off x="1170432" y="2747772"/>
-            <a:ext cx="9235440" cy="219456"/>
+            <a:off x="5166360" y="1508760"/>
+            <a:ext cx="5394960" cy="1051560"/>
           </a:xfrm>
           <a:prstGeom prst="rect">
             <a:avLst/>
@@ -4412,75 +5790,270 @@
           </a:bodyPr>
           <a:lstStyle/>
           <a:p>
-            <a:pPr algn="l"/>
-            <a:r>
-              <a:rPr sz="1400" b="0">
+            <a:pPr algn="ctr"/>
+            <a:r>
+              <a:rPr sz="3000" b="1" dirty="0">
+                <a:solidFill>
+                  <a:srgbClr val="192D3E"/>
+                </a:solidFill>
+                <a:latin typeface="Arial"/>
+              </a:rPr>
+              <a:t>Ports de </a:t>
+            </a:r>
+            <a:r>
+              <a:rPr sz="3000" b="1" dirty="0" err="1">
+                <a:solidFill>
+                  <a:srgbClr val="192D3E"/>
+                </a:solidFill>
+                <a:latin typeface="Arial"/>
+              </a:rPr>
+              <a:t>sortida</a:t>
+            </a:r>
+            <a:r>
+              <a:rPr sz="3000" b="1" dirty="0">
+                <a:solidFill>
+                  <a:srgbClr val="192D3E"/>
+                </a:solidFill>
+                <a:latin typeface="Arial"/>
+              </a:rPr>
+              <a:t>
+</a:t>
+            </a:r>
+            <a:r>
+              <a:rPr sz="3000" b="1" dirty="0" err="1">
+                <a:solidFill>
+                  <a:srgbClr val="192D3E"/>
+                </a:solidFill>
+                <a:latin typeface="Arial"/>
+              </a:rPr>
+              <a:t>en</a:t>
+            </a:r>
+            <a:r>
+              <a:rPr sz="3000" b="1" dirty="0">
+                <a:solidFill>
+                  <a:srgbClr val="192D3E"/>
+                </a:solidFill>
+                <a:latin typeface="Arial"/>
+              </a:rPr>
+              <a:t> </a:t>
+            </a:r>
+            <a:r>
+              <a:rPr sz="3000" b="1" dirty="0" err="1">
+                <a:solidFill>
+                  <a:srgbClr val="192D3E"/>
+                </a:solidFill>
+                <a:latin typeface="Arial"/>
+              </a:rPr>
+              <a:t>arquitectura</a:t>
+            </a:r>
+            <a:r>
+              <a:rPr sz="3000" b="1" dirty="0">
+                <a:solidFill>
+                  <a:srgbClr val="192D3E"/>
+                </a:solidFill>
+                <a:latin typeface="Arial"/>
+              </a:rPr>
+              <a:t> hexagonal</a:t>
+            </a:r>
+          </a:p>
+        </p:txBody>
+      </p:sp>
+      <p:sp>
+        <p:nvSpPr>
+          <p:cNvPr id="9" name="TextBox 8"/>
+          <p:cNvSpPr txBox="1"/>
+          <p:nvPr/>
+        </p:nvSpPr>
+        <p:spPr>
+          <a:xfrm>
+            <a:off x="5394960" y="2971800"/>
+            <a:ext cx="4983480" cy="1143000"/>
+          </a:xfrm>
+          <a:prstGeom prst="rect">
+            <a:avLst/>
+          </a:prstGeom>
+          <a:noFill/>
+        </p:spPr>
+        <p:txBody>
+          <a:bodyPr wrap="square">
+            <a:normAutofit fontScale="77500" lnSpcReduction="20000"/>
+          </a:bodyPr>
+          <a:lstStyle/>
+          <a:p>
+            <a:pPr algn="ctr"/>
+            <a:r>
+              <a:rPr sz="2200" b="0" dirty="0">
                 <a:solidFill>
                   <a:srgbClr val="262626"/>
                 </a:solidFill>
                 <a:latin typeface="Arial"/>
               </a:rPr>
-              <a:t>1. Arquitectura per capes i limitacions</a:t>
-            </a:r>
-          </a:p>
-        </p:txBody>
-      </p:sp>
-      <p:sp>
-        <p:nvSpPr>
-          <p:cNvPr id="10" name="Rounded Rectangle 9"/>
-          <p:cNvSpPr/>
-          <p:nvPr/>
-        </p:nvSpPr>
-        <p:spPr>
-          <a:xfrm>
-            <a:off x="960120" y="3154680"/>
-            <a:ext cx="9875520" cy="347472"/>
-          </a:xfrm>
-          <a:prstGeom prst="roundRect">
-            <a:avLst/>
-          </a:prstGeom>
-          <a:solidFill>
-            <a:srgbClr val="F7F8FA"/>
-          </a:solidFill>
-          <a:ln w="9525">
-            <a:solidFill>
-              <a:srgbClr val="DCE0E4"/>
-            </a:solidFill>
-          </a:ln>
-        </p:spPr>
-        <p:style>
-          <a:lnRef idx="1">
-            <a:schemeClr val="accent1"/>
-          </a:lnRef>
-          <a:fillRef idx="3">
-            <a:schemeClr val="accent1"/>
-          </a:fillRef>
-          <a:effectRef idx="2">
-            <a:schemeClr val="accent1"/>
-          </a:effectRef>
-          <a:fontRef idx="minor">
-            <a:schemeClr val="lt1"/>
-          </a:fontRef>
-        </p:style>
-        <p:txBody>
-          <a:bodyPr rtlCol="0" anchor="ctr"/>
-          <a:lstStyle/>
-          <a:p>
-            <a:pPr algn="ctr"/>
-            <a:endParaRPr/>
-          </a:p>
-        </p:txBody>
-      </p:sp>
-      <p:sp>
-        <p:nvSpPr>
-          <p:cNvPr id="11" name="TextBox 10"/>
+              <a:t>
+Ens </a:t>
+            </a:r>
+            <a:r>
+              <a:rPr sz="2200" b="0" dirty="0" err="1">
+                <a:solidFill>
+                  <a:srgbClr val="262626"/>
+                </a:solidFill>
+                <a:latin typeface="Arial"/>
+              </a:rPr>
+              <a:t>centr</a:t>
+            </a:r>
+            <a:r>
+              <a:rPr lang="es-ES" sz="2200" b="0" dirty="0">
+                <a:solidFill>
+                  <a:srgbClr val="262626"/>
+                </a:solidFill>
+                <a:latin typeface="Arial"/>
+              </a:rPr>
+              <a:t>are</a:t>
+            </a:r>
+            <a:r>
+              <a:rPr sz="2200" b="0" dirty="0">
+                <a:solidFill>
+                  <a:srgbClr val="262626"/>
+                </a:solidFill>
+                <a:latin typeface="Arial"/>
+              </a:rPr>
+              <a:t>m </a:t>
+            </a:r>
+            <a:r>
+              <a:rPr sz="2200" b="0" dirty="0" err="1">
+                <a:solidFill>
+                  <a:srgbClr val="262626"/>
+                </a:solidFill>
+                <a:latin typeface="Arial"/>
+              </a:rPr>
+              <a:t>en</a:t>
+            </a:r>
+            <a:r>
+              <a:rPr sz="2200" b="0" dirty="0">
+                <a:solidFill>
+                  <a:srgbClr val="262626"/>
+                </a:solidFill>
+                <a:latin typeface="Arial"/>
+              </a:rPr>
+              <a:t> </a:t>
+            </a:r>
+            <a:r>
+              <a:rPr lang="es-ES" sz="2200" b="0" dirty="0">
+                <a:solidFill>
+                  <a:srgbClr val="262626"/>
+                </a:solidFill>
+                <a:latin typeface="Arial"/>
+              </a:rPr>
+              <a:t>el </a:t>
+            </a:r>
+            <a:r>
+              <a:rPr lang="es-ES" sz="2200" b="0" dirty="0" err="1">
+                <a:solidFill>
+                  <a:srgbClr val="262626"/>
+                </a:solidFill>
+                <a:latin typeface="Arial"/>
+              </a:rPr>
+              <a:t>disseny</a:t>
+            </a:r>
+            <a:r>
+              <a:rPr lang="es-ES" sz="2200" b="0" dirty="0">
+                <a:solidFill>
+                  <a:srgbClr val="262626"/>
+                </a:solidFill>
+                <a:latin typeface="Arial"/>
+              </a:rPr>
+              <a:t> de </a:t>
+            </a:r>
+            <a:r>
+              <a:rPr lang="es-ES" sz="2200" b="0" dirty="0" err="1">
+                <a:solidFill>
+                  <a:srgbClr val="262626"/>
+                </a:solidFill>
+                <a:latin typeface="Arial"/>
+              </a:rPr>
+              <a:t>ports</a:t>
+            </a:r>
+            <a:r>
+              <a:rPr lang="es-ES" sz="2200" b="0" dirty="0">
+                <a:solidFill>
+                  <a:srgbClr val="262626"/>
+                </a:solidFill>
+                <a:latin typeface="Arial"/>
+              </a:rPr>
+              <a:t> de </a:t>
+            </a:r>
+            <a:r>
+              <a:rPr lang="es-ES" sz="2200" b="0" dirty="0" err="1">
+                <a:solidFill>
+                  <a:srgbClr val="262626"/>
+                </a:solidFill>
+                <a:latin typeface="Arial"/>
+              </a:rPr>
+              <a:t>sortida</a:t>
+            </a:r>
+            <a:r>
+              <a:rPr lang="es-ES" sz="2200" b="0" dirty="0">
+                <a:solidFill>
+                  <a:srgbClr val="262626"/>
+                </a:solidFill>
+                <a:latin typeface="Arial"/>
+              </a:rPr>
+              <a:t> per interactuar </a:t>
+            </a:r>
+            <a:r>
+              <a:rPr lang="es-ES" sz="2200" b="0" dirty="0" err="1">
+                <a:solidFill>
+                  <a:srgbClr val="262626"/>
+                </a:solidFill>
+                <a:latin typeface="Arial"/>
+              </a:rPr>
+              <a:t>amb</a:t>
+            </a:r>
+            <a:r>
+              <a:rPr lang="es-ES" sz="2200" b="0" dirty="0">
+                <a:solidFill>
+                  <a:srgbClr val="262626"/>
+                </a:solidFill>
+                <a:latin typeface="Arial"/>
+              </a:rPr>
+              <a:t> </a:t>
+            </a:r>
+            <a:r>
+              <a:rPr lang="es-ES" sz="2200" b="0" dirty="0" err="1">
+                <a:solidFill>
+                  <a:srgbClr val="262626"/>
+                </a:solidFill>
+                <a:latin typeface="Arial"/>
+              </a:rPr>
+              <a:t>APIs</a:t>
+            </a:r>
+            <a:r>
+              <a:rPr lang="es-ES" sz="2200" b="0" dirty="0">
+                <a:solidFill>
+                  <a:srgbClr val="262626"/>
+                </a:solidFill>
+                <a:latin typeface="Arial"/>
+              </a:rPr>
+              <a:t> externes de manera desacoplada. </a:t>
+            </a:r>
+            <a:endParaRPr sz="2200" b="0" dirty="0">
+              <a:solidFill>
+                <a:srgbClr val="262626"/>
+              </a:solidFill>
+              <a:latin typeface="Arial"/>
+            </a:endParaRPr>
+          </a:p>
+        </p:txBody>
+      </p:sp>
+      <p:sp>
+        <p:nvSpPr>
+          <p:cNvPr id="10" name="TextBox 9"/>
           <p:cNvSpPr txBox="1"/>
           <p:nvPr/>
         </p:nvSpPr>
         <p:spPr>
           <a:xfrm>
-            <a:off x="1170432" y="3204972"/>
-            <a:ext cx="9235440" cy="219456"/>
+            <a:off x="960120" y="5669280"/>
+            <a:ext cx="9875520" cy="320040"/>
           </a:xfrm>
           <a:prstGeom prst="rect">
             <a:avLst/>
@@ -4493,381 +6066,22 @@
           </a:bodyPr>
           <a:lstStyle/>
           <a:p>
-            <a:pPr algn="l"/>
-            <a:r>
-              <a:rPr sz="1400" b="0">
-                <a:solidFill>
-                  <a:srgbClr val="262626"/>
-                </a:solidFill>
-                <a:latin typeface="Arial"/>
-              </a:rPr>
-              <a:t>2. Introducció a Clean / Hexagonal Architecture</a:t>
-            </a:r>
-          </a:p>
-        </p:txBody>
-      </p:sp>
-      <p:sp>
-        <p:nvSpPr>
-          <p:cNvPr id="12" name="Rounded Rectangle 11"/>
-          <p:cNvSpPr/>
-          <p:nvPr/>
-        </p:nvSpPr>
-        <p:spPr>
-          <a:xfrm>
-            <a:off x="960120" y="3611880"/>
-            <a:ext cx="9875520" cy="347472"/>
-          </a:xfrm>
-          <a:prstGeom prst="roundRect">
-            <a:avLst/>
-          </a:prstGeom>
-          <a:solidFill>
-            <a:srgbClr val="F7F8FA"/>
-          </a:solidFill>
-          <a:ln w="9525">
-            <a:solidFill>
-              <a:srgbClr val="DCE0E4"/>
-            </a:solidFill>
-          </a:ln>
-        </p:spPr>
-        <p:style>
-          <a:lnRef idx="1">
-            <a:schemeClr val="accent1"/>
-          </a:lnRef>
-          <a:fillRef idx="3">
-            <a:schemeClr val="accent1"/>
-          </a:fillRef>
-          <a:effectRef idx="2">
-            <a:schemeClr val="accent1"/>
-          </a:effectRef>
-          <a:fontRef idx="minor">
-            <a:schemeClr val="lt1"/>
-          </a:fontRef>
-        </p:style>
-        <p:txBody>
-          <a:bodyPr rtlCol="0" anchor="ctr"/>
-          <a:lstStyle/>
-          <a:p>
             <a:pPr algn="ctr"/>
-            <a:endParaRPr/>
-          </a:p>
-        </p:txBody>
-      </p:sp>
-      <p:sp>
-        <p:nvSpPr>
-          <p:cNvPr id="13" name="TextBox 12"/>
-          <p:cNvSpPr txBox="1"/>
-          <p:nvPr/>
-        </p:nvSpPr>
-        <p:spPr>
-          <a:xfrm>
-            <a:off x="1170432" y="3662172"/>
-            <a:ext cx="9235440" cy="219456"/>
-          </a:xfrm>
-          <a:prstGeom prst="rect">
-            <a:avLst/>
-          </a:prstGeom>
-          <a:noFill/>
-        </p:spPr>
-        <p:txBody>
-          <a:bodyPr wrap="square">
-            <a:normAutofit/>
-          </a:bodyPr>
-          <a:lstStyle/>
-          <a:p>
-            <a:pPr algn="l"/>
-            <a:r>
-              <a:rPr sz="1400" b="0">
-                <a:solidFill>
-                  <a:srgbClr val="262626"/>
-                </a:solidFill>
-                <a:latin typeface="Arial"/>
-              </a:rPr>
-              <a:t>3. Ports i adaptadors</a:t>
-            </a:r>
-          </a:p>
-        </p:txBody>
-      </p:sp>
-      <p:sp>
-        <p:nvSpPr>
-          <p:cNvPr id="14" name="Rounded Rectangle 13"/>
-          <p:cNvSpPr/>
-          <p:nvPr/>
-        </p:nvSpPr>
-        <p:spPr>
-          <a:xfrm>
-            <a:off x="960120" y="4069080"/>
-            <a:ext cx="9875520" cy="347472"/>
-          </a:xfrm>
-          <a:prstGeom prst="roundRect">
-            <a:avLst/>
-          </a:prstGeom>
-          <a:solidFill>
-            <a:srgbClr val="E8F1F8"/>
-          </a:solidFill>
-          <a:ln w="9525">
-            <a:solidFill>
-              <a:srgbClr val="DCE0E4"/>
-            </a:solidFill>
-          </a:ln>
-        </p:spPr>
-        <p:style>
-          <a:lnRef idx="1">
-            <a:schemeClr val="accent1"/>
-          </a:lnRef>
-          <a:fillRef idx="3">
-            <a:schemeClr val="accent1"/>
-          </a:fillRef>
-          <a:effectRef idx="2">
-            <a:schemeClr val="accent1"/>
-          </a:effectRef>
-          <a:fontRef idx="minor">
-            <a:schemeClr val="lt1"/>
-          </a:fontRef>
-        </p:style>
-        <p:txBody>
-          <a:bodyPr rtlCol="0" anchor="ctr"/>
-          <a:lstStyle/>
-          <a:p>
-            <a:pPr algn="ctr"/>
-            <a:endParaRPr/>
-          </a:p>
-        </p:txBody>
-      </p:sp>
-      <p:sp>
-        <p:nvSpPr>
-          <p:cNvPr id="15" name="TextBox 14"/>
-          <p:cNvSpPr txBox="1"/>
-          <p:nvPr/>
-        </p:nvSpPr>
-        <p:spPr>
-          <a:xfrm>
-            <a:off x="1170432" y="4119372"/>
-            <a:ext cx="9235440" cy="219456"/>
-          </a:xfrm>
-          <a:prstGeom prst="rect">
-            <a:avLst/>
-          </a:prstGeom>
-          <a:noFill/>
-        </p:spPr>
-        <p:txBody>
-          <a:bodyPr wrap="square">
-            <a:normAutofit/>
-          </a:bodyPr>
-          <a:lstStyle/>
-          <a:p>
-            <a:pPr algn="l"/>
-            <a:r>
-              <a:rPr sz="1400" b="1">
-                <a:solidFill>
-                  <a:srgbClr val="192D3E"/>
-                </a:solidFill>
-                <a:latin typeface="Arial"/>
-              </a:rPr>
-              <a:t>4. Ports de sortida per a integracions externes</a:t>
-            </a:r>
-          </a:p>
-        </p:txBody>
-      </p:sp>
-      <p:sp>
-        <p:nvSpPr>
-          <p:cNvPr id="16" name="Rounded Rectangle 15"/>
-          <p:cNvSpPr/>
-          <p:nvPr/>
-        </p:nvSpPr>
-        <p:spPr>
-          <a:xfrm>
-            <a:off x="960120" y="4526280"/>
-            <a:ext cx="9875520" cy="347472"/>
-          </a:xfrm>
-          <a:prstGeom prst="roundRect">
-            <a:avLst/>
-          </a:prstGeom>
-          <a:solidFill>
-            <a:srgbClr val="F7F8FA"/>
-          </a:solidFill>
-          <a:ln w="9525">
-            <a:solidFill>
-              <a:srgbClr val="DCE0E4"/>
-            </a:solidFill>
-          </a:ln>
-        </p:spPr>
-        <p:style>
-          <a:lnRef idx="1">
-            <a:schemeClr val="accent1"/>
-          </a:lnRef>
-          <a:fillRef idx="3">
-            <a:schemeClr val="accent1"/>
-          </a:fillRef>
-          <a:effectRef idx="2">
-            <a:schemeClr val="accent1"/>
-          </a:effectRef>
-          <a:fontRef idx="minor">
-            <a:schemeClr val="lt1"/>
-          </a:fontRef>
-        </p:style>
-        <p:txBody>
-          <a:bodyPr rtlCol="0" anchor="ctr"/>
-          <a:lstStyle/>
-          <a:p>
-            <a:pPr algn="ctr"/>
-            <a:endParaRPr/>
-          </a:p>
-        </p:txBody>
-      </p:sp>
-      <p:sp>
-        <p:nvSpPr>
-          <p:cNvPr id="17" name="TextBox 16"/>
-          <p:cNvSpPr txBox="1"/>
-          <p:nvPr/>
-        </p:nvSpPr>
-        <p:spPr>
-          <a:xfrm>
-            <a:off x="1170432" y="4576572"/>
-            <a:ext cx="9235440" cy="219456"/>
-          </a:xfrm>
-          <a:prstGeom prst="rect">
-            <a:avLst/>
-          </a:prstGeom>
-          <a:noFill/>
-        </p:spPr>
-        <p:txBody>
-          <a:bodyPr wrap="square">
-            <a:normAutofit/>
-          </a:bodyPr>
-          <a:lstStyle/>
-          <a:p>
-            <a:pPr algn="l"/>
-            <a:r>
-              <a:rPr sz="1400" b="0">
-                <a:solidFill>
-                  <a:srgbClr val="262626"/>
-                </a:solidFill>
-                <a:latin typeface="Arial"/>
-              </a:rPr>
-              <a:t>5. Testing, mocks i substitució d'infraestructura</a:t>
-            </a:r>
-          </a:p>
-        </p:txBody>
-      </p:sp>
-      <p:sp>
-        <p:nvSpPr>
-          <p:cNvPr id="18" name="Rounded Rectangle 17"/>
-          <p:cNvSpPr/>
-          <p:nvPr/>
-        </p:nvSpPr>
-        <p:spPr>
-          <a:xfrm>
-            <a:off x="960120" y="4983480"/>
-            <a:ext cx="9875520" cy="347472"/>
-          </a:xfrm>
-          <a:prstGeom prst="roundRect">
-            <a:avLst/>
-          </a:prstGeom>
-          <a:solidFill>
-            <a:srgbClr val="F7F8FA"/>
-          </a:solidFill>
-          <a:ln w="9525">
-            <a:solidFill>
-              <a:srgbClr val="DCE0E4"/>
-            </a:solidFill>
-          </a:ln>
-        </p:spPr>
-        <p:style>
-          <a:lnRef idx="1">
-            <a:schemeClr val="accent1"/>
-          </a:lnRef>
-          <a:fillRef idx="3">
-            <a:schemeClr val="accent1"/>
-          </a:fillRef>
-          <a:effectRef idx="2">
-            <a:schemeClr val="accent1"/>
-          </a:effectRef>
-          <a:fontRef idx="minor">
-            <a:schemeClr val="lt1"/>
-          </a:fontRef>
-        </p:style>
-        <p:txBody>
-          <a:bodyPr rtlCol="0" anchor="ctr"/>
-          <a:lstStyle/>
-          <a:p>
-            <a:pPr algn="ctr"/>
-            <a:endParaRPr/>
-          </a:p>
-        </p:txBody>
-      </p:sp>
-      <p:sp>
-        <p:nvSpPr>
-          <p:cNvPr id="19" name="TextBox 18"/>
-          <p:cNvSpPr txBox="1"/>
-          <p:nvPr/>
-        </p:nvSpPr>
-        <p:spPr>
-          <a:xfrm>
-            <a:off x="1170432" y="5033772"/>
-            <a:ext cx="9235440" cy="219456"/>
-          </a:xfrm>
-          <a:prstGeom prst="rect">
-            <a:avLst/>
-          </a:prstGeom>
-          <a:noFill/>
-        </p:spPr>
-        <p:txBody>
-          <a:bodyPr wrap="square">
-            <a:normAutofit/>
-          </a:bodyPr>
-          <a:lstStyle/>
-          <a:p>
-            <a:pPr algn="l"/>
-            <a:r>
-              <a:rPr sz="1400" b="0">
-                <a:solidFill>
-                  <a:srgbClr val="262626"/>
-                </a:solidFill>
-                <a:latin typeface="Arial"/>
-              </a:rPr>
-              <a:t>6. Microserveis i DDD</a:t>
-            </a:r>
-          </a:p>
-        </p:txBody>
-      </p:sp>
-      <p:sp>
-        <p:nvSpPr>
-          <p:cNvPr id="20" name="TextBox 19"/>
-          <p:cNvSpPr txBox="1"/>
-          <p:nvPr/>
-        </p:nvSpPr>
-        <p:spPr>
-          <a:xfrm>
-            <a:off x="960120" y="5715000"/>
-            <a:ext cx="9875520" cy="292608"/>
-          </a:xfrm>
-          <a:prstGeom prst="rect">
-            <a:avLst/>
-          </a:prstGeom>
-          <a:noFill/>
-        </p:spPr>
-        <p:txBody>
-          <a:bodyPr wrap="square">
-            <a:normAutofit/>
-          </a:bodyPr>
-          <a:lstStyle/>
-          <a:p>
-            <a:pPr algn="ctr"/>
-            <a:r>
-              <a:rPr sz="1200" b="0">
+            <a:r>
+              <a:rPr sz="1300" b="0">
                 <a:solidFill>
                   <a:srgbClr val="66707A"/>
                 </a:solidFill>
                 <a:latin typeface="Arial"/>
               </a:rPr>
-              <a:t>Blocs oficials del temari: clean/hexagonal, ports i adaptadors, mapping, mòduls, microserveis i DDD.</a:t>
-            </a:r>
-          </a:p>
-        </p:txBody>
-      </p:sp>
-      <p:sp>
-        <p:nvSpPr>
-          <p:cNvPr id="21" name="TextBox 20"/>
+              <a:t>Microlliçó dins el bloc de clean / hexagonal architecture, ports, adaptadors i DDD.</a:t>
+            </a:r>
+          </a:p>
+        </p:txBody>
+      </p:sp>
+      <p:sp>
+        <p:nvSpPr>
+          <p:cNvPr id="11" name="TextBox 10"/>
           <p:cNvSpPr txBox="1"/>
           <p:nvPr/>
         </p:nvSpPr>
@@ -4883,7 +6097,7 @@
         </p:spPr>
         <p:txBody>
           <a:bodyPr wrap="square">
-            <a:normAutofit/>
+            <a:normAutofit lnSpcReduction="10000"/>
           </a:bodyPr>
           <a:lstStyle/>
           <a:p>
@@ -4902,7 +6116,7 @@
       </p:sp>
       <p:sp>
         <p:nvSpPr>
-          <p:cNvPr id="22" name="TextBox 21"/>
+          <p:cNvPr id="12" name="TextBox 11"/>
           <p:cNvSpPr txBox="1"/>
           <p:nvPr/>
         </p:nvSpPr>
@@ -4918,7 +6132,7 @@
         </p:spPr>
         <p:txBody>
           <a:bodyPr wrap="square">
-            <a:normAutofit/>
+            <a:normAutofit lnSpcReduction="10000"/>
           </a:bodyPr>
           <a:lstStyle/>
           <a:p>
@@ -4978,7 +6192,7 @@
         </p:spPr>
         <p:txBody>
           <a:bodyPr wrap="square">
-            <a:normAutofit/>
+            <a:normAutofit lnSpcReduction="10000"/>
           </a:bodyPr>
           <a:lstStyle/>
           <a:p>
@@ -5071,8 +6285,8 @@
         </p:nvSpPr>
         <p:spPr>
           <a:xfrm>
-            <a:off x="731520" y="1508760"/>
-            <a:ext cx="10332720" cy="731520"/>
+            <a:off x="960120" y="1417320"/>
+            <a:ext cx="10241280" cy="640080"/>
           </a:xfrm>
           <a:prstGeom prst="rect">
             <a:avLst/>
@@ -5081,44 +6295,426 @@
         </p:spPr>
         <p:txBody>
           <a:bodyPr wrap="square">
-            <a:normAutofit/>
+            <a:normAutofit fontScale="92500"/>
           </a:bodyPr>
           <a:lstStyle/>
           <a:p>
+            <a:pPr algn="ctr"/>
+            <a:r>
+              <a:rPr sz="2700" b="1" dirty="0">
+                <a:solidFill>
+                  <a:srgbClr val="192D3E"/>
+                </a:solidFill>
+                <a:latin typeface="Arial"/>
+              </a:rPr>
+              <a:t>El </a:t>
+            </a:r>
+            <a:r>
+              <a:rPr sz="2700" b="1" dirty="0" err="1">
+                <a:solidFill>
+                  <a:srgbClr val="192D3E"/>
+                </a:solidFill>
+                <a:latin typeface="Arial"/>
+              </a:rPr>
+              <a:t>servei</a:t>
+            </a:r>
+            <a:r>
+              <a:rPr sz="2700" b="1" dirty="0">
+                <a:solidFill>
+                  <a:srgbClr val="192D3E"/>
+                </a:solidFill>
+                <a:latin typeface="Arial"/>
+              </a:rPr>
+              <a:t> </a:t>
+            </a:r>
+            <a:r>
+              <a:rPr sz="2700" b="1" dirty="0" err="1">
+                <a:solidFill>
+                  <a:srgbClr val="192D3E"/>
+                </a:solidFill>
+                <a:latin typeface="Arial"/>
+              </a:rPr>
+              <a:t>d'aplicació</a:t>
+            </a:r>
+            <a:r>
+              <a:rPr sz="2700" b="1" dirty="0">
+                <a:solidFill>
+                  <a:srgbClr val="192D3E"/>
+                </a:solidFill>
+                <a:latin typeface="Arial"/>
+              </a:rPr>
+              <a:t> </a:t>
+            </a:r>
+            <a:r>
+              <a:rPr sz="2700" b="1" dirty="0" err="1">
+                <a:solidFill>
+                  <a:srgbClr val="192D3E"/>
+                </a:solidFill>
+                <a:latin typeface="Arial"/>
+              </a:rPr>
+              <a:t>necessita</a:t>
+            </a:r>
+            <a:r>
+              <a:rPr sz="2700" b="1" dirty="0">
+                <a:solidFill>
+                  <a:srgbClr val="192D3E"/>
+                </a:solidFill>
+                <a:latin typeface="Arial"/>
+              </a:rPr>
+              <a:t> </a:t>
+            </a:r>
+            <a:r>
+              <a:rPr sz="2700" b="1" dirty="0" err="1">
+                <a:solidFill>
+                  <a:srgbClr val="192D3E"/>
+                </a:solidFill>
+                <a:latin typeface="Arial"/>
+              </a:rPr>
+              <a:t>una</a:t>
+            </a:r>
+            <a:r>
+              <a:rPr sz="2700" b="1" dirty="0">
+                <a:solidFill>
+                  <a:srgbClr val="192D3E"/>
+                </a:solidFill>
+                <a:latin typeface="Arial"/>
+              </a:rPr>
+              <a:t> </a:t>
+            </a:r>
+            <a:r>
+              <a:rPr sz="2700" b="1" dirty="0" err="1">
+                <a:solidFill>
+                  <a:srgbClr val="192D3E"/>
+                </a:solidFill>
+                <a:latin typeface="Arial"/>
+              </a:rPr>
+              <a:t>capacitat</a:t>
+            </a:r>
+            <a:r>
+              <a:rPr sz="2700" b="1" dirty="0">
+                <a:solidFill>
+                  <a:srgbClr val="192D3E"/>
+                </a:solidFill>
+                <a:latin typeface="Arial"/>
+              </a:rPr>
+              <a:t>, no </a:t>
+            </a:r>
+            <a:r>
+              <a:rPr sz="2700" b="1" dirty="0" err="1">
+                <a:solidFill>
+                  <a:srgbClr val="192D3E"/>
+                </a:solidFill>
+                <a:latin typeface="Arial"/>
+              </a:rPr>
+              <a:t>una</a:t>
+            </a:r>
+            <a:r>
+              <a:rPr sz="2700" b="1" dirty="0">
+                <a:solidFill>
+                  <a:srgbClr val="192D3E"/>
+                </a:solidFill>
+                <a:latin typeface="Arial"/>
+              </a:rPr>
+              <a:t> </a:t>
+            </a:r>
+            <a:r>
+              <a:rPr sz="2700" b="1" dirty="0" err="1">
+                <a:solidFill>
+                  <a:srgbClr val="192D3E"/>
+                </a:solidFill>
+                <a:latin typeface="Arial"/>
+              </a:rPr>
+              <a:t>tecnologia</a:t>
+            </a:r>
+            <a:r>
+              <a:rPr sz="2700" b="1" dirty="0">
+                <a:solidFill>
+                  <a:srgbClr val="192D3E"/>
+                </a:solidFill>
+                <a:latin typeface="Arial"/>
+              </a:rPr>
+              <a:t>.</a:t>
+            </a:r>
+          </a:p>
+        </p:txBody>
+      </p:sp>
+      <p:sp>
+        <p:nvSpPr>
+          <p:cNvPr id="12" name="TextBox 11"/>
+          <p:cNvSpPr txBox="1"/>
+          <p:nvPr/>
+        </p:nvSpPr>
+        <p:spPr>
+          <a:xfrm>
+            <a:off x="594360" y="6473952"/>
+            <a:ext cx="8595360" cy="201168"/>
+          </a:xfrm>
+          <a:prstGeom prst="rect">
+            <a:avLst/>
+          </a:prstGeom>
+          <a:noFill/>
+        </p:spPr>
+        <p:txBody>
+          <a:bodyPr wrap="square">
+            <a:normAutofit lnSpcReduction="10000"/>
+          </a:bodyPr>
+          <a:lstStyle/>
+          <a:p>
             <a:pPr algn="l"/>
             <a:r>
-              <a:rPr sz="2300" b="0">
+              <a:rPr sz="800" b="0">
+                <a:solidFill>
+                  <a:srgbClr val="66707A"/>
+                </a:solidFill>
+                <a:latin typeface="Arial"/>
+              </a:rPr>
+              <a:t>Disseny de Sistemes d'Informació · Ports de sortida en arquitectura hexagonal</a:t>
+            </a:r>
+          </a:p>
+        </p:txBody>
+      </p:sp>
+      <p:sp>
+        <p:nvSpPr>
+          <p:cNvPr id="13" name="TextBox 12"/>
+          <p:cNvSpPr txBox="1"/>
+          <p:nvPr/>
+        </p:nvSpPr>
+        <p:spPr>
+          <a:xfrm>
+            <a:off x="11155680" y="6473952"/>
+            <a:ext cx="411480" cy="201168"/>
+          </a:xfrm>
+          <a:prstGeom prst="rect">
+            <a:avLst/>
+          </a:prstGeom>
+          <a:noFill/>
+        </p:spPr>
+        <p:txBody>
+          <a:bodyPr wrap="square">
+            <a:normAutofit lnSpcReduction="10000"/>
+          </a:bodyPr>
+          <a:lstStyle/>
+          <a:p>
+            <a:pPr algn="r"/>
+            <a:r>
+              <a:rPr sz="800" b="0">
+                <a:solidFill>
+                  <a:srgbClr val="66707A"/>
+                </a:solidFill>
+                <a:latin typeface="Arial"/>
+              </a:rPr>
+              <a:t>3</a:t>
+            </a:r>
+          </a:p>
+        </p:txBody>
+      </p:sp>
+      <p:pic>
+        <p:nvPicPr>
+          <p:cNvPr id="1026" name="Picture 2">
+            <a:extLst>
+              <a:ext uri="{FF2B5EF4-FFF2-40B4-BE49-F238E27FC236}">
+                <a16:creationId xmlns:a16="http://schemas.microsoft.com/office/drawing/2014/main" id="{24324096-D33B-3CBF-C022-BFBBD6A631DD}"/>
+              </a:ext>
+            </a:extLst>
+          </p:cNvPr>
+          <p:cNvPicPr>
+            <a:picLocks noChangeAspect="1" noChangeArrowheads="1"/>
+          </p:cNvPicPr>
+          <p:nvPr/>
+        </p:nvPicPr>
+        <p:blipFill>
+          <a:blip r:embed="rId3">
+            <a:extLst>
+              <a:ext uri="{28A0092B-C50C-407E-A947-70E740481C1C}">
+                <a14:useLocalDpi xmlns:a14="http://schemas.microsoft.com/office/drawing/2010/main" val="0"/>
+              </a:ext>
+            </a:extLst>
+          </a:blip>
+          <a:srcRect/>
+          <a:stretch>
+            <a:fillRect/>
+          </a:stretch>
+        </p:blipFill>
+        <p:spPr bwMode="auto">
+          <a:xfrm>
+            <a:off x="1759017" y="2139756"/>
+            <a:ext cx="8085221" cy="4027872"/>
+          </a:xfrm>
+          <a:prstGeom prst="rect">
+            <a:avLst/>
+          </a:prstGeom>
+          <a:noFill/>
+          <a:extLst>
+            <a:ext uri="{909E8E84-426E-40DD-AFC4-6F175D3DCCD1}">
+              <a14:hiddenFill xmlns:a14="http://schemas.microsoft.com/office/drawing/2010/main">
+                <a:solidFill>
+                  <a:srgbClr val="FFFFFF"/>
+                </a:solidFill>
+              </a14:hiddenFill>
+            </a:ext>
+          </a:extLst>
+        </p:spPr>
+      </p:pic>
+    </p:spTree>
+  </p:cSld>
+  <p:clrMapOvr>
+    <a:masterClrMapping/>
+  </p:clrMapOvr>
+</p:sld>
+</file>
+
+<file path=ppt/slides/slide4.xml><?xml version="1.0" encoding="utf-8"?>
+<p:sld xmlns:a="http://schemas.openxmlformats.org/drawingml/2006/main" xmlns:r="http://schemas.openxmlformats.org/officeDocument/2006/relationships" xmlns:p="http://schemas.openxmlformats.org/presentationml/2006/main">
+  <p:cSld>
+    <p:spTree>
+      <p:nvGrpSpPr>
+        <p:cNvPr id="1" name="">
+          <a:extLst>
+            <a:ext uri="{FF2B5EF4-FFF2-40B4-BE49-F238E27FC236}">
+              <a16:creationId xmlns:a16="http://schemas.microsoft.com/office/drawing/2014/main" id="{91787A17-E989-2125-8BF4-9FD64C66B0F7}"/>
+            </a:ext>
+          </a:extLst>
+        </p:cNvPr>
+        <p:cNvGrpSpPr/>
+        <p:nvPr/>
+      </p:nvGrpSpPr>
+      <p:grpSpPr>
+        <a:xfrm>
+          <a:off x="0" y="0"/>
+          <a:ext cx="0" cy="0"/>
+          <a:chOff x="0" y="0"/>
+          <a:chExt cx="0" cy="0"/>
+        </a:xfrm>
+      </p:grpSpPr>
+      <p:sp>
+        <p:nvSpPr>
+          <p:cNvPr id="2" name="TextBox 1">
+            <a:extLst>
+              <a:ext uri="{FF2B5EF4-FFF2-40B4-BE49-F238E27FC236}">
+                <a16:creationId xmlns:a16="http://schemas.microsoft.com/office/drawing/2014/main" id="{6113BE6D-4BF0-DC81-2CE8-23039C4C9D58}"/>
+              </a:ext>
+            </a:extLst>
+          </p:cNvPr>
+          <p:cNvSpPr txBox="1"/>
+          <p:nvPr/>
+        </p:nvSpPr>
+        <p:spPr>
+          <a:xfrm>
+            <a:off x="594360" y="320040"/>
+            <a:ext cx="8961120" cy="502920"/>
+          </a:xfrm>
+          <a:prstGeom prst="rect">
+            <a:avLst/>
+          </a:prstGeom>
+          <a:noFill/>
+        </p:spPr>
+        <p:txBody>
+          <a:bodyPr wrap="square">
+            <a:normAutofit lnSpcReduction="10000"/>
+          </a:bodyPr>
+          <a:lstStyle/>
+          <a:p>
+            <a:pPr algn="l"/>
+            <a:r>
+              <a:rPr sz="2800" b="1" dirty="0" err="1">
                 <a:solidFill>
                   <a:srgbClr val="192D3E"/>
                 </a:solidFill>
                 <a:latin typeface="Arial"/>
               </a:rPr>
-              <a:t>Dissenyar un port de sortida orientat al llenguatge de l'aplicació, implementar adaptadors intercanviables i justificar la reducció d'acoblament.</a:t>
-            </a:r>
-          </a:p>
-        </p:txBody>
-      </p:sp>
-      <p:sp>
-        <p:nvSpPr>
-          <p:cNvPr id="6" name="Rounded Rectangle 5"/>
+              <a:t>Objectiu</a:t>
+            </a:r>
+            <a:r>
+              <a:rPr sz="2800" b="1" dirty="0">
+                <a:solidFill>
+                  <a:srgbClr val="192D3E"/>
+                </a:solidFill>
+                <a:latin typeface="Arial"/>
+              </a:rPr>
+              <a:t> </a:t>
+            </a:r>
+            <a:r>
+              <a:rPr sz="2800" b="1" dirty="0" err="1">
+                <a:solidFill>
+                  <a:srgbClr val="192D3E"/>
+                </a:solidFill>
+                <a:latin typeface="Arial"/>
+              </a:rPr>
+              <a:t>d'aprenentatge</a:t>
+            </a:r>
+            <a:r>
+              <a:rPr lang="es-ES" sz="2800" b="1" dirty="0">
+                <a:solidFill>
+                  <a:srgbClr val="192D3E"/>
+                </a:solidFill>
+                <a:latin typeface="Arial"/>
+              </a:rPr>
+              <a:t> II</a:t>
+            </a:r>
+            <a:endParaRPr sz="2800" b="1" dirty="0">
+              <a:solidFill>
+                <a:srgbClr val="192D3E"/>
+              </a:solidFill>
+              <a:latin typeface="Arial"/>
+            </a:endParaRPr>
+          </a:p>
+        </p:txBody>
+      </p:sp>
+      <p:pic>
+        <p:nvPicPr>
+          <p:cNvPr id="3" name="Picture 2" descr="logotip-oficial-tecnocampus-upf-horitzontal-color.png">
+            <a:extLst>
+              <a:ext uri="{FF2B5EF4-FFF2-40B4-BE49-F238E27FC236}">
+                <a16:creationId xmlns:a16="http://schemas.microsoft.com/office/drawing/2014/main" id="{6E5AEF9E-E38C-2981-74C2-DA381C85519D}"/>
+              </a:ext>
+            </a:extLst>
+          </p:cNvPr>
+          <p:cNvPicPr>
+            <a:picLocks noChangeAspect="1"/>
+          </p:cNvPicPr>
+          <p:nvPr/>
+        </p:nvPicPr>
+        <p:blipFill>
+          <a:blip r:embed="rId2"/>
+          <a:stretch>
+            <a:fillRect/>
+          </a:stretch>
+        </p:blipFill>
+        <p:spPr>
+          <a:xfrm>
+            <a:off x="9738360" y="293025"/>
+            <a:ext cx="1783079" cy="337493"/>
+          </a:xfrm>
+          <a:prstGeom prst="rect">
+            <a:avLst/>
+          </a:prstGeom>
+        </p:spPr>
+      </p:pic>
+      <p:sp>
+        <p:nvSpPr>
+          <p:cNvPr id="4" name="Rectangle 3">
+            <a:extLst>
+              <a:ext uri="{FF2B5EF4-FFF2-40B4-BE49-F238E27FC236}">
+                <a16:creationId xmlns:a16="http://schemas.microsoft.com/office/drawing/2014/main" id="{565CC16B-626E-E880-45E7-0DBECBCD6306}"/>
+              </a:ext>
+            </a:extLst>
+          </p:cNvPr>
           <p:cNvSpPr/>
           <p:nvPr/>
         </p:nvSpPr>
         <p:spPr>
           <a:xfrm>
-            <a:off x="822960" y="2743200"/>
-            <a:ext cx="3246120" cy="1554480"/>
-          </a:xfrm>
-          <a:prstGeom prst="roundRect">
+            <a:off x="594360" y="1115568"/>
+            <a:ext cx="10972800" cy="13716"/>
+          </a:xfrm>
+          <a:prstGeom prst="rect">
             <a:avLst/>
           </a:prstGeom>
           <a:solidFill>
-            <a:srgbClr val="F8EAEA"/>
+            <a:srgbClr val="D6DBE0"/>
           </a:solidFill>
-          <a:ln w="9525">
-            <a:solidFill>
-              <a:srgbClr val="DCE0E4"/>
-            </a:solidFill>
+          <a:ln>
+            <a:noFill/>
           </a:ln>
         </p:spPr>
         <p:style>
@@ -5146,14 +6742,20 @@
       </p:sp>
       <p:sp>
         <p:nvSpPr>
-          <p:cNvPr id="7" name="TextBox 6"/>
+          <p:cNvPr id="5" name="TextBox 4">
+            <a:extLst>
+              <a:ext uri="{FF2B5EF4-FFF2-40B4-BE49-F238E27FC236}">
+                <a16:creationId xmlns:a16="http://schemas.microsoft.com/office/drawing/2014/main" id="{E5442AE4-020C-7BAB-E612-2262DEB4097A}"/>
+              </a:ext>
+            </a:extLst>
+          </p:cNvPr>
           <p:cNvSpPr txBox="1"/>
           <p:nvPr/>
         </p:nvSpPr>
         <p:spPr>
           <a:xfrm>
-            <a:off x="1024128" y="2999232"/>
-            <a:ext cx="2834640" cy="960120"/>
+            <a:off x="960120" y="1417320"/>
+            <a:ext cx="10241280" cy="640080"/>
           </a:xfrm>
           <a:prstGeom prst="rect">
             <a:avLst/>
@@ -5162,39 +6764,45 @@
         </p:spPr>
         <p:txBody>
           <a:bodyPr wrap="square">
-            <a:normAutofit/>
+            <a:normAutofit fontScale="92500"/>
           </a:bodyPr>
           <a:lstStyle/>
           <a:p>
             <a:pPr algn="ctr"/>
             <a:r>
-              <a:rPr sz="1800" b="1">
+              <a:rPr sz="2700" b="1">
                 <a:solidFill>
                   <a:srgbClr val="192D3E"/>
                 </a:solidFill>
                 <a:latin typeface="Arial"/>
               </a:rPr>
-              <a:t>Identificar el risc d'acoblament amb APIs externes.</a:t>
-            </a:r>
-          </a:p>
-        </p:txBody>
-      </p:sp>
-      <p:sp>
-        <p:nvSpPr>
-          <p:cNvPr id="8" name="Rounded Rectangle 7"/>
+              <a:t>El servei d'aplicació necessita una capacitat, no una tecnologia.</a:t>
+            </a:r>
+          </a:p>
+        </p:txBody>
+      </p:sp>
+      <p:sp>
+        <p:nvSpPr>
+          <p:cNvPr id="6" name="Rounded Rectangle 5">
+            <a:extLst>
+              <a:ext uri="{FF2B5EF4-FFF2-40B4-BE49-F238E27FC236}">
+                <a16:creationId xmlns:a16="http://schemas.microsoft.com/office/drawing/2014/main" id="{064EE3A6-5D0D-EFE6-3907-91BB6540F213}"/>
+              </a:ext>
+            </a:extLst>
+          </p:cNvPr>
           <p:cNvSpPr/>
           <p:nvPr/>
         </p:nvSpPr>
         <p:spPr>
           <a:xfrm>
-            <a:off x="4553712" y="2743200"/>
-            <a:ext cx="3246120" cy="1554480"/>
+            <a:off x="822960" y="2743200"/>
+            <a:ext cx="3246120" cy="1600200"/>
           </a:xfrm>
           <a:prstGeom prst="roundRect">
             <a:avLst/>
           </a:prstGeom>
           <a:solidFill>
-            <a:srgbClr val="FFF3D6"/>
+            <a:srgbClr val="F8EAEA"/>
           </a:solidFill>
           <a:ln w="9525">
             <a:solidFill>
@@ -5227,14 +6835,20 @@
       </p:sp>
       <p:sp>
         <p:nvSpPr>
-          <p:cNvPr id="9" name="TextBox 8"/>
+          <p:cNvPr id="7" name="TextBox 6">
+            <a:extLst>
+              <a:ext uri="{FF2B5EF4-FFF2-40B4-BE49-F238E27FC236}">
+                <a16:creationId xmlns:a16="http://schemas.microsoft.com/office/drawing/2014/main" id="{C0F1223D-ADAB-E817-C2A8-78FB596BC6F8}"/>
+              </a:ext>
+            </a:extLst>
+          </p:cNvPr>
           <p:cNvSpPr txBox="1"/>
           <p:nvPr/>
         </p:nvSpPr>
         <p:spPr>
           <a:xfrm>
-            <a:off x="4754880" y="2999232"/>
-            <a:ext cx="2834640" cy="960120"/>
+            <a:off x="1024128" y="3063240"/>
+            <a:ext cx="2834640" cy="777240"/>
           </a:xfrm>
           <a:prstGeom prst="rect">
             <a:avLst/>
@@ -5243,39 +6857,46 @@
         </p:spPr>
         <p:txBody>
           <a:bodyPr wrap="square">
-            <a:normAutofit/>
+            <a:normAutofit lnSpcReduction="10000"/>
           </a:bodyPr>
           <a:lstStyle/>
           <a:p>
             <a:pPr algn="ctr"/>
             <a:r>
-              <a:rPr sz="1800" b="1">
+              <a:rPr sz="2400" b="1">
                 <a:solidFill>
                   <a:srgbClr val="192D3E"/>
                 </a:solidFill>
                 <a:latin typeface="Arial"/>
               </a:rPr>
-              <a:t>Definir el port en termes de capacitat requerida.</a:t>
-            </a:r>
-          </a:p>
-        </p:txBody>
-      </p:sp>
-      <p:sp>
-        <p:nvSpPr>
-          <p:cNvPr id="10" name="Rounded Rectangle 9"/>
+              <a:t>Identificar
+acoblament</a:t>
+            </a:r>
+          </a:p>
+        </p:txBody>
+      </p:sp>
+      <p:sp>
+        <p:nvSpPr>
+          <p:cNvPr id="8" name="Rounded Rectangle 7">
+            <a:extLst>
+              <a:ext uri="{FF2B5EF4-FFF2-40B4-BE49-F238E27FC236}">
+                <a16:creationId xmlns:a16="http://schemas.microsoft.com/office/drawing/2014/main" id="{460CDC97-EADA-2158-DAC3-FD27FD257839}"/>
+              </a:ext>
+            </a:extLst>
+          </p:cNvPr>
           <p:cNvSpPr/>
           <p:nvPr/>
         </p:nvSpPr>
         <p:spPr>
           <a:xfrm>
-            <a:off x="8284464" y="2743200"/>
-            <a:ext cx="3246120" cy="1554480"/>
+            <a:off x="4553712" y="2743200"/>
+            <a:ext cx="3246120" cy="1600200"/>
           </a:xfrm>
           <a:prstGeom prst="roundRect">
             <a:avLst/>
           </a:prstGeom>
           <a:solidFill>
-            <a:srgbClr val="EBF6F0"/>
+            <a:srgbClr val="FFF3D6"/>
           </a:solidFill>
           <a:ln w="9525">
             <a:solidFill>
@@ -5308,14 +6929,20 @@
       </p:sp>
       <p:sp>
         <p:nvSpPr>
-          <p:cNvPr id="11" name="TextBox 10"/>
+          <p:cNvPr id="9" name="TextBox 8">
+            <a:extLst>
+              <a:ext uri="{FF2B5EF4-FFF2-40B4-BE49-F238E27FC236}">
+                <a16:creationId xmlns:a16="http://schemas.microsoft.com/office/drawing/2014/main" id="{57DA438C-C49C-5E46-6F61-14F3896E8657}"/>
+              </a:ext>
+            </a:extLst>
+          </p:cNvPr>
           <p:cNvSpPr txBox="1"/>
           <p:nvPr/>
         </p:nvSpPr>
         <p:spPr>
           <a:xfrm>
-            <a:off x="8485632" y="2999232"/>
-            <a:ext cx="2834640" cy="960120"/>
+            <a:off x="4754880" y="3063240"/>
+            <a:ext cx="2834640" cy="777240"/>
           </a:xfrm>
           <a:prstGeom prst="rect">
             <a:avLst/>
@@ -5324,231 +6951,51 @@
         </p:spPr>
         <p:txBody>
           <a:bodyPr wrap="square">
-            <a:normAutofit/>
+            <a:normAutofit lnSpcReduction="10000"/>
           </a:bodyPr>
           <a:lstStyle/>
           <a:p>
             <a:pPr algn="ctr"/>
             <a:r>
-              <a:rPr sz="1800" b="1">
+              <a:rPr sz="2400" b="1">
                 <a:solidFill>
                   <a:srgbClr val="192D3E"/>
                 </a:solidFill>
                 <a:latin typeface="Arial"/>
               </a:rPr>
-              <a:t>Substituir l'adaptador sense modificar domini ni cas d'ús.</a:t>
-            </a:r>
-          </a:p>
-        </p:txBody>
-      </p:sp>
-      <p:sp>
-        <p:nvSpPr>
-          <p:cNvPr id="12" name="TextBox 11"/>
-          <p:cNvSpPr txBox="1"/>
-          <p:nvPr/>
-        </p:nvSpPr>
-        <p:spPr>
-          <a:xfrm>
-            <a:off x="594360" y="6473952"/>
-            <a:ext cx="8595360" cy="201168"/>
-          </a:xfrm>
-          <a:prstGeom prst="rect">
-            <a:avLst/>
-          </a:prstGeom>
-          <a:noFill/>
-        </p:spPr>
-        <p:txBody>
-          <a:bodyPr wrap="square">
-            <a:normAutofit/>
-          </a:bodyPr>
-          <a:lstStyle/>
-          <a:p>
-            <a:pPr algn="l"/>
-            <a:r>
-              <a:rPr sz="800" b="0">
-                <a:solidFill>
-                  <a:srgbClr val="66707A"/>
-                </a:solidFill>
-                <a:latin typeface="Arial"/>
-              </a:rPr>
-              <a:t>Disseny de Sistemes d'Informació · Ports de sortida en arquitectura hexagonal</a:t>
-            </a:r>
-          </a:p>
-        </p:txBody>
-      </p:sp>
-      <p:sp>
-        <p:nvSpPr>
-          <p:cNvPr id="13" name="TextBox 12"/>
-          <p:cNvSpPr txBox="1"/>
-          <p:nvPr/>
-        </p:nvSpPr>
-        <p:spPr>
-          <a:xfrm>
-            <a:off x="11155680" y="6473952"/>
-            <a:ext cx="411480" cy="201168"/>
-          </a:xfrm>
-          <a:prstGeom prst="rect">
-            <a:avLst/>
-          </a:prstGeom>
-          <a:noFill/>
-        </p:spPr>
-        <p:txBody>
-          <a:bodyPr wrap="square">
-            <a:normAutofit/>
-          </a:bodyPr>
-          <a:lstStyle/>
-          <a:p>
-            <a:pPr algn="r"/>
-            <a:r>
-              <a:rPr sz="800" b="0">
-                <a:solidFill>
-                  <a:srgbClr val="66707A"/>
-                </a:solidFill>
-                <a:latin typeface="Arial"/>
-              </a:rPr>
-              <a:t>3</a:t>
-            </a:r>
-          </a:p>
-        </p:txBody>
-      </p:sp>
-    </p:spTree>
-  </p:cSld>
-  <p:clrMapOvr>
-    <a:masterClrMapping/>
-  </p:clrMapOvr>
-</p:sld>
-</file>
-
-<file path=ppt/slides/slide4.xml><?xml version="1.0" encoding="utf-8"?>
-<p:sld xmlns:a="http://schemas.openxmlformats.org/drawingml/2006/main" xmlns:r="http://schemas.openxmlformats.org/officeDocument/2006/relationships" xmlns:p="http://schemas.openxmlformats.org/presentationml/2006/main">
-  <p:cSld>
-    <p:spTree>
-      <p:nvGrpSpPr>
-        <p:cNvPr id="1" name=""/>
-        <p:cNvGrpSpPr/>
-        <p:nvPr/>
-      </p:nvGrpSpPr>
-      <p:grpSpPr>
-        <a:xfrm>
-          <a:off x="0" y="0"/>
-          <a:ext cx="0" cy="0"/>
-          <a:chOff x="0" y="0"/>
-          <a:chExt cx="0" cy="0"/>
-        </a:xfrm>
-      </p:grpSpPr>
-      <p:sp>
-        <p:nvSpPr>
-          <p:cNvPr id="2" name="TextBox 1"/>
-          <p:cNvSpPr txBox="1"/>
-          <p:nvPr/>
-        </p:nvSpPr>
-        <p:spPr>
-          <a:xfrm>
-            <a:off x="594360" y="320040"/>
-            <a:ext cx="8961120" cy="502920"/>
-          </a:xfrm>
-          <a:prstGeom prst="rect">
-            <a:avLst/>
-          </a:prstGeom>
-          <a:noFill/>
-        </p:spPr>
-        <p:txBody>
-          <a:bodyPr wrap="square">
-            <a:normAutofit/>
-          </a:bodyPr>
-          <a:lstStyle/>
-          <a:p>
-            <a:pPr algn="l"/>
-            <a:r>
-              <a:rPr sz="2800" b="1">
-                <a:solidFill>
-                  <a:srgbClr val="192D3E"/>
-                </a:solidFill>
-                <a:latin typeface="Arial"/>
-              </a:rPr>
-              <a:t>Cas funcional: avaluació econòmica d'una beca</a:t>
-            </a:r>
-          </a:p>
-        </p:txBody>
-      </p:sp>
-      <p:sp>
-        <p:nvSpPr>
-          <p:cNvPr id="3" name="TextBox 2"/>
-          <p:cNvSpPr txBox="1"/>
-          <p:nvPr/>
-        </p:nvSpPr>
-        <p:spPr>
-          <a:xfrm>
-            <a:off x="612648" y="822960"/>
-            <a:ext cx="8869680" cy="320040"/>
-          </a:xfrm>
-          <a:prstGeom prst="rect">
-            <a:avLst/>
-          </a:prstGeom>
-          <a:noFill/>
-        </p:spPr>
-        <p:txBody>
-          <a:bodyPr wrap="square">
-            <a:normAutofit/>
-          </a:bodyPr>
-          <a:lstStyle/>
-          <a:p>
-            <a:pPr algn="l"/>
-            <a:r>
-              <a:rPr sz="1300" b="0">
-                <a:solidFill>
-                  <a:srgbClr val="66707A"/>
-                </a:solidFill>
-                <a:latin typeface="Arial"/>
-              </a:rPr>
-              <a:t>Abans de parlar d'arquitectura, cal entendre el procediment</a:t>
-            </a:r>
-          </a:p>
-        </p:txBody>
-      </p:sp>
-      <p:pic>
-        <p:nvPicPr>
-          <p:cNvPr id="4" name="Picture 3" descr="logotip-oficial-tecnocampus-upf-horitzontal-color.png"/>
-          <p:cNvPicPr>
-            <a:picLocks noChangeAspect="1"/>
-          </p:cNvPicPr>
-          <p:nvPr/>
-        </p:nvPicPr>
-        <p:blipFill>
-          <a:blip r:embed="rId2"/>
-          <a:stretch>
-            <a:fillRect/>
-          </a:stretch>
-        </p:blipFill>
-        <p:spPr>
-          <a:xfrm>
-            <a:off x="9738360" y="293025"/>
-            <a:ext cx="1783079" cy="337493"/>
-          </a:xfrm>
-          <a:prstGeom prst="rect">
-            <a:avLst/>
-          </a:prstGeom>
-        </p:spPr>
-      </p:pic>
-      <p:sp>
-        <p:nvSpPr>
-          <p:cNvPr id="5" name="Rectangle 4"/>
+              <a:t>Definir
+un port</a:t>
+            </a:r>
+          </a:p>
+        </p:txBody>
+      </p:sp>
+      <p:sp>
+        <p:nvSpPr>
+          <p:cNvPr id="10" name="Rounded Rectangle 9">
+            <a:extLst>
+              <a:ext uri="{FF2B5EF4-FFF2-40B4-BE49-F238E27FC236}">
+                <a16:creationId xmlns:a16="http://schemas.microsoft.com/office/drawing/2014/main" id="{54F82A2A-9916-E9F8-2F4C-A47E7CF470BE}"/>
+              </a:ext>
+            </a:extLst>
+          </p:cNvPr>
           <p:cNvSpPr/>
           <p:nvPr/>
         </p:nvSpPr>
         <p:spPr>
           <a:xfrm>
-            <a:off x="594360" y="1115568"/>
-            <a:ext cx="10972800" cy="13716"/>
-          </a:xfrm>
-          <a:prstGeom prst="rect">
+            <a:off x="8284464" y="2743200"/>
+            <a:ext cx="3246120" cy="1600200"/>
+          </a:xfrm>
+          <a:prstGeom prst="roundRect">
             <a:avLst/>
           </a:prstGeom>
           <a:solidFill>
-            <a:srgbClr val="D6DBE0"/>
+            <a:srgbClr val="EBF6F0"/>
           </a:solidFill>
-          <a:ln>
-            <a:noFill/>
+          <a:ln w="9525">
+            <a:solidFill>
+              <a:srgbClr val="DCE0E4"/>
+            </a:solidFill>
           </a:ln>
         </p:spPr>
         <p:style>
@@ -5574,40 +7021,22 @@
           </a:p>
         </p:txBody>
       </p:sp>
-      <p:pic>
-        <p:nvPicPr>
-          <p:cNvPr id="6" name="Picture 5" descr="agaur-functional-scholarship.png"/>
-          <p:cNvPicPr>
-            <a:picLocks noChangeAspect="1"/>
-          </p:cNvPicPr>
-          <p:nvPr/>
-        </p:nvPicPr>
-        <p:blipFill>
-          <a:blip r:embed="rId3"/>
-          <a:stretch>
-            <a:fillRect/>
-          </a:stretch>
-        </p:blipFill>
-        <p:spPr>
-          <a:xfrm>
-            <a:off x="2211537" y="1234440"/>
-            <a:ext cx="3760806" cy="4526280"/>
-          </a:xfrm>
-          <a:prstGeom prst="rect">
-            <a:avLst/>
-          </a:prstGeom>
-        </p:spPr>
-      </p:pic>
-      <p:sp>
-        <p:nvSpPr>
-          <p:cNvPr id="7" name="TextBox 6"/>
+      <p:sp>
+        <p:nvSpPr>
+          <p:cNvPr id="11" name="TextBox 10">
+            <a:extLst>
+              <a:ext uri="{FF2B5EF4-FFF2-40B4-BE49-F238E27FC236}">
+                <a16:creationId xmlns:a16="http://schemas.microsoft.com/office/drawing/2014/main" id="{C6C32489-28BB-E0B4-6D88-054802179775}"/>
+              </a:ext>
+            </a:extLst>
+          </p:cNvPr>
           <p:cNvSpPr txBox="1"/>
           <p:nvPr/>
         </p:nvSpPr>
         <p:spPr>
           <a:xfrm>
-            <a:off x="7909560" y="1508760"/>
-            <a:ext cx="3246120" cy="1417320"/>
+            <a:off x="8485632" y="3063240"/>
+            <a:ext cx="2834640" cy="777240"/>
           </a:xfrm>
           <a:prstGeom prst="rect">
             <a:avLst/>
@@ -5616,194 +7045,33 @@
         </p:spPr>
         <p:txBody>
           <a:bodyPr wrap="square">
-            <a:normAutofit/>
+            <a:normAutofit lnSpcReduction="10000"/>
           </a:bodyPr>
           <a:lstStyle/>
           <a:p>
-            <a:pPr algn="l"/>
-            <a:r>
-              <a:rPr sz="1800" b="1">
+            <a:pPr algn="ctr"/>
+            <a:r>
+              <a:rPr sz="2400" b="1">
                 <a:solidFill>
                   <a:srgbClr val="192D3E"/>
                 </a:solidFill>
                 <a:latin typeface="Arial"/>
               </a:rPr>
-              <a:t>Una sol·licitud de beca genera un expedient. Després dels requisits generals, AGAUR revisa requisits econòmics de renda i patrimoni. Si no es compleixen, l'expedient no avança a la revisió acadèmica.</a:t>
-            </a:r>
-          </a:p>
-        </p:txBody>
-      </p:sp>
-      <p:sp>
-        <p:nvSpPr>
-          <p:cNvPr id="8" name="TextBox 7"/>
-          <p:cNvSpPr txBox="1"/>
-          <p:nvPr/>
-        </p:nvSpPr>
-        <p:spPr>
-          <a:xfrm>
-            <a:off x="7909560" y="3154680"/>
-            <a:ext cx="3246120" cy="1417320"/>
-          </a:xfrm>
-          <a:prstGeom prst="rect">
-            <a:avLst/>
-          </a:prstGeom>
-          <a:noFill/>
-        </p:spPr>
-        <p:txBody>
-          <a:bodyPr wrap="square">
-            <a:normAutofit/>
-          </a:bodyPr>
-          <a:lstStyle/>
-          <a:p>
-            <a:pPr>
-              <a:spcAft>
-                <a:spcPts val="800"/>
-              </a:spcAft>
-              <a:defRPr sz="1400">
-                <a:solidFill>
-                  <a:srgbClr val="262626"/>
-                </a:solidFill>
-                <a:latin typeface="Arial"/>
-              </a:defRPr>
-            </a:pPr>
-            <a:r>
-              <a:t>Renda familiar.</a:t>
-            </a:r>
-          </a:p>
-          <a:p>
-            <a:pPr>
-              <a:spcAft>
-                <a:spcPts val="800"/>
-              </a:spcAft>
-              <a:defRPr sz="1400">
-                <a:solidFill>
-                  <a:srgbClr val="262626"/>
-                </a:solidFill>
-                <a:latin typeface="Arial"/>
-              </a:defRPr>
-            </a:pPr>
-            <a:r>
-              <a:t>Patrimoni de la unitat familiar.</a:t>
-            </a:r>
-          </a:p>
-          <a:p>
-            <a:pPr>
-              <a:spcAft>
-                <a:spcPts val="800"/>
-              </a:spcAft>
-              <a:defRPr sz="1400">
-                <a:solidFill>
-                  <a:srgbClr val="262626"/>
-                </a:solidFill>
-                <a:latin typeface="Arial"/>
-              </a:defRPr>
-            </a:pPr>
-            <a:r>
-              <a:t>Finques urbanes i rústiques amb valors cadastrals.</a:t>
-            </a:r>
-          </a:p>
-          <a:p>
-            <a:pPr>
-              <a:spcAft>
-                <a:spcPts val="800"/>
-              </a:spcAft>
-              <a:defRPr sz="1400">
-                <a:solidFill>
-                  <a:srgbClr val="262626"/>
-                </a:solidFill>
-                <a:latin typeface="Arial"/>
-              </a:defRPr>
-            </a:pPr>
-            <a:r>
-              <a:t>Proposta de concessió o denegació.</a:t>
-            </a:r>
-          </a:p>
-        </p:txBody>
-      </p:sp>
-      <p:sp>
-        <p:nvSpPr>
-          <p:cNvPr id="9" name="Rounded Rectangle 8"/>
-          <p:cNvSpPr/>
-          <p:nvPr/>
-        </p:nvSpPr>
-        <p:spPr>
-          <a:xfrm>
-            <a:off x="7909560" y="4983480"/>
-            <a:ext cx="3246120" cy="822960"/>
-          </a:xfrm>
-          <a:prstGeom prst="roundRect">
-            <a:avLst/>
-          </a:prstGeom>
-          <a:solidFill>
-            <a:srgbClr val="F7F8FA"/>
-          </a:solidFill>
-          <a:ln w="9525">
-            <a:solidFill>
-              <a:srgbClr val="DCE0E4"/>
-            </a:solidFill>
-          </a:ln>
-        </p:spPr>
-        <p:style>
-          <a:lnRef idx="1">
-            <a:schemeClr val="accent1"/>
-          </a:lnRef>
-          <a:fillRef idx="3">
-            <a:schemeClr val="accent1"/>
-          </a:fillRef>
-          <a:effectRef idx="2">
-            <a:schemeClr val="accent1"/>
-          </a:effectRef>
-          <a:fontRef idx="minor">
-            <a:schemeClr val="lt1"/>
-          </a:fontRef>
-        </p:style>
-        <p:txBody>
-          <a:bodyPr rtlCol="0" anchor="ctr"/>
-          <a:lstStyle/>
-          <a:p>
-            <a:pPr algn="ctr"/>
-            <a:endParaRPr/>
-          </a:p>
-        </p:txBody>
-      </p:sp>
-      <p:sp>
-        <p:nvSpPr>
-          <p:cNvPr id="10" name="TextBox 9"/>
-          <p:cNvSpPr txBox="1"/>
-          <p:nvPr/>
-        </p:nvSpPr>
-        <p:spPr>
-          <a:xfrm>
-            <a:off x="8092440" y="5138928"/>
-            <a:ext cx="2880360" cy="411480"/>
-          </a:xfrm>
-          <a:prstGeom prst="rect">
-            <a:avLst/>
-          </a:prstGeom>
-          <a:noFill/>
-        </p:spPr>
-        <p:txBody>
-          <a:bodyPr wrap="square">
-            <a:normAutofit/>
-          </a:bodyPr>
-          <a:lstStyle/>
-          <a:p>
-            <a:pPr algn="ctr"/>
-            <a:r>
-              <a:rPr sz="1000" b="0">
-                <a:solidFill>
-                  <a:srgbClr val="66707A"/>
-                </a:solidFill>
-                <a:latin typeface="Arial"/>
-              </a:rPr>
-              <a:t>Fonts públiques: AGAUR requisits econòmics i BOE 2025-2026 sobre llindars de renda i patrimoni.</a:t>
-            </a:r>
-          </a:p>
-        </p:txBody>
-      </p:sp>
-      <p:sp>
-        <p:nvSpPr>
-          <p:cNvPr id="11" name="TextBox 10"/>
+              <a:t>Substituir
+adaptadors</a:t>
+            </a:r>
+          </a:p>
+        </p:txBody>
+      </p:sp>
+      <p:sp>
+        <p:nvSpPr>
+          <p:cNvPr id="12" name="TextBox 11">
+            <a:extLst>
+              <a:ext uri="{FF2B5EF4-FFF2-40B4-BE49-F238E27FC236}">
+                <a16:creationId xmlns:a16="http://schemas.microsoft.com/office/drawing/2014/main" id="{5298AC41-2EA2-3BF1-14F5-5DF9647D4D84}"/>
+              </a:ext>
+            </a:extLst>
+          </p:cNvPr>
           <p:cNvSpPr txBox="1"/>
           <p:nvPr/>
         </p:nvSpPr>
@@ -5819,7 +7087,7 @@
         </p:spPr>
         <p:txBody>
           <a:bodyPr wrap="square">
-            <a:normAutofit/>
+            <a:normAutofit lnSpcReduction="10000"/>
           </a:bodyPr>
           <a:lstStyle/>
           <a:p>
@@ -5838,7 +7106,13 @@
       </p:sp>
       <p:sp>
         <p:nvSpPr>
-          <p:cNvPr id="12" name="TextBox 11"/>
+          <p:cNvPr id="13" name="TextBox 12">
+            <a:extLst>
+              <a:ext uri="{FF2B5EF4-FFF2-40B4-BE49-F238E27FC236}">
+                <a16:creationId xmlns:a16="http://schemas.microsoft.com/office/drawing/2014/main" id="{88D08D29-A0AD-1C10-91EF-4939D83B6478}"/>
+              </a:ext>
+            </a:extLst>
+          </p:cNvPr>
           <p:cNvSpPr txBox="1"/>
           <p:nvPr/>
         </p:nvSpPr>
@@ -5854,7 +7128,7 @@
         </p:spPr>
         <p:txBody>
           <a:bodyPr wrap="square">
-            <a:normAutofit/>
+            <a:normAutofit lnSpcReduction="10000"/>
           </a:bodyPr>
           <a:lstStyle/>
           <a:p>
@@ -5866,12 +7140,17 @@
                 </a:solidFill>
                 <a:latin typeface="Arial"/>
               </a:rPr>
-              <a:t>4</a:t>
+              <a:t>3</a:t>
             </a:r>
           </a:p>
         </p:txBody>
       </p:sp>
     </p:spTree>
+    <p:extLst>
+      <p:ext uri="{BB962C8B-B14F-4D97-AF65-F5344CB8AC3E}">
+        <p14:creationId xmlns:p14="http://schemas.microsoft.com/office/powerpoint/2010/main" val="1026507124"/>
+      </p:ext>
+    </p:extLst>
   </p:cSld>
   <p:clrMapOvr>
     <a:masterClrMapping/>
@@ -5914,7 +7193,7 @@
         </p:spPr>
         <p:txBody>
           <a:bodyPr wrap="square">
-            <a:normAutofit/>
+            <a:normAutofit lnSpcReduction="10000"/>
           </a:bodyPr>
           <a:lstStyle/>
           <a:p>
@@ -5926,7 +7205,7 @@
                 </a:solidFill>
                 <a:latin typeface="Arial"/>
               </a:rPr>
-              <a:t>Quina informació externa necessita el procediment?</a:t>
+              <a:t>Avaluació econòmica d'una beca</a:t>
             </a:r>
           </a:p>
         </p:txBody>
@@ -5961,7 +7240,7 @@
                 </a:solidFill>
                 <a:latin typeface="Arial"/>
               </a:rPr>
-              <a:t>Renda, patrimoni i informació cadastral</a:t>
+              <a:t>Abans de parlar d'arquitectura, cal entendre el procediment</a:t>
             </a:r>
           </a:p>
         </p:txBody>
@@ -6036,7 +7315,7 @@
       </p:sp>
       <p:pic>
         <p:nvPicPr>
-          <p:cNvPr id="6" name="Picture 5" descr="agaur-data-interoperability.png"/>
+          <p:cNvPr id="6" name="Picture 5" descr="agaur-functional-scholarship.png"/>
           <p:cNvPicPr>
             <a:picLocks noChangeAspect="1"/>
           </p:cNvPicPr>
@@ -6050,8 +7329,8 @@
         </p:blipFill>
         <p:spPr>
           <a:xfrm>
-            <a:off x="3053404" y="1234440"/>
-            <a:ext cx="2442831" cy="4526280"/>
+            <a:off x="2185147" y="1234440"/>
+            <a:ext cx="3950745" cy="4754880"/>
           </a:xfrm>
           <a:prstGeom prst="rect">
             <a:avLst/>
@@ -6066,8 +7345,8 @@
         </p:nvSpPr>
         <p:spPr>
           <a:xfrm>
-            <a:off x="8229600" y="1508760"/>
-            <a:ext cx="2926080" cy="1234440"/>
+            <a:off x="8001000" y="1691640"/>
+            <a:ext cx="3063240" cy="1234440"/>
           </a:xfrm>
           <a:prstGeom prst="rect">
             <a:avLst/>
@@ -6076,632 +7355,41 @@
         </p:spPr>
         <p:txBody>
           <a:bodyPr wrap="square">
-            <a:normAutofit/>
+            <a:normAutofit fontScale="92500" lnSpcReduction="20000"/>
           </a:bodyPr>
           <a:lstStyle/>
           <a:p>
-            <a:pPr algn="l"/>
-            <a:r>
-              <a:rPr sz="1800" b="1" dirty="0">
+            <a:pPr algn="ctr"/>
+            <a:r>
+              <a:rPr sz="1800" b="1">
                 <a:solidFill>
                   <a:srgbClr val="192D3E"/>
                 </a:solidFill>
                 <a:latin typeface="Arial"/>
               </a:rPr>
-              <a:t>La </a:t>
-            </a:r>
-            <a:r>
-              <a:rPr sz="1800" b="1" dirty="0" err="1">
-                <a:solidFill>
-                  <a:srgbClr val="192D3E"/>
-                </a:solidFill>
-                <a:latin typeface="Arial"/>
-              </a:rPr>
-              <a:t>necessitat</a:t>
-            </a:r>
-            <a:r>
-              <a:rPr sz="1800" b="1" dirty="0">
-                <a:solidFill>
-                  <a:srgbClr val="192D3E"/>
-                </a:solidFill>
-                <a:latin typeface="Arial"/>
-              </a:rPr>
-              <a:t> </a:t>
-            </a:r>
-            <a:r>
-              <a:rPr sz="1800" b="1" dirty="0" err="1">
-                <a:solidFill>
-                  <a:srgbClr val="192D3E"/>
-                </a:solidFill>
-                <a:latin typeface="Arial"/>
-              </a:rPr>
-              <a:t>funcional</a:t>
-            </a:r>
-            <a:r>
-              <a:rPr sz="1800" b="1" dirty="0">
-                <a:solidFill>
-                  <a:srgbClr val="192D3E"/>
-                </a:solidFill>
-                <a:latin typeface="Arial"/>
-              </a:rPr>
-              <a:t> no </a:t>
-            </a:r>
-            <a:r>
-              <a:rPr sz="1800" b="1" dirty="0" err="1">
-                <a:solidFill>
-                  <a:srgbClr val="192D3E"/>
-                </a:solidFill>
-                <a:latin typeface="Arial"/>
-              </a:rPr>
-              <a:t>és</a:t>
-            </a:r>
-            <a:r>
-              <a:rPr sz="1800" b="1" dirty="0">
-                <a:solidFill>
-                  <a:srgbClr val="192D3E"/>
-                </a:solidFill>
-                <a:latin typeface="Arial"/>
-              </a:rPr>
-              <a:t> </a:t>
-            </a:r>
-            <a:r>
-              <a:rPr sz="1800" b="1" dirty="0" err="1">
-                <a:solidFill>
-                  <a:srgbClr val="192D3E"/>
-                </a:solidFill>
-                <a:latin typeface="Arial"/>
-              </a:rPr>
-              <a:t>consumir</a:t>
-            </a:r>
-            <a:r>
-              <a:rPr sz="1800" b="1" dirty="0">
-                <a:solidFill>
-                  <a:srgbClr val="192D3E"/>
-                </a:solidFill>
-                <a:latin typeface="Arial"/>
-              </a:rPr>
-              <a:t> </a:t>
-            </a:r>
-            <a:r>
-              <a:rPr sz="1800" b="1" dirty="0" err="1">
-                <a:solidFill>
-                  <a:srgbClr val="192D3E"/>
-                </a:solidFill>
-                <a:latin typeface="Arial"/>
-              </a:rPr>
-              <a:t>una</a:t>
-            </a:r>
-            <a:r>
-              <a:rPr sz="1800" b="1" dirty="0">
-                <a:solidFill>
-                  <a:srgbClr val="192D3E"/>
-                </a:solidFill>
-                <a:latin typeface="Arial"/>
-              </a:rPr>
-              <a:t> API </a:t>
-            </a:r>
-            <a:r>
-              <a:rPr sz="1800" b="1" dirty="0" err="1">
-                <a:solidFill>
-                  <a:srgbClr val="192D3E"/>
-                </a:solidFill>
-                <a:latin typeface="Arial"/>
-              </a:rPr>
-              <a:t>concreta</a:t>
-            </a:r>
-            <a:r>
-              <a:rPr sz="1800" b="1" dirty="0">
-                <a:solidFill>
-                  <a:srgbClr val="192D3E"/>
-                </a:solidFill>
-                <a:latin typeface="Arial"/>
-              </a:rPr>
-              <a:t>. </a:t>
-            </a:r>
-            <a:r>
-              <a:rPr sz="1800" b="1" dirty="0" err="1">
-                <a:solidFill>
-                  <a:srgbClr val="192D3E"/>
-                </a:solidFill>
-                <a:latin typeface="Arial"/>
-              </a:rPr>
-              <a:t>És</a:t>
-            </a:r>
-            <a:r>
-              <a:rPr sz="1800" b="1" dirty="0">
-                <a:solidFill>
-                  <a:srgbClr val="192D3E"/>
-                </a:solidFill>
-                <a:latin typeface="Arial"/>
-              </a:rPr>
-              <a:t> </a:t>
-            </a:r>
-            <a:r>
-              <a:rPr sz="1800" b="1" dirty="0" err="1">
-                <a:solidFill>
-                  <a:srgbClr val="192D3E"/>
-                </a:solidFill>
-                <a:latin typeface="Arial"/>
-              </a:rPr>
-              <a:t>obtenir</a:t>
-            </a:r>
-            <a:r>
-              <a:rPr sz="1800" b="1" dirty="0">
-                <a:solidFill>
-                  <a:srgbClr val="192D3E"/>
-                </a:solidFill>
-                <a:latin typeface="Arial"/>
-              </a:rPr>
-              <a:t> </a:t>
-            </a:r>
-            <a:r>
-              <a:rPr sz="1800" b="1" dirty="0" err="1">
-                <a:solidFill>
-                  <a:srgbClr val="192D3E"/>
-                </a:solidFill>
-                <a:latin typeface="Arial"/>
-              </a:rPr>
-              <a:t>informació</a:t>
-            </a:r>
-            <a:r>
-              <a:rPr sz="1800" b="1" dirty="0">
-                <a:solidFill>
-                  <a:srgbClr val="192D3E"/>
-                </a:solidFill>
-                <a:latin typeface="Arial"/>
-              </a:rPr>
-              <a:t> </a:t>
-            </a:r>
-            <a:r>
-              <a:rPr sz="1800" b="1" dirty="0" err="1">
-                <a:solidFill>
-                  <a:srgbClr val="192D3E"/>
-                </a:solidFill>
-                <a:latin typeface="Arial"/>
-              </a:rPr>
-              <a:t>administrativa</a:t>
-            </a:r>
-            <a:r>
-              <a:rPr sz="1800" b="1" dirty="0">
-                <a:solidFill>
-                  <a:srgbClr val="192D3E"/>
-                </a:solidFill>
-                <a:latin typeface="Arial"/>
-              </a:rPr>
-              <a:t> </a:t>
-            </a:r>
-            <a:r>
-              <a:rPr sz="1800" b="1" dirty="0" err="1">
-                <a:solidFill>
-                  <a:srgbClr val="192D3E"/>
-                </a:solidFill>
-                <a:latin typeface="Arial"/>
-              </a:rPr>
-              <a:t>fiable</a:t>
-            </a:r>
-            <a:r>
-              <a:rPr sz="1800" b="1" dirty="0">
-                <a:solidFill>
-                  <a:srgbClr val="192D3E"/>
-                </a:solidFill>
-                <a:latin typeface="Arial"/>
-              </a:rPr>
-              <a:t> per </a:t>
-            </a:r>
-            <a:r>
-              <a:rPr sz="1800" b="1" dirty="0" err="1">
-                <a:solidFill>
-                  <a:srgbClr val="192D3E"/>
-                </a:solidFill>
-                <a:latin typeface="Arial"/>
-              </a:rPr>
-              <a:t>avaluar</a:t>
-            </a:r>
-            <a:r>
-              <a:rPr sz="1800" b="1" dirty="0">
-                <a:solidFill>
-                  <a:srgbClr val="192D3E"/>
-                </a:solidFill>
-                <a:latin typeface="Arial"/>
-              </a:rPr>
-              <a:t> </a:t>
-            </a:r>
-            <a:r>
-              <a:rPr sz="1800" b="1" dirty="0" err="1">
-                <a:solidFill>
-                  <a:srgbClr val="192D3E"/>
-                </a:solidFill>
-                <a:latin typeface="Arial"/>
-              </a:rPr>
-              <a:t>si</a:t>
-            </a:r>
-            <a:r>
-              <a:rPr sz="1800" b="1" dirty="0">
-                <a:solidFill>
-                  <a:srgbClr val="192D3E"/>
-                </a:solidFill>
-                <a:latin typeface="Arial"/>
-              </a:rPr>
-              <a:t> </a:t>
-            </a:r>
-            <a:r>
-              <a:rPr sz="1800" b="1" dirty="0" err="1">
-                <a:solidFill>
-                  <a:srgbClr val="192D3E"/>
-                </a:solidFill>
-                <a:latin typeface="Arial"/>
-              </a:rPr>
-              <a:t>una</a:t>
-            </a:r>
-            <a:r>
-              <a:rPr sz="1800" b="1" dirty="0">
-                <a:solidFill>
-                  <a:srgbClr val="192D3E"/>
-                </a:solidFill>
-                <a:latin typeface="Arial"/>
-              </a:rPr>
-              <a:t> </a:t>
-            </a:r>
-            <a:r>
-              <a:rPr sz="1800" b="1" dirty="0" err="1">
-                <a:solidFill>
-                  <a:srgbClr val="192D3E"/>
-                </a:solidFill>
-                <a:latin typeface="Arial"/>
-              </a:rPr>
-              <a:t>sol·licitud</a:t>
-            </a:r>
-            <a:r>
-              <a:rPr sz="1800" b="1" dirty="0">
-                <a:solidFill>
-                  <a:srgbClr val="192D3E"/>
-                </a:solidFill>
-                <a:latin typeface="Arial"/>
-              </a:rPr>
-              <a:t> </a:t>
-            </a:r>
-            <a:r>
-              <a:rPr sz="1800" b="1" dirty="0" err="1">
-                <a:solidFill>
-                  <a:srgbClr val="192D3E"/>
-                </a:solidFill>
-                <a:latin typeface="Arial"/>
-              </a:rPr>
-              <a:t>compleix</a:t>
-            </a:r>
-            <a:r>
-              <a:rPr sz="1800" b="1" dirty="0">
-                <a:solidFill>
-                  <a:srgbClr val="192D3E"/>
-                </a:solidFill>
-                <a:latin typeface="Arial"/>
-              </a:rPr>
-              <a:t> </a:t>
-            </a:r>
-            <a:r>
-              <a:rPr sz="1800" b="1" dirty="0" err="1">
-                <a:solidFill>
-                  <a:srgbClr val="192D3E"/>
-                </a:solidFill>
-                <a:latin typeface="Arial"/>
-              </a:rPr>
-              <a:t>els</a:t>
-            </a:r>
-            <a:r>
-              <a:rPr sz="1800" b="1" dirty="0">
-                <a:solidFill>
-                  <a:srgbClr val="192D3E"/>
-                </a:solidFill>
-                <a:latin typeface="Arial"/>
-              </a:rPr>
-              <a:t> </a:t>
-            </a:r>
-            <a:r>
-              <a:rPr sz="1800" b="1" dirty="0" err="1">
-                <a:solidFill>
-                  <a:srgbClr val="192D3E"/>
-                </a:solidFill>
-                <a:latin typeface="Arial"/>
-              </a:rPr>
-              <a:t>requisits</a:t>
-            </a:r>
-            <a:r>
-              <a:rPr sz="1800" b="1" dirty="0">
-                <a:solidFill>
-                  <a:srgbClr val="192D3E"/>
-                </a:solidFill>
-                <a:latin typeface="Arial"/>
-              </a:rPr>
-              <a:t> </a:t>
-            </a:r>
-            <a:r>
-              <a:rPr sz="1800" b="1" dirty="0" err="1">
-                <a:solidFill>
-                  <a:srgbClr val="192D3E"/>
-                </a:solidFill>
-                <a:latin typeface="Arial"/>
-              </a:rPr>
-              <a:t>econòmics</a:t>
-            </a:r>
-            <a:r>
-              <a:rPr sz="1800" b="1" dirty="0">
-                <a:solidFill>
-                  <a:srgbClr val="192D3E"/>
-                </a:solidFill>
-                <a:latin typeface="Arial"/>
-              </a:rPr>
-              <a:t>.</a:t>
-            </a:r>
-          </a:p>
-        </p:txBody>
-      </p:sp>
-      <p:sp>
-        <p:nvSpPr>
-          <p:cNvPr id="8" name="TextBox 7"/>
-          <p:cNvSpPr txBox="1"/>
-          <p:nvPr/>
-        </p:nvSpPr>
-        <p:spPr>
-          <a:xfrm>
-            <a:off x="8229600" y="3063240"/>
-            <a:ext cx="2926080" cy="1691640"/>
-          </a:xfrm>
-          <a:prstGeom prst="rect">
-            <a:avLst/>
-          </a:prstGeom>
-          <a:noFill/>
-        </p:spPr>
-        <p:txBody>
-          <a:bodyPr wrap="square">
-            <a:normAutofit/>
-          </a:bodyPr>
-          <a:lstStyle/>
-          <a:p>
-            <a:pPr>
-              <a:spcAft>
-                <a:spcPts val="800"/>
-              </a:spcAft>
-              <a:defRPr sz="1200">
-                <a:solidFill>
-                  <a:srgbClr val="262626"/>
-                </a:solidFill>
-                <a:latin typeface="Arial"/>
-              </a:defRPr>
-            </a:pPr>
-            <a:r>
-              <a:rPr dirty="0"/>
-              <a:t>La </a:t>
-            </a:r>
-            <a:r>
-              <a:rPr dirty="0" err="1"/>
-              <a:t>sol·licitud</a:t>
-            </a:r>
-            <a:r>
-              <a:rPr dirty="0"/>
-              <a:t> </a:t>
-            </a:r>
-            <a:r>
-              <a:rPr dirty="0" err="1"/>
-              <a:t>autoritza</a:t>
-            </a:r>
-            <a:r>
-              <a:rPr dirty="0"/>
-              <a:t> la consulta de </a:t>
-            </a:r>
-            <a:r>
-              <a:rPr dirty="0" err="1"/>
-              <a:t>renda</a:t>
-            </a:r>
-            <a:r>
-              <a:rPr dirty="0"/>
-              <a:t> </a:t>
-            </a:r>
-            <a:r>
-              <a:rPr dirty="0" err="1"/>
-              <a:t>i</a:t>
-            </a:r>
-            <a:r>
-              <a:rPr dirty="0"/>
-              <a:t> </a:t>
-            </a:r>
-            <a:r>
-              <a:rPr dirty="0" err="1"/>
-              <a:t>patrimoni</a:t>
-            </a:r>
-            <a:r>
-              <a:rPr dirty="0"/>
-              <a:t>.</a:t>
-            </a:r>
-          </a:p>
-          <a:p>
-            <a:pPr>
-              <a:spcAft>
-                <a:spcPts val="800"/>
-              </a:spcAft>
-              <a:defRPr sz="1200">
-                <a:solidFill>
-                  <a:srgbClr val="262626"/>
-                </a:solidFill>
-                <a:latin typeface="Arial"/>
-              </a:defRPr>
-            </a:pPr>
-            <a:r>
-              <a:rPr dirty="0"/>
-              <a:t>El </a:t>
-            </a:r>
-            <a:r>
-              <a:rPr dirty="0" err="1"/>
-              <a:t>patrimoni</a:t>
-            </a:r>
-            <a:r>
-              <a:rPr dirty="0"/>
-              <a:t> pot </a:t>
-            </a:r>
-            <a:r>
-              <a:rPr dirty="0" err="1"/>
-              <a:t>incloure</a:t>
-            </a:r>
-            <a:r>
-              <a:rPr dirty="0"/>
-              <a:t> </a:t>
-            </a:r>
-            <a:r>
-              <a:rPr dirty="0" err="1"/>
-              <a:t>béns</a:t>
-            </a:r>
-            <a:r>
-              <a:rPr dirty="0"/>
-              <a:t> </a:t>
-            </a:r>
-            <a:r>
-              <a:rPr dirty="0" err="1"/>
-              <a:t>immobles</a:t>
-            </a:r>
-            <a:r>
-              <a:rPr dirty="0"/>
-              <a:t>.</a:t>
-            </a:r>
-          </a:p>
-          <a:p>
-            <a:pPr>
-              <a:spcAft>
-                <a:spcPts val="800"/>
-              </a:spcAft>
-              <a:defRPr sz="1200">
-                <a:solidFill>
-                  <a:srgbClr val="262626"/>
-                </a:solidFill>
-                <a:latin typeface="Arial"/>
-              </a:defRPr>
-            </a:pPr>
-            <a:r>
-              <a:rPr dirty="0"/>
-              <a:t>El valor cadastral pot </a:t>
-            </a:r>
-            <a:r>
-              <a:rPr dirty="0" err="1"/>
-              <a:t>influir</a:t>
-            </a:r>
-            <a:r>
-              <a:rPr dirty="0"/>
-              <a:t> </a:t>
-            </a:r>
-            <a:r>
-              <a:rPr dirty="0" err="1"/>
-              <a:t>en</a:t>
-            </a:r>
-            <a:r>
-              <a:rPr dirty="0"/>
-              <a:t> </a:t>
-            </a:r>
-            <a:r>
-              <a:rPr dirty="0" err="1"/>
-              <a:t>el</a:t>
-            </a:r>
-            <a:r>
-              <a:rPr dirty="0"/>
-              <a:t> </a:t>
-            </a:r>
-            <a:r>
-              <a:rPr dirty="0" err="1"/>
-              <a:t>resultat</a:t>
-            </a:r>
-            <a:r>
-              <a:rPr dirty="0"/>
-              <a:t> </a:t>
-            </a:r>
-            <a:r>
-              <a:rPr dirty="0" err="1"/>
-              <a:t>econòmic</a:t>
-            </a:r>
-            <a:r>
-              <a:rPr dirty="0"/>
-              <a:t>.</a:t>
-            </a:r>
-          </a:p>
-          <a:p>
-            <a:pPr>
-              <a:spcAft>
-                <a:spcPts val="800"/>
-              </a:spcAft>
-              <a:defRPr sz="1200">
-                <a:solidFill>
-                  <a:srgbClr val="262626"/>
-                </a:solidFill>
-                <a:latin typeface="Arial"/>
-              </a:defRPr>
-            </a:pPr>
-            <a:r>
-              <a:rPr dirty="0"/>
-              <a:t>La </a:t>
-            </a:r>
-            <a:r>
-              <a:rPr dirty="0" err="1"/>
-              <a:t>documentació</a:t>
-            </a:r>
-            <a:r>
-              <a:rPr dirty="0"/>
-              <a:t> </a:t>
-            </a:r>
-            <a:r>
-              <a:rPr dirty="0" err="1"/>
-              <a:t>pública</a:t>
-            </a:r>
-            <a:r>
-              <a:rPr dirty="0"/>
-              <a:t> vincula PICA </a:t>
-            </a:r>
-            <a:r>
-              <a:rPr dirty="0" err="1"/>
-              <a:t>amb</a:t>
-            </a:r>
-            <a:r>
-              <a:rPr dirty="0"/>
-              <a:t> </a:t>
-            </a:r>
-            <a:r>
-              <a:rPr dirty="0" err="1"/>
-              <a:t>dades</a:t>
-            </a:r>
-            <a:r>
-              <a:rPr dirty="0"/>
-              <a:t> de </a:t>
-            </a:r>
-            <a:r>
-              <a:rPr dirty="0" err="1"/>
-              <a:t>cadastre</a:t>
-            </a:r>
-            <a:r>
-              <a:rPr dirty="0"/>
-              <a:t> </a:t>
-            </a:r>
-            <a:r>
-              <a:rPr dirty="0" err="1"/>
-              <a:t>disponibles</a:t>
-            </a:r>
-            <a:r>
-              <a:rPr dirty="0"/>
-              <a:t> per AEAT.</a:t>
-            </a:r>
-          </a:p>
-        </p:txBody>
-      </p:sp>
-      <p:sp>
-        <p:nvSpPr>
-          <p:cNvPr id="9" name="Rounded Rectangle 8"/>
+              <a:t>Sol·licitud → Expedient → Requisits generals
+→ Requisits econòmics → Revisió acadèmica
+→ Resolució</a:t>
+            </a:r>
+          </a:p>
+        </p:txBody>
+      </p:sp>
+      <p:sp>
+        <p:nvSpPr>
+          <p:cNvPr id="8" name="Rounded Rectangle 7"/>
           <p:cNvSpPr/>
           <p:nvPr/>
         </p:nvSpPr>
         <p:spPr>
           <a:xfrm>
-            <a:off x="8229600" y="4892040"/>
-            <a:ext cx="2926080" cy="1005840"/>
+            <a:off x="8001000" y="3337560"/>
+            <a:ext cx="3063240" cy="1234440"/>
           </a:xfrm>
           <a:prstGeom prst="roundRect">
             <a:avLst/>
           </a:prstGeom>
           <a:solidFill>
-            <a:srgbClr val="F7F8FA"/>
+            <a:srgbClr val="F8EAEA"/>
           </a:solidFill>
           <a:ln w="9525">
             <a:solidFill>
@@ -6734,14 +7422,51 @@
       </p:sp>
       <p:sp>
         <p:nvSpPr>
+          <p:cNvPr id="9" name="TextBox 8"/>
+          <p:cNvSpPr txBox="1"/>
+          <p:nvPr/>
+        </p:nvSpPr>
+        <p:spPr>
+          <a:xfrm>
+            <a:off x="8229600" y="3566160"/>
+            <a:ext cx="2606040" cy="749808"/>
+          </a:xfrm>
+          <a:prstGeom prst="rect">
+            <a:avLst/>
+          </a:prstGeom>
+          <a:noFill/>
+        </p:spPr>
+        <p:txBody>
+          <a:bodyPr wrap="square">
+            <a:normAutofit fontScale="85000" lnSpcReduction="20000"/>
+          </a:bodyPr>
+          <a:lstStyle/>
+          <a:p>
+            <a:pPr algn="ctr"/>
+            <a:r>
+              <a:rPr sz="2000" b="1">
+                <a:solidFill>
+                  <a:srgbClr val="192D3E"/>
+                </a:solidFill>
+                <a:latin typeface="Arial"/>
+              </a:rPr>
+              <a:t>Si no es compleixen
+requisits econòmics,
+l'expedient no avança.</a:t>
+            </a:r>
+          </a:p>
+        </p:txBody>
+      </p:sp>
+      <p:sp>
+        <p:nvSpPr>
           <p:cNvPr id="10" name="TextBox 9"/>
           <p:cNvSpPr txBox="1"/>
           <p:nvPr/>
         </p:nvSpPr>
         <p:spPr>
           <a:xfrm>
-            <a:off x="8394192" y="5029200"/>
-            <a:ext cx="2606040" cy="658368"/>
+            <a:off x="8001000" y="5166360"/>
+            <a:ext cx="3063240" cy="292608"/>
           </a:xfrm>
           <a:prstGeom prst="rect">
             <a:avLst/>
@@ -6750,19 +7475,19 @@
         </p:spPr>
         <p:txBody>
           <a:bodyPr wrap="square">
-            <a:normAutofit/>
+            <a:normAutofit fontScale="77500" lnSpcReduction="20000"/>
           </a:bodyPr>
           <a:lstStyle/>
           <a:p>
             <a:pPr algn="ctr"/>
             <a:r>
-              <a:rPr sz="800" b="0">
+              <a:rPr sz="1000" b="0">
                 <a:solidFill>
                   <a:srgbClr val="66707A"/>
                 </a:solidFill>
                 <a:latin typeface="Arial"/>
               </a:rPr>
-              <a:t>Glossari mínim: PICA és interoperabilitat administrativa; Cadastre és registre de béns immobles; SOAP/XML és missatgeria i format d'integració.</a:t>
+              <a:t>Fonts públiques: AGAUR requisits econòmics i BOE 2025-2026.</a:t>
             </a:r>
           </a:p>
         </p:txBody>
@@ -6785,7 +7510,7 @@
         </p:spPr>
         <p:txBody>
           <a:bodyPr wrap="square">
-            <a:normAutofit/>
+            <a:normAutofit lnSpcReduction="10000"/>
           </a:bodyPr>
           <a:lstStyle/>
           <a:p>
@@ -6820,7 +7545,7 @@
         </p:spPr>
         <p:txBody>
           <a:bodyPr wrap="square">
-            <a:normAutofit/>
+            <a:normAutofit lnSpcReduction="10000"/>
           </a:bodyPr>
           <a:lstStyle/>
           <a:p>
@@ -6832,7 +7557,7 @@
                 </a:solidFill>
                 <a:latin typeface="Arial"/>
               </a:rPr>
-              <a:t>5</a:t>
+              <a:t>4</a:t>
             </a:r>
           </a:p>
         </p:txBody>
@@ -6880,7 +7605,7 @@
         </p:spPr>
         <p:txBody>
           <a:bodyPr wrap="square">
-            <a:normAutofit/>
+            <a:normAutofit fontScale="92500"/>
           </a:bodyPr>
           <a:lstStyle/>
           <a:p>
@@ -6892,7 +7617,7 @@
                 </a:solidFill>
                 <a:latin typeface="Arial"/>
               </a:rPr>
-              <a:t>Quan l'acoblament es fa risc d'evolució</a:t>
+              <a:t>Quina informació externa necessita el procediment?</a:t>
             </a:r>
           </a:p>
         </p:txBody>
@@ -6927,7 +7652,7 @@
                 </a:solidFill>
                 <a:latin typeface="Arial"/>
               </a:rPr>
-              <a:t>Lectura institucional prudent: PICA, web services i orientació CTTI cap a APIs</a:t>
+              <a:t>Renda, patrimoni i informació cadastral</a:t>
             </a:r>
           </a:p>
         </p:txBody>
@@ -7000,16 +7725,40 @@
           </a:p>
         </p:txBody>
       </p:sp>
-      <p:sp>
-        <p:nvSpPr>
-          <p:cNvPr id="6" name="TextBox 5"/>
+      <p:pic>
+        <p:nvPicPr>
+          <p:cNvPr id="6" name="Picture 5" descr="agaur-data-interoperability.png"/>
+          <p:cNvPicPr>
+            <a:picLocks noChangeAspect="1"/>
+          </p:cNvPicPr>
+          <p:nvPr/>
+        </p:nvPicPr>
+        <p:blipFill>
+          <a:blip r:embed="rId3"/>
+          <a:stretch>
+            <a:fillRect/>
+          </a:stretch>
+        </p:blipFill>
+        <p:spPr>
+          <a:xfrm>
+            <a:off x="2889754" y="1234440"/>
+            <a:ext cx="2541531" cy="4709160"/>
+          </a:xfrm>
+          <a:prstGeom prst="rect">
+            <a:avLst/>
+          </a:prstGeom>
+        </p:spPr>
+      </p:pic>
+      <p:sp>
+        <p:nvSpPr>
+          <p:cNvPr id="7" name="TextBox 6"/>
           <p:cNvSpPr txBox="1"/>
           <p:nvPr/>
         </p:nvSpPr>
         <p:spPr>
           <a:xfrm>
-            <a:off x="822960" y="1298448"/>
-            <a:ext cx="10424160" cy="320040"/>
+            <a:off x="8183879" y="1417320"/>
+            <a:ext cx="2926080" cy="320040"/>
           </a:xfrm>
           <a:prstGeom prst="rect">
             <a:avLst/>
@@ -7018,7 +7767,7 @@
         </p:spPr>
         <p:txBody>
           <a:bodyPr wrap="square">
-            <a:normAutofit/>
+            <a:normAutofit lnSpcReduction="10000"/>
           </a:bodyPr>
           <a:lstStyle/>
           <a:p>
@@ -7026,58 +7775,12 @@
             <a:r>
               <a:rPr sz="1600" b="1">
                 <a:solidFill>
-                  <a:srgbClr val="192D3E"/>
-                </a:solidFill>
-                <a:latin typeface="Arial"/>
-              </a:rPr>
-              <a:t>La qüestió no és predir l'evolució concreta de SOAP: és que cap tecnologia d'integració ha d'arrossegar el procediment.</a:t>
-            </a:r>
-          </a:p>
-        </p:txBody>
-      </p:sp>
-      <p:sp>
-        <p:nvSpPr>
-          <p:cNvPr id="7" name="Rectangle 6"/>
-          <p:cNvSpPr/>
-          <p:nvPr/>
-        </p:nvSpPr>
-        <p:spPr>
-          <a:xfrm>
-            <a:off x="777240" y="1783080"/>
-            <a:ext cx="3246120" cy="2971800"/>
-          </a:xfrm>
-          <a:prstGeom prst="rect">
-            <a:avLst/>
-          </a:prstGeom>
-          <a:solidFill>
-            <a:srgbClr val="F8EAEA"/>
-          </a:solidFill>
-          <a:ln w="9525">
-            <a:solidFill>
-              <a:srgbClr val="DCE0E4"/>
-            </a:solidFill>
-          </a:ln>
-        </p:spPr>
-        <p:style>
-          <a:lnRef idx="1">
-            <a:schemeClr val="accent1"/>
-          </a:lnRef>
-          <a:fillRef idx="3">
-            <a:schemeClr val="accent1"/>
-          </a:fillRef>
-          <a:effectRef idx="2">
-            <a:schemeClr val="accent1"/>
-          </a:effectRef>
-          <a:fontRef idx="minor">
-            <a:schemeClr val="lt1"/>
-          </a:fontRef>
-        </p:style>
-        <p:txBody>
-          <a:bodyPr rtlCol="0" anchor="ctr"/>
-          <a:lstStyle/>
-          <a:p>
-            <a:pPr algn="ctr"/>
-            <a:endParaRPr/>
+                  <a:srgbClr val="236092"/>
+                </a:solidFill>
+                <a:latin typeface="Arial"/>
+              </a:rPr>
+              <a:t>NECESSITAT</a:t>
+            </a:r>
           </a:p>
         </p:txBody>
       </p:sp>
@@ -7089,8 +7792,8 @@
         </p:nvSpPr>
         <p:spPr>
           <a:xfrm>
-            <a:off x="1005840" y="2011680"/>
-            <a:ext cx="2788920" cy="292608"/>
+            <a:off x="8275320" y="1828800"/>
+            <a:ext cx="2743200" cy="960120"/>
           </a:xfrm>
           <a:prstGeom prst="rect">
             <a:avLst/>
@@ -7099,228 +7802,7 @@
         </p:spPr>
         <p:txBody>
           <a:bodyPr wrap="square">
-            <a:normAutofit/>
-          </a:bodyPr>
-          <a:lstStyle/>
-          <a:p>
-            <a:pPr algn="ctr"/>
-            <a:r>
-              <a:rPr sz="1800" b="1">
-                <a:solidFill>
-                  <a:srgbClr val="192D3E"/>
-                </a:solidFill>
-                <a:latin typeface="Arial"/>
-              </a:rPr>
-              <a:t>Situació verificable</a:t>
-            </a:r>
-          </a:p>
-        </p:txBody>
-      </p:sp>
-      <p:sp>
-        <p:nvSpPr>
-          <p:cNvPr id="9" name="TextBox 8"/>
-          <p:cNvSpPr txBox="1"/>
-          <p:nvPr/>
-        </p:nvSpPr>
-        <p:spPr>
-          <a:xfrm>
-            <a:off x="1024128" y="2487168"/>
-            <a:ext cx="2788920" cy="640080"/>
-          </a:xfrm>
-          <a:prstGeom prst="rect">
-            <a:avLst/>
-          </a:prstGeom>
-          <a:noFill/>
-        </p:spPr>
-        <p:txBody>
-          <a:bodyPr wrap="square">
-            <a:normAutofit/>
-          </a:bodyPr>
-          <a:lstStyle/>
-          <a:p>
-            <a:pPr algn="ctr"/>
-            <a:r>
-              <a:rPr sz="1600" b="1">
-                <a:solidFill>
-                  <a:srgbClr val="192D3E"/>
-                </a:solidFill>
-                <a:latin typeface="Arial"/>
-              </a:rPr>
-              <a:t>PICA continua essent una plataforma corporativa d'interoperabilitat.</a:t>
-            </a:r>
-          </a:p>
-        </p:txBody>
-      </p:sp>
-      <p:sp>
-        <p:nvSpPr>
-          <p:cNvPr id="10" name="TextBox 9"/>
-          <p:cNvSpPr txBox="1"/>
-          <p:nvPr/>
-        </p:nvSpPr>
-        <p:spPr>
-          <a:xfrm>
-            <a:off x="1024128" y="3364992"/>
-            <a:ext cx="2788920" cy="640080"/>
-          </a:xfrm>
-          <a:prstGeom prst="rect">
-            <a:avLst/>
-          </a:prstGeom>
-          <a:noFill/>
-        </p:spPr>
-        <p:txBody>
-          <a:bodyPr wrap="square">
-            <a:normAutofit/>
-          </a:bodyPr>
-          <a:lstStyle/>
-          <a:p>
-            <a:pPr algn="ctr"/>
-            <a:r>
-              <a:rPr sz="1400" b="0">
-                <a:solidFill>
-                  <a:srgbClr val="262626"/>
-                </a:solidFill>
-                <a:latin typeface="Arial"/>
-              </a:rPr>
-              <a:t>La documentació pública mostra integració amb web services i antecedents SOAP.</a:t>
-            </a:r>
-          </a:p>
-        </p:txBody>
-      </p:sp>
-      <p:sp>
-        <p:nvSpPr>
-          <p:cNvPr id="11" name="TextBox 10"/>
-          <p:cNvSpPr txBox="1"/>
-          <p:nvPr/>
-        </p:nvSpPr>
-        <p:spPr>
-          <a:xfrm>
-            <a:off x="1024128" y="4114800"/>
-            <a:ext cx="2788920" cy="320040"/>
-          </a:xfrm>
-          <a:prstGeom prst="rect">
-            <a:avLst/>
-          </a:prstGeom>
-          <a:noFill/>
-        </p:spPr>
-        <p:txBody>
-          <a:bodyPr wrap="square">
-            <a:normAutofit/>
-          </a:bodyPr>
-          <a:lstStyle/>
-          <a:p>
-            <a:pPr algn="ctr"/>
-            <a:r>
-              <a:rPr sz="1700" b="1">
-                <a:solidFill>
-                  <a:srgbClr val="236092"/>
-                </a:solidFill>
-                <a:latin typeface="Arial"/>
-              </a:rPr>
-              <a:t>PICA / web services</a:t>
-            </a:r>
-          </a:p>
-        </p:txBody>
-      </p:sp>
-      <p:sp>
-        <p:nvSpPr>
-          <p:cNvPr id="12" name="Rectangle 11"/>
-          <p:cNvSpPr/>
-          <p:nvPr/>
-        </p:nvSpPr>
-        <p:spPr>
-          <a:xfrm>
-            <a:off x="4434840" y="1783080"/>
-            <a:ext cx="3246120" cy="2971800"/>
-          </a:xfrm>
-          <a:prstGeom prst="rect">
-            <a:avLst/>
-          </a:prstGeom>
-          <a:solidFill>
-            <a:srgbClr val="FFF3D6"/>
-          </a:solidFill>
-          <a:ln w="9525">
-            <a:solidFill>
-              <a:srgbClr val="DCE0E4"/>
-            </a:solidFill>
-          </a:ln>
-        </p:spPr>
-        <p:style>
-          <a:lnRef idx="1">
-            <a:schemeClr val="accent1"/>
-          </a:lnRef>
-          <a:fillRef idx="3">
-            <a:schemeClr val="accent1"/>
-          </a:fillRef>
-          <a:effectRef idx="2">
-            <a:schemeClr val="accent1"/>
-          </a:effectRef>
-          <a:fontRef idx="minor">
-            <a:schemeClr val="lt1"/>
-          </a:fontRef>
-        </p:style>
-        <p:txBody>
-          <a:bodyPr rtlCol="0" anchor="ctr"/>
-          <a:lstStyle/>
-          <a:p>
-            <a:pPr algn="ctr"/>
-            <a:endParaRPr/>
-          </a:p>
-        </p:txBody>
-      </p:sp>
-      <p:sp>
-        <p:nvSpPr>
-          <p:cNvPr id="13" name="TextBox 12"/>
-          <p:cNvSpPr txBox="1"/>
-          <p:nvPr/>
-        </p:nvSpPr>
-        <p:spPr>
-          <a:xfrm>
-            <a:off x="4663440" y="2011680"/>
-            <a:ext cx="2788920" cy="292608"/>
-          </a:xfrm>
-          <a:prstGeom prst="rect">
-            <a:avLst/>
-          </a:prstGeom>
-          <a:noFill/>
-        </p:spPr>
-        <p:txBody>
-          <a:bodyPr wrap="square">
-            <a:normAutofit/>
-          </a:bodyPr>
-          <a:lstStyle/>
-          <a:p>
-            <a:pPr algn="ctr"/>
-            <a:r>
-              <a:rPr sz="1800" b="1">
-                <a:solidFill>
-                  <a:srgbClr val="192D3E"/>
-                </a:solidFill>
-                <a:latin typeface="Arial"/>
-              </a:rPr>
-              <a:t>Risc arquitectònic</a:t>
-            </a:r>
-          </a:p>
-        </p:txBody>
-      </p:sp>
-      <p:sp>
-        <p:nvSpPr>
-          <p:cNvPr id="14" name="TextBox 13"/>
-          <p:cNvSpPr txBox="1"/>
-          <p:nvPr/>
-        </p:nvSpPr>
-        <p:spPr>
-          <a:xfrm>
-            <a:off x="4681728" y="2514600"/>
-            <a:ext cx="2788920" cy="1737360"/>
-          </a:xfrm>
-          <a:prstGeom prst="rect">
-            <a:avLst/>
-          </a:prstGeom>
-          <a:noFill/>
-        </p:spPr>
-        <p:txBody>
-          <a:bodyPr wrap="square">
-            <a:normAutofit/>
+            <a:normAutofit fontScale="92500" lnSpcReduction="10000"/>
           </a:bodyPr>
           <a:lstStyle/>
           <a:p>
@@ -7328,7 +7810,7 @@
               <a:spcAft>
                 <a:spcPts val="800"/>
               </a:spcAft>
-              <a:defRPr sz="1200">
+              <a:defRPr sz="1700">
                 <a:solidFill>
                   <a:srgbClr val="262626"/>
                 </a:solidFill>
@@ -7336,7 +7818,7 @@
               </a:defRPr>
             </a:pPr>
             <a:r>
-              <a:t>El flux de l'expedient coneix PICA, SOAP/XML, DTOs, mapping i errors tècnics.</a:t>
+              <a:t>Renda familiar</a:t>
             </a:r>
           </a:p>
           <a:p>
@@ -7344,7 +7826,7 @@
               <a:spcAft>
                 <a:spcPts val="800"/>
               </a:spcAft>
-              <a:defRPr sz="1200">
+              <a:defRPr sz="1700">
                 <a:solidFill>
                   <a:srgbClr val="262626"/>
                 </a:solidFill>
@@ -7352,7 +7834,7 @@
               </a:defRPr>
             </a:pPr>
             <a:r>
-              <a:t>La lògica administrativa depèn d'una tecnologia d'integració concreta.</a:t>
+              <a:t>Patrimoni</a:t>
             </a:r>
           </a:p>
           <a:p>
@@ -7360,7 +7842,7 @@
               <a:spcAft>
                 <a:spcPts val="800"/>
               </a:spcAft>
-              <a:defRPr sz="1200">
+              <a:defRPr sz="1700">
                 <a:solidFill>
                   <a:srgbClr val="262626"/>
                 </a:solidFill>
@@ -7368,67 +7850,163 @@
               </a:defRPr>
             </a:pPr>
             <a:r>
-              <a:t>Qualsevol evolució cap a REST, API Manager o EventHub impacta massa capes.</a:t>
-            </a:r>
-          </a:p>
-        </p:txBody>
-      </p:sp>
-      <p:sp>
-        <p:nvSpPr>
-          <p:cNvPr id="15" name="Rectangle 14"/>
-          <p:cNvSpPr/>
-          <p:nvPr/>
-        </p:nvSpPr>
-        <p:spPr>
-          <a:xfrm>
-            <a:off x="8092440" y="1783080"/>
-            <a:ext cx="3246120" cy="2971800"/>
-          </a:xfrm>
-          <a:prstGeom prst="rect">
-            <a:avLst/>
-          </a:prstGeom>
-          <a:solidFill>
-            <a:srgbClr val="E8F1F8"/>
-          </a:solidFill>
-          <a:ln w="9525">
-            <a:solidFill>
-              <a:srgbClr val="DCE0E4"/>
-            </a:solidFill>
-          </a:ln>
-        </p:spPr>
-        <p:style>
-          <a:lnRef idx="1">
-            <a:schemeClr val="accent1"/>
-          </a:lnRef>
-          <a:fillRef idx="3">
-            <a:schemeClr val="accent1"/>
-          </a:fillRef>
-          <a:effectRef idx="2">
-            <a:schemeClr val="accent1"/>
-          </a:effectRef>
-          <a:fontRef idx="minor">
-            <a:schemeClr val="lt1"/>
-          </a:fontRef>
-        </p:style>
-        <p:txBody>
-          <a:bodyPr rtlCol="0" anchor="ctr"/>
+              <a:t>Béns immobles</a:t>
+            </a:r>
+          </a:p>
+        </p:txBody>
+      </p:sp>
+      <p:sp>
+        <p:nvSpPr>
+          <p:cNvPr id="9" name="TextBox 8"/>
+          <p:cNvSpPr txBox="1"/>
+          <p:nvPr/>
+        </p:nvSpPr>
+        <p:spPr>
+          <a:xfrm>
+            <a:off x="8183879" y="3063240"/>
+            <a:ext cx="2926080" cy="320040"/>
+          </a:xfrm>
+          <a:prstGeom prst="rect">
+            <a:avLst/>
+          </a:prstGeom>
+          <a:noFill/>
+        </p:spPr>
+        <p:txBody>
+          <a:bodyPr wrap="square">
+            <a:normAutofit lnSpcReduction="10000"/>
+          </a:bodyPr>
           <a:lstStyle/>
           <a:p>
             <a:pPr algn="ctr"/>
-            <a:endParaRPr/>
-          </a:p>
-        </p:txBody>
-      </p:sp>
-      <p:sp>
-        <p:nvSpPr>
-          <p:cNvPr id="16" name="TextBox 15"/>
+            <a:r>
+              <a:rPr sz="1600" b="1">
+                <a:solidFill>
+                  <a:srgbClr val="236092"/>
+                </a:solidFill>
+                <a:latin typeface="Arial"/>
+              </a:rPr>
+              <a:t>FONTS</a:t>
+            </a:r>
+          </a:p>
+        </p:txBody>
+      </p:sp>
+      <p:sp>
+        <p:nvSpPr>
+          <p:cNvPr id="10" name="TextBox 9"/>
           <p:cNvSpPr txBox="1"/>
           <p:nvPr/>
         </p:nvSpPr>
         <p:spPr>
           <a:xfrm>
-            <a:off x="8321040" y="2011680"/>
-            <a:ext cx="2788920" cy="292608"/>
+            <a:off x="8275320" y="3474720"/>
+            <a:ext cx="2743200" cy="914400"/>
+          </a:xfrm>
+          <a:prstGeom prst="rect">
+            <a:avLst/>
+          </a:prstGeom>
+          <a:noFill/>
+        </p:spPr>
+        <p:txBody>
+          <a:bodyPr wrap="square">
+            <a:normAutofit fontScale="92500" lnSpcReduction="20000"/>
+          </a:bodyPr>
+          <a:lstStyle/>
+          <a:p>
+            <a:pPr>
+              <a:spcAft>
+                <a:spcPts val="800"/>
+              </a:spcAft>
+              <a:defRPr sz="1700">
+                <a:solidFill>
+                  <a:srgbClr val="262626"/>
+                </a:solidFill>
+                <a:latin typeface="Arial"/>
+              </a:defRPr>
+            </a:pPr>
+            <a:r>
+              <a:t>AEAT</a:t>
+            </a:r>
+          </a:p>
+          <a:p>
+            <a:pPr>
+              <a:spcAft>
+                <a:spcPts val="800"/>
+              </a:spcAft>
+              <a:defRPr sz="1700">
+                <a:solidFill>
+                  <a:srgbClr val="262626"/>
+                </a:solidFill>
+                <a:latin typeface="Arial"/>
+              </a:defRPr>
+            </a:pPr>
+            <a:r>
+              <a:t>Cadastre</a:t>
+            </a:r>
+          </a:p>
+          <a:p>
+            <a:pPr>
+              <a:spcAft>
+                <a:spcPts val="800"/>
+              </a:spcAft>
+              <a:defRPr sz="1700">
+                <a:solidFill>
+                  <a:srgbClr val="262626"/>
+                </a:solidFill>
+                <a:latin typeface="Arial"/>
+              </a:defRPr>
+            </a:pPr>
+            <a:r>
+              <a:t>PICA</a:t>
+            </a:r>
+          </a:p>
+        </p:txBody>
+      </p:sp>
+      <p:sp>
+        <p:nvSpPr>
+          <p:cNvPr id="11" name="TextBox 10"/>
+          <p:cNvSpPr txBox="1"/>
+          <p:nvPr/>
+        </p:nvSpPr>
+        <p:spPr>
+          <a:xfrm>
+            <a:off x="8092440" y="4892040"/>
+            <a:ext cx="3063240" cy="685800"/>
+          </a:xfrm>
+          <a:prstGeom prst="rect">
+            <a:avLst/>
+          </a:prstGeom>
+          <a:noFill/>
+        </p:spPr>
+        <p:txBody>
+          <a:bodyPr wrap="square">
+            <a:normAutofit fontScale="92500" lnSpcReduction="20000"/>
+          </a:bodyPr>
+          <a:lstStyle/>
+          <a:p>
+            <a:pPr algn="ctr"/>
+            <a:r>
+              <a:rPr sz="1600" b="1">
+                <a:solidFill>
+                  <a:srgbClr val="192D3E"/>
+                </a:solidFill>
+                <a:latin typeface="Arial"/>
+              </a:rPr>
+              <a:t>El procediment necessita informació administrativa,
+no una API concreta.</a:t>
+            </a:r>
+          </a:p>
+        </p:txBody>
+      </p:sp>
+      <p:sp>
+        <p:nvSpPr>
+          <p:cNvPr id="12" name="TextBox 11"/>
+          <p:cNvSpPr txBox="1"/>
+          <p:nvPr/>
+        </p:nvSpPr>
+        <p:spPr>
+          <a:xfrm>
+            <a:off x="914400" y="5897880"/>
+            <a:ext cx="10332720" cy="228600"/>
           </a:xfrm>
           <a:prstGeom prst="rect">
             <a:avLst/>
@@ -7443,162 +8021,20 @@
           <a:p>
             <a:pPr algn="ctr"/>
             <a:r>
-              <a:rPr sz="1800" b="1">
-                <a:solidFill>
-                  <a:srgbClr val="192D3E"/>
-                </a:solidFill>
-                <a:latin typeface="Arial"/>
-              </a:rPr>
-              <a:t>Criteri docent</a:t>
-            </a:r>
-          </a:p>
-        </p:txBody>
-      </p:sp>
-      <p:sp>
-        <p:nvSpPr>
-          <p:cNvPr id="17" name="TextBox 16"/>
-          <p:cNvSpPr txBox="1"/>
-          <p:nvPr/>
-        </p:nvSpPr>
-        <p:spPr>
-          <a:xfrm>
-            <a:off x="8339327" y="2542032"/>
-            <a:ext cx="2788920" cy="685800"/>
-          </a:xfrm>
-          <a:prstGeom prst="rect">
-            <a:avLst/>
-          </a:prstGeom>
-          <a:noFill/>
-        </p:spPr>
-        <p:txBody>
-          <a:bodyPr wrap="square">
-            <a:normAutofit/>
-          </a:bodyPr>
-          <a:lstStyle/>
-          <a:p>
-            <a:pPr algn="ctr"/>
-            <a:r>
-              <a:rPr sz="1600" b="1">
-                <a:solidFill>
-                  <a:srgbClr val="192D3E"/>
-                </a:solidFill>
-                <a:latin typeface="Arial"/>
-              </a:rPr>
-              <a:t>Separar criteris del procediment, casos d'ús i infraestructura.</a:t>
-            </a:r>
-          </a:p>
-        </p:txBody>
-      </p:sp>
-      <p:sp>
-        <p:nvSpPr>
-          <p:cNvPr id="18" name="TextBox 17"/>
-          <p:cNvSpPr txBox="1"/>
-          <p:nvPr/>
-        </p:nvSpPr>
-        <p:spPr>
-          <a:xfrm>
-            <a:off x="8339327" y="3474720"/>
-            <a:ext cx="2788920" cy="777240"/>
-          </a:xfrm>
-          <a:prstGeom prst="rect">
-            <a:avLst/>
-          </a:prstGeom>
-          <a:noFill/>
-        </p:spPr>
-        <p:txBody>
-          <a:bodyPr wrap="square">
-            <a:normAutofit/>
-          </a:bodyPr>
-          <a:lstStyle/>
-          <a:p>
-            <a:pPr algn="ctr"/>
-            <a:r>
-              <a:rPr sz="1800" b="1">
-                <a:solidFill>
-                  <a:srgbClr val="236092"/>
-                </a:solidFill>
-                <a:latin typeface="Arial"/>
-              </a:rPr>
-              <a:t>Port de sortida
-+
-adaptadors substituïbles</a:t>
-            </a:r>
-          </a:p>
-        </p:txBody>
-      </p:sp>
-      <p:sp>
-        <p:nvSpPr>
-          <p:cNvPr id="19" name="TextBox 18"/>
-          <p:cNvSpPr txBox="1"/>
-          <p:nvPr/>
-        </p:nvSpPr>
-        <p:spPr>
-          <a:xfrm>
-            <a:off x="1051560" y="5074920"/>
-            <a:ext cx="6949440" cy="566928"/>
-          </a:xfrm>
-          <a:prstGeom prst="rect">
-            <a:avLst/>
-          </a:prstGeom>
-          <a:noFill/>
-        </p:spPr>
-        <p:txBody>
-          <a:bodyPr wrap="square">
-            <a:normAutofit/>
-          </a:bodyPr>
-          <a:lstStyle/>
-          <a:p>
-            <a:pPr algn="l"/>
-            <a:r>
-              <a:rPr sz="1700" b="1">
-                <a:solidFill>
-                  <a:srgbClr val="192D3E"/>
-                </a:solidFill>
-                <a:latin typeface="Arial"/>
-              </a:rPr>
-              <a:t>El motiu arquitectònic no és només "fer REST": és evitar que l'evolució tecnològica arrossegui els casos d'ús.</a:t>
-            </a:r>
-          </a:p>
-        </p:txBody>
-      </p:sp>
-      <p:sp>
-        <p:nvSpPr>
-          <p:cNvPr id="20" name="TextBox 19"/>
-          <p:cNvSpPr txBox="1"/>
-          <p:nvPr/>
-        </p:nvSpPr>
-        <p:spPr>
-          <a:xfrm>
-            <a:off x="8229600" y="5102352"/>
-            <a:ext cx="2971800" cy="502920"/>
-          </a:xfrm>
-          <a:prstGeom prst="rect">
-            <a:avLst/>
-          </a:prstGeom>
-          <a:noFill/>
-        </p:spPr>
-        <p:txBody>
-          <a:bodyPr wrap="square">
-            <a:normAutofit/>
-          </a:bodyPr>
-          <a:lstStyle/>
-          <a:p>
-            <a:pPr algn="ctr"/>
-            <a:r>
-              <a:rPr sz="1000" b="0">
+              <a:rPr sz="900" b="0">
                 <a:solidFill>
                   <a:srgbClr val="66707A"/>
                 </a:solidFill>
                 <a:latin typeface="Arial"/>
               </a:rPr>
-              <a:t>Evidència: l'informe AGAUR acredita refactorització SOAP cap a REST i reducció d'acoblament.</a:t>
-            </a:r>
-          </a:p>
-        </p:txBody>
-      </p:sp>
-      <p:sp>
-        <p:nvSpPr>
-          <p:cNvPr id="21" name="TextBox 20"/>
+              <a:t>PICA: interoperabilitat administrativa · Cadastre: registre de béns immobles · SOAP/XML: missatgeria i format d'integració</a:t>
+            </a:r>
+          </a:p>
+        </p:txBody>
+      </p:sp>
+      <p:sp>
+        <p:nvSpPr>
+          <p:cNvPr id="13" name="TextBox 12"/>
           <p:cNvSpPr txBox="1"/>
           <p:nvPr/>
         </p:nvSpPr>
@@ -7614,7 +8050,7 @@
         </p:spPr>
         <p:txBody>
           <a:bodyPr wrap="square">
-            <a:normAutofit/>
+            <a:normAutofit lnSpcReduction="10000"/>
           </a:bodyPr>
           <a:lstStyle/>
           <a:p>
@@ -7633,7 +8069,7 @@
       </p:sp>
       <p:sp>
         <p:nvSpPr>
-          <p:cNvPr id="22" name="TextBox 21"/>
+          <p:cNvPr id="14" name="TextBox 13"/>
           <p:cNvSpPr txBox="1"/>
           <p:nvPr/>
         </p:nvSpPr>
@@ -7649,7 +8085,7 @@
         </p:spPr>
         <p:txBody>
           <a:bodyPr wrap="square">
-            <a:normAutofit/>
+            <a:normAutofit lnSpcReduction="10000"/>
           </a:bodyPr>
           <a:lstStyle/>
           <a:p>
@@ -7661,7 +8097,7 @@
                 </a:solidFill>
                 <a:latin typeface="Arial"/>
               </a:rPr>
-              <a:t>6</a:t>
+              <a:t>5</a:t>
             </a:r>
           </a:p>
         </p:txBody>
@@ -7709,7 +8145,7 @@
         </p:spPr>
         <p:txBody>
           <a:bodyPr wrap="square">
-            <a:normAutofit/>
+            <a:normAutofit lnSpcReduction="10000"/>
           </a:bodyPr>
           <a:lstStyle/>
           <a:p>
@@ -7721,7 +8157,7 @@
                 </a:solidFill>
                 <a:latin typeface="Arial"/>
               </a:rPr>
-              <a:t>Solució AGAUR: port de sortida i adaptador</a:t>
+              <a:t>Quan canvia la integració, canvia massa codi</a:t>
             </a:r>
           </a:p>
         </p:txBody>
@@ -7794,40 +8230,16 @@
           </a:p>
         </p:txBody>
       </p:sp>
-      <p:pic>
-        <p:nvPicPr>
-          <p:cNvPr id="5" name="Picture 4" descr="agaur-after-hexagonal.png"/>
-          <p:cNvPicPr>
-            <a:picLocks noChangeAspect="1"/>
-          </p:cNvPicPr>
-          <p:nvPr/>
-        </p:nvPicPr>
-        <p:blipFill>
-          <a:blip r:embed="rId3"/>
-          <a:stretch>
-            <a:fillRect/>
-          </a:stretch>
-        </p:blipFill>
-        <p:spPr>
-          <a:xfrm>
-            <a:off x="685800" y="2511212"/>
-            <a:ext cx="7315200" cy="2475655"/>
-          </a:xfrm>
-          <a:prstGeom prst="rect">
-            <a:avLst/>
-          </a:prstGeom>
-        </p:spPr>
-      </p:pic>
-      <p:sp>
-        <p:nvSpPr>
-          <p:cNvPr id="6" name="TextBox 5"/>
+      <p:sp>
+        <p:nvSpPr>
+          <p:cNvPr id="5" name="TextBox 4"/>
           <p:cNvSpPr txBox="1"/>
           <p:nvPr/>
         </p:nvSpPr>
         <p:spPr>
           <a:xfrm>
-            <a:off x="8229600" y="1828800"/>
-            <a:ext cx="2971800" cy="1920240"/>
+            <a:off x="960120" y="1600200"/>
+            <a:ext cx="10241280" cy="777240"/>
           </a:xfrm>
           <a:prstGeom prst="rect">
             <a:avLst/>
@@ -7840,17 +8252,62 @@
           </a:bodyPr>
           <a:lstStyle/>
           <a:p>
-            <a:pPr algn="l"/>
-            <a:r>
-              <a:rPr sz="2100" b="1">
+            <a:pPr algn="ctr"/>
+            <a:r>
+              <a:rPr sz="3100" b="1">
                 <a:solidFill>
                   <a:srgbClr val="192D3E"/>
                 </a:solidFill>
                 <a:latin typeface="Arial"/>
               </a:rPr>
-              <a:t>El port defineix què necessita l'aplicació.
-L'adaptador resol com obtenir-ho amb una tecnologia concreta.</a:t>
-            </a:r>
+              <a:t>Cas d'ús  →  SOAP/XML  →  PICA  →  AEAT</a:t>
+            </a:r>
+          </a:p>
+        </p:txBody>
+      </p:sp>
+      <p:sp>
+        <p:nvSpPr>
+          <p:cNvPr id="6" name="Rectangle 5"/>
+          <p:cNvSpPr/>
+          <p:nvPr/>
+        </p:nvSpPr>
+        <p:spPr>
+          <a:xfrm>
+            <a:off x="914400" y="2743200"/>
+            <a:ext cx="3063240" cy="1188720"/>
+          </a:xfrm>
+          <a:prstGeom prst="rect">
+            <a:avLst/>
+          </a:prstGeom>
+          <a:solidFill>
+            <a:srgbClr val="F8EAEA"/>
+          </a:solidFill>
+          <a:ln w="9525">
+            <a:solidFill>
+              <a:srgbClr val="DCE0E4"/>
+            </a:solidFill>
+          </a:ln>
+        </p:spPr>
+        <p:style>
+          <a:lnRef idx="1">
+            <a:schemeClr val="accent1"/>
+          </a:lnRef>
+          <a:fillRef idx="3">
+            <a:schemeClr val="accent1"/>
+          </a:fillRef>
+          <a:effectRef idx="2">
+            <a:schemeClr val="accent1"/>
+          </a:effectRef>
+          <a:fontRef idx="minor">
+            <a:schemeClr val="lt1"/>
+          </a:fontRef>
+        </p:style>
+        <p:txBody>
+          <a:bodyPr rtlCol="0" anchor="ctr"/>
+          <a:lstStyle/>
+          <a:p>
+            <a:pPr algn="ctr"/>
+            <a:endParaRPr/>
           </a:p>
         </p:txBody>
       </p:sp>
@@ -7862,8 +8319,372 @@
         </p:nvSpPr>
         <p:spPr>
           <a:xfrm>
-            <a:off x="8229600" y="4160520"/>
-            <a:ext cx="2971800" cy="822960"/>
+            <a:off x="1143000" y="3017520"/>
+            <a:ext cx="2606040" cy="548640"/>
+          </a:xfrm>
+          <a:prstGeom prst="rect">
+            <a:avLst/>
+          </a:prstGeom>
+          <a:noFill/>
+        </p:spPr>
+        <p:txBody>
+          <a:bodyPr wrap="square">
+            <a:normAutofit fontScale="92500" lnSpcReduction="20000"/>
+          </a:bodyPr>
+          <a:lstStyle/>
+          <a:p>
+            <a:pPr algn="ctr"/>
+            <a:r>
+              <a:rPr sz="1800" b="1">
+                <a:solidFill>
+                  <a:srgbClr val="192D3E"/>
+                </a:solidFill>
+                <a:latin typeface="Arial"/>
+              </a:rPr>
+              <a:t>El cas d'ús coneix
+la infraestructura</a:t>
+            </a:r>
+          </a:p>
+        </p:txBody>
+      </p:sp>
+      <p:sp>
+        <p:nvSpPr>
+          <p:cNvPr id="8" name="Rectangle 7"/>
+          <p:cNvSpPr/>
+          <p:nvPr/>
+        </p:nvSpPr>
+        <p:spPr>
+          <a:xfrm>
+            <a:off x="4526280" y="2743200"/>
+            <a:ext cx="3063240" cy="1188720"/>
+          </a:xfrm>
+          <a:prstGeom prst="rect">
+            <a:avLst/>
+          </a:prstGeom>
+          <a:solidFill>
+            <a:srgbClr val="FFF3D6"/>
+          </a:solidFill>
+          <a:ln w="9525">
+            <a:solidFill>
+              <a:srgbClr val="DCE0E4"/>
+            </a:solidFill>
+          </a:ln>
+        </p:spPr>
+        <p:style>
+          <a:lnRef idx="1">
+            <a:schemeClr val="accent1"/>
+          </a:lnRef>
+          <a:fillRef idx="3">
+            <a:schemeClr val="accent1"/>
+          </a:fillRef>
+          <a:effectRef idx="2">
+            <a:schemeClr val="accent1"/>
+          </a:effectRef>
+          <a:fontRef idx="minor">
+            <a:schemeClr val="lt1"/>
+          </a:fontRef>
+        </p:style>
+        <p:txBody>
+          <a:bodyPr rtlCol="0" anchor="ctr"/>
+          <a:lstStyle/>
+          <a:p>
+            <a:pPr algn="ctr"/>
+            <a:endParaRPr/>
+          </a:p>
+        </p:txBody>
+      </p:sp>
+      <p:sp>
+        <p:nvSpPr>
+          <p:cNvPr id="9" name="TextBox 8"/>
+          <p:cNvSpPr txBox="1"/>
+          <p:nvPr/>
+        </p:nvSpPr>
+        <p:spPr>
+          <a:xfrm>
+            <a:off x="4754880" y="3017520"/>
+            <a:ext cx="2656574" cy="653796"/>
+          </a:xfrm>
+          <a:prstGeom prst="rect">
+            <a:avLst/>
+          </a:prstGeom>
+          <a:noFill/>
+        </p:spPr>
+        <p:txBody>
+          <a:bodyPr wrap="square">
+            <a:normAutofit fontScale="85000" lnSpcReduction="20000"/>
+          </a:bodyPr>
+          <a:lstStyle/>
+          <a:p>
+            <a:pPr algn="ctr"/>
+            <a:r>
+              <a:rPr sz="1800" b="1" dirty="0">
+                <a:solidFill>
+                  <a:srgbClr val="192D3E"/>
+                </a:solidFill>
+                <a:latin typeface="Arial"/>
+              </a:rPr>
+              <a:t>El </a:t>
+            </a:r>
+            <a:r>
+              <a:rPr sz="1800" b="1" dirty="0" err="1">
+                <a:solidFill>
+                  <a:srgbClr val="192D3E"/>
+                </a:solidFill>
+                <a:latin typeface="Arial"/>
+              </a:rPr>
+              <a:t>canvi</a:t>
+            </a:r>
+            <a:r>
+              <a:rPr sz="1800" b="1" dirty="0">
+                <a:solidFill>
+                  <a:srgbClr val="192D3E"/>
+                </a:solidFill>
+                <a:latin typeface="Arial"/>
+              </a:rPr>
+              <a:t> </a:t>
+            </a:r>
+            <a:r>
+              <a:rPr lang="es-ES" b="1" dirty="0">
+                <a:solidFill>
+                  <a:srgbClr val="192D3E"/>
+                </a:solidFill>
+                <a:latin typeface="Arial"/>
+              </a:rPr>
+              <a:t>de tecnología de la API</a:t>
+            </a:r>
+            <a:r>
+              <a:rPr sz="1800" b="1" dirty="0">
+                <a:solidFill>
+                  <a:srgbClr val="192D3E"/>
+                </a:solidFill>
+                <a:latin typeface="Arial"/>
+              </a:rPr>
+              <a:t>
+</a:t>
+            </a:r>
+            <a:r>
+              <a:rPr sz="1800" b="1" dirty="0" err="1">
+                <a:solidFill>
+                  <a:srgbClr val="192D3E"/>
+                </a:solidFill>
+                <a:latin typeface="Arial"/>
+              </a:rPr>
+              <a:t>impacta</a:t>
+            </a:r>
+            <a:r>
+              <a:rPr sz="1800" b="1" dirty="0">
+                <a:solidFill>
+                  <a:srgbClr val="192D3E"/>
+                </a:solidFill>
+                <a:latin typeface="Arial"/>
+              </a:rPr>
+              <a:t> </a:t>
+            </a:r>
+            <a:r>
+              <a:rPr lang="es-ES" sz="1800" b="1" dirty="0">
+                <a:solidFill>
+                  <a:srgbClr val="192D3E"/>
+                </a:solidFill>
+                <a:latin typeface="Arial"/>
+              </a:rPr>
+              <a:t>en el cas </a:t>
+            </a:r>
+            <a:r>
+              <a:rPr lang="es-ES" sz="1800" b="1" dirty="0" err="1">
+                <a:solidFill>
+                  <a:srgbClr val="192D3E"/>
+                </a:solidFill>
+                <a:latin typeface="Arial"/>
+              </a:rPr>
+              <a:t>d’ús</a:t>
+            </a:r>
+            <a:endParaRPr sz="1800" b="1" dirty="0">
+              <a:solidFill>
+                <a:srgbClr val="192D3E"/>
+              </a:solidFill>
+              <a:latin typeface="Arial"/>
+            </a:endParaRPr>
+          </a:p>
+        </p:txBody>
+      </p:sp>
+      <p:sp>
+        <p:nvSpPr>
+          <p:cNvPr id="10" name="Rectangle 9"/>
+          <p:cNvSpPr/>
+          <p:nvPr/>
+        </p:nvSpPr>
+        <p:spPr>
+          <a:xfrm>
+            <a:off x="8138160" y="2743200"/>
+            <a:ext cx="3063240" cy="1188720"/>
+          </a:xfrm>
+          <a:prstGeom prst="rect">
+            <a:avLst/>
+          </a:prstGeom>
+          <a:solidFill>
+            <a:srgbClr val="E8F1F8"/>
+          </a:solidFill>
+          <a:ln w="9525">
+            <a:solidFill>
+              <a:srgbClr val="DCE0E4"/>
+            </a:solidFill>
+          </a:ln>
+        </p:spPr>
+        <p:style>
+          <a:lnRef idx="1">
+            <a:schemeClr val="accent1"/>
+          </a:lnRef>
+          <a:fillRef idx="3">
+            <a:schemeClr val="accent1"/>
+          </a:fillRef>
+          <a:effectRef idx="2">
+            <a:schemeClr val="accent1"/>
+          </a:effectRef>
+          <a:fontRef idx="minor">
+            <a:schemeClr val="lt1"/>
+          </a:fontRef>
+        </p:style>
+        <p:txBody>
+          <a:bodyPr rtlCol="0" anchor="ctr"/>
+          <a:lstStyle/>
+          <a:p>
+            <a:pPr algn="ctr"/>
+            <a:endParaRPr/>
+          </a:p>
+        </p:txBody>
+      </p:sp>
+      <p:sp>
+        <p:nvSpPr>
+          <p:cNvPr id="11" name="TextBox 10"/>
+          <p:cNvSpPr txBox="1"/>
+          <p:nvPr/>
+        </p:nvSpPr>
+        <p:spPr>
+          <a:xfrm>
+            <a:off x="8260080" y="2960370"/>
+            <a:ext cx="2788920" cy="809244"/>
+          </a:xfrm>
+          <a:prstGeom prst="rect">
+            <a:avLst/>
+          </a:prstGeom>
+          <a:noFill/>
+        </p:spPr>
+        <p:txBody>
+          <a:bodyPr wrap="square">
+            <a:normAutofit fontScale="77500" lnSpcReduction="20000"/>
+          </a:bodyPr>
+          <a:lstStyle/>
+          <a:p>
+            <a:pPr algn="ctr"/>
+            <a:r>
+              <a:rPr lang="es-ES" sz="1800" b="1" dirty="0" err="1">
+                <a:solidFill>
+                  <a:srgbClr val="192D3E"/>
+                </a:solidFill>
+                <a:latin typeface="Arial"/>
+              </a:rPr>
+              <a:t>L'acoplement</a:t>
+            </a:r>
+            <a:r>
+              <a:rPr lang="es-ES" sz="1800" b="1" dirty="0">
+                <a:solidFill>
+                  <a:srgbClr val="192D3E"/>
+                </a:solidFill>
+                <a:latin typeface="Arial"/>
+              </a:rPr>
+              <a:t> del cas </a:t>
+            </a:r>
+            <a:r>
+              <a:rPr lang="es-ES" sz="1800" b="1" dirty="0" err="1">
+                <a:solidFill>
+                  <a:srgbClr val="192D3E"/>
+                </a:solidFill>
+                <a:latin typeface="Arial"/>
+              </a:rPr>
+              <a:t>d’ús</a:t>
+            </a:r>
+            <a:r>
+              <a:rPr lang="es-ES" sz="1800" b="1" dirty="0">
+                <a:solidFill>
+                  <a:srgbClr val="192D3E"/>
+                </a:solidFill>
+                <a:latin typeface="Arial"/>
+              </a:rPr>
+              <a:t> </a:t>
+            </a:r>
+            <a:r>
+              <a:rPr lang="es-ES" sz="1800" b="1" dirty="0" err="1">
+                <a:solidFill>
+                  <a:srgbClr val="192D3E"/>
+                </a:solidFill>
+                <a:latin typeface="Arial"/>
+              </a:rPr>
+              <a:t>amb</a:t>
+            </a:r>
+            <a:r>
+              <a:rPr lang="es-ES" sz="1800" b="1" dirty="0">
+                <a:solidFill>
+                  <a:srgbClr val="192D3E"/>
+                </a:solidFill>
+                <a:latin typeface="Arial"/>
+              </a:rPr>
+              <a:t> infraestructura </a:t>
+            </a:r>
+            <a:r>
+              <a:rPr lang="es-ES" sz="1800" b="1" dirty="0" err="1">
+                <a:solidFill>
+                  <a:srgbClr val="192D3E"/>
+                </a:solidFill>
+                <a:latin typeface="Arial"/>
+              </a:rPr>
+              <a:t>tecnològica</a:t>
+            </a:r>
+            <a:r>
+              <a:rPr lang="es-ES" sz="1800" b="1" dirty="0">
+                <a:solidFill>
+                  <a:srgbClr val="192D3E"/>
+                </a:solidFill>
+                <a:latin typeface="Arial"/>
+              </a:rPr>
+              <a:t> concreta dificulta el </a:t>
+            </a:r>
+            <a:r>
+              <a:rPr lang="es-ES" sz="1800" b="1" dirty="0" err="1">
+                <a:solidFill>
+                  <a:srgbClr val="192D3E"/>
+                </a:solidFill>
+                <a:latin typeface="Arial"/>
+              </a:rPr>
+              <a:t>manteniment</a:t>
+            </a:r>
+            <a:r>
+              <a:rPr lang="es-ES" sz="1800" b="1" dirty="0">
+                <a:solidFill>
+                  <a:srgbClr val="192D3E"/>
+                </a:solidFill>
+                <a:latin typeface="Arial"/>
+              </a:rPr>
+              <a:t> de software. </a:t>
+            </a:r>
+            <a:endParaRPr sz="1800" b="1" dirty="0">
+              <a:solidFill>
+                <a:srgbClr val="192D3E"/>
+              </a:solidFill>
+              <a:latin typeface="Arial"/>
+            </a:endParaRPr>
+          </a:p>
+        </p:txBody>
+      </p:sp>
+      <p:sp>
+        <p:nvSpPr>
+          <p:cNvPr id="12" name="TextBox 11"/>
+          <p:cNvSpPr txBox="1"/>
+          <p:nvPr/>
+        </p:nvSpPr>
+        <p:spPr>
+          <a:xfrm>
+            <a:off x="960120" y="5074920"/>
+            <a:ext cx="10241280" cy="502920"/>
           </a:xfrm>
           <a:prstGeom prst="rect">
             <a:avLst/>
@@ -7876,22 +8697,121 @@
           </a:bodyPr>
           <a:lstStyle/>
           <a:p>
-            <a:pPr algn="l"/>
-            <a:r>
-              <a:rPr sz="1700" b="0">
+            <a:pPr algn="ctr"/>
+            <a:r>
+              <a:rPr sz="2500" b="1" dirty="0" err="1">
                 <a:solidFill>
                   <a:srgbClr val="236092"/>
                 </a:solidFill>
                 <a:latin typeface="Arial"/>
               </a:rPr>
-              <a:t>El cas d'ús necessita una capacitat externa, no una tecnologia externa concreta.</a:t>
-            </a:r>
-          </a:p>
-        </p:txBody>
-      </p:sp>
-      <p:sp>
-        <p:nvSpPr>
-          <p:cNvPr id="8" name="TextBox 7"/>
+              <a:t>Separar</a:t>
+            </a:r>
+            <a:r>
+              <a:rPr sz="2500" b="1" dirty="0">
+                <a:solidFill>
+                  <a:srgbClr val="236092"/>
+                </a:solidFill>
+                <a:latin typeface="Arial"/>
+              </a:rPr>
+              <a:t> </a:t>
+            </a:r>
+            <a:r>
+              <a:rPr sz="2500" b="1" dirty="0" err="1">
+                <a:solidFill>
+                  <a:srgbClr val="236092"/>
+                </a:solidFill>
+                <a:latin typeface="Arial"/>
+              </a:rPr>
+              <a:t>casos</a:t>
+            </a:r>
+            <a:r>
+              <a:rPr sz="2500" b="1" dirty="0">
+                <a:solidFill>
+                  <a:srgbClr val="236092"/>
+                </a:solidFill>
+                <a:latin typeface="Arial"/>
+              </a:rPr>
+              <a:t> </a:t>
+            </a:r>
+            <a:r>
+              <a:rPr sz="2500" b="1" dirty="0" err="1">
+                <a:solidFill>
+                  <a:srgbClr val="236092"/>
+                </a:solidFill>
+                <a:latin typeface="Arial"/>
+              </a:rPr>
+              <a:t>d'ús</a:t>
+            </a:r>
+            <a:r>
+              <a:rPr sz="2500" b="1" dirty="0">
+                <a:solidFill>
+                  <a:srgbClr val="236092"/>
+                </a:solidFill>
+                <a:latin typeface="Arial"/>
+              </a:rPr>
+              <a:t>, </a:t>
+            </a:r>
+            <a:r>
+              <a:rPr lang="es-ES" sz="2500" b="1" dirty="0" err="1">
+                <a:solidFill>
+                  <a:srgbClr val="236092"/>
+                </a:solidFill>
+                <a:latin typeface="Arial"/>
+              </a:rPr>
+              <a:t>domini</a:t>
+            </a:r>
+            <a:r>
+              <a:rPr sz="2500" b="1" dirty="0">
+                <a:solidFill>
+                  <a:srgbClr val="236092"/>
+                </a:solidFill>
+                <a:latin typeface="Arial"/>
+              </a:rPr>
+              <a:t> </a:t>
+            </a:r>
+            <a:r>
+              <a:rPr sz="2500" b="1" dirty="0" err="1">
+                <a:solidFill>
+                  <a:srgbClr val="236092"/>
+                </a:solidFill>
+                <a:latin typeface="Arial"/>
+              </a:rPr>
+              <a:t>i</a:t>
+            </a:r>
+            <a:r>
+              <a:rPr sz="2500" b="1" dirty="0">
+                <a:solidFill>
+                  <a:srgbClr val="236092"/>
+                </a:solidFill>
+                <a:latin typeface="Arial"/>
+              </a:rPr>
+              <a:t> </a:t>
+            </a:r>
+            <a:r>
+              <a:rPr sz="2500" b="1" dirty="0" err="1">
+                <a:solidFill>
+                  <a:srgbClr val="236092"/>
+                </a:solidFill>
+                <a:latin typeface="Arial"/>
+              </a:rPr>
+              <a:t>infraestructura</a:t>
+            </a:r>
+            <a:r>
+              <a:rPr sz="2500" b="1" dirty="0">
+                <a:solidFill>
+                  <a:srgbClr val="236092"/>
+                </a:solidFill>
+                <a:latin typeface="Arial"/>
+              </a:rPr>
+              <a:t>.</a:t>
+            </a:r>
+          </a:p>
+        </p:txBody>
+      </p:sp>
+      <p:sp>
+        <p:nvSpPr>
+          <p:cNvPr id="13" name="TextBox 12"/>
           <p:cNvSpPr txBox="1"/>
           <p:nvPr/>
         </p:nvSpPr>
@@ -7907,7 +8827,7 @@
         </p:spPr>
         <p:txBody>
           <a:bodyPr wrap="square">
-            <a:normAutofit/>
+            <a:normAutofit lnSpcReduction="10000"/>
           </a:bodyPr>
           <a:lstStyle/>
           <a:p>
@@ -7926,7 +8846,7 @@
       </p:sp>
       <p:sp>
         <p:nvSpPr>
-          <p:cNvPr id="9" name="TextBox 8"/>
+          <p:cNvPr id="14" name="TextBox 13"/>
           <p:cNvSpPr txBox="1"/>
           <p:nvPr/>
         </p:nvSpPr>
@@ -7942,7 +8862,7 @@
         </p:spPr>
         <p:txBody>
           <a:bodyPr wrap="square">
-            <a:normAutofit/>
+            <a:normAutofit lnSpcReduction="10000"/>
           </a:bodyPr>
           <a:lstStyle/>
           <a:p>
@@ -7954,7 +8874,7 @@
                 </a:solidFill>
                 <a:latin typeface="Arial"/>
               </a:rPr>
-              <a:t>7</a:t>
+              <a:t>6</a:t>
             </a:r>
           </a:p>
         </p:txBody>
@@ -8002,7 +8922,7 @@
         </p:spPr>
         <p:txBody>
           <a:bodyPr wrap="square">
-            <a:normAutofit/>
+            <a:normAutofit lnSpcReduction="10000"/>
           </a:bodyPr>
           <a:lstStyle/>
           <a:p>
@@ -8014,49 +8934,14 @@
                 </a:solidFill>
                 <a:latin typeface="Arial"/>
               </a:rPr>
-              <a:t>De la interface al port</a:t>
-            </a:r>
-          </a:p>
-        </p:txBody>
-      </p:sp>
-      <p:sp>
-        <p:nvSpPr>
-          <p:cNvPr id="3" name="TextBox 2"/>
-          <p:cNvSpPr txBox="1"/>
-          <p:nvPr/>
-        </p:nvSpPr>
-        <p:spPr>
-          <a:xfrm>
-            <a:off x="612648" y="822960"/>
-            <a:ext cx="8869680" cy="320040"/>
-          </a:xfrm>
-          <a:prstGeom prst="rect">
-            <a:avLst/>
-          </a:prstGeom>
-          <a:noFill/>
-        </p:spPr>
-        <p:txBody>
-          <a:bodyPr wrap="square">
-            <a:normAutofit/>
-          </a:bodyPr>
-          <a:lstStyle/>
-          <a:p>
-            <a:pPr algn="l"/>
-            <a:r>
-              <a:rPr sz="1300" b="0">
-                <a:solidFill>
-                  <a:srgbClr val="66707A"/>
-                </a:solidFill>
-                <a:latin typeface="Arial"/>
-              </a:rPr>
-              <a:t>Una frontera arquitectònica, no només un contracte Java</a:t>
+              <a:t>Port de sortida i adaptador</a:t>
             </a:r>
           </a:p>
         </p:txBody>
       </p:sp>
       <p:pic>
         <p:nvPicPr>
-          <p:cNvPr id="4" name="Picture 3" descr="logotip-oficial-tecnocampus-upf-horitzontal-color.png"/>
+          <p:cNvPr id="3" name="Picture 2" descr="logotip-oficial-tecnocampus-upf-horitzontal-color.png"/>
           <p:cNvPicPr>
             <a:picLocks noChangeAspect="1"/>
           </p:cNvPicPr>
@@ -8080,7 +8965,7 @@
       </p:pic>
       <p:sp>
         <p:nvSpPr>
-          <p:cNvPr id="5" name="Rectangle 4"/>
+          <p:cNvPr id="4" name="Rectangle 3"/>
           <p:cNvSpPr/>
           <p:nvPr/>
         </p:nvSpPr>
@@ -8122,46 +9007,22 @@
           </a:p>
         </p:txBody>
       </p:sp>
-      <p:pic>
-        <p:nvPicPr>
-          <p:cNvPr id="6" name="Picture 5" descr="output-port-pattern.png"/>
-          <p:cNvPicPr>
-            <a:picLocks noChangeAspect="1"/>
-          </p:cNvPicPr>
-          <p:nvPr/>
-        </p:nvPicPr>
-        <p:blipFill>
-          <a:blip r:embed="rId3"/>
-          <a:stretch>
-            <a:fillRect/>
-          </a:stretch>
-        </p:blipFill>
-        <p:spPr>
-          <a:xfrm>
-            <a:off x="685800" y="2281557"/>
-            <a:ext cx="6766560" cy="2889246"/>
-          </a:xfrm>
-          <a:prstGeom prst="rect">
-            <a:avLst/>
-          </a:prstGeom>
-        </p:spPr>
-      </p:pic>
-      <p:sp>
-        <p:nvSpPr>
-          <p:cNvPr id="7" name="Rounded Rectangle 6"/>
+      <p:sp>
+        <p:nvSpPr>
+          <p:cNvPr id="5" name="Rounded Rectangle 4"/>
           <p:cNvSpPr/>
           <p:nvPr/>
         </p:nvSpPr>
         <p:spPr>
           <a:xfrm>
-            <a:off x="7726679" y="1600200"/>
-            <a:ext cx="3337560" cy="3474720"/>
+            <a:off x="3794760" y="1417320"/>
+            <a:ext cx="4480560" cy="566928"/>
           </a:xfrm>
           <a:prstGeom prst="roundRect">
             <a:avLst/>
           </a:prstGeom>
           <a:solidFill>
-            <a:srgbClr val="F7F8FA"/>
+            <a:srgbClr val="E8F1F8"/>
           </a:solidFill>
           <a:ln w="9525">
             <a:solidFill>
@@ -8194,14 +9055,14 @@
       </p:sp>
       <p:sp>
         <p:nvSpPr>
-          <p:cNvPr id="8" name="TextBox 7"/>
+          <p:cNvPr id="6" name="TextBox 5"/>
           <p:cNvSpPr txBox="1"/>
           <p:nvPr/>
         </p:nvSpPr>
         <p:spPr>
           <a:xfrm>
-            <a:off x="8001000" y="2011680"/>
-            <a:ext cx="2788920" cy="2194560"/>
+            <a:off x="3977639" y="1517904"/>
+            <a:ext cx="4114800" cy="256032"/>
           </a:xfrm>
           <a:prstGeom prst="rect">
             <a:avLst/>
@@ -8210,21 +9071,101 @@
         </p:spPr>
         <p:txBody>
           <a:bodyPr wrap="square">
-            <a:normAutofit/>
+            <a:normAutofit fontScale="62500" lnSpcReduction="20000"/>
           </a:bodyPr>
           <a:lstStyle/>
           <a:p>
             <a:pPr algn="ctr"/>
             <a:r>
+              <a:rPr sz="2100" b="1">
+                <a:solidFill>
+                  <a:srgbClr val="192D3E"/>
+                </a:solidFill>
+                <a:latin typeface="Arial"/>
+              </a:rPr>
+              <a:t>Cas d'ús</a:t>
+            </a:r>
+          </a:p>
+        </p:txBody>
+      </p:sp>
+      <p:sp>
+        <p:nvSpPr>
+          <p:cNvPr id="7" name="TextBox 6"/>
+          <p:cNvSpPr txBox="1"/>
+          <p:nvPr/>
+        </p:nvSpPr>
+        <p:spPr>
+          <a:xfrm>
+            <a:off x="5897880" y="1984248"/>
+            <a:ext cx="274320" cy="292608"/>
+          </a:xfrm>
+          <a:prstGeom prst="rect">
+            <a:avLst/>
+          </a:prstGeom>
+          <a:noFill/>
+        </p:spPr>
+        <p:txBody>
+          <a:bodyPr wrap="square">
+            <a:normAutofit fontScale="70000" lnSpcReduction="20000"/>
+          </a:bodyPr>
+          <a:lstStyle/>
+          <a:p>
+            <a:pPr algn="ctr"/>
+            <a:r>
               <a:rPr sz="2200" b="1">
                 <a:solidFill>
-                  <a:srgbClr val="192D3E"/>
-                </a:solidFill>
-                <a:latin typeface="Arial"/>
-              </a:rPr>
-              <a:t>Una interface pot desacoblar dues classes.
-Un port de sortida defineix una frontera arquitectònica.</a:t>
-            </a:r>
+                  <a:srgbClr val="236092"/>
+                </a:solidFill>
+                <a:latin typeface="Arial"/>
+              </a:rPr>
+              <a:t>↓</a:t>
+            </a:r>
+          </a:p>
+        </p:txBody>
+      </p:sp>
+      <p:sp>
+        <p:nvSpPr>
+          <p:cNvPr id="8" name="Rounded Rectangle 7"/>
+          <p:cNvSpPr/>
+          <p:nvPr/>
+        </p:nvSpPr>
+        <p:spPr>
+          <a:xfrm>
+            <a:off x="3794760" y="2377440"/>
+            <a:ext cx="4480560" cy="566928"/>
+          </a:xfrm>
+          <a:prstGeom prst="roundRect">
+            <a:avLst/>
+          </a:prstGeom>
+          <a:solidFill>
+            <a:srgbClr val="FFF3D6"/>
+          </a:solidFill>
+          <a:ln w="9525">
+            <a:solidFill>
+              <a:srgbClr val="DCE0E4"/>
+            </a:solidFill>
+          </a:ln>
+        </p:spPr>
+        <p:style>
+          <a:lnRef idx="1">
+            <a:schemeClr val="accent1"/>
+          </a:lnRef>
+          <a:fillRef idx="3">
+            <a:schemeClr val="accent1"/>
+          </a:fillRef>
+          <a:effectRef idx="2">
+            <a:schemeClr val="accent1"/>
+          </a:effectRef>
+          <a:fontRef idx="minor">
+            <a:schemeClr val="lt1"/>
+          </a:fontRef>
+        </p:style>
+        <p:txBody>
+          <a:bodyPr rtlCol="0" anchor="ctr"/>
+          <a:lstStyle/>
+          <a:p>
+            <a:pPr algn="ctr"/>
+            <a:endParaRPr/>
           </a:p>
         </p:txBody>
       </p:sp>
@@ -8236,6 +9177,343 @@
         </p:nvSpPr>
         <p:spPr>
           <a:xfrm>
+            <a:off x="3977639" y="2478024"/>
+            <a:ext cx="4114800" cy="256032"/>
+          </a:xfrm>
+          <a:prstGeom prst="rect">
+            <a:avLst/>
+          </a:prstGeom>
+          <a:noFill/>
+        </p:spPr>
+        <p:txBody>
+          <a:bodyPr wrap="square">
+            <a:normAutofit fontScale="62500" lnSpcReduction="20000"/>
+          </a:bodyPr>
+          <a:lstStyle/>
+          <a:p>
+            <a:pPr algn="ctr"/>
+            <a:r>
+              <a:rPr sz="2100" b="1">
+                <a:solidFill>
+                  <a:srgbClr val="192D3E"/>
+                </a:solidFill>
+                <a:latin typeface="Arial"/>
+              </a:rPr>
+              <a:t>Port de sortida</a:t>
+            </a:r>
+          </a:p>
+        </p:txBody>
+      </p:sp>
+      <p:sp>
+        <p:nvSpPr>
+          <p:cNvPr id="10" name="TextBox 9"/>
+          <p:cNvSpPr txBox="1"/>
+          <p:nvPr/>
+        </p:nvSpPr>
+        <p:spPr>
+          <a:xfrm>
+            <a:off x="5897880" y="2944368"/>
+            <a:ext cx="274320" cy="292608"/>
+          </a:xfrm>
+          <a:prstGeom prst="rect">
+            <a:avLst/>
+          </a:prstGeom>
+          <a:noFill/>
+        </p:spPr>
+        <p:txBody>
+          <a:bodyPr wrap="square">
+            <a:normAutofit fontScale="70000" lnSpcReduction="20000"/>
+          </a:bodyPr>
+          <a:lstStyle/>
+          <a:p>
+            <a:pPr algn="ctr"/>
+            <a:r>
+              <a:rPr sz="2200" b="1">
+                <a:solidFill>
+                  <a:srgbClr val="236092"/>
+                </a:solidFill>
+                <a:latin typeface="Arial"/>
+              </a:rPr>
+              <a:t>↓</a:t>
+            </a:r>
+          </a:p>
+        </p:txBody>
+      </p:sp>
+      <p:sp>
+        <p:nvSpPr>
+          <p:cNvPr id="11" name="Rounded Rectangle 10"/>
+          <p:cNvSpPr/>
+          <p:nvPr/>
+        </p:nvSpPr>
+        <p:spPr>
+          <a:xfrm>
+            <a:off x="3794760" y="3337560"/>
+            <a:ext cx="4480560" cy="566928"/>
+          </a:xfrm>
+          <a:prstGeom prst="roundRect">
+            <a:avLst/>
+          </a:prstGeom>
+          <a:solidFill>
+            <a:srgbClr val="EBF6F0"/>
+          </a:solidFill>
+          <a:ln w="9525">
+            <a:solidFill>
+              <a:srgbClr val="DCE0E4"/>
+            </a:solidFill>
+          </a:ln>
+        </p:spPr>
+        <p:style>
+          <a:lnRef idx="1">
+            <a:schemeClr val="accent1"/>
+          </a:lnRef>
+          <a:fillRef idx="3">
+            <a:schemeClr val="accent1"/>
+          </a:fillRef>
+          <a:effectRef idx="2">
+            <a:schemeClr val="accent1"/>
+          </a:effectRef>
+          <a:fontRef idx="minor">
+            <a:schemeClr val="lt1"/>
+          </a:fontRef>
+        </p:style>
+        <p:txBody>
+          <a:bodyPr rtlCol="0" anchor="ctr"/>
+          <a:lstStyle/>
+          <a:p>
+            <a:pPr algn="ctr"/>
+            <a:endParaRPr/>
+          </a:p>
+        </p:txBody>
+      </p:sp>
+      <p:sp>
+        <p:nvSpPr>
+          <p:cNvPr id="12" name="TextBox 11"/>
+          <p:cNvSpPr txBox="1"/>
+          <p:nvPr/>
+        </p:nvSpPr>
+        <p:spPr>
+          <a:xfrm>
+            <a:off x="3977639" y="3438144"/>
+            <a:ext cx="4114800" cy="256032"/>
+          </a:xfrm>
+          <a:prstGeom prst="rect">
+            <a:avLst/>
+          </a:prstGeom>
+          <a:noFill/>
+        </p:spPr>
+        <p:txBody>
+          <a:bodyPr wrap="square">
+            <a:normAutofit fontScale="62500" lnSpcReduction="20000"/>
+          </a:bodyPr>
+          <a:lstStyle/>
+          <a:p>
+            <a:pPr algn="ctr"/>
+            <a:r>
+              <a:rPr sz="2100" b="1">
+                <a:solidFill>
+                  <a:srgbClr val="192D3E"/>
+                </a:solidFill>
+                <a:latin typeface="Arial"/>
+              </a:rPr>
+              <a:t>Adaptador</a:t>
+            </a:r>
+          </a:p>
+        </p:txBody>
+      </p:sp>
+      <p:sp>
+        <p:nvSpPr>
+          <p:cNvPr id="13" name="TextBox 12"/>
+          <p:cNvSpPr txBox="1"/>
+          <p:nvPr/>
+        </p:nvSpPr>
+        <p:spPr>
+          <a:xfrm>
+            <a:off x="5897880" y="3904488"/>
+            <a:ext cx="274320" cy="292608"/>
+          </a:xfrm>
+          <a:prstGeom prst="rect">
+            <a:avLst/>
+          </a:prstGeom>
+          <a:noFill/>
+        </p:spPr>
+        <p:txBody>
+          <a:bodyPr wrap="square">
+            <a:normAutofit fontScale="70000" lnSpcReduction="20000"/>
+          </a:bodyPr>
+          <a:lstStyle/>
+          <a:p>
+            <a:pPr algn="ctr"/>
+            <a:r>
+              <a:rPr sz="2200" b="1">
+                <a:solidFill>
+                  <a:srgbClr val="236092"/>
+                </a:solidFill>
+                <a:latin typeface="Arial"/>
+              </a:rPr>
+              <a:t>↓</a:t>
+            </a:r>
+          </a:p>
+        </p:txBody>
+      </p:sp>
+      <p:sp>
+        <p:nvSpPr>
+          <p:cNvPr id="14" name="Rounded Rectangle 13"/>
+          <p:cNvSpPr/>
+          <p:nvPr/>
+        </p:nvSpPr>
+        <p:spPr>
+          <a:xfrm>
+            <a:off x="3794760" y="4297680"/>
+            <a:ext cx="4480560" cy="566928"/>
+          </a:xfrm>
+          <a:prstGeom prst="roundRect">
+            <a:avLst/>
+          </a:prstGeom>
+          <a:solidFill>
+            <a:srgbClr val="F7F8FA"/>
+          </a:solidFill>
+          <a:ln w="9525">
+            <a:solidFill>
+              <a:srgbClr val="DCE0E4"/>
+            </a:solidFill>
+          </a:ln>
+        </p:spPr>
+        <p:style>
+          <a:lnRef idx="1">
+            <a:schemeClr val="accent1"/>
+          </a:lnRef>
+          <a:fillRef idx="3">
+            <a:schemeClr val="accent1"/>
+          </a:fillRef>
+          <a:effectRef idx="2">
+            <a:schemeClr val="accent1"/>
+          </a:effectRef>
+          <a:fontRef idx="minor">
+            <a:schemeClr val="lt1"/>
+          </a:fontRef>
+        </p:style>
+        <p:txBody>
+          <a:bodyPr rtlCol="0" anchor="ctr"/>
+          <a:lstStyle/>
+          <a:p>
+            <a:pPr algn="ctr"/>
+            <a:endParaRPr/>
+          </a:p>
+        </p:txBody>
+      </p:sp>
+      <p:sp>
+        <p:nvSpPr>
+          <p:cNvPr id="15" name="TextBox 14"/>
+          <p:cNvSpPr txBox="1"/>
+          <p:nvPr/>
+        </p:nvSpPr>
+        <p:spPr>
+          <a:xfrm>
+            <a:off x="3977639" y="4398264"/>
+            <a:ext cx="4114800" cy="256032"/>
+          </a:xfrm>
+          <a:prstGeom prst="rect">
+            <a:avLst/>
+          </a:prstGeom>
+          <a:noFill/>
+        </p:spPr>
+        <p:txBody>
+          <a:bodyPr wrap="square">
+            <a:normAutofit fontScale="62500" lnSpcReduction="20000"/>
+          </a:bodyPr>
+          <a:lstStyle/>
+          <a:p>
+            <a:pPr algn="ctr"/>
+            <a:r>
+              <a:rPr sz="2100" b="1">
+                <a:solidFill>
+                  <a:srgbClr val="192D3E"/>
+                </a:solidFill>
+                <a:latin typeface="Arial"/>
+              </a:rPr>
+              <a:t>Sistema extern</a:t>
+            </a:r>
+          </a:p>
+        </p:txBody>
+      </p:sp>
+      <p:sp>
+        <p:nvSpPr>
+          <p:cNvPr id="16" name="TextBox 15"/>
+          <p:cNvSpPr txBox="1"/>
+          <p:nvPr/>
+        </p:nvSpPr>
+        <p:spPr>
+          <a:xfrm>
+            <a:off x="914400" y="5349240"/>
+            <a:ext cx="4754880" cy="347472"/>
+          </a:xfrm>
+          <a:prstGeom prst="rect">
+            <a:avLst/>
+          </a:prstGeom>
+          <a:noFill/>
+        </p:spPr>
+        <p:txBody>
+          <a:bodyPr wrap="square">
+            <a:normAutofit fontScale="92500" lnSpcReduction="20000"/>
+          </a:bodyPr>
+          <a:lstStyle/>
+          <a:p>
+            <a:pPr algn="ctr"/>
+            <a:r>
+              <a:rPr sz="2300" b="1">
+                <a:solidFill>
+                  <a:srgbClr val="192D3E"/>
+                </a:solidFill>
+                <a:latin typeface="Arial"/>
+              </a:rPr>
+              <a:t>El port defineix què.</a:t>
+            </a:r>
+          </a:p>
+        </p:txBody>
+      </p:sp>
+      <p:sp>
+        <p:nvSpPr>
+          <p:cNvPr id="17" name="TextBox 16"/>
+          <p:cNvSpPr txBox="1"/>
+          <p:nvPr/>
+        </p:nvSpPr>
+        <p:spPr>
+          <a:xfrm>
+            <a:off x="6400800" y="5349240"/>
+            <a:ext cx="4754880" cy="347472"/>
+          </a:xfrm>
+          <a:prstGeom prst="rect">
+            <a:avLst/>
+          </a:prstGeom>
+          <a:noFill/>
+        </p:spPr>
+        <p:txBody>
+          <a:bodyPr wrap="square">
+            <a:normAutofit fontScale="92500" lnSpcReduction="20000"/>
+          </a:bodyPr>
+          <a:lstStyle/>
+          <a:p>
+            <a:pPr algn="ctr"/>
+            <a:r>
+              <a:rPr sz="2300" b="1">
+                <a:solidFill>
+                  <a:srgbClr val="192D3E"/>
+                </a:solidFill>
+                <a:latin typeface="Arial"/>
+              </a:rPr>
+              <a:t>L'adaptador resol com.</a:t>
+            </a:r>
+          </a:p>
+        </p:txBody>
+      </p:sp>
+      <p:sp>
+        <p:nvSpPr>
+          <p:cNvPr id="18" name="TextBox 17"/>
+          <p:cNvSpPr txBox="1"/>
+          <p:nvPr/>
+        </p:nvSpPr>
+        <p:spPr>
+          <a:xfrm>
             <a:off x="594360" y="6473952"/>
             <a:ext cx="8595360" cy="201168"/>
           </a:xfrm>
@@ -8246,7 +9524,7 @@
         </p:spPr>
         <p:txBody>
           <a:bodyPr wrap="square">
-            <a:normAutofit/>
+            <a:normAutofit lnSpcReduction="10000"/>
           </a:bodyPr>
           <a:lstStyle/>
           <a:p>
@@ -8265,7 +9543,7 @@
       </p:sp>
       <p:sp>
         <p:nvSpPr>
-          <p:cNvPr id="10" name="TextBox 9"/>
+          <p:cNvPr id="19" name="TextBox 18"/>
           <p:cNvSpPr txBox="1"/>
           <p:nvPr/>
         </p:nvSpPr>
@@ -8281,7 +9559,7 @@
         </p:spPr>
         <p:txBody>
           <a:bodyPr wrap="square">
-            <a:normAutofit/>
+            <a:normAutofit lnSpcReduction="10000"/>
           </a:bodyPr>
           <a:lstStyle/>
           <a:p>
@@ -8293,7 +9571,7 @@
                 </a:solidFill>
                 <a:latin typeface="Arial"/>
               </a:rPr>
-              <a:t>8</a:t>
+              <a:t>7</a:t>
             </a:r>
           </a:p>
         </p:txBody>
@@ -8341,20 +9619,62 @@
         </p:spPr>
         <p:txBody>
           <a:bodyPr wrap="square">
-            <a:normAutofit/>
+            <a:normAutofit lnSpcReduction="10000"/>
           </a:bodyPr>
           <a:lstStyle/>
           <a:p>
             <a:pPr algn="l"/>
             <a:r>
-              <a:rPr sz="2800" b="1">
+              <a:rPr lang="es-ES" sz="2800" b="1" dirty="0">
                 <a:solidFill>
                   <a:srgbClr val="192D3E"/>
                 </a:solidFill>
                 <a:latin typeface="Arial"/>
               </a:rPr>
-              <a:t>Transferència a HexaStock</a:t>
-            </a:r>
+              <a:t>Port de </a:t>
+            </a:r>
+            <a:r>
+              <a:rPr lang="es-ES" sz="2800" b="1" dirty="0" err="1">
+                <a:solidFill>
+                  <a:srgbClr val="192D3E"/>
+                </a:solidFill>
+                <a:latin typeface="Arial"/>
+              </a:rPr>
+              <a:t>sortida</a:t>
+            </a:r>
+            <a:r>
+              <a:rPr lang="es-ES" sz="2800" b="1" dirty="0">
+                <a:solidFill>
+                  <a:srgbClr val="192D3E"/>
+                </a:solidFill>
+                <a:latin typeface="Arial"/>
+              </a:rPr>
+              <a:t> per a </a:t>
+            </a:r>
+            <a:r>
+              <a:rPr lang="es-ES" sz="2800" b="1" dirty="0" err="1">
+                <a:solidFill>
+                  <a:srgbClr val="192D3E"/>
+                </a:solidFill>
+                <a:latin typeface="Arial"/>
+              </a:rPr>
+              <a:t>informació</a:t>
+            </a:r>
+            <a:r>
+              <a:rPr lang="es-ES" sz="2800" b="1" dirty="0">
+                <a:solidFill>
+                  <a:srgbClr val="192D3E"/>
+                </a:solidFill>
+                <a:latin typeface="Arial"/>
+              </a:rPr>
+              <a:t> patrimonial</a:t>
+            </a:r>
+            <a:endParaRPr sz="2800" b="1" dirty="0">
+              <a:solidFill>
+                <a:srgbClr val="192D3E"/>
+              </a:solidFill>
+              <a:latin typeface="Arial"/>
+            </a:endParaRPr>
           </a:p>
         </p:txBody>
       </p:sp>
@@ -8382,14 +9702,146 @@
           <a:p>
             <a:pPr algn="l"/>
             <a:r>
-              <a:rPr sz="1300" b="0">
+              <a:rPr lang="es-ES" sz="1300" b="0" dirty="0">
                 <a:solidFill>
                   <a:srgbClr val="66707A"/>
                 </a:solidFill>
                 <a:latin typeface="Arial"/>
               </a:rPr>
-              <a:t>Venda d'accions amb proveïdor de preus substituïble</a:t>
-            </a:r>
+              <a:t>El cas </a:t>
+            </a:r>
+            <a:r>
+              <a:rPr lang="es-ES" sz="1300" b="0" dirty="0" err="1">
+                <a:solidFill>
+                  <a:srgbClr val="66707A"/>
+                </a:solidFill>
+                <a:latin typeface="Arial"/>
+              </a:rPr>
+              <a:t>d’ús</a:t>
+            </a:r>
+            <a:r>
+              <a:rPr lang="es-ES" sz="1300" b="0" dirty="0">
+                <a:solidFill>
+                  <a:srgbClr val="66707A"/>
+                </a:solidFill>
+                <a:latin typeface="Arial"/>
+              </a:rPr>
+              <a:t> </a:t>
+            </a:r>
+            <a:r>
+              <a:rPr lang="es-ES" sz="1300" b="0" dirty="0" err="1">
+                <a:solidFill>
+                  <a:srgbClr val="66707A"/>
+                </a:solidFill>
+                <a:latin typeface="Arial"/>
+              </a:rPr>
+              <a:t>depèn</a:t>
+            </a:r>
+            <a:r>
+              <a:rPr lang="es-ES" sz="1300" b="0" dirty="0">
+                <a:solidFill>
+                  <a:srgbClr val="66707A"/>
+                </a:solidFill>
+                <a:latin typeface="Arial"/>
+              </a:rPr>
+              <a:t> </a:t>
+            </a:r>
+            <a:r>
+              <a:rPr lang="es-ES" sz="1300" b="0" dirty="0" err="1">
+                <a:solidFill>
+                  <a:srgbClr val="66707A"/>
+                </a:solidFill>
+                <a:latin typeface="Arial"/>
+              </a:rPr>
+              <a:t>d’un</a:t>
+            </a:r>
+            <a:r>
+              <a:rPr lang="es-ES" sz="1300" b="0" dirty="0">
+                <a:solidFill>
+                  <a:srgbClr val="66707A"/>
+                </a:solidFill>
+                <a:latin typeface="Arial"/>
+              </a:rPr>
+              <a:t> contracte de </a:t>
+            </a:r>
+            <a:r>
+              <a:rPr lang="es-ES" sz="1300" b="0" dirty="0" err="1">
+                <a:solidFill>
+                  <a:srgbClr val="66707A"/>
+                </a:solidFill>
+                <a:latin typeface="Arial"/>
+              </a:rPr>
+              <a:t>l’aplicació</a:t>
+            </a:r>
+            <a:r>
+              <a:rPr lang="es-ES" sz="1300" b="0" dirty="0">
+                <a:solidFill>
+                  <a:srgbClr val="66707A"/>
+                </a:solidFill>
+                <a:latin typeface="Arial"/>
+              </a:rPr>
+              <a:t>, no </a:t>
+            </a:r>
+            <a:r>
+              <a:rPr lang="es-ES" sz="1300" b="0" dirty="0" err="1">
+                <a:solidFill>
+                  <a:srgbClr val="66707A"/>
+                </a:solidFill>
+                <a:latin typeface="Arial"/>
+              </a:rPr>
+              <a:t>dels</a:t>
+            </a:r>
+            <a:r>
+              <a:rPr lang="es-ES" sz="1300" b="0" dirty="0">
+                <a:solidFill>
+                  <a:srgbClr val="66707A"/>
+                </a:solidFill>
+                <a:latin typeface="Arial"/>
+              </a:rPr>
+              <a:t> </a:t>
+            </a:r>
+            <a:r>
+              <a:rPr lang="es-ES" sz="1300" b="0" dirty="0" err="1">
+                <a:solidFill>
+                  <a:srgbClr val="66707A"/>
+                </a:solidFill>
+                <a:latin typeface="Arial"/>
+              </a:rPr>
+              <a:t>detalls</a:t>
+            </a:r>
+            <a:r>
+              <a:rPr lang="es-ES" sz="1300" b="0" dirty="0">
+                <a:solidFill>
+                  <a:srgbClr val="66707A"/>
+                </a:solidFill>
+                <a:latin typeface="Arial"/>
+              </a:rPr>
+              <a:t> de PICA, AEAT o </a:t>
+            </a:r>
+            <a:r>
+              <a:rPr lang="es-ES" sz="1300" b="0" dirty="0" err="1">
+                <a:solidFill>
+                  <a:srgbClr val="66707A"/>
+                </a:solidFill>
+                <a:latin typeface="Arial"/>
+              </a:rPr>
+              <a:t>Cadastre</a:t>
+            </a:r>
+            <a:r>
+              <a:rPr lang="es-ES" sz="1300" b="0" dirty="0">
+                <a:solidFill>
+                  <a:srgbClr val="66707A"/>
+                </a:solidFill>
+                <a:latin typeface="Arial"/>
+              </a:rPr>
+              <a:t>.</a:t>
+            </a:r>
+            <a:endParaRPr sz="1300" b="0" dirty="0">
+              <a:solidFill>
+                <a:srgbClr val="66707A"/>
+              </a:solidFill>
+              <a:latin typeface="Arial"/>
+            </a:endParaRPr>
           </a:p>
         </p:txBody>
       </p:sp>
@@ -8461,9 +9913,85 @@
           </a:p>
         </p:txBody>
       </p:sp>
+      <p:sp>
+        <p:nvSpPr>
+          <p:cNvPr id="9" name="TextBox 8"/>
+          <p:cNvSpPr txBox="1"/>
+          <p:nvPr/>
+        </p:nvSpPr>
+        <p:spPr>
+          <a:xfrm>
+            <a:off x="594360" y="6473952"/>
+            <a:ext cx="8595360" cy="201168"/>
+          </a:xfrm>
+          <a:prstGeom prst="rect">
+            <a:avLst/>
+          </a:prstGeom>
+          <a:noFill/>
+        </p:spPr>
+        <p:txBody>
+          <a:bodyPr wrap="square">
+            <a:normAutofit lnSpcReduction="10000"/>
+          </a:bodyPr>
+          <a:lstStyle/>
+          <a:p>
+            <a:pPr algn="l"/>
+            <a:r>
+              <a:rPr sz="800" b="0">
+                <a:solidFill>
+                  <a:srgbClr val="66707A"/>
+                </a:solidFill>
+                <a:latin typeface="Arial"/>
+              </a:rPr>
+              <a:t>Disseny de Sistemes d'Informació · Ports de sortida en arquitectura hexagonal</a:t>
+            </a:r>
+          </a:p>
+        </p:txBody>
+      </p:sp>
+      <p:sp>
+        <p:nvSpPr>
+          <p:cNvPr id="10" name="TextBox 9"/>
+          <p:cNvSpPr txBox="1"/>
+          <p:nvPr/>
+        </p:nvSpPr>
+        <p:spPr>
+          <a:xfrm>
+            <a:off x="11155680" y="6473952"/>
+            <a:ext cx="411480" cy="201168"/>
+          </a:xfrm>
+          <a:prstGeom prst="rect">
+            <a:avLst/>
+          </a:prstGeom>
+          <a:noFill/>
+        </p:spPr>
+        <p:txBody>
+          <a:bodyPr wrap="square">
+            <a:normAutofit lnSpcReduction="10000"/>
+          </a:bodyPr>
+          <a:lstStyle/>
+          <a:p>
+            <a:pPr algn="r"/>
+            <a:r>
+              <a:rPr sz="800" b="0">
+                <a:solidFill>
+                  <a:srgbClr val="66707A"/>
+                </a:solidFill>
+                <a:latin typeface="Arial"/>
+              </a:rPr>
+              <a:t>8</a:t>
+            </a:r>
+          </a:p>
+        </p:txBody>
+      </p:sp>
       <p:pic>
         <p:nvPicPr>
-          <p:cNvPr id="6" name="Picture 5" descr="hexastock-sellstocks-arquitectura-vpd.png"/>
+          <p:cNvPr id="11" name="Imagen 10">
+            <a:extLst>
+              <a:ext uri="{FF2B5EF4-FFF2-40B4-BE49-F238E27FC236}">
+                <a16:creationId xmlns:a16="http://schemas.microsoft.com/office/drawing/2014/main" id="{B6A73A3E-C968-EC80-D679-F89DCA1ECD1A}"/>
+              </a:ext>
+            </a:extLst>
+          </p:cNvPr>
           <p:cNvPicPr>
             <a:picLocks noChangeAspect="1"/>
           </p:cNvPicPr>
@@ -8477,225 +10005,14 @@
         </p:blipFill>
         <p:spPr>
           <a:xfrm>
-            <a:off x="502920" y="1600138"/>
-            <a:ext cx="7818120" cy="4389244"/>
+            <a:off x="178054" y="1308010"/>
+            <a:ext cx="11102753" cy="5165942"/>
           </a:xfrm>
           <a:prstGeom prst="rect">
             <a:avLst/>
           </a:prstGeom>
         </p:spPr>
       </p:pic>
-      <p:sp>
-        <p:nvSpPr>
-          <p:cNvPr id="7" name="TextBox 6"/>
-          <p:cNvSpPr txBox="1"/>
-          <p:nvPr/>
-        </p:nvSpPr>
-        <p:spPr>
-          <a:xfrm>
-            <a:off x="8549640" y="1600200"/>
-            <a:ext cx="2743200" cy="2011680"/>
-          </a:xfrm>
-          <a:prstGeom prst="rect">
-            <a:avLst/>
-          </a:prstGeom>
-          <a:noFill/>
-        </p:spPr>
-        <p:txBody>
-          <a:bodyPr wrap="square">
-            <a:normAutofit/>
-          </a:bodyPr>
-          <a:lstStyle/>
-          <a:p>
-            <a:pPr algn="l"/>
-            <a:r>
-              <a:rPr sz="1700" b="1">
-                <a:solidFill>
-                  <a:srgbClr val="192D3E"/>
-                </a:solidFill>
-                <a:latin typeface="Arial"/>
-              </a:rPr>
-              <a:t>El cas d'ús necessita el preu actual d'un ticker, però no ha de dependre de Finnhub, Alpha Vantage, REST, JSON, tokens, endpoints ni clients HTTP.</a:t>
-            </a:r>
-          </a:p>
-        </p:txBody>
-      </p:sp>
-      <p:sp>
-        <p:nvSpPr>
-          <p:cNvPr id="8" name="TextBox 7"/>
-          <p:cNvSpPr txBox="1"/>
-          <p:nvPr/>
-        </p:nvSpPr>
-        <p:spPr>
-          <a:xfrm>
-            <a:off x="8549640" y="3931920"/>
-            <a:ext cx="2743200" cy="1417320"/>
-          </a:xfrm>
-          <a:prstGeom prst="rect">
-            <a:avLst/>
-          </a:prstGeom>
-          <a:noFill/>
-        </p:spPr>
-        <p:txBody>
-          <a:bodyPr wrap="square">
-            <a:normAutofit/>
-          </a:bodyPr>
-          <a:lstStyle/>
-          <a:p>
-            <a:pPr>
-              <a:spcAft>
-                <a:spcPts val="800"/>
-              </a:spcAft>
-              <a:defRPr sz="1300">
-                <a:solidFill>
-                  <a:srgbClr val="262626"/>
-                </a:solidFill>
-                <a:latin typeface="Arial"/>
-              </a:defRPr>
-            </a:pPr>
-            <a:r>
-              <a:t>Port: StockPriceProviderPort</a:t>
-            </a:r>
-          </a:p>
-          <a:p>
-            <a:pPr>
-              <a:spcAft>
-                <a:spcPts val="800"/>
-              </a:spcAft>
-              <a:defRPr sz="1300">
-                <a:solidFill>
-                  <a:srgbClr val="262626"/>
-                </a:solidFill>
-                <a:latin typeface="Arial"/>
-              </a:defRPr>
-            </a:pPr>
-            <a:r>
-              <a:t>Adaptadors: Finnhub, Alpha Vantage, mock</a:t>
-            </a:r>
-          </a:p>
-          <a:p>
-            <a:pPr>
-              <a:spcAft>
-                <a:spcPts val="800"/>
-              </a:spcAft>
-              <a:defRPr sz="1300">
-                <a:solidFill>
-                  <a:srgbClr val="262626"/>
-                </a:solidFill>
-                <a:latin typeface="Arial"/>
-              </a:defRPr>
-            </a:pPr>
-            <a:r>
-              <a:t>Domini: Portfolio, Holding, Price, Ticker, ShareQuantity</a:t>
-            </a:r>
-          </a:p>
-        </p:txBody>
-      </p:sp>
-      <p:sp>
-        <p:nvSpPr>
-          <p:cNvPr id="9" name="TextBox 8"/>
-          <p:cNvSpPr txBox="1"/>
-          <p:nvPr/>
-        </p:nvSpPr>
-        <p:spPr>
-          <a:xfrm>
-            <a:off x="8549640" y="5669280"/>
-            <a:ext cx="2743200" cy="228600"/>
-          </a:xfrm>
-          <a:prstGeom prst="rect">
-            <a:avLst/>
-          </a:prstGeom>
-          <a:noFill/>
-        </p:spPr>
-        <p:txBody>
-          <a:bodyPr wrap="square">
-            <a:normAutofit/>
-          </a:bodyPr>
-          <a:lstStyle/>
-          <a:p>
-            <a:pPr algn="ctr"/>
-            <a:r>
-              <a:rPr sz="1000" b="0">
-                <a:solidFill>
-                  <a:srgbClr val="66707A"/>
-                </a:solidFill>
-                <a:latin typeface="Arial"/>
-              </a:rPr>
-              <a:t>Diagrama del tutorial HexaStock Sell Stocks.</a:t>
-            </a:r>
-          </a:p>
-        </p:txBody>
-      </p:sp>
-      <p:sp>
-        <p:nvSpPr>
-          <p:cNvPr id="10" name="TextBox 9"/>
-          <p:cNvSpPr txBox="1"/>
-          <p:nvPr/>
-        </p:nvSpPr>
-        <p:spPr>
-          <a:xfrm>
-            <a:off x="594360" y="6473952"/>
-            <a:ext cx="8595360" cy="201168"/>
-          </a:xfrm>
-          <a:prstGeom prst="rect">
-            <a:avLst/>
-          </a:prstGeom>
-          <a:noFill/>
-        </p:spPr>
-        <p:txBody>
-          <a:bodyPr wrap="square">
-            <a:normAutofit/>
-          </a:bodyPr>
-          <a:lstStyle/>
-          <a:p>
-            <a:pPr algn="l"/>
-            <a:r>
-              <a:rPr sz="800" b="0">
-                <a:solidFill>
-                  <a:srgbClr val="66707A"/>
-                </a:solidFill>
-                <a:latin typeface="Arial"/>
-              </a:rPr>
-              <a:t>Disseny de Sistemes d'Informació · Ports de sortida en arquitectura hexagonal</a:t>
-            </a:r>
-          </a:p>
-        </p:txBody>
-      </p:sp>
-      <p:sp>
-        <p:nvSpPr>
-          <p:cNvPr id="11" name="TextBox 10"/>
-          <p:cNvSpPr txBox="1"/>
-          <p:nvPr/>
-        </p:nvSpPr>
-        <p:spPr>
-          <a:xfrm>
-            <a:off x="11155680" y="6473952"/>
-            <a:ext cx="411480" cy="201168"/>
-          </a:xfrm>
-          <a:prstGeom prst="rect">
-            <a:avLst/>
-          </a:prstGeom>
-          <a:noFill/>
-        </p:spPr>
-        <p:txBody>
-          <a:bodyPr wrap="square">
-            <a:normAutofit/>
-          </a:bodyPr>
-          <a:lstStyle/>
-          <a:p>
-            <a:pPr algn="r"/>
-            <a:r>
-              <a:rPr sz="800" b="0">
-                <a:solidFill>
-                  <a:srgbClr val="66707A"/>
-                </a:solidFill>
-                <a:latin typeface="Arial"/>
-              </a:rPr>
-              <a:t>9</a:t>
-            </a:r>
-          </a:p>
-        </p:txBody>
-      </p:sp>
     </p:spTree>
   </p:cSld>
   <p:clrMapOvr>
